--- a/downloads/presentations/modules/lesson-06-time-series-analysis-anomaly-detection-and-outbreak-signals.pptx
+++ b/downloads/presentations/modules/lesson-06-time-series-analysis-anomaly-detection-and-outbreak-signals.pptx
@@ -25,9 +25,11 @@
     <p:sldId id="273" r:id="rId19"/>
     <p:sldId id="274" r:id="rId20"/>
     <p:sldId id="275" r:id="rId21"/>
+    <p:sldId id="276" r:id="rId22"/>
+    <p:sldId id="277" r:id="rId23"/>
   </p:sldIdLst>
   <p:notesMasterIdLst>
-    <p:notesMasterId r:id="rId22"/>
+    <p:notesMasterId r:id="rId24"/>
   </p:notesMasterIdLst>
   <p:sldSz cx="12192000" cy="6858000"/>
   <p:notesSz cx="6858000" cy="12192000"/>
@@ -610,10 +612,10 @@
           <a:p>
             <a:r>
               <a:rPr lang="en-US" dirty="0"/>
-              <a:t>Risks, Failure Modes, and Guardrails
-Reporting artifacts. Feed failures, delayed batches, or coding changes can trigger false alerts. Guardrails include data quality checks, feed monitoring, and partner change logs.
-Alert fatigue. Too many alerts can reduce attention. Guardrails include threshold tuning, tiered alerting, user feedback, and periodic alert review.
-Overreaction to signals. A statistical signal may be mistaken for a confirmed outbreak. Guardrails include defined review protocols and communication approval.</a:t>
+              <a:t>Technical Deep Dive
+Baseline selection is one of the most important technical decisions. A baseline may use several prior weeks, several prior years, a regression model, seasonal decomposition, or more complex algorithms. The baseline should match the public health question. A short baseline may adapt quickly but miss seasonal context. A long baseline may capture seasonality but fail when underlying systems change.
+Time-series data often require preprocessing. Analysts may need to address missing days, duplicate submissions, delayed reporting, facility onboarding, outliers, and known holidays. Data corrections can appear as sudden spikes or drops. AI tools should distinguish between raw signals and quality-adjusted signals whenever possible.
+Thresholds control alert volume and sensitivity. A very sensitive threshold may detect early signals but generate many false alarms. A conservative threshold may reduce workload but delay detection. Thresholds should be chosen with input from epidemiologists, program staff, and emergency response leads because operational capacity and consequences matter.</a:t>
             </a:r>
             <a:endParaRPr lang="en-US" dirty="0"/>
           </a:p>
@@ -701,8 +703,9 @@
           <a:p>
             <a:r>
               <a:rPr lang="en-US" dirty="0"/>
-              <a:t>Risks, Failure Modes, and Guardrails
-Missed emerging events. Overly conservative thresholds may miss early signals. Guardrails include multiple indicators, sensitivity review, and escalation pathways for staff concerns.</a:t>
+              <a:t>Technical Deep Dive
+Anomaly detection methods vary in complexity. Simple methods may compare counts to moving averages or standard deviations. More advanced methods may use regression, Bayesian approaches, control charts, machine learning, or ensemble models. More complex methods are not automatically better. In public health practice, interpretability, stability, transparency, and workflow fit often matter as much as statistical sophistication.
+Alert review should be documented. Staff should record what signal occurred, what data were reviewed, what explanation was considered, what action was taken, and whether the alert was useful. Over time, these review notes can improve thresholds, reduce alert fatigue, and support accountability.</a:t>
             </a:r>
             <a:endParaRPr lang="en-US" dirty="0"/>
           </a:p>
@@ -790,9 +793,10 @@
           <a:p>
             <a:r>
               <a:rPr lang="en-US" dirty="0"/>
-              <a:t>Application to AI-Supported Workflows
-Time-series and anomaly detection methods can support predictive dashboards, syndromic surveillance, wastewater monitoring, outbreak intelligence, and emergency preparedness. Generative AI may summarize signal review, but it should include uncertainty and source indicators. Agentic workflows may route alerts or create tasks, but those actions should be limited to defined protocols and human review.
-The best AI-supported surveillance workflows combine automation with epidemiologic judgment. AI can help detect changes, but humans determine whether the signal is meaningful, what additional evidence is needed, and what public health action is appropriate.</a:t>
+              <a:t>Risks, Failure Modes, and Guardrails
+Reporting artifacts. Feed failures, delayed batches, or coding changes can trigger false alerts. Guardrails include data quality checks, feed monitoring, and partner change logs.
+Alert fatigue. Too many alerts can reduce attention. Guardrails include threshold tuning, tiered alerting, user feedback, and periodic alert review.
+Overreaction to signals. A statistical signal may be mistaken for a confirmed outbreak. Guardrails include defined review protocols and communication approval.</a:t>
             </a:r>
             <a:endParaRPr lang="en-US" dirty="0"/>
           </a:p>
@@ -880,10 +884,8 @@
           <a:p>
             <a:r>
               <a:rPr lang="en-US" dirty="0"/>
-              <a:t>Reflection Questions
-What time-series data stream would benefit from automated signal review?
-What baseline is appropriate for the condition, data source, and decision?
-Which reporting artifacts could create false signals?</a:t>
+              <a:t>Risks, Failure Modes, and Guardrails
+Missed emerging events. Overly conservative thresholds may miss early signals. Guardrails include multiple indicators, sensitivity review, and escalation pathways for staff concerns.</a:t>
             </a:r>
             <a:endParaRPr lang="en-US" dirty="0"/>
           </a:p>
@@ -971,9 +973,9 @@
           <a:p>
             <a:r>
               <a:rPr lang="en-US" dirty="0"/>
-              <a:t>Reflection Questions
-What threshold balances early detection and alert fatigue?
-How will staff document review, decisions, and lessons learned?</a:t>
+              <a:t>Application to AI-Supported Workflows
+Time-series and anomaly detection methods can support predictive dashboards, syndromic surveillance, wastewater monitoring, outbreak intelligence, and emergency preparedness. Generative AI may summarize signal review, but it should include uncertainty and source indicators. Agentic workflows may route alerts or create tasks, but those actions should be limited to defined protocols and human review.
+The best AI-supported surveillance workflows combine automation with epidemiologic judgment. AI can help detect changes, but humans determine whether the signal is meaningful, what additional evidence is needed, and what public health action is appropriate.</a:t>
             </a:r>
             <a:endParaRPr lang="en-US" dirty="0"/>
           </a:p>
@@ -1061,9 +1063,10 @@
           <a:p>
             <a:r>
               <a:rPr lang="en-US" dirty="0"/>
-              <a:t>Practical Exercise
-Create an anomaly detection review plan for one public health data stream. Include the monitored indicator, data source, update frequency, baseline approach, known reporting patterns, threshold rationale, alert tiers, review steps, related indicators, documentation expectations, and escalation criteria.
-The plan should identify how staff will distinguish statistical anomalies from data quality issues and public health events.</a:t>
+              <a:t>Reflection Questions
+What time-series data stream would benefit from automated signal review?
+What baseline is appropriate for the condition, data source, and decision?
+Which reporting artifacts could create false signals?</a:t>
             </a:r>
             <a:endParaRPr lang="en-US" dirty="0"/>
           </a:p>
@@ -1151,10 +1154,9 @@
           <a:p>
             <a:r>
               <a:rPr lang="en-US" dirty="0"/>
-              <a:t>Expected Artifact or Evidence
-Anomaly detection review plan
-Baseline and threshold rationale
-Alert review protocol</a:t>
+              <a:t>Reflection Questions
+What threshold balances early detection and alert fatigue?
+How will staff document review, decisions, and lessons learned?</a:t>
             </a:r>
             <a:endParaRPr lang="en-US" dirty="0"/>
           </a:p>
@@ -1242,8 +1244,9 @@
           <a:p>
             <a:r>
               <a:rPr lang="en-US" dirty="0"/>
-              <a:t>Expected Artifact or Evidence
-Signal documentation template</a:t>
+              <a:t>Practical Exercise
+Create an anomaly detection review plan for one public health data stream. Include the monitored indicator, data source, update frequency, baseline approach, known reporting patterns, threshold rationale, alert tiers, review steps, related indicators, documentation expectations, and escalation criteria.
+The plan should identify how staff will distinguish statistical anomalies from data quality issues and public health events.</a:t>
             </a:r>
             <a:endParaRPr lang="en-US" dirty="0"/>
           </a:p>
@@ -1331,11 +1334,10 @@
           <a:p>
             <a:r>
               <a:rPr lang="en-US" dirty="0"/>
-              <a:t>Expected Assignment
+              <a:t>Expected Artifact or Evidence
 Anomaly detection review plan
 Baseline and threshold rationale
-Alert review protocol
-Signal documentation template</a:t>
+Alert review protocol</a:t>
             </a:r>
             <a:endParaRPr lang="en-US" dirty="0"/>
           </a:p>
@@ -1423,12 +1425,8 @@
           <a:p>
             <a:r>
               <a:rPr lang="en-US" dirty="0"/>
-              <a:t>Knowledge Check
-1. What is an anomaly in a public health time series?
-2. Why does seasonality matter?
-3. What is a common risk of too many low-value alerts?
-4. Which statement is most accurate?
-5. What is strong completion evidence for this module?</a:t>
+              <a:t>Expected Artifact or Evidence
+Signal documentation template</a:t>
             </a:r>
             <a:endParaRPr lang="en-US" dirty="0"/>
           </a:p>
@@ -1608,11 +1606,11 @@
           <a:p>
             <a:r>
               <a:rPr lang="en-US" dirty="0"/>
-              <a:t>References and Resources
-CDC National Syndromic Surveillance Program: https://www.cdc.gov/nssp/
-CDC Evaluation Framework: https://www.cdc.gov/evaluation/
-NIST Artificial Intelligence Risk Management Framework: https://www.nist.gov/itl/ai-risk-management-framework
-CDC Public Health Data Strategy: https://www.cdc.gov/public-health-data-strategy/php/about/index.html</a:t>
+              <a:t>Expected Assignment
+Anomaly detection review plan
+Baseline and threshold rationale
+Alert review protocol
+Signal documentation template</a:t>
             </a:r>
             <a:endParaRPr lang="en-US" dirty="0"/>
           </a:p>
@@ -1636,6 +1634,191 @@
             <a:fld id="{F7021451-1387-4CA6-816F-3879F97B5CBC}" type="slidenum">
               <a:rPr lang="en-US"/>
               <a:t>20</a:t>
+            </a:fld>
+            <a:endParaRPr lang="en-US"/>
+          </a:p>
+        </p:txBody>
+      </p:sp>
+    </p:spTree>
+    <p:extLst>
+      <p:ext uri="{BB962C8B-B14F-4D97-AF65-F5344CB8AC3E}">
+        <p14:creationId xmlns:p14="http://schemas.microsoft.com/office/powerpoint/2010/main" val="1024086991"/>
+      </p:ext>
+    </p:extLst>
+  </p:cSld>
+  <p:clrMapOvr>
+    <a:masterClrMapping/>
+  </p:clrMapOvr>
+</p:notes>
+</file>
+
+<file path=ppt/notesSlides/notesSlide21.xml><?xml version="1.0" encoding="utf-8"?>
+<p:notes xmlns:a="http://schemas.openxmlformats.org/drawingml/2006/main" xmlns:r="http://schemas.openxmlformats.org/officeDocument/2006/relationships" xmlns:p="http://schemas.openxmlformats.org/presentationml/2006/main">
+  <p:cSld>
+    <p:spTree>
+      <p:nvGrpSpPr>
+        <p:cNvPr id="1" name=""/>
+        <p:cNvGrpSpPr/>
+        <p:nvPr/>
+      </p:nvGrpSpPr>
+      <p:grpSpPr>
+        <a:xfrm>
+          <a:off x="0" y="0"/>
+          <a:ext cx="0" cy="0"/>
+          <a:chOff x="0" y="0"/>
+          <a:chExt cx="0" cy="0"/>
+        </a:xfrm>
+      </p:grpSpPr>
+      <p:sp>
+        <p:nvSpPr>
+          <p:cNvPr id="2" name="Slide Image Placeholder 1"/>
+          <p:cNvSpPr>
+            <a:spLocks noGrp="1" noRot="1" noChangeAspect="1"/>
+          </p:cNvSpPr>
+          <p:nvPr>
+            <p:ph type="sldImg"/>
+          </p:nvPr>
+        </p:nvSpPr>
+        <p:spPr/>
+      </p:sp>
+      <p:sp>
+        <p:nvSpPr>
+          <p:cNvPr id="3" name="Notes Placeholder 2"/>
+          <p:cNvSpPr>
+            <a:spLocks noGrp="1"/>
+          </p:cNvSpPr>
+          <p:nvPr>
+            <p:ph type="body" idx="1"/>
+          </p:nvPr>
+        </p:nvSpPr>
+        <p:spPr/>
+        <p:txBody>
+          <a:bodyPr/>
+          <a:lstStyle/>
+          <a:p>
+            <a:r>
+              <a:rPr lang="en-US" dirty="0"/>
+              <a:t>Knowledge Check
+1. What is an anomaly in a public health time series?
+2. Why does seasonality matter?
+3. What is a common risk of too many low-value alerts?
+4. Which statement is most accurate?
+5. What is strong completion evidence for this module?</a:t>
+            </a:r>
+            <a:endParaRPr lang="en-US" dirty="0"/>
+          </a:p>
+        </p:txBody>
+      </p:sp>
+      <p:sp>
+        <p:nvSpPr>
+          <p:cNvPr id="4" name="Slide Number Placeholder 3"/>
+          <p:cNvSpPr>
+            <a:spLocks noGrp="1"/>
+          </p:cNvSpPr>
+          <p:nvPr>
+            <p:ph type="sldNum" sz="quarter" idx="10"/>
+          </p:nvPr>
+        </p:nvSpPr>
+        <p:spPr/>
+        <p:txBody>
+          <a:bodyPr/>
+          <a:lstStyle/>
+          <a:p>
+            <a:fld id="{F7021451-1387-4CA6-816F-3879F97B5CBC}" type="slidenum">
+              <a:rPr lang="en-US"/>
+              <a:t>21</a:t>
+            </a:fld>
+            <a:endParaRPr lang="en-US"/>
+          </a:p>
+        </p:txBody>
+      </p:sp>
+    </p:spTree>
+    <p:extLst>
+      <p:ext uri="{BB962C8B-B14F-4D97-AF65-F5344CB8AC3E}">
+        <p14:creationId xmlns:p14="http://schemas.microsoft.com/office/powerpoint/2010/main" val="1024086991"/>
+      </p:ext>
+    </p:extLst>
+  </p:cSld>
+  <p:clrMapOvr>
+    <a:masterClrMapping/>
+  </p:clrMapOvr>
+</p:notes>
+</file>
+
+<file path=ppt/notesSlides/notesSlide22.xml><?xml version="1.0" encoding="utf-8"?>
+<p:notes xmlns:a="http://schemas.openxmlformats.org/drawingml/2006/main" xmlns:r="http://schemas.openxmlformats.org/officeDocument/2006/relationships" xmlns:p="http://schemas.openxmlformats.org/presentationml/2006/main">
+  <p:cSld>
+    <p:spTree>
+      <p:nvGrpSpPr>
+        <p:cNvPr id="1" name=""/>
+        <p:cNvGrpSpPr/>
+        <p:nvPr/>
+      </p:nvGrpSpPr>
+      <p:grpSpPr>
+        <a:xfrm>
+          <a:off x="0" y="0"/>
+          <a:ext cx="0" cy="0"/>
+          <a:chOff x="0" y="0"/>
+          <a:chExt cx="0" cy="0"/>
+        </a:xfrm>
+      </p:grpSpPr>
+      <p:sp>
+        <p:nvSpPr>
+          <p:cNvPr id="2" name="Slide Image Placeholder 1"/>
+          <p:cNvSpPr>
+            <a:spLocks noGrp="1" noRot="1" noChangeAspect="1"/>
+          </p:cNvSpPr>
+          <p:nvPr>
+            <p:ph type="sldImg"/>
+          </p:nvPr>
+        </p:nvSpPr>
+        <p:spPr/>
+      </p:sp>
+      <p:sp>
+        <p:nvSpPr>
+          <p:cNvPr id="3" name="Notes Placeholder 2"/>
+          <p:cNvSpPr>
+            <a:spLocks noGrp="1"/>
+          </p:cNvSpPr>
+          <p:nvPr>
+            <p:ph type="body" idx="1"/>
+          </p:nvPr>
+        </p:nvSpPr>
+        <p:spPr/>
+        <p:txBody>
+          <a:bodyPr/>
+          <a:lstStyle/>
+          <a:p>
+            <a:r>
+              <a:rPr lang="en-US" dirty="0"/>
+              <a:t>References and Resources
+CDC National Syndromic Surveillance Program: https://www.cdc.gov/nssp/
+CDC Evaluation Framework: https://www.cdc.gov/evaluation/
+NIST Artificial Intelligence Risk Management Framework: https://www.nist.gov/itl/ai-risk-management-framework
+CDC Public Health Data Strategy: https://www.cdc.gov/public-health-data-strategy/php/about/index.html</a:t>
+            </a:r>
+            <a:endParaRPr lang="en-US" dirty="0"/>
+          </a:p>
+        </p:txBody>
+      </p:sp>
+      <p:sp>
+        <p:nvSpPr>
+          <p:cNvPr id="4" name="Slide Number Placeholder 3"/>
+          <p:cNvSpPr>
+            <a:spLocks noGrp="1"/>
+          </p:cNvSpPr>
+          <p:nvPr>
+            <p:ph type="sldNum" sz="quarter" idx="10"/>
+          </p:nvPr>
+        </p:nvSpPr>
+        <p:spPr/>
+        <p:txBody>
+          <a:bodyPr/>
+          <a:lstStyle/>
+          <a:p>
+            <a:fld id="{F7021451-1387-4CA6-816F-3879F97B5CBC}" type="slidenum">
+              <a:rPr lang="en-US"/>
+              <a:t>22</a:t>
             </a:fld>
             <a:endParaRPr lang="en-US"/>
           </a:p>
@@ -1700,12 +1883,11 @@
           <a:p>
             <a:r>
               <a:rPr lang="en-US" dirty="0"/>
-              <a:t>Learning Objectives
-Define time-series analysis and anomaly detection in public health terms.
-Explain baselines, seasonality, trends, reporting delays, and thresholds.
-Distinguish statistical signals from confirmed outbreaks or public health events.
-Identify risks from alert fatigue, data artifacts, delayed reporting, and model drift.
-Design guardrails for AI-supported surveillance alerts.</a:t>
+              <a:t>Related Playbook Plays
+Play 13: Monitor and Evaluate AI Systems - This lesson informs Play 13 by helping learners connect the lesson topic to monitor and evaluate ai systems work in the AI Playbook.
+Play 12: Execute Governance and Oversight - This lesson informs Play 12 by helping learners connect the lesson topic to execute governance and oversight work in the AI Playbook.
+Play 1: Vision &amp; Guardrails - This lesson informs Play 1 by helping learners connect the lesson topic to vision &amp; guardrails work in the AI Playbook sequence.
+Play 11: Build and Deploy AI Solutions - This lesson informs Play 11 by helping learners connect the lesson topic to build and deploy ai solutions work in the AI Playbook.</a:t>
             </a:r>
             <a:endParaRPr lang="en-US" dirty="0"/>
           </a:p>
@@ -1793,8 +1975,13 @@
           <a:p>
             <a:r>
               <a:rPr lang="en-US" dirty="0"/>
-              <a:t>Learning Objectives
-Produce an anomaly detection review plan for one public health data stream.</a:t>
+              <a:t>Related Toolkit Resources
+Tool 44: Performance Monitoring Dashboard (Dashboard) - Use this tool to complete or strengthen the practical exercise for the module using fictional, de-identified, or generalized.
+Tool 45: Continuous Improvement Log (Log) - Use Continuous Improvement Log to translate this lesson into a documented public health AI planning, governance, implementation,.
+Tool 48: AI Evaluation &amp; Outcomes Reporting (Template) - Use this tool to complete or strengthen the practical exercise for the module using fictional, de-identified, or generalized.
+Tool 4: AI Policy Landscape Scan (Worksheet) - Use AI Policy Landscape Scan to translate this lesson into a documented public health AI planning, governance, implementation,.
+Tool 5: AI Environmental and Resource Impact Review (Checklist) - Use AI Environmental and Resource Impact Review to translate this lesson into a documented public health AI planning,.
+Tool 6: Human-Centered AI Decision Rule Checklist (Checklist) - Use Human-Centered AI Decision Rule Checklist to translate this lesson into a documented public health AI planning, governance,.</a:t>
             </a:r>
             <a:endParaRPr lang="en-US" dirty="0"/>
           </a:p>
@@ -1882,10 +2069,12 @@
           <a:p>
             <a:r>
               <a:rPr lang="en-US" dirty="0"/>
-              <a:t>Module Overview
-Time-series analysis examines data collected over time. In public health, time patterns are central to surveillance, outbreak detection, syndromic monitoring, wastewater analysis, emergency response, seasonal planning, and program performance. AI-supported anomaly detection can help identify unusual increases, decreases, or pattern changes that may require investigation.
-This module explains how time-series and anomaly detection methods can support public health without replacing epidemiologic interpretation. Automated alerts may identify signals faster, but signals are not diagnoses or confirmed events. Staff need to understand baselines, seasonality, reporting delays, thresholds, alert fatigue, and the difference between statistical anomalies and public health significance.
-Learners will practice designing an anomaly detection review plan that includes data quality checks, baseline selection, threshold rationale, human review, and escalation procedures.</a:t>
+              <a:t>Learning Objectives
+Define time-series analysis and anomaly detection in public health terms.
+Explain baselines, seasonality, trends, reporting delays, and thresholds.
+Distinguish statistical signals from confirmed outbreaks or public health events.
+Identify risks from alert fatigue, data artifacts, delayed reporting, and model drift.
+Design guardrails for AI-supported surveillance alerts.</a:t>
             </a:r>
             <a:endParaRPr lang="en-US" dirty="0"/>
           </a:p>
@@ -1973,10 +2162,8 @@
           <a:p>
             <a:r>
               <a:rPr lang="en-US" dirty="0"/>
-              <a:t>Why This Topic Matters for Public Health AI
-Time-series methods matter because public health surveillance is often about change. A single count may be difficult to interpret without knowing whether it is higher than expected for that time, place, population, reporting source, and condition. AI-supported anomaly detection can help staff review large volumes of data and prioritize signals that deserve attention.
-However, public health time-series data are shaped by reporting systems as much as disease patterns. Weekends, holidays, provider onboarding, lab code changes, EHR outages, weather events, testing availability, and public attention can all change observed data. An anomaly may indicate an outbreak, but it may also indicate a data feed problem or behavior change.
-Responsible use requires a workflow that treats alerts as starting points for investigation. Staff must know what data are being monitored, how the baseline was selected, what triggers an alert, what review steps follow, and when a signal becomes an incident, outbreak investigation, or communication issue.</a:t>
+              <a:t>Learning Objectives
+Produce an anomaly detection review plan for one public health data stream.</a:t>
             </a:r>
             <a:endParaRPr lang="en-US" dirty="0"/>
           </a:p>
@@ -2064,9 +2251,10 @@
           <a:p>
             <a:r>
               <a:rPr lang="en-US" dirty="0"/>
-              <a:t>Public Health Example
-A syndromic surveillance team may use anomaly detection to monitor emergency department visits for respiratory symptoms. The system may flag a county when visits exceed the expected range for that day and season. The alert could prompt review of age groups, facilities, diagnosis text, lab data, school absenteeism, and local context.
-The alert is valuable only if it enters a disciplined review process. A sudden increase may reflect a true outbreak, a coding change, a new facility feed, a holiday effect, or a backlog. The analyst should review data quality, compare related indicators, assess geography and populations, and document whether the signal requires action or continued monitoring.</a:t>
+              <a:t>Module Overview
+Time-series analysis examines data collected over time. In public health, time patterns are central to surveillance, outbreak detection, syndromic monitoring, wastewater analysis, emergency response, seasonal planning, and program performance. AI-supported anomaly detection can help identify unusual increases, decreases, or pattern changes that may require investigation.
+This module explains how time-series and anomaly detection methods can support public health without replacing epidemiologic interpretation. Automated alerts may identify signals faster, but signals are not diagnoses or confirmed events. Staff need to understand baselines, seasonality, reporting delays, thresholds, alert fatigue, and the difference between statistical anomalies and public health significance.
+Learners will practice designing an anomaly detection review plan that includes data quality checks, baseline selection, threshold rationale, human review, and escalation procedures.</a:t>
             </a:r>
             <a:endParaRPr lang="en-US" dirty="0"/>
           </a:p>
@@ -2154,10 +2342,10 @@
           <a:p>
             <a:r>
               <a:rPr lang="en-US" dirty="0"/>
-              <a:t>Technical Deep Dive
-Baseline selection is one of the most important technical decisions. A baseline may use several prior weeks, several prior years, a regression model, seasonal decomposition, or more complex algorithms. The baseline should match the public health question. A short baseline may adapt quickly but miss seasonal context. A long baseline may capture seasonality but fail when underlying systems change.
-Time-series data often require preprocessing. Analysts may need to address missing days, duplicate submissions, delayed reporting, facility onboarding, outliers, and known holidays. Data corrections can appear as sudden spikes or drops. AI tools should distinguish between raw signals and quality-adjusted signals whenever possible.
-Thresholds control alert volume and sensitivity. A very sensitive threshold may detect early signals but generate many false alarms. A conservative threshold may reduce workload but delay detection. Thresholds should be chosen with input from epidemiologists, program staff, and emergency response leads because operational capacity and consequences matter.</a:t>
+              <a:t>Why This Topic Matters for Public Health AI
+Time-series methods matter because public health surveillance is often about change. A single count may be difficult to interpret without knowing whether it is higher than expected for that time, place, population, reporting source, and condition. AI-supported anomaly detection can help staff review large volumes of data and prioritize signals that deserve attention.
+However, public health time-series data are shaped by reporting systems as much as disease patterns. Weekends, holidays, provider onboarding, lab code changes, EHR outages, weather events, testing availability, and public attention can all change observed data. An anomaly may indicate an outbreak, but it may also indicate a data feed problem or behavior change.
+Responsible use requires a workflow that treats alerts as starting points for investigation. Staff must know what data are being monitored, how the baseline was selected, what triggers an alert, what review steps follow, and when a signal becomes an incident, outbreak investigation, or communication issue.</a:t>
             </a:r>
             <a:endParaRPr lang="en-US" dirty="0"/>
           </a:p>
@@ -2245,9 +2433,9 @@
           <a:p>
             <a:r>
               <a:rPr lang="en-US" dirty="0"/>
-              <a:t>Technical Deep Dive
-Anomaly detection methods vary in complexity. Simple methods may compare counts to moving averages or standard deviations. More advanced methods may use regression, Bayesian approaches, control charts, machine learning, or ensemble models. More complex methods are not automatically better. In public health practice, interpretability, stability, transparency, and workflow fit often matter as much as statistical sophistication.
-Alert review should be documented. Staff should record what signal occurred, what data were reviewed, what explanation was considered, what action was taken, and whether the alert was useful. Over time, these review notes can improve thresholds, reduce alert fatigue, and support accountability.</a:t>
+              <a:t>Public Health Example
+A syndromic surveillance team may use anomaly detection to monitor emergency department visits for respiratory symptoms. The system may flag a county when visits exceed the expected range for that day and season. The alert could prompt review of age groups, facilities, diagnosis text, lab data, school absenteeism, and local context.
+The alert is valuable only if it enters a disciplined review process. A sudden increase may reflect a true outbreak, a coding change, a new facility feed, a holiday effect, or a backlog. The analyst should review data quality, compare related indicators, assess geography and populations, and document whether the signal requires action or continued monitoring.</a:t>
             </a:r>
             <a:endParaRPr lang="en-US" dirty="0"/>
           </a:p>
@@ -2870,7 +3058,32 @@
       </p:sp>
       <p:sp>
         <p:nvSpPr>
-          <p:cNvPr id="3" name="Text 1"/>
+          <p:cNvPr id="3" name="Shape 1"/>
+          <p:cNvSpPr/>
+          <p:nvPr/>
+        </p:nvSpPr>
+        <p:spPr>
+          <a:xfrm>
+            <a:off x="0" y="164592"/>
+            <a:ext cx="146304" cy="6693408"/>
+          </a:xfrm>
+          <a:prstGeom prst="rect">
+            <a:avLst/>
+          </a:prstGeom>
+          <a:solidFill>
+            <a:srgbClr val="2F8A28"/>
+          </a:solidFill>
+          <a:ln w="12700">
+            <a:solidFill>
+              <a:srgbClr val="2F8A28"/>
+            </a:solidFill>
+            <a:prstDash val="solid"/>
+          </a:ln>
+        </p:spPr>
+      </p:sp>
+      <p:sp>
+        <p:nvSpPr>
+          <p:cNvPr id="4" name="Text 2"/>
           <p:cNvSpPr/>
           <p:nvPr/>
         </p:nvSpPr>
@@ -2909,7 +3122,7 @@
       </p:sp>
       <p:sp>
         <p:nvSpPr>
-          <p:cNvPr id="4" name="Text 2"/>
+          <p:cNvPr id="5" name="Text 3"/>
           <p:cNvSpPr/>
           <p:nvPr/>
         </p:nvSpPr>
@@ -2948,7 +3161,7 @@
       </p:sp>
       <p:sp>
         <p:nvSpPr>
-          <p:cNvPr id="5" name="Text 3"/>
+          <p:cNvPr id="6" name="Text 4"/>
           <p:cNvSpPr/>
           <p:nvPr/>
         </p:nvSpPr>
@@ -2987,13 +3200,77 @@
       </p:sp>
       <p:sp>
         <p:nvSpPr>
-          <p:cNvPr id="6" name="Text 4"/>
+          <p:cNvPr id="7" name="Shape 5"/>
           <p:cNvSpPr/>
           <p:nvPr/>
         </p:nvSpPr>
         <p:spPr>
           <a:xfrm>
             <a:off x="640080" y="658368"/>
+            <a:ext cx="420624" cy="420624"/>
+          </a:xfrm>
+          <a:prstGeom prst="ellipse">
+            <a:avLst/>
+          </a:prstGeom>
+          <a:solidFill>
+            <a:srgbClr val="0068B7"/>
+          </a:solidFill>
+          <a:ln w="12700">
+            <a:solidFill>
+              <a:srgbClr val="0068B7"/>
+            </a:solidFill>
+            <a:prstDash val="solid"/>
+          </a:ln>
+        </p:spPr>
+      </p:sp>
+      <p:sp>
+        <p:nvSpPr>
+          <p:cNvPr id="8" name="Text 6"/>
+          <p:cNvSpPr/>
+          <p:nvPr/>
+        </p:nvSpPr>
+        <p:spPr>
+          <a:xfrm>
+            <a:off x="640080" y="731520"/>
+            <a:ext cx="420624" cy="164592"/>
+          </a:xfrm>
+          <a:prstGeom prst="rect">
+            <a:avLst/>
+          </a:prstGeom>
+          <a:noFill/>
+          <a:ln/>
+        </p:spPr>
+        <p:txBody>
+          <a:bodyPr wrap="square" lIns="0" tIns="0" rIns="0" bIns="0" rtlCol="0" anchor="ctr"/>
+          <a:lstStyle/>
+          <a:p>
+            <a:pPr algn="ctr" indent="0" marL="0">
+              <a:buNone/>
+            </a:pPr>
+            <a:r>
+              <a:rPr lang="en-US" sz="1100" b="1" dirty="0">
+                <a:solidFill>
+                  <a:srgbClr val="FFFFFF"/>
+                </a:solidFill>
+                <a:latin typeface="Aptos" pitchFamily="34" charset="0"/>
+                <a:ea typeface="Aptos" pitchFamily="34" charset="-122"/>
+                <a:cs typeface="Aptos" pitchFamily="34" charset="-120"/>
+              </a:rPr>
+              <a:t>5</a:t>
+            </a:r>
+            <a:endParaRPr lang="en-US" sz="1100" dirty="0"/>
+          </a:p>
+        </p:txBody>
+      </p:sp>
+      <p:sp>
+        <p:nvSpPr>
+          <p:cNvPr id="9" name="Text 7"/>
+          <p:cNvSpPr/>
+          <p:nvPr/>
+        </p:nvSpPr>
+        <p:spPr>
+          <a:xfrm>
+            <a:off x="640080" y="621792"/>
             <a:ext cx="10881360" cy="566928"/>
           </a:xfrm>
           <a:prstGeom prst="rect">
@@ -3020,7 +3297,7 @@
                 <a:ea typeface="Aptos Display" pitchFamily="34" charset="-122"/>
                 <a:cs typeface="Aptos Display" pitchFamily="34" charset="-120"/>
               </a:rPr>
-              <a:t>Risks, Failure Modes, and Guardrails</a:t>
+              <a:t>Technical Deep Dive</a:t>
             </a:r>
             <a:endParaRPr lang="en-US" sz="2700" dirty="0"/>
           </a:p>
@@ -3028,32 +3305,178 @@
       </p:sp>
       <p:sp>
         <p:nvSpPr>
-          <p:cNvPr id="7" name="Text 5"/>
-          <p:cNvSpPr/>
-          <p:nvPr/>
-        </p:nvSpPr>
-        <p:spPr>
-          <a:xfrm>
-            <a:off x="822960" y="1325880"/>
-            <a:ext cx="10378440" cy="4800600"/>
-          </a:xfrm>
-          <a:prstGeom prst="rect">
-            <a:avLst/>
-          </a:prstGeom>
-          <a:noFill/>
-          <a:ln/>
-        </p:spPr>
-        <p:txBody>
-          <a:bodyPr wrap="square" lIns="1016" tIns="1016" rIns="1016" bIns="1016" rtlCol="0" anchor="t">
+          <p:cNvPr id="10" name="Text 8"/>
+          <p:cNvSpPr/>
+          <p:nvPr/>
+        </p:nvSpPr>
+        <p:spPr>
+          <a:xfrm>
+            <a:off x="868680" y="1417320"/>
+            <a:ext cx="6675120" cy="4434840"/>
+          </a:xfrm>
+          <a:prstGeom prst="rect">
+            <a:avLst/>
+          </a:prstGeom>
+          <a:noFill/>
+          <a:ln/>
+        </p:spPr>
+        <p:txBody>
+          <a:bodyPr wrap="square" lIns="635" tIns="635" rIns="635" bIns="635" rtlCol="0" anchor="t">
             <a:normAutofit/>
           </a:bodyPr>
           <a:lstStyle/>
           <a:p>
+            <a:r>
+              <a:rPr lang="en-US" sz="1700" dirty="0">
+                <a:solidFill>
+                  <a:srgbClr val="17364A"/>
+                </a:solidFill>
+                <a:latin typeface="Aptos" pitchFamily="34" charset="0"/>
+                <a:ea typeface="Aptos" pitchFamily="34" charset="-122"/>
+                <a:cs typeface="Aptos" pitchFamily="34" charset="-120"/>
+              </a:rPr>
+              <a:t>Baseline selection is one of the most important technical decisions.</a:t>
+            </a:r>
+            <a:endParaRPr lang="en-US" sz="1700" dirty="0"/>
+          </a:p>
+          <a:p>
+            <a:r>
+              <a:rPr lang="en-US" sz="1700" dirty="0">
+                <a:solidFill>
+                  <a:srgbClr val="17364A"/>
+                </a:solidFill>
+                <a:latin typeface="Aptos" pitchFamily="34" charset="0"/>
+                <a:ea typeface="Aptos" pitchFamily="34" charset="-122"/>
+                <a:cs typeface="Aptos" pitchFamily="34" charset="-120"/>
+              </a:rPr>
+              <a:t>A baseline may use several prior weeks, several prior years, a regression model, seasonal decomposition, or more complex.</a:t>
+            </a:r>
+            <a:endParaRPr lang="en-US" sz="1700" dirty="0"/>
+          </a:p>
+          <a:p>
+            <a:r>
+              <a:rPr lang="en-US" sz="1700" dirty="0">
+                <a:solidFill>
+                  <a:srgbClr val="17364A"/>
+                </a:solidFill>
+                <a:latin typeface="Aptos" pitchFamily="34" charset="0"/>
+                <a:ea typeface="Aptos" pitchFamily="34" charset="-122"/>
+                <a:cs typeface="Aptos" pitchFamily="34" charset="-120"/>
+              </a:rPr>
+              <a:t>The baseline should match the public health question.</a:t>
+            </a:r>
+            <a:endParaRPr lang="en-US" sz="1700" dirty="0"/>
+          </a:p>
+          <a:p>
+            <a:r>
+              <a:rPr lang="en-US" sz="1700" dirty="0">
+                <a:solidFill>
+                  <a:srgbClr val="17364A"/>
+                </a:solidFill>
+                <a:latin typeface="Aptos" pitchFamily="34" charset="0"/>
+                <a:ea typeface="Aptos" pitchFamily="34" charset="-122"/>
+                <a:cs typeface="Aptos" pitchFamily="34" charset="-120"/>
+              </a:rPr>
+              <a:t>A short baseline may adapt quickly but miss seasonal context.</a:t>
+            </a:r>
+            <a:endParaRPr lang="en-US" sz="1700" dirty="0"/>
+          </a:p>
+        </p:txBody>
+      </p:sp>
+      <p:sp>
+        <p:nvSpPr>
+          <p:cNvPr id="11" name="Shape 9"/>
+          <p:cNvSpPr/>
+          <p:nvPr/>
+        </p:nvSpPr>
+        <p:spPr>
+          <a:xfrm>
+            <a:off x="7909560" y="1417320"/>
+            <a:ext cx="3154680" cy="1828800"/>
+          </a:xfrm>
+          <a:prstGeom prst="roundRect">
+            <a:avLst>
+              <a:gd name="adj" fmla="val 6000"/>
+            </a:avLst>
+          </a:prstGeom>
+          <a:solidFill>
+            <a:srgbClr val="EEF8ED"/>
+          </a:solidFill>
+          <a:ln w="12700">
+            <a:solidFill>
+              <a:srgbClr val="B9D7E6"/>
+            </a:solidFill>
+            <a:prstDash val="solid"/>
+          </a:ln>
+        </p:spPr>
+      </p:sp>
+      <p:sp>
+        <p:nvSpPr>
+          <p:cNvPr id="12" name="Text 10"/>
+          <p:cNvSpPr/>
+          <p:nvPr/>
+        </p:nvSpPr>
+        <p:spPr>
+          <a:xfrm>
+            <a:off x="8074152" y="1563624"/>
+            <a:ext cx="2825496" cy="201168"/>
+          </a:xfrm>
+          <a:prstGeom prst="rect">
+            <a:avLst/>
+          </a:prstGeom>
+          <a:noFill/>
+          <a:ln/>
+        </p:spPr>
+        <p:txBody>
+          <a:bodyPr wrap="square" lIns="0" tIns="0" rIns="0" bIns="0" rtlCol="0" anchor="ctr"/>
+          <a:lstStyle/>
+          <a:p>
             <a:pPr indent="0" marL="0">
               <a:buNone/>
             </a:pPr>
             <a:r>
-              <a:rPr lang="en-US" sz="1420" dirty="0">
+              <a:rPr lang="en-US" sz="950" b="1" dirty="0">
+                <a:solidFill>
+                  <a:srgbClr val="0068B7"/>
+                </a:solidFill>
+                <a:latin typeface="Aptos" pitchFamily="34" charset="0"/>
+                <a:ea typeface="Aptos" pitchFamily="34" charset="-122"/>
+                <a:cs typeface="Aptos" pitchFamily="34" charset="-120"/>
+              </a:rPr>
+              <a:t>Key idea</a:t>
+            </a:r>
+            <a:endParaRPr lang="en-US" sz="950" dirty="0"/>
+          </a:p>
+        </p:txBody>
+      </p:sp>
+      <p:sp>
+        <p:nvSpPr>
+          <p:cNvPr id="13" name="Text 11"/>
+          <p:cNvSpPr/>
+          <p:nvPr/>
+        </p:nvSpPr>
+        <p:spPr>
+          <a:xfrm>
+            <a:off x="8074152" y="1856232"/>
+            <a:ext cx="2825496" cy="1261872"/>
+          </a:xfrm>
+          <a:prstGeom prst="rect">
+            <a:avLst/>
+          </a:prstGeom>
+          <a:noFill/>
+          <a:ln/>
+        </p:spPr>
+        <p:txBody>
+          <a:bodyPr wrap="square" lIns="0" tIns="0" rIns="0" bIns="0" rtlCol="0" anchor="t">
+            <a:normAutofit/>
+          </a:bodyPr>
+          <a:lstStyle/>
+          <a:p>
+            <a:pPr indent="0" marL="0">
+              <a:buNone/>
+            </a:pPr>
+            <a:r>
+              <a:rPr lang="en-US" sz="1250" dirty="0">
                 <a:solidFill>
                   <a:srgbClr val="17364A"/>
                 </a:solidFill>
@@ -3061,9 +3484,116 @@
                 <a:ea typeface="Aptos" pitchFamily="34" charset="-122"/>
                 <a:cs typeface="Aptos" pitchFamily="34" charset="-120"/>
               </a:rPr>
-              <a:t>Reporting artifacts. Feed failures, delayed batches, or coding changes can trigger false alerts. Guardrails include data quality checks, feed monitoring, and partner change logs. Alert fatigue. Too many alerts can reduce attention. Guardrails include threshold tuning, tiered alerting, user feedback, and periodic alert review. Overreaction to signals. A statistical signal may be mistaken for a confirmed outbreak. Guardrails include defined review protocols and communication approval.</a:t>
-            </a:r>
-            <a:endParaRPr lang="en-US" sz="1420" dirty="0"/>
+              <a:t>Baseline selection is one of the most important technical decisions.</a:t>
+            </a:r>
+            <a:endParaRPr lang="en-US" sz="1250" dirty="0"/>
+          </a:p>
+        </p:txBody>
+      </p:sp>
+      <p:sp>
+        <p:nvSpPr>
+          <p:cNvPr id="14" name="Shape 12"/>
+          <p:cNvSpPr/>
+          <p:nvPr/>
+        </p:nvSpPr>
+        <p:spPr>
+          <a:xfrm>
+            <a:off x="7909560" y="3520440"/>
+            <a:ext cx="3154680" cy="1737360"/>
+          </a:xfrm>
+          <a:prstGeom prst="roundRect">
+            <a:avLst>
+              <a:gd name="adj" fmla="val 6316"/>
+            </a:avLst>
+          </a:prstGeom>
+          <a:solidFill>
+            <a:srgbClr val="EAF6F8"/>
+          </a:solidFill>
+          <a:ln w="12700">
+            <a:solidFill>
+              <a:srgbClr val="B9D7E6"/>
+            </a:solidFill>
+            <a:prstDash val="solid"/>
+          </a:ln>
+        </p:spPr>
+      </p:sp>
+      <p:sp>
+        <p:nvSpPr>
+          <p:cNvPr id="15" name="Text 13"/>
+          <p:cNvSpPr/>
+          <p:nvPr/>
+        </p:nvSpPr>
+        <p:spPr>
+          <a:xfrm>
+            <a:off x="8074152" y="3666744"/>
+            <a:ext cx="2825496" cy="201168"/>
+          </a:xfrm>
+          <a:prstGeom prst="rect">
+            <a:avLst/>
+          </a:prstGeom>
+          <a:noFill/>
+          <a:ln/>
+        </p:spPr>
+        <p:txBody>
+          <a:bodyPr wrap="square" lIns="0" tIns="0" rIns="0" bIns="0" rtlCol="0" anchor="ctr"/>
+          <a:lstStyle/>
+          <a:p>
+            <a:pPr indent="0" marL="0">
+              <a:buNone/>
+            </a:pPr>
+            <a:r>
+              <a:rPr lang="en-US" sz="950" b="1" dirty="0">
+                <a:solidFill>
+                  <a:srgbClr val="0068B7"/>
+                </a:solidFill>
+                <a:latin typeface="Aptos" pitchFamily="34" charset="0"/>
+                <a:ea typeface="Aptos" pitchFamily="34" charset="-122"/>
+                <a:cs typeface="Aptos" pitchFamily="34" charset="-120"/>
+              </a:rPr>
+              <a:t>Use this for</a:t>
+            </a:r>
+            <a:endParaRPr lang="en-US" sz="950" dirty="0"/>
+          </a:p>
+        </p:txBody>
+      </p:sp>
+      <p:sp>
+        <p:nvSpPr>
+          <p:cNvPr id="16" name="Text 14"/>
+          <p:cNvSpPr/>
+          <p:nvPr/>
+        </p:nvSpPr>
+        <p:spPr>
+          <a:xfrm>
+            <a:off x="8074152" y="3959352"/>
+            <a:ext cx="2825496" cy="1170432"/>
+          </a:xfrm>
+          <a:prstGeom prst="rect">
+            <a:avLst/>
+          </a:prstGeom>
+          <a:noFill/>
+          <a:ln/>
+        </p:spPr>
+        <p:txBody>
+          <a:bodyPr wrap="square" lIns="0" tIns="0" rIns="0" bIns="0" rtlCol="0" anchor="t">
+            <a:normAutofit/>
+          </a:bodyPr>
+          <a:lstStyle/>
+          <a:p>
+            <a:pPr indent="0" marL="0">
+              <a:buNone/>
+            </a:pPr>
+            <a:r>
+              <a:rPr lang="en-US" sz="1250" dirty="0">
+                <a:solidFill>
+                  <a:srgbClr val="17364A"/>
+                </a:solidFill>
+                <a:latin typeface="Aptos" pitchFamily="34" charset="0"/>
+                <a:ea typeface="Aptos" pitchFamily="34" charset="-122"/>
+                <a:cs typeface="Aptos" pitchFamily="34" charset="-120"/>
+              </a:rPr>
+              <a:t>Connect the concept to public health decisions, safeguards, documentation, or implementation work.</a:t>
+            </a:r>
+            <a:endParaRPr lang="en-US" sz="1250" dirty="0"/>
           </a:p>
         </p:txBody>
       </p:sp>
@@ -3126,7 +3656,32 @@
       </p:sp>
       <p:sp>
         <p:nvSpPr>
-          <p:cNvPr id="3" name="Text 1"/>
+          <p:cNvPr id="3" name="Shape 1"/>
+          <p:cNvSpPr/>
+          <p:nvPr/>
+        </p:nvSpPr>
+        <p:spPr>
+          <a:xfrm>
+            <a:off x="0" y="164592"/>
+            <a:ext cx="146304" cy="6693408"/>
+          </a:xfrm>
+          <a:prstGeom prst="rect">
+            <a:avLst/>
+          </a:prstGeom>
+          <a:solidFill>
+            <a:srgbClr val="2F8A28"/>
+          </a:solidFill>
+          <a:ln w="12700">
+            <a:solidFill>
+              <a:srgbClr val="2F8A28"/>
+            </a:solidFill>
+            <a:prstDash val="solid"/>
+          </a:ln>
+        </p:spPr>
+      </p:sp>
+      <p:sp>
+        <p:nvSpPr>
+          <p:cNvPr id="4" name="Text 2"/>
           <p:cNvSpPr/>
           <p:nvPr/>
         </p:nvSpPr>
@@ -3165,7 +3720,7 @@
       </p:sp>
       <p:sp>
         <p:nvSpPr>
-          <p:cNvPr id="4" name="Text 2"/>
+          <p:cNvPr id="5" name="Text 3"/>
           <p:cNvSpPr/>
           <p:nvPr/>
         </p:nvSpPr>
@@ -3204,7 +3759,7 @@
       </p:sp>
       <p:sp>
         <p:nvSpPr>
-          <p:cNvPr id="5" name="Text 3"/>
+          <p:cNvPr id="6" name="Text 4"/>
           <p:cNvSpPr/>
           <p:nvPr/>
         </p:nvSpPr>
@@ -3243,7 +3798,7 @@
       </p:sp>
       <p:sp>
         <p:nvSpPr>
-          <p:cNvPr id="6" name="Text 4"/>
+          <p:cNvPr id="7" name="Text 5"/>
           <p:cNvSpPr/>
           <p:nvPr/>
         </p:nvSpPr>
@@ -3276,7 +3831,7 @@
                 <a:ea typeface="Aptos Display" pitchFamily="34" charset="-122"/>
                 <a:cs typeface="Aptos Display" pitchFamily="34" charset="-120"/>
               </a:rPr>
-              <a:t>Risks, Failure Modes, and Guardrails Continued</a:t>
+              <a:t>Technical Deep Dive Continued</a:t>
             </a:r>
             <a:endParaRPr lang="en-US" sz="2700" dirty="0"/>
           </a:p>
@@ -3284,32 +3839,178 @@
       </p:sp>
       <p:sp>
         <p:nvSpPr>
-          <p:cNvPr id="7" name="Text 5"/>
-          <p:cNvSpPr/>
-          <p:nvPr/>
-        </p:nvSpPr>
-        <p:spPr>
-          <a:xfrm>
-            <a:off x="822960" y="1325880"/>
-            <a:ext cx="10378440" cy="4800600"/>
-          </a:xfrm>
-          <a:prstGeom prst="rect">
-            <a:avLst/>
-          </a:prstGeom>
-          <a:noFill/>
-          <a:ln/>
-        </p:spPr>
-        <p:txBody>
-          <a:bodyPr wrap="square" lIns="1016" tIns="1016" rIns="1016" bIns="1016" rtlCol="0" anchor="t">
+          <p:cNvPr id="8" name="Text 6"/>
+          <p:cNvSpPr/>
+          <p:nvPr/>
+        </p:nvSpPr>
+        <p:spPr>
+          <a:xfrm>
+            <a:off x="868680" y="1417320"/>
+            <a:ext cx="6675120" cy="4434840"/>
+          </a:xfrm>
+          <a:prstGeom prst="rect">
+            <a:avLst/>
+          </a:prstGeom>
+          <a:noFill/>
+          <a:ln/>
+        </p:spPr>
+        <p:txBody>
+          <a:bodyPr wrap="square" lIns="635" tIns="635" rIns="635" bIns="635" rtlCol="0" anchor="t">
             <a:normAutofit/>
           </a:bodyPr>
           <a:lstStyle/>
           <a:p>
+            <a:r>
+              <a:rPr lang="en-US" sz="1700" dirty="0">
+                <a:solidFill>
+                  <a:srgbClr val="17364A"/>
+                </a:solidFill>
+                <a:latin typeface="Aptos" pitchFamily="34" charset="0"/>
+                <a:ea typeface="Aptos" pitchFamily="34" charset="-122"/>
+                <a:cs typeface="Aptos" pitchFamily="34" charset="-120"/>
+              </a:rPr>
+              <a:t>Anomaly detection methods vary in complexity.</a:t>
+            </a:r>
+            <a:endParaRPr lang="en-US" sz="1700" dirty="0"/>
+          </a:p>
+          <a:p>
+            <a:r>
+              <a:rPr lang="en-US" sz="1700" dirty="0">
+                <a:solidFill>
+                  <a:srgbClr val="17364A"/>
+                </a:solidFill>
+                <a:latin typeface="Aptos" pitchFamily="34" charset="0"/>
+                <a:ea typeface="Aptos" pitchFamily="34" charset="-122"/>
+                <a:cs typeface="Aptos" pitchFamily="34" charset="-120"/>
+              </a:rPr>
+              <a:t>Simple methods may compare counts to moving averages or standard deviations.</a:t>
+            </a:r>
+            <a:endParaRPr lang="en-US" sz="1700" dirty="0"/>
+          </a:p>
+          <a:p>
+            <a:r>
+              <a:rPr lang="en-US" sz="1700" dirty="0">
+                <a:solidFill>
+                  <a:srgbClr val="17364A"/>
+                </a:solidFill>
+                <a:latin typeface="Aptos" pitchFamily="34" charset="0"/>
+                <a:ea typeface="Aptos" pitchFamily="34" charset="-122"/>
+                <a:cs typeface="Aptos" pitchFamily="34" charset="-120"/>
+              </a:rPr>
+              <a:t>More advanced methods may use regression, Bayesian approaches, control charts, machine learning, or ensemble models.</a:t>
+            </a:r>
+            <a:endParaRPr lang="en-US" sz="1700" dirty="0"/>
+          </a:p>
+          <a:p>
+            <a:r>
+              <a:rPr lang="en-US" sz="1700" dirty="0">
+                <a:solidFill>
+                  <a:srgbClr val="17364A"/>
+                </a:solidFill>
+                <a:latin typeface="Aptos" pitchFamily="34" charset="0"/>
+                <a:ea typeface="Aptos" pitchFamily="34" charset="-122"/>
+                <a:cs typeface="Aptos" pitchFamily="34" charset="-120"/>
+              </a:rPr>
+              <a:t>More complex methods are not automatically better.</a:t>
+            </a:r>
+            <a:endParaRPr lang="en-US" sz="1700" dirty="0"/>
+          </a:p>
+        </p:txBody>
+      </p:sp>
+      <p:sp>
+        <p:nvSpPr>
+          <p:cNvPr id="9" name="Shape 7"/>
+          <p:cNvSpPr/>
+          <p:nvPr/>
+        </p:nvSpPr>
+        <p:spPr>
+          <a:xfrm>
+            <a:off x="7909560" y="1417320"/>
+            <a:ext cx="3154680" cy="1828800"/>
+          </a:xfrm>
+          <a:prstGeom prst="roundRect">
+            <a:avLst>
+              <a:gd name="adj" fmla="val 6000"/>
+            </a:avLst>
+          </a:prstGeom>
+          <a:solidFill>
+            <a:srgbClr val="EEF8ED"/>
+          </a:solidFill>
+          <a:ln w="12700">
+            <a:solidFill>
+              <a:srgbClr val="B9D7E6"/>
+            </a:solidFill>
+            <a:prstDash val="solid"/>
+          </a:ln>
+        </p:spPr>
+      </p:sp>
+      <p:sp>
+        <p:nvSpPr>
+          <p:cNvPr id="10" name="Text 8"/>
+          <p:cNvSpPr/>
+          <p:nvPr/>
+        </p:nvSpPr>
+        <p:spPr>
+          <a:xfrm>
+            <a:off x="8074152" y="1563624"/>
+            <a:ext cx="2825496" cy="201168"/>
+          </a:xfrm>
+          <a:prstGeom prst="rect">
+            <a:avLst/>
+          </a:prstGeom>
+          <a:noFill/>
+          <a:ln/>
+        </p:spPr>
+        <p:txBody>
+          <a:bodyPr wrap="square" lIns="0" tIns="0" rIns="0" bIns="0" rtlCol="0" anchor="ctr"/>
+          <a:lstStyle/>
+          <a:p>
             <a:pPr indent="0" marL="0">
               <a:buNone/>
             </a:pPr>
             <a:r>
-              <a:rPr lang="en-US" sz="1420" dirty="0">
+              <a:rPr lang="en-US" sz="950" b="1" dirty="0">
+                <a:solidFill>
+                  <a:srgbClr val="0068B7"/>
+                </a:solidFill>
+                <a:latin typeface="Aptos" pitchFamily="34" charset="0"/>
+                <a:ea typeface="Aptos" pitchFamily="34" charset="-122"/>
+                <a:cs typeface="Aptos" pitchFamily="34" charset="-120"/>
+              </a:rPr>
+              <a:t>Key idea</a:t>
+            </a:r>
+            <a:endParaRPr lang="en-US" sz="950" dirty="0"/>
+          </a:p>
+        </p:txBody>
+      </p:sp>
+      <p:sp>
+        <p:nvSpPr>
+          <p:cNvPr id="11" name="Text 9"/>
+          <p:cNvSpPr/>
+          <p:nvPr/>
+        </p:nvSpPr>
+        <p:spPr>
+          <a:xfrm>
+            <a:off x="8074152" y="1856232"/>
+            <a:ext cx="2825496" cy="1261872"/>
+          </a:xfrm>
+          <a:prstGeom prst="rect">
+            <a:avLst/>
+          </a:prstGeom>
+          <a:noFill/>
+          <a:ln/>
+        </p:spPr>
+        <p:txBody>
+          <a:bodyPr wrap="square" lIns="0" tIns="0" rIns="0" bIns="0" rtlCol="0" anchor="t">
+            <a:normAutofit/>
+          </a:bodyPr>
+          <a:lstStyle/>
+          <a:p>
+            <a:pPr indent="0" marL="0">
+              <a:buNone/>
+            </a:pPr>
+            <a:r>
+              <a:rPr lang="en-US" sz="1250" dirty="0">
                 <a:solidFill>
                   <a:srgbClr val="17364A"/>
                 </a:solidFill>
@@ -3317,9 +4018,116 @@
                 <a:ea typeface="Aptos" pitchFamily="34" charset="-122"/>
                 <a:cs typeface="Aptos" pitchFamily="34" charset="-120"/>
               </a:rPr>
-              <a:t>Missed emerging events. Overly conservative thresholds may miss early signals. Guardrails include multiple indicators, sensitivity review, and escalation pathways for staff concerns.</a:t>
-            </a:r>
-            <a:endParaRPr lang="en-US" sz="1420" dirty="0"/>
+              <a:t>Anomaly detection methods vary in complexity.</a:t>
+            </a:r>
+            <a:endParaRPr lang="en-US" sz="1250" dirty="0"/>
+          </a:p>
+        </p:txBody>
+      </p:sp>
+      <p:sp>
+        <p:nvSpPr>
+          <p:cNvPr id="12" name="Shape 10"/>
+          <p:cNvSpPr/>
+          <p:nvPr/>
+        </p:nvSpPr>
+        <p:spPr>
+          <a:xfrm>
+            <a:off x="7909560" y="3520440"/>
+            <a:ext cx="3154680" cy="1737360"/>
+          </a:xfrm>
+          <a:prstGeom prst="roundRect">
+            <a:avLst>
+              <a:gd name="adj" fmla="val 6316"/>
+            </a:avLst>
+          </a:prstGeom>
+          <a:solidFill>
+            <a:srgbClr val="EAF6F8"/>
+          </a:solidFill>
+          <a:ln w="12700">
+            <a:solidFill>
+              <a:srgbClr val="B9D7E6"/>
+            </a:solidFill>
+            <a:prstDash val="solid"/>
+          </a:ln>
+        </p:spPr>
+      </p:sp>
+      <p:sp>
+        <p:nvSpPr>
+          <p:cNvPr id="13" name="Text 11"/>
+          <p:cNvSpPr/>
+          <p:nvPr/>
+        </p:nvSpPr>
+        <p:spPr>
+          <a:xfrm>
+            <a:off x="8074152" y="3666744"/>
+            <a:ext cx="2825496" cy="201168"/>
+          </a:xfrm>
+          <a:prstGeom prst="rect">
+            <a:avLst/>
+          </a:prstGeom>
+          <a:noFill/>
+          <a:ln/>
+        </p:spPr>
+        <p:txBody>
+          <a:bodyPr wrap="square" lIns="0" tIns="0" rIns="0" bIns="0" rtlCol="0" anchor="ctr"/>
+          <a:lstStyle/>
+          <a:p>
+            <a:pPr indent="0" marL="0">
+              <a:buNone/>
+            </a:pPr>
+            <a:r>
+              <a:rPr lang="en-US" sz="950" b="1" dirty="0">
+                <a:solidFill>
+                  <a:srgbClr val="0068B7"/>
+                </a:solidFill>
+                <a:latin typeface="Aptos" pitchFamily="34" charset="0"/>
+                <a:ea typeface="Aptos" pitchFamily="34" charset="-122"/>
+                <a:cs typeface="Aptos" pitchFamily="34" charset="-120"/>
+              </a:rPr>
+              <a:t>Use this for</a:t>
+            </a:r>
+            <a:endParaRPr lang="en-US" sz="950" dirty="0"/>
+          </a:p>
+        </p:txBody>
+      </p:sp>
+      <p:sp>
+        <p:nvSpPr>
+          <p:cNvPr id="14" name="Text 12"/>
+          <p:cNvSpPr/>
+          <p:nvPr/>
+        </p:nvSpPr>
+        <p:spPr>
+          <a:xfrm>
+            <a:off x="8074152" y="3959352"/>
+            <a:ext cx="2825496" cy="1170432"/>
+          </a:xfrm>
+          <a:prstGeom prst="rect">
+            <a:avLst/>
+          </a:prstGeom>
+          <a:noFill/>
+          <a:ln/>
+        </p:spPr>
+        <p:txBody>
+          <a:bodyPr wrap="square" lIns="0" tIns="0" rIns="0" bIns="0" rtlCol="0" anchor="t">
+            <a:normAutofit/>
+          </a:bodyPr>
+          <a:lstStyle/>
+          <a:p>
+            <a:pPr indent="0" marL="0">
+              <a:buNone/>
+            </a:pPr>
+            <a:r>
+              <a:rPr lang="en-US" sz="1250" dirty="0">
+                <a:solidFill>
+                  <a:srgbClr val="17364A"/>
+                </a:solidFill>
+                <a:latin typeface="Aptos" pitchFamily="34" charset="0"/>
+                <a:ea typeface="Aptos" pitchFamily="34" charset="-122"/>
+                <a:cs typeface="Aptos" pitchFamily="34" charset="-120"/>
+              </a:rPr>
+              <a:t>Connect the concept to public health decisions, safeguards, documentation, or implementation work.</a:t>
+            </a:r>
+            <a:endParaRPr lang="en-US" sz="1250" dirty="0"/>
           </a:p>
         </p:txBody>
       </p:sp>
@@ -3382,7 +4190,32 @@
       </p:sp>
       <p:sp>
         <p:nvSpPr>
-          <p:cNvPr id="3" name="Text 1"/>
+          <p:cNvPr id="3" name="Shape 1"/>
+          <p:cNvSpPr/>
+          <p:nvPr/>
+        </p:nvSpPr>
+        <p:spPr>
+          <a:xfrm>
+            <a:off x="0" y="164592"/>
+            <a:ext cx="146304" cy="6693408"/>
+          </a:xfrm>
+          <a:prstGeom prst="rect">
+            <a:avLst/>
+          </a:prstGeom>
+          <a:solidFill>
+            <a:srgbClr val="2F8A28"/>
+          </a:solidFill>
+          <a:ln w="12700">
+            <a:solidFill>
+              <a:srgbClr val="2F8A28"/>
+            </a:solidFill>
+            <a:prstDash val="solid"/>
+          </a:ln>
+        </p:spPr>
+      </p:sp>
+      <p:sp>
+        <p:nvSpPr>
+          <p:cNvPr id="4" name="Text 2"/>
           <p:cNvSpPr/>
           <p:nvPr/>
         </p:nvSpPr>
@@ -3421,7 +4254,7 @@
       </p:sp>
       <p:sp>
         <p:nvSpPr>
-          <p:cNvPr id="4" name="Text 2"/>
+          <p:cNvPr id="5" name="Text 3"/>
           <p:cNvSpPr/>
           <p:nvPr/>
         </p:nvSpPr>
@@ -3460,7 +4293,7 @@
       </p:sp>
       <p:sp>
         <p:nvSpPr>
-          <p:cNvPr id="5" name="Text 3"/>
+          <p:cNvPr id="6" name="Text 4"/>
           <p:cNvSpPr/>
           <p:nvPr/>
         </p:nvSpPr>
@@ -3499,13 +4332,77 @@
       </p:sp>
       <p:sp>
         <p:nvSpPr>
-          <p:cNvPr id="6" name="Text 4"/>
+          <p:cNvPr id="7" name="Shape 5"/>
           <p:cNvSpPr/>
           <p:nvPr/>
         </p:nvSpPr>
         <p:spPr>
           <a:xfrm>
             <a:off x="640080" y="658368"/>
+            <a:ext cx="420624" cy="420624"/>
+          </a:xfrm>
+          <a:prstGeom prst="ellipse">
+            <a:avLst/>
+          </a:prstGeom>
+          <a:solidFill>
+            <a:srgbClr val="0068B7"/>
+          </a:solidFill>
+          <a:ln w="12700">
+            <a:solidFill>
+              <a:srgbClr val="0068B7"/>
+            </a:solidFill>
+            <a:prstDash val="solid"/>
+          </a:ln>
+        </p:spPr>
+      </p:sp>
+      <p:sp>
+        <p:nvSpPr>
+          <p:cNvPr id="8" name="Text 6"/>
+          <p:cNvSpPr/>
+          <p:nvPr/>
+        </p:nvSpPr>
+        <p:spPr>
+          <a:xfrm>
+            <a:off x="640080" y="731520"/>
+            <a:ext cx="420624" cy="164592"/>
+          </a:xfrm>
+          <a:prstGeom prst="rect">
+            <a:avLst/>
+          </a:prstGeom>
+          <a:noFill/>
+          <a:ln/>
+        </p:spPr>
+        <p:txBody>
+          <a:bodyPr wrap="square" lIns="0" tIns="0" rIns="0" bIns="0" rtlCol="0" anchor="ctr"/>
+          <a:lstStyle/>
+          <a:p>
+            <a:pPr algn="ctr" indent="0" marL="0">
+              <a:buNone/>
+            </a:pPr>
+            <a:r>
+              <a:rPr lang="en-US" sz="1100" b="1" dirty="0">
+                <a:solidFill>
+                  <a:srgbClr val="FFFFFF"/>
+                </a:solidFill>
+                <a:latin typeface="Aptos" pitchFamily="34" charset="0"/>
+                <a:ea typeface="Aptos" pitchFamily="34" charset="-122"/>
+                <a:cs typeface="Aptos" pitchFamily="34" charset="-120"/>
+              </a:rPr>
+              <a:t>6</a:t>
+            </a:r>
+            <a:endParaRPr lang="en-US" sz="1100" dirty="0"/>
+          </a:p>
+        </p:txBody>
+      </p:sp>
+      <p:sp>
+        <p:nvSpPr>
+          <p:cNvPr id="9" name="Text 7"/>
+          <p:cNvSpPr/>
+          <p:nvPr/>
+        </p:nvSpPr>
+        <p:spPr>
+          <a:xfrm>
+            <a:off x="640080" y="621792"/>
             <a:ext cx="10881360" cy="566928"/>
           </a:xfrm>
           <a:prstGeom prst="rect">
@@ -3532,7 +4429,7 @@
                 <a:ea typeface="Aptos Display" pitchFamily="34" charset="-122"/>
                 <a:cs typeface="Aptos Display" pitchFamily="34" charset="-120"/>
               </a:rPr>
-              <a:t>Application to AI-Supported Workflows</a:t>
+              <a:t>Risks, Failure Modes, and Guardrails</a:t>
             </a:r>
             <a:endParaRPr lang="en-US" sz="2700" dirty="0"/>
           </a:p>
@@ -3540,32 +4437,178 @@
       </p:sp>
       <p:sp>
         <p:nvSpPr>
-          <p:cNvPr id="7" name="Text 5"/>
-          <p:cNvSpPr/>
-          <p:nvPr/>
-        </p:nvSpPr>
-        <p:spPr>
-          <a:xfrm>
-            <a:off x="822960" y="1325880"/>
-            <a:ext cx="10378440" cy="4800600"/>
-          </a:xfrm>
-          <a:prstGeom prst="rect">
-            <a:avLst/>
-          </a:prstGeom>
-          <a:noFill/>
-          <a:ln/>
-        </p:spPr>
-        <p:txBody>
-          <a:bodyPr wrap="square" lIns="1016" tIns="1016" rIns="1016" bIns="1016" rtlCol="0" anchor="t">
+          <p:cNvPr id="10" name="Text 8"/>
+          <p:cNvSpPr/>
+          <p:nvPr/>
+        </p:nvSpPr>
+        <p:spPr>
+          <a:xfrm>
+            <a:off x="868680" y="1417320"/>
+            <a:ext cx="6675120" cy="4434840"/>
+          </a:xfrm>
+          <a:prstGeom prst="rect">
+            <a:avLst/>
+          </a:prstGeom>
+          <a:noFill/>
+          <a:ln/>
+        </p:spPr>
+        <p:txBody>
+          <a:bodyPr wrap="square" lIns="635" tIns="635" rIns="635" bIns="635" rtlCol="0" anchor="t">
             <a:normAutofit/>
           </a:bodyPr>
           <a:lstStyle/>
           <a:p>
+            <a:r>
+              <a:rPr lang="en-US" sz="1700" dirty="0">
+                <a:solidFill>
+                  <a:srgbClr val="17364A"/>
+                </a:solidFill>
+                <a:latin typeface="Aptos" pitchFamily="34" charset="0"/>
+                <a:ea typeface="Aptos" pitchFamily="34" charset="-122"/>
+                <a:cs typeface="Aptos" pitchFamily="34" charset="-120"/>
+              </a:rPr>
+              <a:t>Reporting artifacts.</a:t>
+            </a:r>
+            <a:endParaRPr lang="en-US" sz="1700" dirty="0"/>
+          </a:p>
+          <a:p>
+            <a:r>
+              <a:rPr lang="en-US" sz="1700" dirty="0">
+                <a:solidFill>
+                  <a:srgbClr val="17364A"/>
+                </a:solidFill>
+                <a:latin typeface="Aptos" pitchFamily="34" charset="0"/>
+                <a:ea typeface="Aptos" pitchFamily="34" charset="-122"/>
+                <a:cs typeface="Aptos" pitchFamily="34" charset="-120"/>
+              </a:rPr>
+              <a:t>Feed failures, delayed batches, or coding changes can trigger false alerts.</a:t>
+            </a:r>
+            <a:endParaRPr lang="en-US" sz="1700" dirty="0"/>
+          </a:p>
+          <a:p>
+            <a:r>
+              <a:rPr lang="en-US" sz="1700" dirty="0">
+                <a:solidFill>
+                  <a:srgbClr val="17364A"/>
+                </a:solidFill>
+                <a:latin typeface="Aptos" pitchFamily="34" charset="0"/>
+                <a:ea typeface="Aptos" pitchFamily="34" charset="-122"/>
+                <a:cs typeface="Aptos" pitchFamily="34" charset="-120"/>
+              </a:rPr>
+              <a:t>Guardrails include data quality checks, feed monitoring, and partner change logs.</a:t>
+            </a:r>
+            <a:endParaRPr lang="en-US" sz="1700" dirty="0"/>
+          </a:p>
+          <a:p>
+            <a:r>
+              <a:rPr lang="en-US" sz="1700" dirty="0">
+                <a:solidFill>
+                  <a:srgbClr val="17364A"/>
+                </a:solidFill>
+                <a:latin typeface="Aptos" pitchFamily="34" charset="0"/>
+                <a:ea typeface="Aptos" pitchFamily="34" charset="-122"/>
+                <a:cs typeface="Aptos" pitchFamily="34" charset="-120"/>
+              </a:rPr>
+              <a:t>Alert fatigue.</a:t>
+            </a:r>
+            <a:endParaRPr lang="en-US" sz="1700" dirty="0"/>
+          </a:p>
+        </p:txBody>
+      </p:sp>
+      <p:sp>
+        <p:nvSpPr>
+          <p:cNvPr id="11" name="Shape 9"/>
+          <p:cNvSpPr/>
+          <p:nvPr/>
+        </p:nvSpPr>
+        <p:spPr>
+          <a:xfrm>
+            <a:off x="7909560" y="1417320"/>
+            <a:ext cx="3154680" cy="1828800"/>
+          </a:xfrm>
+          <a:prstGeom prst="roundRect">
+            <a:avLst>
+              <a:gd name="adj" fmla="val 6000"/>
+            </a:avLst>
+          </a:prstGeom>
+          <a:solidFill>
+            <a:srgbClr val="EEF8ED"/>
+          </a:solidFill>
+          <a:ln w="12700">
+            <a:solidFill>
+              <a:srgbClr val="B9D7E6"/>
+            </a:solidFill>
+            <a:prstDash val="solid"/>
+          </a:ln>
+        </p:spPr>
+      </p:sp>
+      <p:sp>
+        <p:nvSpPr>
+          <p:cNvPr id="12" name="Text 10"/>
+          <p:cNvSpPr/>
+          <p:nvPr/>
+        </p:nvSpPr>
+        <p:spPr>
+          <a:xfrm>
+            <a:off x="8074152" y="1563624"/>
+            <a:ext cx="2825496" cy="201168"/>
+          </a:xfrm>
+          <a:prstGeom prst="rect">
+            <a:avLst/>
+          </a:prstGeom>
+          <a:noFill/>
+          <a:ln/>
+        </p:spPr>
+        <p:txBody>
+          <a:bodyPr wrap="square" lIns="0" tIns="0" rIns="0" bIns="0" rtlCol="0" anchor="ctr"/>
+          <a:lstStyle/>
+          <a:p>
             <a:pPr indent="0" marL="0">
               <a:buNone/>
             </a:pPr>
             <a:r>
-              <a:rPr lang="en-US" sz="1420" dirty="0">
+              <a:rPr lang="en-US" sz="950" b="1" dirty="0">
+                <a:solidFill>
+                  <a:srgbClr val="0068B7"/>
+                </a:solidFill>
+                <a:latin typeface="Aptos" pitchFamily="34" charset="0"/>
+                <a:ea typeface="Aptos" pitchFamily="34" charset="-122"/>
+                <a:cs typeface="Aptos" pitchFamily="34" charset="-120"/>
+              </a:rPr>
+              <a:t>Key idea</a:t>
+            </a:r>
+            <a:endParaRPr lang="en-US" sz="950" dirty="0"/>
+          </a:p>
+        </p:txBody>
+      </p:sp>
+      <p:sp>
+        <p:nvSpPr>
+          <p:cNvPr id="13" name="Text 11"/>
+          <p:cNvSpPr/>
+          <p:nvPr/>
+        </p:nvSpPr>
+        <p:spPr>
+          <a:xfrm>
+            <a:off x="8074152" y="1856232"/>
+            <a:ext cx="2825496" cy="1261872"/>
+          </a:xfrm>
+          <a:prstGeom prst="rect">
+            <a:avLst/>
+          </a:prstGeom>
+          <a:noFill/>
+          <a:ln/>
+        </p:spPr>
+        <p:txBody>
+          <a:bodyPr wrap="square" lIns="0" tIns="0" rIns="0" bIns="0" rtlCol="0" anchor="t">
+            <a:normAutofit/>
+          </a:bodyPr>
+          <a:lstStyle/>
+          <a:p>
+            <a:pPr indent="0" marL="0">
+              <a:buNone/>
+            </a:pPr>
+            <a:r>
+              <a:rPr lang="en-US" sz="1250" dirty="0">
                 <a:solidFill>
                   <a:srgbClr val="17364A"/>
                 </a:solidFill>
@@ -3573,9 +4616,116 @@
                 <a:ea typeface="Aptos" pitchFamily="34" charset="-122"/>
                 <a:cs typeface="Aptos" pitchFamily="34" charset="-120"/>
               </a:rPr>
-              <a:t>Time-series and anomaly detection methods can support predictive dashboards, syndromic surveillance, wastewater monitoring, outbreak intelligence, and emergency preparedness. Generative AI may summarize signal review, but it should include uncertainty and source indicators. Agentic workflows may route alerts or create tasks, but those actions should be limited to defined protocols and human review. The best AI-supported surveillance workflows combine automation with epidemiologic judgment. AI can help detect changes, but humans determine whether the signal is meaningful, what additional evidence is needed, and what public health action is appropriate.</a:t>
-            </a:r>
-            <a:endParaRPr lang="en-US" sz="1420" dirty="0"/>
+              <a:t>Reporting artifacts.</a:t>
+            </a:r>
+            <a:endParaRPr lang="en-US" sz="1250" dirty="0"/>
+          </a:p>
+        </p:txBody>
+      </p:sp>
+      <p:sp>
+        <p:nvSpPr>
+          <p:cNvPr id="14" name="Shape 12"/>
+          <p:cNvSpPr/>
+          <p:nvPr/>
+        </p:nvSpPr>
+        <p:spPr>
+          <a:xfrm>
+            <a:off x="7909560" y="3520440"/>
+            <a:ext cx="3154680" cy="1737360"/>
+          </a:xfrm>
+          <a:prstGeom prst="roundRect">
+            <a:avLst>
+              <a:gd name="adj" fmla="val 6316"/>
+            </a:avLst>
+          </a:prstGeom>
+          <a:solidFill>
+            <a:srgbClr val="EAF6F8"/>
+          </a:solidFill>
+          <a:ln w="12700">
+            <a:solidFill>
+              <a:srgbClr val="B9D7E6"/>
+            </a:solidFill>
+            <a:prstDash val="solid"/>
+          </a:ln>
+        </p:spPr>
+      </p:sp>
+      <p:sp>
+        <p:nvSpPr>
+          <p:cNvPr id="15" name="Text 13"/>
+          <p:cNvSpPr/>
+          <p:nvPr/>
+        </p:nvSpPr>
+        <p:spPr>
+          <a:xfrm>
+            <a:off x="8074152" y="3666744"/>
+            <a:ext cx="2825496" cy="201168"/>
+          </a:xfrm>
+          <a:prstGeom prst="rect">
+            <a:avLst/>
+          </a:prstGeom>
+          <a:noFill/>
+          <a:ln/>
+        </p:spPr>
+        <p:txBody>
+          <a:bodyPr wrap="square" lIns="0" tIns="0" rIns="0" bIns="0" rtlCol="0" anchor="ctr"/>
+          <a:lstStyle/>
+          <a:p>
+            <a:pPr indent="0" marL="0">
+              <a:buNone/>
+            </a:pPr>
+            <a:r>
+              <a:rPr lang="en-US" sz="950" b="1" dirty="0">
+                <a:solidFill>
+                  <a:srgbClr val="0068B7"/>
+                </a:solidFill>
+                <a:latin typeface="Aptos" pitchFamily="34" charset="0"/>
+                <a:ea typeface="Aptos" pitchFamily="34" charset="-122"/>
+                <a:cs typeface="Aptos" pitchFamily="34" charset="-120"/>
+              </a:rPr>
+              <a:t>Use this for</a:t>
+            </a:r>
+            <a:endParaRPr lang="en-US" sz="950" dirty="0"/>
+          </a:p>
+        </p:txBody>
+      </p:sp>
+      <p:sp>
+        <p:nvSpPr>
+          <p:cNvPr id="16" name="Text 14"/>
+          <p:cNvSpPr/>
+          <p:nvPr/>
+        </p:nvSpPr>
+        <p:spPr>
+          <a:xfrm>
+            <a:off x="8074152" y="3959352"/>
+            <a:ext cx="2825496" cy="1170432"/>
+          </a:xfrm>
+          <a:prstGeom prst="rect">
+            <a:avLst/>
+          </a:prstGeom>
+          <a:noFill/>
+          <a:ln/>
+        </p:spPr>
+        <p:txBody>
+          <a:bodyPr wrap="square" lIns="0" tIns="0" rIns="0" bIns="0" rtlCol="0" anchor="t">
+            <a:normAutofit/>
+          </a:bodyPr>
+          <a:lstStyle/>
+          <a:p>
+            <a:pPr indent="0" marL="0">
+              <a:buNone/>
+            </a:pPr>
+            <a:r>
+              <a:rPr lang="en-US" sz="1250" dirty="0">
+                <a:solidFill>
+                  <a:srgbClr val="17364A"/>
+                </a:solidFill>
+                <a:latin typeface="Aptos" pitchFamily="34" charset="0"/>
+                <a:ea typeface="Aptos" pitchFamily="34" charset="-122"/>
+                <a:cs typeface="Aptos" pitchFamily="34" charset="-120"/>
+              </a:rPr>
+              <a:t>Connect the concept to public health decisions, safeguards, documentation, or implementation work.</a:t>
+            </a:r>
+            <a:endParaRPr lang="en-US" sz="1250" dirty="0"/>
           </a:p>
         </p:txBody>
       </p:sp>
@@ -3638,7 +4788,32 @@
       </p:sp>
       <p:sp>
         <p:nvSpPr>
-          <p:cNvPr id="3" name="Text 1"/>
+          <p:cNvPr id="3" name="Shape 1"/>
+          <p:cNvSpPr/>
+          <p:nvPr/>
+        </p:nvSpPr>
+        <p:spPr>
+          <a:xfrm>
+            <a:off x="0" y="164592"/>
+            <a:ext cx="146304" cy="6693408"/>
+          </a:xfrm>
+          <a:prstGeom prst="rect">
+            <a:avLst/>
+          </a:prstGeom>
+          <a:solidFill>
+            <a:srgbClr val="2F8A28"/>
+          </a:solidFill>
+          <a:ln w="12700">
+            <a:solidFill>
+              <a:srgbClr val="2F8A28"/>
+            </a:solidFill>
+            <a:prstDash val="solid"/>
+          </a:ln>
+        </p:spPr>
+      </p:sp>
+      <p:sp>
+        <p:nvSpPr>
+          <p:cNvPr id="4" name="Text 2"/>
           <p:cNvSpPr/>
           <p:nvPr/>
         </p:nvSpPr>
@@ -3677,7 +4852,7 @@
       </p:sp>
       <p:sp>
         <p:nvSpPr>
-          <p:cNvPr id="4" name="Text 2"/>
+          <p:cNvPr id="5" name="Text 3"/>
           <p:cNvSpPr/>
           <p:nvPr/>
         </p:nvSpPr>
@@ -3716,7 +4891,7 @@
       </p:sp>
       <p:sp>
         <p:nvSpPr>
-          <p:cNvPr id="5" name="Text 3"/>
+          <p:cNvPr id="6" name="Text 4"/>
           <p:cNvSpPr/>
           <p:nvPr/>
         </p:nvSpPr>
@@ -3755,7 +4930,7 @@
       </p:sp>
       <p:sp>
         <p:nvSpPr>
-          <p:cNvPr id="6" name="Text 4"/>
+          <p:cNvPr id="7" name="Text 5"/>
           <p:cNvSpPr/>
           <p:nvPr/>
         </p:nvSpPr>
@@ -3788,7 +4963,7 @@
                 <a:ea typeface="Aptos Display" pitchFamily="34" charset="-122"/>
                 <a:cs typeface="Aptos Display" pitchFamily="34" charset="-120"/>
               </a:rPr>
-              <a:t>Reflection Questions</a:t>
+              <a:t>Risks, Failure Modes, and Guardrails Continued</a:t>
             </a:r>
             <a:endParaRPr lang="en-US" sz="2700" dirty="0"/>
           </a:p>
@@ -3796,32 +4971,164 @@
       </p:sp>
       <p:sp>
         <p:nvSpPr>
-          <p:cNvPr id="7" name="Text 5"/>
-          <p:cNvSpPr/>
-          <p:nvPr/>
-        </p:nvSpPr>
-        <p:spPr>
-          <a:xfrm>
-            <a:off x="822960" y="1325880"/>
-            <a:ext cx="10378440" cy="4800600"/>
-          </a:xfrm>
-          <a:prstGeom prst="rect">
-            <a:avLst/>
-          </a:prstGeom>
-          <a:noFill/>
-          <a:ln/>
-        </p:spPr>
-        <p:txBody>
-          <a:bodyPr wrap="square" lIns="1016" tIns="1016" rIns="1016" bIns="1016" rtlCol="0" anchor="t">
+          <p:cNvPr id="8" name="Text 6"/>
+          <p:cNvSpPr/>
+          <p:nvPr/>
+        </p:nvSpPr>
+        <p:spPr>
+          <a:xfrm>
+            <a:off x="868680" y="1417320"/>
+            <a:ext cx="6675120" cy="4434840"/>
+          </a:xfrm>
+          <a:prstGeom prst="rect">
+            <a:avLst/>
+          </a:prstGeom>
+          <a:noFill/>
+          <a:ln/>
+        </p:spPr>
+        <p:txBody>
+          <a:bodyPr wrap="square" lIns="635" tIns="635" rIns="635" bIns="635" rtlCol="0" anchor="t">
             <a:normAutofit/>
           </a:bodyPr>
           <a:lstStyle/>
           <a:p>
+            <a:r>
+              <a:rPr lang="en-US" sz="1700" dirty="0">
+                <a:solidFill>
+                  <a:srgbClr val="17364A"/>
+                </a:solidFill>
+                <a:latin typeface="Aptos" pitchFamily="34" charset="0"/>
+                <a:ea typeface="Aptos" pitchFamily="34" charset="-122"/>
+                <a:cs typeface="Aptos" pitchFamily="34" charset="-120"/>
+              </a:rPr>
+              <a:t>Missed emerging events.</a:t>
+            </a:r>
+            <a:endParaRPr lang="en-US" sz="1700" dirty="0"/>
+          </a:p>
+          <a:p>
+            <a:r>
+              <a:rPr lang="en-US" sz="1700" dirty="0">
+                <a:solidFill>
+                  <a:srgbClr val="17364A"/>
+                </a:solidFill>
+                <a:latin typeface="Aptos" pitchFamily="34" charset="0"/>
+                <a:ea typeface="Aptos" pitchFamily="34" charset="-122"/>
+                <a:cs typeface="Aptos" pitchFamily="34" charset="-120"/>
+              </a:rPr>
+              <a:t>Overly conservative thresholds may miss early signals.</a:t>
+            </a:r>
+            <a:endParaRPr lang="en-US" sz="1700" dirty="0"/>
+          </a:p>
+          <a:p>
+            <a:r>
+              <a:rPr lang="en-US" sz="1700" dirty="0">
+                <a:solidFill>
+                  <a:srgbClr val="17364A"/>
+                </a:solidFill>
+                <a:latin typeface="Aptos" pitchFamily="34" charset="0"/>
+                <a:ea typeface="Aptos" pitchFamily="34" charset="-122"/>
+                <a:cs typeface="Aptos" pitchFamily="34" charset="-120"/>
+              </a:rPr>
+              <a:t>Guardrails include multiple indicators, sensitivity review, and escalation pathways for staff concerns.</a:t>
+            </a:r>
+            <a:endParaRPr lang="en-US" sz="1700" dirty="0"/>
+          </a:p>
+        </p:txBody>
+      </p:sp>
+      <p:sp>
+        <p:nvSpPr>
+          <p:cNvPr id="9" name="Shape 7"/>
+          <p:cNvSpPr/>
+          <p:nvPr/>
+        </p:nvSpPr>
+        <p:spPr>
+          <a:xfrm>
+            <a:off x="7909560" y="1417320"/>
+            <a:ext cx="3154680" cy="1828800"/>
+          </a:xfrm>
+          <a:prstGeom prst="roundRect">
+            <a:avLst>
+              <a:gd name="adj" fmla="val 6000"/>
+            </a:avLst>
+          </a:prstGeom>
+          <a:solidFill>
+            <a:srgbClr val="EEF8ED"/>
+          </a:solidFill>
+          <a:ln w="12700">
+            <a:solidFill>
+              <a:srgbClr val="B9D7E6"/>
+            </a:solidFill>
+            <a:prstDash val="solid"/>
+          </a:ln>
+        </p:spPr>
+      </p:sp>
+      <p:sp>
+        <p:nvSpPr>
+          <p:cNvPr id="10" name="Text 8"/>
+          <p:cNvSpPr/>
+          <p:nvPr/>
+        </p:nvSpPr>
+        <p:spPr>
+          <a:xfrm>
+            <a:off x="8074152" y="1563624"/>
+            <a:ext cx="2825496" cy="201168"/>
+          </a:xfrm>
+          <a:prstGeom prst="rect">
+            <a:avLst/>
+          </a:prstGeom>
+          <a:noFill/>
+          <a:ln/>
+        </p:spPr>
+        <p:txBody>
+          <a:bodyPr wrap="square" lIns="0" tIns="0" rIns="0" bIns="0" rtlCol="0" anchor="ctr"/>
+          <a:lstStyle/>
+          <a:p>
             <a:pPr indent="0" marL="0">
               <a:buNone/>
             </a:pPr>
             <a:r>
-              <a:rPr lang="en-US" sz="1420" dirty="0">
+              <a:rPr lang="en-US" sz="950" b="1" dirty="0">
+                <a:solidFill>
+                  <a:srgbClr val="0068B7"/>
+                </a:solidFill>
+                <a:latin typeface="Aptos" pitchFamily="34" charset="0"/>
+                <a:ea typeface="Aptos" pitchFamily="34" charset="-122"/>
+                <a:cs typeface="Aptos" pitchFamily="34" charset="-120"/>
+              </a:rPr>
+              <a:t>Key idea</a:t>
+            </a:r>
+            <a:endParaRPr lang="en-US" sz="950" dirty="0"/>
+          </a:p>
+        </p:txBody>
+      </p:sp>
+      <p:sp>
+        <p:nvSpPr>
+          <p:cNvPr id="11" name="Text 9"/>
+          <p:cNvSpPr/>
+          <p:nvPr/>
+        </p:nvSpPr>
+        <p:spPr>
+          <a:xfrm>
+            <a:off x="8074152" y="1856232"/>
+            <a:ext cx="2825496" cy="1261872"/>
+          </a:xfrm>
+          <a:prstGeom prst="rect">
+            <a:avLst/>
+          </a:prstGeom>
+          <a:noFill/>
+          <a:ln/>
+        </p:spPr>
+        <p:txBody>
+          <a:bodyPr wrap="square" lIns="0" tIns="0" rIns="0" bIns="0" rtlCol="0" anchor="t">
+            <a:normAutofit/>
+          </a:bodyPr>
+          <a:lstStyle/>
+          <a:p>
+            <a:pPr indent="0" marL="0">
+              <a:buNone/>
+            </a:pPr>
+            <a:r>
+              <a:rPr lang="en-US" sz="1250" dirty="0">
                 <a:solidFill>
                   <a:srgbClr val="17364A"/>
                 </a:solidFill>
@@ -3829,9 +5136,116 @@
                 <a:ea typeface="Aptos" pitchFamily="34" charset="-122"/>
                 <a:cs typeface="Aptos" pitchFamily="34" charset="-120"/>
               </a:rPr>
-              <a:t>What time-series data stream would benefit from automated signal review? What baseline is appropriate for the condition, data source, and decision? Which reporting artifacts could create false signals?</a:t>
-            </a:r>
-            <a:endParaRPr lang="en-US" sz="1420" dirty="0"/>
+              <a:t>Missed emerging events.</a:t>
+            </a:r>
+            <a:endParaRPr lang="en-US" sz="1250" dirty="0"/>
+          </a:p>
+        </p:txBody>
+      </p:sp>
+      <p:sp>
+        <p:nvSpPr>
+          <p:cNvPr id="12" name="Shape 10"/>
+          <p:cNvSpPr/>
+          <p:nvPr/>
+        </p:nvSpPr>
+        <p:spPr>
+          <a:xfrm>
+            <a:off x="7909560" y="3520440"/>
+            <a:ext cx="3154680" cy="1737360"/>
+          </a:xfrm>
+          <a:prstGeom prst="roundRect">
+            <a:avLst>
+              <a:gd name="adj" fmla="val 6316"/>
+            </a:avLst>
+          </a:prstGeom>
+          <a:solidFill>
+            <a:srgbClr val="EAF6F8"/>
+          </a:solidFill>
+          <a:ln w="12700">
+            <a:solidFill>
+              <a:srgbClr val="B9D7E6"/>
+            </a:solidFill>
+            <a:prstDash val="solid"/>
+          </a:ln>
+        </p:spPr>
+      </p:sp>
+      <p:sp>
+        <p:nvSpPr>
+          <p:cNvPr id="13" name="Text 11"/>
+          <p:cNvSpPr/>
+          <p:nvPr/>
+        </p:nvSpPr>
+        <p:spPr>
+          <a:xfrm>
+            <a:off x="8074152" y="3666744"/>
+            <a:ext cx="2825496" cy="201168"/>
+          </a:xfrm>
+          <a:prstGeom prst="rect">
+            <a:avLst/>
+          </a:prstGeom>
+          <a:noFill/>
+          <a:ln/>
+        </p:spPr>
+        <p:txBody>
+          <a:bodyPr wrap="square" lIns="0" tIns="0" rIns="0" bIns="0" rtlCol="0" anchor="ctr"/>
+          <a:lstStyle/>
+          <a:p>
+            <a:pPr indent="0" marL="0">
+              <a:buNone/>
+            </a:pPr>
+            <a:r>
+              <a:rPr lang="en-US" sz="950" b="1" dirty="0">
+                <a:solidFill>
+                  <a:srgbClr val="0068B7"/>
+                </a:solidFill>
+                <a:latin typeface="Aptos" pitchFamily="34" charset="0"/>
+                <a:ea typeface="Aptos" pitchFamily="34" charset="-122"/>
+                <a:cs typeface="Aptos" pitchFamily="34" charset="-120"/>
+              </a:rPr>
+              <a:t>Use this for</a:t>
+            </a:r>
+            <a:endParaRPr lang="en-US" sz="950" dirty="0"/>
+          </a:p>
+        </p:txBody>
+      </p:sp>
+      <p:sp>
+        <p:nvSpPr>
+          <p:cNvPr id="14" name="Text 12"/>
+          <p:cNvSpPr/>
+          <p:nvPr/>
+        </p:nvSpPr>
+        <p:spPr>
+          <a:xfrm>
+            <a:off x="8074152" y="3959352"/>
+            <a:ext cx="2825496" cy="1170432"/>
+          </a:xfrm>
+          <a:prstGeom prst="rect">
+            <a:avLst/>
+          </a:prstGeom>
+          <a:noFill/>
+          <a:ln/>
+        </p:spPr>
+        <p:txBody>
+          <a:bodyPr wrap="square" lIns="0" tIns="0" rIns="0" bIns="0" rtlCol="0" anchor="t">
+            <a:normAutofit/>
+          </a:bodyPr>
+          <a:lstStyle/>
+          <a:p>
+            <a:pPr indent="0" marL="0">
+              <a:buNone/>
+            </a:pPr>
+            <a:r>
+              <a:rPr lang="en-US" sz="1250" dirty="0">
+                <a:solidFill>
+                  <a:srgbClr val="17364A"/>
+                </a:solidFill>
+                <a:latin typeface="Aptos" pitchFamily="34" charset="0"/>
+                <a:ea typeface="Aptos" pitchFamily="34" charset="-122"/>
+                <a:cs typeface="Aptos" pitchFamily="34" charset="-120"/>
+              </a:rPr>
+              <a:t>Connect the concept to public health decisions, safeguards, documentation, or implementation work.</a:t>
+            </a:r>
+            <a:endParaRPr lang="en-US" sz="1250" dirty="0"/>
           </a:p>
         </p:txBody>
       </p:sp>
@@ -3894,7 +5308,32 @@
       </p:sp>
       <p:sp>
         <p:nvSpPr>
-          <p:cNvPr id="3" name="Text 1"/>
+          <p:cNvPr id="3" name="Shape 1"/>
+          <p:cNvSpPr/>
+          <p:nvPr/>
+        </p:nvSpPr>
+        <p:spPr>
+          <a:xfrm>
+            <a:off x="0" y="164592"/>
+            <a:ext cx="146304" cy="6693408"/>
+          </a:xfrm>
+          <a:prstGeom prst="rect">
+            <a:avLst/>
+          </a:prstGeom>
+          <a:solidFill>
+            <a:srgbClr val="2F8A28"/>
+          </a:solidFill>
+          <a:ln w="12700">
+            <a:solidFill>
+              <a:srgbClr val="2F8A28"/>
+            </a:solidFill>
+            <a:prstDash val="solid"/>
+          </a:ln>
+        </p:spPr>
+      </p:sp>
+      <p:sp>
+        <p:nvSpPr>
+          <p:cNvPr id="4" name="Text 2"/>
           <p:cNvSpPr/>
           <p:nvPr/>
         </p:nvSpPr>
@@ -3933,7 +5372,7 @@
       </p:sp>
       <p:sp>
         <p:nvSpPr>
-          <p:cNvPr id="4" name="Text 2"/>
+          <p:cNvPr id="5" name="Text 3"/>
           <p:cNvSpPr/>
           <p:nvPr/>
         </p:nvSpPr>
@@ -3972,7 +5411,7 @@
       </p:sp>
       <p:sp>
         <p:nvSpPr>
-          <p:cNvPr id="5" name="Text 3"/>
+          <p:cNvPr id="6" name="Text 4"/>
           <p:cNvSpPr/>
           <p:nvPr/>
         </p:nvSpPr>
@@ -4011,13 +5450,77 @@
       </p:sp>
       <p:sp>
         <p:nvSpPr>
-          <p:cNvPr id="6" name="Text 4"/>
+          <p:cNvPr id="7" name="Shape 5"/>
           <p:cNvSpPr/>
           <p:nvPr/>
         </p:nvSpPr>
         <p:spPr>
           <a:xfrm>
             <a:off x="640080" y="658368"/>
+            <a:ext cx="420624" cy="420624"/>
+          </a:xfrm>
+          <a:prstGeom prst="ellipse">
+            <a:avLst/>
+          </a:prstGeom>
+          <a:solidFill>
+            <a:srgbClr val="0068B7"/>
+          </a:solidFill>
+          <a:ln w="12700">
+            <a:solidFill>
+              <a:srgbClr val="0068B7"/>
+            </a:solidFill>
+            <a:prstDash val="solid"/>
+          </a:ln>
+        </p:spPr>
+      </p:sp>
+      <p:sp>
+        <p:nvSpPr>
+          <p:cNvPr id="8" name="Text 6"/>
+          <p:cNvSpPr/>
+          <p:nvPr/>
+        </p:nvSpPr>
+        <p:spPr>
+          <a:xfrm>
+            <a:off x="640080" y="731520"/>
+            <a:ext cx="420624" cy="164592"/>
+          </a:xfrm>
+          <a:prstGeom prst="rect">
+            <a:avLst/>
+          </a:prstGeom>
+          <a:noFill/>
+          <a:ln/>
+        </p:spPr>
+        <p:txBody>
+          <a:bodyPr wrap="square" lIns="0" tIns="0" rIns="0" bIns="0" rtlCol="0" anchor="ctr"/>
+          <a:lstStyle/>
+          <a:p>
+            <a:pPr algn="ctr" indent="0" marL="0">
+              <a:buNone/>
+            </a:pPr>
+            <a:r>
+              <a:rPr lang="en-US" sz="1100" b="1" dirty="0">
+                <a:solidFill>
+                  <a:srgbClr val="FFFFFF"/>
+                </a:solidFill>
+                <a:latin typeface="Aptos" pitchFamily="34" charset="0"/>
+                <a:ea typeface="Aptos" pitchFamily="34" charset="-122"/>
+                <a:cs typeface="Aptos" pitchFamily="34" charset="-120"/>
+              </a:rPr>
+              <a:t>7</a:t>
+            </a:r>
+            <a:endParaRPr lang="en-US" sz="1100" dirty="0"/>
+          </a:p>
+        </p:txBody>
+      </p:sp>
+      <p:sp>
+        <p:nvSpPr>
+          <p:cNvPr id="9" name="Text 7"/>
+          <p:cNvSpPr/>
+          <p:nvPr/>
+        </p:nvSpPr>
+        <p:spPr>
+          <a:xfrm>
+            <a:off x="640080" y="621792"/>
             <a:ext cx="10881360" cy="566928"/>
           </a:xfrm>
           <a:prstGeom prst="rect">
@@ -4044,7 +5547,7 @@
                 <a:ea typeface="Aptos Display" pitchFamily="34" charset="-122"/>
                 <a:cs typeface="Aptos Display" pitchFamily="34" charset="-120"/>
               </a:rPr>
-              <a:t>Reflection Questions Continued</a:t>
+              <a:t>Application to AI-Supported Workflows</a:t>
             </a:r>
             <a:endParaRPr lang="en-US" sz="2700" dirty="0"/>
           </a:p>
@@ -4052,32 +5555,178 @@
       </p:sp>
       <p:sp>
         <p:nvSpPr>
-          <p:cNvPr id="7" name="Text 5"/>
-          <p:cNvSpPr/>
-          <p:nvPr/>
-        </p:nvSpPr>
-        <p:spPr>
-          <a:xfrm>
-            <a:off x="822960" y="1325880"/>
-            <a:ext cx="10378440" cy="4800600"/>
-          </a:xfrm>
-          <a:prstGeom prst="rect">
-            <a:avLst/>
-          </a:prstGeom>
-          <a:noFill/>
-          <a:ln/>
-        </p:spPr>
-        <p:txBody>
-          <a:bodyPr wrap="square" lIns="1016" tIns="1016" rIns="1016" bIns="1016" rtlCol="0" anchor="t">
+          <p:cNvPr id="10" name="Text 8"/>
+          <p:cNvSpPr/>
+          <p:nvPr/>
+        </p:nvSpPr>
+        <p:spPr>
+          <a:xfrm>
+            <a:off x="868680" y="1417320"/>
+            <a:ext cx="6675120" cy="4434840"/>
+          </a:xfrm>
+          <a:prstGeom prst="rect">
+            <a:avLst/>
+          </a:prstGeom>
+          <a:noFill/>
+          <a:ln/>
+        </p:spPr>
+        <p:txBody>
+          <a:bodyPr wrap="square" lIns="635" tIns="635" rIns="635" bIns="635" rtlCol="0" anchor="t">
             <a:normAutofit/>
           </a:bodyPr>
           <a:lstStyle/>
           <a:p>
+            <a:r>
+              <a:rPr lang="en-US" sz="1700" dirty="0">
+                <a:solidFill>
+                  <a:srgbClr val="17364A"/>
+                </a:solidFill>
+                <a:latin typeface="Aptos" pitchFamily="34" charset="0"/>
+                <a:ea typeface="Aptos" pitchFamily="34" charset="-122"/>
+                <a:cs typeface="Aptos" pitchFamily="34" charset="-120"/>
+              </a:rPr>
+              <a:t>Time-series and anomaly detection methods can support predictive dashboards, syndromic surveillance, wastewater monitoring,.</a:t>
+            </a:r>
+            <a:endParaRPr lang="en-US" sz="1700" dirty="0"/>
+          </a:p>
+          <a:p>
+            <a:r>
+              <a:rPr lang="en-US" sz="1700" dirty="0">
+                <a:solidFill>
+                  <a:srgbClr val="17364A"/>
+                </a:solidFill>
+                <a:latin typeface="Aptos" pitchFamily="34" charset="0"/>
+                <a:ea typeface="Aptos" pitchFamily="34" charset="-122"/>
+                <a:cs typeface="Aptos" pitchFamily="34" charset="-120"/>
+              </a:rPr>
+              <a:t>Generative AI may summarize signal review, but it should include uncertainty and source indicators.</a:t>
+            </a:r>
+            <a:endParaRPr lang="en-US" sz="1700" dirty="0"/>
+          </a:p>
+          <a:p>
+            <a:r>
+              <a:rPr lang="en-US" sz="1700" dirty="0">
+                <a:solidFill>
+                  <a:srgbClr val="17364A"/>
+                </a:solidFill>
+                <a:latin typeface="Aptos" pitchFamily="34" charset="0"/>
+                <a:ea typeface="Aptos" pitchFamily="34" charset="-122"/>
+                <a:cs typeface="Aptos" pitchFamily="34" charset="-120"/>
+              </a:rPr>
+              <a:t>Agentic workflows may route alerts or create tasks, but those actions should be limited to defined protocols and human.</a:t>
+            </a:r>
+            <a:endParaRPr lang="en-US" sz="1700" dirty="0"/>
+          </a:p>
+          <a:p>
+            <a:r>
+              <a:rPr lang="en-US" sz="1700" dirty="0">
+                <a:solidFill>
+                  <a:srgbClr val="17364A"/>
+                </a:solidFill>
+                <a:latin typeface="Aptos" pitchFamily="34" charset="0"/>
+                <a:ea typeface="Aptos" pitchFamily="34" charset="-122"/>
+                <a:cs typeface="Aptos" pitchFamily="34" charset="-120"/>
+              </a:rPr>
+              <a:t>The best AI-supported surveillance workflows combine automation with epidemiologic judgment.</a:t>
+            </a:r>
+            <a:endParaRPr lang="en-US" sz="1700" dirty="0"/>
+          </a:p>
+        </p:txBody>
+      </p:sp>
+      <p:sp>
+        <p:nvSpPr>
+          <p:cNvPr id="11" name="Shape 9"/>
+          <p:cNvSpPr/>
+          <p:nvPr/>
+        </p:nvSpPr>
+        <p:spPr>
+          <a:xfrm>
+            <a:off x="7909560" y="1417320"/>
+            <a:ext cx="3154680" cy="1828800"/>
+          </a:xfrm>
+          <a:prstGeom prst="roundRect">
+            <a:avLst>
+              <a:gd name="adj" fmla="val 6000"/>
+            </a:avLst>
+          </a:prstGeom>
+          <a:solidFill>
+            <a:srgbClr val="EEF8ED"/>
+          </a:solidFill>
+          <a:ln w="12700">
+            <a:solidFill>
+              <a:srgbClr val="B9D7E6"/>
+            </a:solidFill>
+            <a:prstDash val="solid"/>
+          </a:ln>
+        </p:spPr>
+      </p:sp>
+      <p:sp>
+        <p:nvSpPr>
+          <p:cNvPr id="12" name="Text 10"/>
+          <p:cNvSpPr/>
+          <p:nvPr/>
+        </p:nvSpPr>
+        <p:spPr>
+          <a:xfrm>
+            <a:off x="8074152" y="1563624"/>
+            <a:ext cx="2825496" cy="201168"/>
+          </a:xfrm>
+          <a:prstGeom prst="rect">
+            <a:avLst/>
+          </a:prstGeom>
+          <a:noFill/>
+          <a:ln/>
+        </p:spPr>
+        <p:txBody>
+          <a:bodyPr wrap="square" lIns="0" tIns="0" rIns="0" bIns="0" rtlCol="0" anchor="ctr"/>
+          <a:lstStyle/>
+          <a:p>
             <a:pPr indent="0" marL="0">
               <a:buNone/>
             </a:pPr>
             <a:r>
-              <a:rPr lang="en-US" sz="1420" dirty="0">
+              <a:rPr lang="en-US" sz="950" b="1" dirty="0">
+                <a:solidFill>
+                  <a:srgbClr val="0068B7"/>
+                </a:solidFill>
+                <a:latin typeface="Aptos" pitchFamily="34" charset="0"/>
+                <a:ea typeface="Aptos" pitchFamily="34" charset="-122"/>
+                <a:cs typeface="Aptos" pitchFamily="34" charset="-120"/>
+              </a:rPr>
+              <a:t>Key idea</a:t>
+            </a:r>
+            <a:endParaRPr lang="en-US" sz="950" dirty="0"/>
+          </a:p>
+        </p:txBody>
+      </p:sp>
+      <p:sp>
+        <p:nvSpPr>
+          <p:cNvPr id="13" name="Text 11"/>
+          <p:cNvSpPr/>
+          <p:nvPr/>
+        </p:nvSpPr>
+        <p:spPr>
+          <a:xfrm>
+            <a:off x="8074152" y="1856232"/>
+            <a:ext cx="2825496" cy="1261872"/>
+          </a:xfrm>
+          <a:prstGeom prst="rect">
+            <a:avLst/>
+          </a:prstGeom>
+          <a:noFill/>
+          <a:ln/>
+        </p:spPr>
+        <p:txBody>
+          <a:bodyPr wrap="square" lIns="0" tIns="0" rIns="0" bIns="0" rtlCol="0" anchor="t">
+            <a:normAutofit/>
+          </a:bodyPr>
+          <a:lstStyle/>
+          <a:p>
+            <a:pPr indent="0" marL="0">
+              <a:buNone/>
+            </a:pPr>
+            <a:r>
+              <a:rPr lang="en-US" sz="1250" dirty="0">
                 <a:solidFill>
                   <a:srgbClr val="17364A"/>
                 </a:solidFill>
@@ -4085,9 +5734,116 @@
                 <a:ea typeface="Aptos" pitchFamily="34" charset="-122"/>
                 <a:cs typeface="Aptos" pitchFamily="34" charset="-120"/>
               </a:rPr>
-              <a:t>What threshold balances early detection and alert fatigue? How will staff document review, decisions, and lessons learned?</a:t>
-            </a:r>
-            <a:endParaRPr lang="en-US" sz="1420" dirty="0"/>
+              <a:t>Time-series and anomaly detection methods can support predictive dashboards, syndromic surveillance, wastewater monitoring,.</a:t>
+            </a:r>
+            <a:endParaRPr lang="en-US" sz="1250" dirty="0"/>
+          </a:p>
+        </p:txBody>
+      </p:sp>
+      <p:sp>
+        <p:nvSpPr>
+          <p:cNvPr id="14" name="Shape 12"/>
+          <p:cNvSpPr/>
+          <p:nvPr/>
+        </p:nvSpPr>
+        <p:spPr>
+          <a:xfrm>
+            <a:off x="7909560" y="3520440"/>
+            <a:ext cx="3154680" cy="1737360"/>
+          </a:xfrm>
+          <a:prstGeom prst="roundRect">
+            <a:avLst>
+              <a:gd name="adj" fmla="val 6316"/>
+            </a:avLst>
+          </a:prstGeom>
+          <a:solidFill>
+            <a:srgbClr val="EAF6F8"/>
+          </a:solidFill>
+          <a:ln w="12700">
+            <a:solidFill>
+              <a:srgbClr val="B9D7E6"/>
+            </a:solidFill>
+            <a:prstDash val="solid"/>
+          </a:ln>
+        </p:spPr>
+      </p:sp>
+      <p:sp>
+        <p:nvSpPr>
+          <p:cNvPr id="15" name="Text 13"/>
+          <p:cNvSpPr/>
+          <p:nvPr/>
+        </p:nvSpPr>
+        <p:spPr>
+          <a:xfrm>
+            <a:off x="8074152" y="3666744"/>
+            <a:ext cx="2825496" cy="201168"/>
+          </a:xfrm>
+          <a:prstGeom prst="rect">
+            <a:avLst/>
+          </a:prstGeom>
+          <a:noFill/>
+          <a:ln/>
+        </p:spPr>
+        <p:txBody>
+          <a:bodyPr wrap="square" lIns="0" tIns="0" rIns="0" bIns="0" rtlCol="0" anchor="ctr"/>
+          <a:lstStyle/>
+          <a:p>
+            <a:pPr indent="0" marL="0">
+              <a:buNone/>
+            </a:pPr>
+            <a:r>
+              <a:rPr lang="en-US" sz="950" b="1" dirty="0">
+                <a:solidFill>
+                  <a:srgbClr val="0068B7"/>
+                </a:solidFill>
+                <a:latin typeface="Aptos" pitchFamily="34" charset="0"/>
+                <a:ea typeface="Aptos" pitchFamily="34" charset="-122"/>
+                <a:cs typeface="Aptos" pitchFamily="34" charset="-120"/>
+              </a:rPr>
+              <a:t>Use this for</a:t>
+            </a:r>
+            <a:endParaRPr lang="en-US" sz="950" dirty="0"/>
+          </a:p>
+        </p:txBody>
+      </p:sp>
+      <p:sp>
+        <p:nvSpPr>
+          <p:cNvPr id="16" name="Text 14"/>
+          <p:cNvSpPr/>
+          <p:nvPr/>
+        </p:nvSpPr>
+        <p:spPr>
+          <a:xfrm>
+            <a:off x="8074152" y="3959352"/>
+            <a:ext cx="2825496" cy="1170432"/>
+          </a:xfrm>
+          <a:prstGeom prst="rect">
+            <a:avLst/>
+          </a:prstGeom>
+          <a:noFill/>
+          <a:ln/>
+        </p:spPr>
+        <p:txBody>
+          <a:bodyPr wrap="square" lIns="0" tIns="0" rIns="0" bIns="0" rtlCol="0" anchor="t">
+            <a:normAutofit/>
+          </a:bodyPr>
+          <a:lstStyle/>
+          <a:p>
+            <a:pPr indent="0" marL="0">
+              <a:buNone/>
+            </a:pPr>
+            <a:r>
+              <a:rPr lang="en-US" sz="1250" dirty="0">
+                <a:solidFill>
+                  <a:srgbClr val="17364A"/>
+                </a:solidFill>
+                <a:latin typeface="Aptos" pitchFamily="34" charset="0"/>
+                <a:ea typeface="Aptos" pitchFamily="34" charset="-122"/>
+                <a:cs typeface="Aptos" pitchFamily="34" charset="-120"/>
+              </a:rPr>
+              <a:t>Connect the concept to public health decisions, safeguards, documentation, or implementation work.</a:t>
+            </a:r>
+            <a:endParaRPr lang="en-US" sz="1250" dirty="0"/>
           </a:p>
         </p:txBody>
       </p:sp>
@@ -4150,7 +5906,32 @@
       </p:sp>
       <p:sp>
         <p:nvSpPr>
-          <p:cNvPr id="3" name="Text 1"/>
+          <p:cNvPr id="3" name="Shape 1"/>
+          <p:cNvSpPr/>
+          <p:nvPr/>
+        </p:nvSpPr>
+        <p:spPr>
+          <a:xfrm>
+            <a:off x="0" y="164592"/>
+            <a:ext cx="146304" cy="6693408"/>
+          </a:xfrm>
+          <a:prstGeom prst="rect">
+            <a:avLst/>
+          </a:prstGeom>
+          <a:solidFill>
+            <a:srgbClr val="2F8A28"/>
+          </a:solidFill>
+          <a:ln w="12700">
+            <a:solidFill>
+              <a:srgbClr val="2F8A28"/>
+            </a:solidFill>
+            <a:prstDash val="solid"/>
+          </a:ln>
+        </p:spPr>
+      </p:sp>
+      <p:sp>
+        <p:nvSpPr>
+          <p:cNvPr id="4" name="Text 2"/>
           <p:cNvSpPr/>
           <p:nvPr/>
         </p:nvSpPr>
@@ -4189,7 +5970,7 @@
       </p:sp>
       <p:sp>
         <p:nvSpPr>
-          <p:cNvPr id="4" name="Text 2"/>
+          <p:cNvPr id="5" name="Text 3"/>
           <p:cNvSpPr/>
           <p:nvPr/>
         </p:nvSpPr>
@@ -4228,7 +6009,7 @@
       </p:sp>
       <p:sp>
         <p:nvSpPr>
-          <p:cNvPr id="5" name="Text 3"/>
+          <p:cNvPr id="6" name="Text 4"/>
           <p:cNvSpPr/>
           <p:nvPr/>
         </p:nvSpPr>
@@ -4267,13 +6048,77 @@
       </p:sp>
       <p:sp>
         <p:nvSpPr>
-          <p:cNvPr id="6" name="Text 4"/>
+          <p:cNvPr id="7" name="Shape 5"/>
           <p:cNvSpPr/>
           <p:nvPr/>
         </p:nvSpPr>
         <p:spPr>
           <a:xfrm>
             <a:off x="640080" y="658368"/>
+            <a:ext cx="420624" cy="420624"/>
+          </a:xfrm>
+          <a:prstGeom prst="ellipse">
+            <a:avLst/>
+          </a:prstGeom>
+          <a:solidFill>
+            <a:srgbClr val="0068B7"/>
+          </a:solidFill>
+          <a:ln w="12700">
+            <a:solidFill>
+              <a:srgbClr val="0068B7"/>
+            </a:solidFill>
+            <a:prstDash val="solid"/>
+          </a:ln>
+        </p:spPr>
+      </p:sp>
+      <p:sp>
+        <p:nvSpPr>
+          <p:cNvPr id="8" name="Text 6"/>
+          <p:cNvSpPr/>
+          <p:nvPr/>
+        </p:nvSpPr>
+        <p:spPr>
+          <a:xfrm>
+            <a:off x="640080" y="731520"/>
+            <a:ext cx="420624" cy="164592"/>
+          </a:xfrm>
+          <a:prstGeom prst="rect">
+            <a:avLst/>
+          </a:prstGeom>
+          <a:noFill/>
+          <a:ln/>
+        </p:spPr>
+        <p:txBody>
+          <a:bodyPr wrap="square" lIns="0" tIns="0" rIns="0" bIns="0" rtlCol="0" anchor="ctr"/>
+          <a:lstStyle/>
+          <a:p>
+            <a:pPr algn="ctr" indent="0" marL="0">
+              <a:buNone/>
+            </a:pPr>
+            <a:r>
+              <a:rPr lang="en-US" sz="1100" b="1" dirty="0">
+                <a:solidFill>
+                  <a:srgbClr val="FFFFFF"/>
+                </a:solidFill>
+                <a:latin typeface="Aptos" pitchFamily="34" charset="0"/>
+                <a:ea typeface="Aptos" pitchFamily="34" charset="-122"/>
+                <a:cs typeface="Aptos" pitchFamily="34" charset="-120"/>
+              </a:rPr>
+              <a:t>8</a:t>
+            </a:r>
+            <a:endParaRPr lang="en-US" sz="1100" dirty="0"/>
+          </a:p>
+        </p:txBody>
+      </p:sp>
+      <p:sp>
+        <p:nvSpPr>
+          <p:cNvPr id="9" name="Text 7"/>
+          <p:cNvSpPr/>
+          <p:nvPr/>
+        </p:nvSpPr>
+        <p:spPr>
+          <a:xfrm>
+            <a:off x="640080" y="621792"/>
             <a:ext cx="10881360" cy="566928"/>
           </a:xfrm>
           <a:prstGeom prst="rect">
@@ -4300,7 +6145,7 @@
                 <a:ea typeface="Aptos Display" pitchFamily="34" charset="-122"/>
                 <a:cs typeface="Aptos Display" pitchFamily="34" charset="-120"/>
               </a:rPr>
-              <a:t>Practical Exercise</a:t>
+              <a:t>Reflection Questions</a:t>
             </a:r>
             <a:endParaRPr lang="en-US" sz="2700" dirty="0"/>
           </a:p>
@@ -4308,32 +6153,164 @@
       </p:sp>
       <p:sp>
         <p:nvSpPr>
-          <p:cNvPr id="7" name="Text 5"/>
-          <p:cNvSpPr/>
-          <p:nvPr/>
-        </p:nvSpPr>
-        <p:spPr>
-          <a:xfrm>
-            <a:off x="822960" y="1325880"/>
-            <a:ext cx="10378440" cy="4800600"/>
-          </a:xfrm>
-          <a:prstGeom prst="rect">
-            <a:avLst/>
-          </a:prstGeom>
-          <a:noFill/>
-          <a:ln/>
-        </p:spPr>
-        <p:txBody>
-          <a:bodyPr wrap="square" lIns="1016" tIns="1016" rIns="1016" bIns="1016" rtlCol="0" anchor="t">
+          <p:cNvPr id="10" name="Text 8"/>
+          <p:cNvSpPr/>
+          <p:nvPr/>
+        </p:nvSpPr>
+        <p:spPr>
+          <a:xfrm>
+            <a:off x="868680" y="1417320"/>
+            <a:ext cx="6675120" cy="4434840"/>
+          </a:xfrm>
+          <a:prstGeom prst="rect">
+            <a:avLst/>
+          </a:prstGeom>
+          <a:noFill/>
+          <a:ln/>
+        </p:spPr>
+        <p:txBody>
+          <a:bodyPr wrap="square" lIns="635" tIns="635" rIns="635" bIns="635" rtlCol="0" anchor="t">
             <a:normAutofit/>
           </a:bodyPr>
           <a:lstStyle/>
           <a:p>
+            <a:r>
+              <a:rPr lang="en-US" sz="1700" dirty="0">
+                <a:solidFill>
+                  <a:srgbClr val="17364A"/>
+                </a:solidFill>
+                <a:latin typeface="Aptos" pitchFamily="34" charset="0"/>
+                <a:ea typeface="Aptos" pitchFamily="34" charset="-122"/>
+                <a:cs typeface="Aptos" pitchFamily="34" charset="-120"/>
+              </a:rPr>
+              <a:t>What time-series data stream would benefit from automated signal review?</a:t>
+            </a:r>
+            <a:endParaRPr lang="en-US" sz="1700" dirty="0"/>
+          </a:p>
+          <a:p>
+            <a:r>
+              <a:rPr lang="en-US" sz="1700" dirty="0">
+                <a:solidFill>
+                  <a:srgbClr val="17364A"/>
+                </a:solidFill>
+                <a:latin typeface="Aptos" pitchFamily="34" charset="0"/>
+                <a:ea typeface="Aptos" pitchFamily="34" charset="-122"/>
+                <a:cs typeface="Aptos" pitchFamily="34" charset="-120"/>
+              </a:rPr>
+              <a:t>What baseline is appropriate for the condition, data source, and decision?</a:t>
+            </a:r>
+            <a:endParaRPr lang="en-US" sz="1700" dirty="0"/>
+          </a:p>
+          <a:p>
+            <a:r>
+              <a:rPr lang="en-US" sz="1700" dirty="0">
+                <a:solidFill>
+                  <a:srgbClr val="17364A"/>
+                </a:solidFill>
+                <a:latin typeface="Aptos" pitchFamily="34" charset="0"/>
+                <a:ea typeface="Aptos" pitchFamily="34" charset="-122"/>
+                <a:cs typeface="Aptos" pitchFamily="34" charset="-120"/>
+              </a:rPr>
+              <a:t>Which reporting artifacts could create false signals?</a:t>
+            </a:r>
+            <a:endParaRPr lang="en-US" sz="1700" dirty="0"/>
+          </a:p>
+        </p:txBody>
+      </p:sp>
+      <p:sp>
+        <p:nvSpPr>
+          <p:cNvPr id="11" name="Shape 9"/>
+          <p:cNvSpPr/>
+          <p:nvPr/>
+        </p:nvSpPr>
+        <p:spPr>
+          <a:xfrm>
+            <a:off x="7909560" y="1417320"/>
+            <a:ext cx="3154680" cy="1828800"/>
+          </a:xfrm>
+          <a:prstGeom prst="roundRect">
+            <a:avLst>
+              <a:gd name="adj" fmla="val 6000"/>
+            </a:avLst>
+          </a:prstGeom>
+          <a:solidFill>
+            <a:srgbClr val="EEF8ED"/>
+          </a:solidFill>
+          <a:ln w="12700">
+            <a:solidFill>
+              <a:srgbClr val="B9D7E6"/>
+            </a:solidFill>
+            <a:prstDash val="solid"/>
+          </a:ln>
+        </p:spPr>
+      </p:sp>
+      <p:sp>
+        <p:nvSpPr>
+          <p:cNvPr id="12" name="Text 10"/>
+          <p:cNvSpPr/>
+          <p:nvPr/>
+        </p:nvSpPr>
+        <p:spPr>
+          <a:xfrm>
+            <a:off x="8074152" y="1563624"/>
+            <a:ext cx="2825496" cy="201168"/>
+          </a:xfrm>
+          <a:prstGeom prst="rect">
+            <a:avLst/>
+          </a:prstGeom>
+          <a:noFill/>
+          <a:ln/>
+        </p:spPr>
+        <p:txBody>
+          <a:bodyPr wrap="square" lIns="0" tIns="0" rIns="0" bIns="0" rtlCol="0" anchor="ctr"/>
+          <a:lstStyle/>
+          <a:p>
             <a:pPr indent="0" marL="0">
               <a:buNone/>
             </a:pPr>
             <a:r>
-              <a:rPr lang="en-US" sz="1420" dirty="0">
+              <a:rPr lang="en-US" sz="950" b="1" dirty="0">
+                <a:solidFill>
+                  <a:srgbClr val="0068B7"/>
+                </a:solidFill>
+                <a:latin typeface="Aptos" pitchFamily="34" charset="0"/>
+                <a:ea typeface="Aptos" pitchFamily="34" charset="-122"/>
+                <a:cs typeface="Aptos" pitchFamily="34" charset="-120"/>
+              </a:rPr>
+              <a:t>Key idea</a:t>
+            </a:r>
+            <a:endParaRPr lang="en-US" sz="950" dirty="0"/>
+          </a:p>
+        </p:txBody>
+      </p:sp>
+      <p:sp>
+        <p:nvSpPr>
+          <p:cNvPr id="13" name="Text 11"/>
+          <p:cNvSpPr/>
+          <p:nvPr/>
+        </p:nvSpPr>
+        <p:spPr>
+          <a:xfrm>
+            <a:off x="8074152" y="1856232"/>
+            <a:ext cx="2825496" cy="1261872"/>
+          </a:xfrm>
+          <a:prstGeom prst="rect">
+            <a:avLst/>
+          </a:prstGeom>
+          <a:noFill/>
+          <a:ln/>
+        </p:spPr>
+        <p:txBody>
+          <a:bodyPr wrap="square" lIns="0" tIns="0" rIns="0" bIns="0" rtlCol="0" anchor="t">
+            <a:normAutofit/>
+          </a:bodyPr>
+          <a:lstStyle/>
+          <a:p>
+            <a:pPr indent="0" marL="0">
+              <a:buNone/>
+            </a:pPr>
+            <a:r>
+              <a:rPr lang="en-US" sz="1250" dirty="0">
                 <a:solidFill>
                   <a:srgbClr val="17364A"/>
                 </a:solidFill>
@@ -4341,9 +6318,116 @@
                 <a:ea typeface="Aptos" pitchFamily="34" charset="-122"/>
                 <a:cs typeface="Aptos" pitchFamily="34" charset="-120"/>
               </a:rPr>
-              <a:t>Create an anomaly detection review plan for one public health data stream. Include the monitored indicator, data source, update frequency, baseline approach, known reporting patterns, threshold rationale, alert tiers, review steps, related indicators, documentation expectations, and escalation criteria. The plan should identify how staff will distinguish statistical anomalies from data quality issues and public health events.</a:t>
-            </a:r>
-            <a:endParaRPr lang="en-US" sz="1420" dirty="0"/>
+              <a:t>What time-series data stream would benefit from automated signal review?</a:t>
+            </a:r>
+            <a:endParaRPr lang="en-US" sz="1250" dirty="0"/>
+          </a:p>
+        </p:txBody>
+      </p:sp>
+      <p:sp>
+        <p:nvSpPr>
+          <p:cNvPr id="14" name="Shape 12"/>
+          <p:cNvSpPr/>
+          <p:nvPr/>
+        </p:nvSpPr>
+        <p:spPr>
+          <a:xfrm>
+            <a:off x="7909560" y="3520440"/>
+            <a:ext cx="3154680" cy="1737360"/>
+          </a:xfrm>
+          <a:prstGeom prst="roundRect">
+            <a:avLst>
+              <a:gd name="adj" fmla="val 6316"/>
+            </a:avLst>
+          </a:prstGeom>
+          <a:solidFill>
+            <a:srgbClr val="EAF6F8"/>
+          </a:solidFill>
+          <a:ln w="12700">
+            <a:solidFill>
+              <a:srgbClr val="B9D7E6"/>
+            </a:solidFill>
+            <a:prstDash val="solid"/>
+          </a:ln>
+        </p:spPr>
+      </p:sp>
+      <p:sp>
+        <p:nvSpPr>
+          <p:cNvPr id="15" name="Text 13"/>
+          <p:cNvSpPr/>
+          <p:nvPr/>
+        </p:nvSpPr>
+        <p:spPr>
+          <a:xfrm>
+            <a:off x="8074152" y="3666744"/>
+            <a:ext cx="2825496" cy="201168"/>
+          </a:xfrm>
+          <a:prstGeom prst="rect">
+            <a:avLst/>
+          </a:prstGeom>
+          <a:noFill/>
+          <a:ln/>
+        </p:spPr>
+        <p:txBody>
+          <a:bodyPr wrap="square" lIns="0" tIns="0" rIns="0" bIns="0" rtlCol="0" anchor="ctr"/>
+          <a:lstStyle/>
+          <a:p>
+            <a:pPr indent="0" marL="0">
+              <a:buNone/>
+            </a:pPr>
+            <a:r>
+              <a:rPr lang="en-US" sz="950" b="1" dirty="0">
+                <a:solidFill>
+                  <a:srgbClr val="0068B7"/>
+                </a:solidFill>
+                <a:latin typeface="Aptos" pitchFamily="34" charset="0"/>
+                <a:ea typeface="Aptos" pitchFamily="34" charset="-122"/>
+                <a:cs typeface="Aptos" pitchFamily="34" charset="-120"/>
+              </a:rPr>
+              <a:t>Use this for</a:t>
+            </a:r>
+            <a:endParaRPr lang="en-US" sz="950" dirty="0"/>
+          </a:p>
+        </p:txBody>
+      </p:sp>
+      <p:sp>
+        <p:nvSpPr>
+          <p:cNvPr id="16" name="Text 14"/>
+          <p:cNvSpPr/>
+          <p:nvPr/>
+        </p:nvSpPr>
+        <p:spPr>
+          <a:xfrm>
+            <a:off x="8074152" y="3959352"/>
+            <a:ext cx="2825496" cy="1170432"/>
+          </a:xfrm>
+          <a:prstGeom prst="rect">
+            <a:avLst/>
+          </a:prstGeom>
+          <a:noFill/>
+          <a:ln/>
+        </p:spPr>
+        <p:txBody>
+          <a:bodyPr wrap="square" lIns="0" tIns="0" rIns="0" bIns="0" rtlCol="0" anchor="t">
+            <a:normAutofit/>
+          </a:bodyPr>
+          <a:lstStyle/>
+          <a:p>
+            <a:pPr indent="0" marL="0">
+              <a:buNone/>
+            </a:pPr>
+            <a:r>
+              <a:rPr lang="en-US" sz="1250" dirty="0">
+                <a:solidFill>
+                  <a:srgbClr val="17364A"/>
+                </a:solidFill>
+                <a:latin typeface="Aptos" pitchFamily="34" charset="0"/>
+                <a:ea typeface="Aptos" pitchFamily="34" charset="-122"/>
+                <a:cs typeface="Aptos" pitchFamily="34" charset="-120"/>
+              </a:rPr>
+              <a:t>Connect the concept to public health decisions, safeguards, documentation, or implementation work.</a:t>
+            </a:r>
+            <a:endParaRPr lang="en-US" sz="1250" dirty="0"/>
           </a:p>
         </p:txBody>
       </p:sp>
@@ -4406,7 +6490,32 @@
       </p:sp>
       <p:sp>
         <p:nvSpPr>
-          <p:cNvPr id="3" name="Text 1"/>
+          <p:cNvPr id="3" name="Shape 1"/>
+          <p:cNvSpPr/>
+          <p:nvPr/>
+        </p:nvSpPr>
+        <p:spPr>
+          <a:xfrm>
+            <a:off x="0" y="164592"/>
+            <a:ext cx="146304" cy="6693408"/>
+          </a:xfrm>
+          <a:prstGeom prst="rect">
+            <a:avLst/>
+          </a:prstGeom>
+          <a:solidFill>
+            <a:srgbClr val="2F8A28"/>
+          </a:solidFill>
+          <a:ln w="12700">
+            <a:solidFill>
+              <a:srgbClr val="2F8A28"/>
+            </a:solidFill>
+            <a:prstDash val="solid"/>
+          </a:ln>
+        </p:spPr>
+      </p:sp>
+      <p:sp>
+        <p:nvSpPr>
+          <p:cNvPr id="4" name="Text 2"/>
           <p:cNvSpPr/>
           <p:nvPr/>
         </p:nvSpPr>
@@ -4445,7 +6554,7 @@
       </p:sp>
       <p:sp>
         <p:nvSpPr>
-          <p:cNvPr id="4" name="Text 2"/>
+          <p:cNvPr id="5" name="Text 3"/>
           <p:cNvSpPr/>
           <p:nvPr/>
         </p:nvSpPr>
@@ -4484,7 +6593,7 @@
       </p:sp>
       <p:sp>
         <p:nvSpPr>
-          <p:cNvPr id="5" name="Text 3"/>
+          <p:cNvPr id="6" name="Text 4"/>
           <p:cNvSpPr/>
           <p:nvPr/>
         </p:nvSpPr>
@@ -4523,7 +6632,7 @@
       </p:sp>
       <p:sp>
         <p:nvSpPr>
-          <p:cNvPr id="6" name="Text 4"/>
+          <p:cNvPr id="7" name="Text 5"/>
           <p:cNvSpPr/>
           <p:nvPr/>
         </p:nvSpPr>
@@ -4556,7 +6665,7 @@
                 <a:ea typeface="Aptos Display" pitchFamily="34" charset="-122"/>
                 <a:cs typeface="Aptos Display" pitchFamily="34" charset="-120"/>
               </a:rPr>
-              <a:t>Expected Artifact or Evidence</a:t>
+              <a:t>Reflection Questions Continued</a:t>
             </a:r>
             <a:endParaRPr lang="en-US" sz="2700" dirty="0"/>
           </a:p>
@@ -4564,32 +6673,150 @@
       </p:sp>
       <p:sp>
         <p:nvSpPr>
-          <p:cNvPr id="7" name="Text 5"/>
-          <p:cNvSpPr/>
-          <p:nvPr/>
-        </p:nvSpPr>
-        <p:spPr>
-          <a:xfrm>
-            <a:off x="822960" y="1325880"/>
-            <a:ext cx="10378440" cy="4800600"/>
-          </a:xfrm>
-          <a:prstGeom prst="rect">
-            <a:avLst/>
-          </a:prstGeom>
-          <a:noFill/>
-          <a:ln/>
-        </p:spPr>
-        <p:txBody>
-          <a:bodyPr wrap="square" lIns="1016" tIns="1016" rIns="1016" bIns="1016" rtlCol="0" anchor="t">
+          <p:cNvPr id="8" name="Text 6"/>
+          <p:cNvSpPr/>
+          <p:nvPr/>
+        </p:nvSpPr>
+        <p:spPr>
+          <a:xfrm>
+            <a:off x="868680" y="1417320"/>
+            <a:ext cx="6675120" cy="4434840"/>
+          </a:xfrm>
+          <a:prstGeom prst="rect">
+            <a:avLst/>
+          </a:prstGeom>
+          <a:noFill/>
+          <a:ln/>
+        </p:spPr>
+        <p:txBody>
+          <a:bodyPr wrap="square" lIns="635" tIns="635" rIns="635" bIns="635" rtlCol="0" anchor="t">
             <a:normAutofit/>
           </a:bodyPr>
           <a:lstStyle/>
           <a:p>
+            <a:r>
+              <a:rPr lang="en-US" sz="1700" dirty="0">
+                <a:solidFill>
+                  <a:srgbClr val="17364A"/>
+                </a:solidFill>
+                <a:latin typeface="Aptos" pitchFamily="34" charset="0"/>
+                <a:ea typeface="Aptos" pitchFamily="34" charset="-122"/>
+                <a:cs typeface="Aptos" pitchFamily="34" charset="-120"/>
+              </a:rPr>
+              <a:t>What threshold balances early detection and alert fatigue?</a:t>
+            </a:r>
+            <a:endParaRPr lang="en-US" sz="1700" dirty="0"/>
+          </a:p>
+          <a:p>
+            <a:r>
+              <a:rPr lang="en-US" sz="1700" dirty="0">
+                <a:solidFill>
+                  <a:srgbClr val="17364A"/>
+                </a:solidFill>
+                <a:latin typeface="Aptos" pitchFamily="34" charset="0"/>
+                <a:ea typeface="Aptos" pitchFamily="34" charset="-122"/>
+                <a:cs typeface="Aptos" pitchFamily="34" charset="-120"/>
+              </a:rPr>
+              <a:t>How will staff document review, decisions, and lessons learned?</a:t>
+            </a:r>
+            <a:endParaRPr lang="en-US" sz="1700" dirty="0"/>
+          </a:p>
+        </p:txBody>
+      </p:sp>
+      <p:sp>
+        <p:nvSpPr>
+          <p:cNvPr id="9" name="Shape 7"/>
+          <p:cNvSpPr/>
+          <p:nvPr/>
+        </p:nvSpPr>
+        <p:spPr>
+          <a:xfrm>
+            <a:off x="7909560" y="1417320"/>
+            <a:ext cx="3154680" cy="1828800"/>
+          </a:xfrm>
+          <a:prstGeom prst="roundRect">
+            <a:avLst>
+              <a:gd name="adj" fmla="val 6000"/>
+            </a:avLst>
+          </a:prstGeom>
+          <a:solidFill>
+            <a:srgbClr val="EEF8ED"/>
+          </a:solidFill>
+          <a:ln w="12700">
+            <a:solidFill>
+              <a:srgbClr val="B9D7E6"/>
+            </a:solidFill>
+            <a:prstDash val="solid"/>
+          </a:ln>
+        </p:spPr>
+      </p:sp>
+      <p:sp>
+        <p:nvSpPr>
+          <p:cNvPr id="10" name="Text 8"/>
+          <p:cNvSpPr/>
+          <p:nvPr/>
+        </p:nvSpPr>
+        <p:spPr>
+          <a:xfrm>
+            <a:off x="8074152" y="1563624"/>
+            <a:ext cx="2825496" cy="201168"/>
+          </a:xfrm>
+          <a:prstGeom prst="rect">
+            <a:avLst/>
+          </a:prstGeom>
+          <a:noFill/>
+          <a:ln/>
+        </p:spPr>
+        <p:txBody>
+          <a:bodyPr wrap="square" lIns="0" tIns="0" rIns="0" bIns="0" rtlCol="0" anchor="ctr"/>
+          <a:lstStyle/>
+          <a:p>
             <a:pPr indent="0" marL="0">
               <a:buNone/>
             </a:pPr>
             <a:r>
-              <a:rPr lang="en-US" sz="1420" dirty="0">
+              <a:rPr lang="en-US" sz="950" b="1" dirty="0">
+                <a:solidFill>
+                  <a:srgbClr val="0068B7"/>
+                </a:solidFill>
+                <a:latin typeface="Aptos" pitchFamily="34" charset="0"/>
+                <a:ea typeface="Aptos" pitchFamily="34" charset="-122"/>
+                <a:cs typeface="Aptos" pitchFamily="34" charset="-120"/>
+              </a:rPr>
+              <a:t>Key idea</a:t>
+            </a:r>
+            <a:endParaRPr lang="en-US" sz="950" dirty="0"/>
+          </a:p>
+        </p:txBody>
+      </p:sp>
+      <p:sp>
+        <p:nvSpPr>
+          <p:cNvPr id="11" name="Text 9"/>
+          <p:cNvSpPr/>
+          <p:nvPr/>
+        </p:nvSpPr>
+        <p:spPr>
+          <a:xfrm>
+            <a:off x="8074152" y="1856232"/>
+            <a:ext cx="2825496" cy="1261872"/>
+          </a:xfrm>
+          <a:prstGeom prst="rect">
+            <a:avLst/>
+          </a:prstGeom>
+          <a:noFill/>
+          <a:ln/>
+        </p:spPr>
+        <p:txBody>
+          <a:bodyPr wrap="square" lIns="0" tIns="0" rIns="0" bIns="0" rtlCol="0" anchor="t">
+            <a:normAutofit/>
+          </a:bodyPr>
+          <a:lstStyle/>
+          <a:p>
+            <a:pPr indent="0" marL="0">
+              <a:buNone/>
+            </a:pPr>
+            <a:r>
+              <a:rPr lang="en-US" sz="1250" dirty="0">
                 <a:solidFill>
                   <a:srgbClr val="17364A"/>
                 </a:solidFill>
@@ -4597,9 +6824,116 @@
                 <a:ea typeface="Aptos" pitchFamily="34" charset="-122"/>
                 <a:cs typeface="Aptos" pitchFamily="34" charset="-120"/>
               </a:rPr>
-              <a:t>Anomaly detection review plan Baseline and threshold rationale Alert review protocol</a:t>
-            </a:r>
-            <a:endParaRPr lang="en-US" sz="1420" dirty="0"/>
+              <a:t>What threshold balances early detection and alert fatigue?</a:t>
+            </a:r>
+            <a:endParaRPr lang="en-US" sz="1250" dirty="0"/>
+          </a:p>
+        </p:txBody>
+      </p:sp>
+      <p:sp>
+        <p:nvSpPr>
+          <p:cNvPr id="12" name="Shape 10"/>
+          <p:cNvSpPr/>
+          <p:nvPr/>
+        </p:nvSpPr>
+        <p:spPr>
+          <a:xfrm>
+            <a:off x="7909560" y="3520440"/>
+            <a:ext cx="3154680" cy="1737360"/>
+          </a:xfrm>
+          <a:prstGeom prst="roundRect">
+            <a:avLst>
+              <a:gd name="adj" fmla="val 6316"/>
+            </a:avLst>
+          </a:prstGeom>
+          <a:solidFill>
+            <a:srgbClr val="EAF6F8"/>
+          </a:solidFill>
+          <a:ln w="12700">
+            <a:solidFill>
+              <a:srgbClr val="B9D7E6"/>
+            </a:solidFill>
+            <a:prstDash val="solid"/>
+          </a:ln>
+        </p:spPr>
+      </p:sp>
+      <p:sp>
+        <p:nvSpPr>
+          <p:cNvPr id="13" name="Text 11"/>
+          <p:cNvSpPr/>
+          <p:nvPr/>
+        </p:nvSpPr>
+        <p:spPr>
+          <a:xfrm>
+            <a:off x="8074152" y="3666744"/>
+            <a:ext cx="2825496" cy="201168"/>
+          </a:xfrm>
+          <a:prstGeom prst="rect">
+            <a:avLst/>
+          </a:prstGeom>
+          <a:noFill/>
+          <a:ln/>
+        </p:spPr>
+        <p:txBody>
+          <a:bodyPr wrap="square" lIns="0" tIns="0" rIns="0" bIns="0" rtlCol="0" anchor="ctr"/>
+          <a:lstStyle/>
+          <a:p>
+            <a:pPr indent="0" marL="0">
+              <a:buNone/>
+            </a:pPr>
+            <a:r>
+              <a:rPr lang="en-US" sz="950" b="1" dirty="0">
+                <a:solidFill>
+                  <a:srgbClr val="0068B7"/>
+                </a:solidFill>
+                <a:latin typeface="Aptos" pitchFamily="34" charset="0"/>
+                <a:ea typeface="Aptos" pitchFamily="34" charset="-122"/>
+                <a:cs typeface="Aptos" pitchFamily="34" charset="-120"/>
+              </a:rPr>
+              <a:t>Use this for</a:t>
+            </a:r>
+            <a:endParaRPr lang="en-US" sz="950" dirty="0"/>
+          </a:p>
+        </p:txBody>
+      </p:sp>
+      <p:sp>
+        <p:nvSpPr>
+          <p:cNvPr id="14" name="Text 12"/>
+          <p:cNvSpPr/>
+          <p:nvPr/>
+        </p:nvSpPr>
+        <p:spPr>
+          <a:xfrm>
+            <a:off x="8074152" y="3959352"/>
+            <a:ext cx="2825496" cy="1170432"/>
+          </a:xfrm>
+          <a:prstGeom prst="rect">
+            <a:avLst/>
+          </a:prstGeom>
+          <a:noFill/>
+          <a:ln/>
+        </p:spPr>
+        <p:txBody>
+          <a:bodyPr wrap="square" lIns="0" tIns="0" rIns="0" bIns="0" rtlCol="0" anchor="t">
+            <a:normAutofit/>
+          </a:bodyPr>
+          <a:lstStyle/>
+          <a:p>
+            <a:pPr indent="0" marL="0">
+              <a:buNone/>
+            </a:pPr>
+            <a:r>
+              <a:rPr lang="en-US" sz="1250" dirty="0">
+                <a:solidFill>
+                  <a:srgbClr val="17364A"/>
+                </a:solidFill>
+                <a:latin typeface="Aptos" pitchFamily="34" charset="0"/>
+                <a:ea typeface="Aptos" pitchFamily="34" charset="-122"/>
+                <a:cs typeface="Aptos" pitchFamily="34" charset="-120"/>
+              </a:rPr>
+              <a:t>Connect the concept to public health decisions, safeguards, documentation, or implementation work.</a:t>
+            </a:r>
+            <a:endParaRPr lang="en-US" sz="1250" dirty="0"/>
           </a:p>
         </p:txBody>
       </p:sp>
@@ -4662,7 +6996,32 @@
       </p:sp>
       <p:sp>
         <p:nvSpPr>
-          <p:cNvPr id="3" name="Text 1"/>
+          <p:cNvPr id="3" name="Shape 1"/>
+          <p:cNvSpPr/>
+          <p:nvPr/>
+        </p:nvSpPr>
+        <p:spPr>
+          <a:xfrm>
+            <a:off x="0" y="164592"/>
+            <a:ext cx="146304" cy="6693408"/>
+          </a:xfrm>
+          <a:prstGeom prst="rect">
+            <a:avLst/>
+          </a:prstGeom>
+          <a:solidFill>
+            <a:srgbClr val="2F8A28"/>
+          </a:solidFill>
+          <a:ln w="12700">
+            <a:solidFill>
+              <a:srgbClr val="2F8A28"/>
+            </a:solidFill>
+            <a:prstDash val="solid"/>
+          </a:ln>
+        </p:spPr>
+      </p:sp>
+      <p:sp>
+        <p:nvSpPr>
+          <p:cNvPr id="4" name="Text 2"/>
           <p:cNvSpPr/>
           <p:nvPr/>
         </p:nvSpPr>
@@ -4701,7 +7060,7 @@
       </p:sp>
       <p:sp>
         <p:nvSpPr>
-          <p:cNvPr id="4" name="Text 2"/>
+          <p:cNvPr id="5" name="Text 3"/>
           <p:cNvSpPr/>
           <p:nvPr/>
         </p:nvSpPr>
@@ -4740,7 +7099,7 @@
       </p:sp>
       <p:sp>
         <p:nvSpPr>
-          <p:cNvPr id="5" name="Text 3"/>
+          <p:cNvPr id="6" name="Text 4"/>
           <p:cNvSpPr/>
           <p:nvPr/>
         </p:nvSpPr>
@@ -4779,13 +7138,77 @@
       </p:sp>
       <p:sp>
         <p:nvSpPr>
-          <p:cNvPr id="6" name="Text 4"/>
+          <p:cNvPr id="7" name="Shape 5"/>
           <p:cNvSpPr/>
           <p:nvPr/>
         </p:nvSpPr>
         <p:spPr>
           <a:xfrm>
             <a:off x="640080" y="658368"/>
+            <a:ext cx="420624" cy="420624"/>
+          </a:xfrm>
+          <a:prstGeom prst="ellipse">
+            <a:avLst/>
+          </a:prstGeom>
+          <a:solidFill>
+            <a:srgbClr val="0068B7"/>
+          </a:solidFill>
+          <a:ln w="12700">
+            <a:solidFill>
+              <a:srgbClr val="0068B7"/>
+            </a:solidFill>
+            <a:prstDash val="solid"/>
+          </a:ln>
+        </p:spPr>
+      </p:sp>
+      <p:sp>
+        <p:nvSpPr>
+          <p:cNvPr id="8" name="Text 6"/>
+          <p:cNvSpPr/>
+          <p:nvPr/>
+        </p:nvSpPr>
+        <p:spPr>
+          <a:xfrm>
+            <a:off x="640080" y="731520"/>
+            <a:ext cx="420624" cy="164592"/>
+          </a:xfrm>
+          <a:prstGeom prst="rect">
+            <a:avLst/>
+          </a:prstGeom>
+          <a:noFill/>
+          <a:ln/>
+        </p:spPr>
+        <p:txBody>
+          <a:bodyPr wrap="square" lIns="0" tIns="0" rIns="0" bIns="0" rtlCol="0" anchor="ctr"/>
+          <a:lstStyle/>
+          <a:p>
+            <a:pPr algn="ctr" indent="0" marL="0">
+              <a:buNone/>
+            </a:pPr>
+            <a:r>
+              <a:rPr lang="en-US" sz="1100" b="1" dirty="0">
+                <a:solidFill>
+                  <a:srgbClr val="FFFFFF"/>
+                </a:solidFill>
+                <a:latin typeface="Aptos" pitchFamily="34" charset="0"/>
+                <a:ea typeface="Aptos" pitchFamily="34" charset="-122"/>
+                <a:cs typeface="Aptos" pitchFamily="34" charset="-120"/>
+              </a:rPr>
+              <a:t>9</a:t>
+            </a:r>
+            <a:endParaRPr lang="en-US" sz="1100" dirty="0"/>
+          </a:p>
+        </p:txBody>
+      </p:sp>
+      <p:sp>
+        <p:nvSpPr>
+          <p:cNvPr id="9" name="Text 7"/>
+          <p:cNvSpPr/>
+          <p:nvPr/>
+        </p:nvSpPr>
+        <p:spPr>
+          <a:xfrm>
+            <a:off x="640080" y="621792"/>
             <a:ext cx="10881360" cy="566928"/>
           </a:xfrm>
           <a:prstGeom prst="rect">
@@ -4812,7 +7235,7 @@
                 <a:ea typeface="Aptos Display" pitchFamily="34" charset="-122"/>
                 <a:cs typeface="Aptos Display" pitchFamily="34" charset="-120"/>
               </a:rPr>
-              <a:t>Expected Artifact or Evidence Continued</a:t>
+              <a:t>Practical Exercise</a:t>
             </a:r>
             <a:endParaRPr lang="en-US" sz="2700" dirty="0"/>
           </a:p>
@@ -4820,32 +7243,164 @@
       </p:sp>
       <p:sp>
         <p:nvSpPr>
-          <p:cNvPr id="7" name="Text 5"/>
-          <p:cNvSpPr/>
-          <p:nvPr/>
-        </p:nvSpPr>
-        <p:spPr>
-          <a:xfrm>
-            <a:off x="822960" y="1325880"/>
-            <a:ext cx="10378440" cy="4800600"/>
-          </a:xfrm>
-          <a:prstGeom prst="rect">
-            <a:avLst/>
-          </a:prstGeom>
-          <a:noFill/>
-          <a:ln/>
-        </p:spPr>
-        <p:txBody>
-          <a:bodyPr wrap="square" lIns="1016" tIns="1016" rIns="1016" bIns="1016" rtlCol="0" anchor="t">
+          <p:cNvPr id="10" name="Text 8"/>
+          <p:cNvSpPr/>
+          <p:nvPr/>
+        </p:nvSpPr>
+        <p:spPr>
+          <a:xfrm>
+            <a:off x="868680" y="1417320"/>
+            <a:ext cx="6675120" cy="4434840"/>
+          </a:xfrm>
+          <a:prstGeom prst="rect">
+            <a:avLst/>
+          </a:prstGeom>
+          <a:noFill/>
+          <a:ln/>
+        </p:spPr>
+        <p:txBody>
+          <a:bodyPr wrap="square" lIns="635" tIns="635" rIns="635" bIns="635" rtlCol="0" anchor="t">
             <a:normAutofit/>
           </a:bodyPr>
           <a:lstStyle/>
           <a:p>
+            <a:r>
+              <a:rPr lang="en-US" sz="1700" dirty="0">
+                <a:solidFill>
+                  <a:srgbClr val="17364A"/>
+                </a:solidFill>
+                <a:latin typeface="Aptos" pitchFamily="34" charset="0"/>
+                <a:ea typeface="Aptos" pitchFamily="34" charset="-122"/>
+                <a:cs typeface="Aptos" pitchFamily="34" charset="-120"/>
+              </a:rPr>
+              <a:t>Create an anomaly detection review plan for one public health data stream.</a:t>
+            </a:r>
+            <a:endParaRPr lang="en-US" sz="1700" dirty="0"/>
+          </a:p>
+          <a:p>
+            <a:r>
+              <a:rPr lang="en-US" sz="1700" dirty="0">
+                <a:solidFill>
+                  <a:srgbClr val="17364A"/>
+                </a:solidFill>
+                <a:latin typeface="Aptos" pitchFamily="34" charset="0"/>
+                <a:ea typeface="Aptos" pitchFamily="34" charset="-122"/>
+                <a:cs typeface="Aptos" pitchFamily="34" charset="-120"/>
+              </a:rPr>
+              <a:t>Include the monitored indicator, data source, update frequency, baseline approach, known reporting patterns, threshold.</a:t>
+            </a:r>
+            <a:endParaRPr lang="en-US" sz="1700" dirty="0"/>
+          </a:p>
+          <a:p>
+            <a:r>
+              <a:rPr lang="en-US" sz="1700" dirty="0">
+                <a:solidFill>
+                  <a:srgbClr val="17364A"/>
+                </a:solidFill>
+                <a:latin typeface="Aptos" pitchFamily="34" charset="0"/>
+                <a:ea typeface="Aptos" pitchFamily="34" charset="-122"/>
+                <a:cs typeface="Aptos" pitchFamily="34" charset="-120"/>
+              </a:rPr>
+              <a:t>The plan should identify how staff will distinguish statistical anomalies from data quality issues and public health events.</a:t>
+            </a:r>
+            <a:endParaRPr lang="en-US" sz="1700" dirty="0"/>
+          </a:p>
+        </p:txBody>
+      </p:sp>
+      <p:sp>
+        <p:nvSpPr>
+          <p:cNvPr id="11" name="Shape 9"/>
+          <p:cNvSpPr/>
+          <p:nvPr/>
+        </p:nvSpPr>
+        <p:spPr>
+          <a:xfrm>
+            <a:off x="7909560" y="1417320"/>
+            <a:ext cx="3154680" cy="1828800"/>
+          </a:xfrm>
+          <a:prstGeom prst="roundRect">
+            <a:avLst>
+              <a:gd name="adj" fmla="val 6000"/>
+            </a:avLst>
+          </a:prstGeom>
+          <a:solidFill>
+            <a:srgbClr val="EEF8ED"/>
+          </a:solidFill>
+          <a:ln w="12700">
+            <a:solidFill>
+              <a:srgbClr val="B9D7E6"/>
+            </a:solidFill>
+            <a:prstDash val="solid"/>
+          </a:ln>
+        </p:spPr>
+      </p:sp>
+      <p:sp>
+        <p:nvSpPr>
+          <p:cNvPr id="12" name="Text 10"/>
+          <p:cNvSpPr/>
+          <p:nvPr/>
+        </p:nvSpPr>
+        <p:spPr>
+          <a:xfrm>
+            <a:off x="8074152" y="1563624"/>
+            <a:ext cx="2825496" cy="201168"/>
+          </a:xfrm>
+          <a:prstGeom prst="rect">
+            <a:avLst/>
+          </a:prstGeom>
+          <a:noFill/>
+          <a:ln/>
+        </p:spPr>
+        <p:txBody>
+          <a:bodyPr wrap="square" lIns="0" tIns="0" rIns="0" bIns="0" rtlCol="0" anchor="ctr"/>
+          <a:lstStyle/>
+          <a:p>
             <a:pPr indent="0" marL="0">
               <a:buNone/>
             </a:pPr>
             <a:r>
-              <a:rPr lang="en-US" sz="1420" dirty="0">
+              <a:rPr lang="en-US" sz="950" b="1" dirty="0">
+                <a:solidFill>
+                  <a:srgbClr val="0068B7"/>
+                </a:solidFill>
+                <a:latin typeface="Aptos" pitchFamily="34" charset="0"/>
+                <a:ea typeface="Aptos" pitchFamily="34" charset="-122"/>
+                <a:cs typeface="Aptos" pitchFamily="34" charset="-120"/>
+              </a:rPr>
+              <a:t>Key idea</a:t>
+            </a:r>
+            <a:endParaRPr lang="en-US" sz="950" dirty="0"/>
+          </a:p>
+        </p:txBody>
+      </p:sp>
+      <p:sp>
+        <p:nvSpPr>
+          <p:cNvPr id="13" name="Text 11"/>
+          <p:cNvSpPr/>
+          <p:nvPr/>
+        </p:nvSpPr>
+        <p:spPr>
+          <a:xfrm>
+            <a:off x="8074152" y="1856232"/>
+            <a:ext cx="2825496" cy="1261872"/>
+          </a:xfrm>
+          <a:prstGeom prst="rect">
+            <a:avLst/>
+          </a:prstGeom>
+          <a:noFill/>
+          <a:ln/>
+        </p:spPr>
+        <p:txBody>
+          <a:bodyPr wrap="square" lIns="0" tIns="0" rIns="0" bIns="0" rtlCol="0" anchor="t">
+            <a:normAutofit/>
+          </a:bodyPr>
+          <a:lstStyle/>
+          <a:p>
+            <a:pPr indent="0" marL="0">
+              <a:buNone/>
+            </a:pPr>
+            <a:r>
+              <a:rPr lang="en-US" sz="1250" dirty="0">
                 <a:solidFill>
                   <a:srgbClr val="17364A"/>
                 </a:solidFill>
@@ -4853,9 +7408,116 @@
                 <a:ea typeface="Aptos" pitchFamily="34" charset="-122"/>
                 <a:cs typeface="Aptos" pitchFamily="34" charset="-120"/>
               </a:rPr>
-              <a:t>Signal documentation template</a:t>
-            </a:r>
-            <a:endParaRPr lang="en-US" sz="1420" dirty="0"/>
+              <a:t>Create an anomaly detection review plan for one public health data stream.</a:t>
+            </a:r>
+            <a:endParaRPr lang="en-US" sz="1250" dirty="0"/>
+          </a:p>
+        </p:txBody>
+      </p:sp>
+      <p:sp>
+        <p:nvSpPr>
+          <p:cNvPr id="14" name="Shape 12"/>
+          <p:cNvSpPr/>
+          <p:nvPr/>
+        </p:nvSpPr>
+        <p:spPr>
+          <a:xfrm>
+            <a:off x="7909560" y="3520440"/>
+            <a:ext cx="3154680" cy="1737360"/>
+          </a:xfrm>
+          <a:prstGeom prst="roundRect">
+            <a:avLst>
+              <a:gd name="adj" fmla="val 6316"/>
+            </a:avLst>
+          </a:prstGeom>
+          <a:solidFill>
+            <a:srgbClr val="EAF6F8"/>
+          </a:solidFill>
+          <a:ln w="12700">
+            <a:solidFill>
+              <a:srgbClr val="B9D7E6"/>
+            </a:solidFill>
+            <a:prstDash val="solid"/>
+          </a:ln>
+        </p:spPr>
+      </p:sp>
+      <p:sp>
+        <p:nvSpPr>
+          <p:cNvPr id="15" name="Text 13"/>
+          <p:cNvSpPr/>
+          <p:nvPr/>
+        </p:nvSpPr>
+        <p:spPr>
+          <a:xfrm>
+            <a:off x="8074152" y="3666744"/>
+            <a:ext cx="2825496" cy="201168"/>
+          </a:xfrm>
+          <a:prstGeom prst="rect">
+            <a:avLst/>
+          </a:prstGeom>
+          <a:noFill/>
+          <a:ln/>
+        </p:spPr>
+        <p:txBody>
+          <a:bodyPr wrap="square" lIns="0" tIns="0" rIns="0" bIns="0" rtlCol="0" anchor="ctr"/>
+          <a:lstStyle/>
+          <a:p>
+            <a:pPr indent="0" marL="0">
+              <a:buNone/>
+            </a:pPr>
+            <a:r>
+              <a:rPr lang="en-US" sz="950" b="1" dirty="0">
+                <a:solidFill>
+                  <a:srgbClr val="0068B7"/>
+                </a:solidFill>
+                <a:latin typeface="Aptos" pitchFamily="34" charset="0"/>
+                <a:ea typeface="Aptos" pitchFamily="34" charset="-122"/>
+                <a:cs typeface="Aptos" pitchFamily="34" charset="-120"/>
+              </a:rPr>
+              <a:t>Use this for</a:t>
+            </a:r>
+            <a:endParaRPr lang="en-US" sz="950" dirty="0"/>
+          </a:p>
+        </p:txBody>
+      </p:sp>
+      <p:sp>
+        <p:nvSpPr>
+          <p:cNvPr id="16" name="Text 14"/>
+          <p:cNvSpPr/>
+          <p:nvPr/>
+        </p:nvSpPr>
+        <p:spPr>
+          <a:xfrm>
+            <a:off x="8074152" y="3959352"/>
+            <a:ext cx="2825496" cy="1170432"/>
+          </a:xfrm>
+          <a:prstGeom prst="rect">
+            <a:avLst/>
+          </a:prstGeom>
+          <a:noFill/>
+          <a:ln/>
+        </p:spPr>
+        <p:txBody>
+          <a:bodyPr wrap="square" lIns="0" tIns="0" rIns="0" bIns="0" rtlCol="0" anchor="t">
+            <a:normAutofit/>
+          </a:bodyPr>
+          <a:lstStyle/>
+          <a:p>
+            <a:pPr indent="0" marL="0">
+              <a:buNone/>
+            </a:pPr>
+            <a:r>
+              <a:rPr lang="en-US" sz="1250" dirty="0">
+                <a:solidFill>
+                  <a:srgbClr val="17364A"/>
+                </a:solidFill>
+                <a:latin typeface="Aptos" pitchFamily="34" charset="0"/>
+                <a:ea typeface="Aptos" pitchFamily="34" charset="-122"/>
+                <a:cs typeface="Aptos" pitchFamily="34" charset="-120"/>
+              </a:rPr>
+              <a:t>Connect the concept to public health decisions, safeguards, documentation, or implementation work.</a:t>
+            </a:r>
+            <a:endParaRPr lang="en-US" sz="1250" dirty="0"/>
           </a:p>
         </p:txBody>
       </p:sp>
@@ -4918,7 +7580,32 @@
       </p:sp>
       <p:sp>
         <p:nvSpPr>
-          <p:cNvPr id="3" name="Text 1"/>
+          <p:cNvPr id="3" name="Shape 1"/>
+          <p:cNvSpPr/>
+          <p:nvPr/>
+        </p:nvSpPr>
+        <p:spPr>
+          <a:xfrm>
+            <a:off x="0" y="164592"/>
+            <a:ext cx="146304" cy="6693408"/>
+          </a:xfrm>
+          <a:prstGeom prst="rect">
+            <a:avLst/>
+          </a:prstGeom>
+          <a:solidFill>
+            <a:srgbClr val="2F8A28"/>
+          </a:solidFill>
+          <a:ln w="12700">
+            <a:solidFill>
+              <a:srgbClr val="2F8A28"/>
+            </a:solidFill>
+            <a:prstDash val="solid"/>
+          </a:ln>
+        </p:spPr>
+      </p:sp>
+      <p:sp>
+        <p:nvSpPr>
+          <p:cNvPr id="4" name="Text 2"/>
           <p:cNvSpPr/>
           <p:nvPr/>
         </p:nvSpPr>
@@ -4957,7 +7644,7 @@
       </p:sp>
       <p:sp>
         <p:nvSpPr>
-          <p:cNvPr id="4" name="Text 2"/>
+          <p:cNvPr id="5" name="Text 3"/>
           <p:cNvSpPr/>
           <p:nvPr/>
         </p:nvSpPr>
@@ -4996,7 +7683,7 @@
       </p:sp>
       <p:sp>
         <p:nvSpPr>
-          <p:cNvPr id="5" name="Text 3"/>
+          <p:cNvPr id="6" name="Text 4"/>
           <p:cNvSpPr/>
           <p:nvPr/>
         </p:nvSpPr>
@@ -5035,13 +7722,77 @@
       </p:sp>
       <p:sp>
         <p:nvSpPr>
-          <p:cNvPr id="6" name="Text 4"/>
+          <p:cNvPr id="7" name="Shape 5"/>
           <p:cNvSpPr/>
           <p:nvPr/>
         </p:nvSpPr>
         <p:spPr>
           <a:xfrm>
             <a:off x="640080" y="658368"/>
+            <a:ext cx="420624" cy="420624"/>
+          </a:xfrm>
+          <a:prstGeom prst="ellipse">
+            <a:avLst/>
+          </a:prstGeom>
+          <a:solidFill>
+            <a:srgbClr val="0068B7"/>
+          </a:solidFill>
+          <a:ln w="12700">
+            <a:solidFill>
+              <a:srgbClr val="0068B7"/>
+            </a:solidFill>
+            <a:prstDash val="solid"/>
+          </a:ln>
+        </p:spPr>
+      </p:sp>
+      <p:sp>
+        <p:nvSpPr>
+          <p:cNvPr id="8" name="Text 6"/>
+          <p:cNvSpPr/>
+          <p:nvPr/>
+        </p:nvSpPr>
+        <p:spPr>
+          <a:xfrm>
+            <a:off x="640080" y="731520"/>
+            <a:ext cx="420624" cy="164592"/>
+          </a:xfrm>
+          <a:prstGeom prst="rect">
+            <a:avLst/>
+          </a:prstGeom>
+          <a:noFill/>
+          <a:ln/>
+        </p:spPr>
+        <p:txBody>
+          <a:bodyPr wrap="square" lIns="0" tIns="0" rIns="0" bIns="0" rtlCol="0" anchor="ctr"/>
+          <a:lstStyle/>
+          <a:p>
+            <a:pPr algn="ctr" indent="0" marL="0">
+              <a:buNone/>
+            </a:pPr>
+            <a:r>
+              <a:rPr lang="en-US" sz="1100" b="1" dirty="0">
+                <a:solidFill>
+                  <a:srgbClr val="FFFFFF"/>
+                </a:solidFill>
+                <a:latin typeface="Aptos" pitchFamily="34" charset="0"/>
+                <a:ea typeface="Aptos" pitchFamily="34" charset="-122"/>
+                <a:cs typeface="Aptos" pitchFamily="34" charset="-120"/>
+              </a:rPr>
+              <a:t>10</a:t>
+            </a:r>
+            <a:endParaRPr lang="en-US" sz="1100" dirty="0"/>
+          </a:p>
+        </p:txBody>
+      </p:sp>
+      <p:sp>
+        <p:nvSpPr>
+          <p:cNvPr id="9" name="Text 7"/>
+          <p:cNvSpPr/>
+          <p:nvPr/>
+        </p:nvSpPr>
+        <p:spPr>
+          <a:xfrm>
+            <a:off x="640080" y="621792"/>
             <a:ext cx="10881360" cy="566928"/>
           </a:xfrm>
           <a:prstGeom prst="rect">
@@ -5068,7 +7819,7 @@
                 <a:ea typeface="Aptos Display" pitchFamily="34" charset="-122"/>
                 <a:cs typeface="Aptos Display" pitchFamily="34" charset="-120"/>
               </a:rPr>
-              <a:t>Expected Assignment</a:t>
+              <a:t>Expected Artifact or Evidence</a:t>
             </a:r>
             <a:endParaRPr lang="en-US" sz="2700" dirty="0"/>
           </a:p>
@@ -5076,14 +7827,14 @@
       </p:sp>
       <p:sp>
         <p:nvSpPr>
-          <p:cNvPr id="7" name="Text 5"/>
-          <p:cNvSpPr/>
-          <p:nvPr/>
-        </p:nvSpPr>
-        <p:spPr>
-          <a:xfrm>
-            <a:off x="822960" y="1325880"/>
-            <a:ext cx="10378440" cy="4800600"/>
+          <p:cNvPr id="10" name="Text 8"/>
+          <p:cNvSpPr/>
+          <p:nvPr/>
+        </p:nvSpPr>
+        <p:spPr>
+          <a:xfrm>
+            <a:off x="868680" y="1417320"/>
+            <a:ext cx="6675120" cy="4434840"/>
           </a:xfrm>
           <a:prstGeom prst="rect">
             <a:avLst/>
@@ -5098,7 +7849,7 @@
           <a:lstStyle/>
           <a:p>
             <a:r>
-              <a:rPr lang="en-US" sz="1450" dirty="0">
+              <a:rPr lang="en-US" sz="1700" dirty="0">
                 <a:solidFill>
                   <a:srgbClr val="17364A"/>
                 </a:solidFill>
@@ -5108,11 +7859,11 @@
               </a:rPr>
               <a:t>Anomaly detection review plan</a:t>
             </a:r>
-            <a:endParaRPr lang="en-US" sz="1450" dirty="0"/>
-          </a:p>
-          <a:p>
-            <a:r>
-              <a:rPr lang="en-US" sz="1450" dirty="0">
+            <a:endParaRPr lang="en-US" sz="1700" dirty="0"/>
+          </a:p>
+          <a:p>
+            <a:r>
+              <a:rPr lang="en-US" sz="1700" dirty="0">
                 <a:solidFill>
                   <a:srgbClr val="17364A"/>
                 </a:solidFill>
@@ -5122,11 +7873,11 @@
               </a:rPr>
               <a:t>Baseline and threshold rationale</a:t>
             </a:r>
-            <a:endParaRPr lang="en-US" sz="1450" dirty="0"/>
-          </a:p>
-          <a:p>
-            <a:r>
-              <a:rPr lang="en-US" sz="1450" dirty="0">
+            <a:endParaRPr lang="en-US" sz="1700" dirty="0"/>
+          </a:p>
+          <a:p>
+            <a:r>
+              <a:rPr lang="en-US" sz="1700" dirty="0">
                 <a:solidFill>
                   <a:srgbClr val="17364A"/>
                 </a:solidFill>
@@ -5136,11 +7887,104 @@
               </a:rPr>
               <a:t>Alert review protocol</a:t>
             </a:r>
-            <a:endParaRPr lang="en-US" sz="1450" dirty="0"/>
-          </a:p>
-          <a:p>
-            <a:r>
-              <a:rPr lang="en-US" sz="1450" dirty="0">
+            <a:endParaRPr lang="en-US" sz="1700" dirty="0"/>
+          </a:p>
+        </p:txBody>
+      </p:sp>
+      <p:sp>
+        <p:nvSpPr>
+          <p:cNvPr id="11" name="Shape 9"/>
+          <p:cNvSpPr/>
+          <p:nvPr/>
+        </p:nvSpPr>
+        <p:spPr>
+          <a:xfrm>
+            <a:off x="7909560" y="1417320"/>
+            <a:ext cx="3154680" cy="1828800"/>
+          </a:xfrm>
+          <a:prstGeom prst="roundRect">
+            <a:avLst>
+              <a:gd name="adj" fmla="val 6000"/>
+            </a:avLst>
+          </a:prstGeom>
+          <a:solidFill>
+            <a:srgbClr val="EEF8ED"/>
+          </a:solidFill>
+          <a:ln w="12700">
+            <a:solidFill>
+              <a:srgbClr val="B9D7E6"/>
+            </a:solidFill>
+            <a:prstDash val="solid"/>
+          </a:ln>
+        </p:spPr>
+      </p:sp>
+      <p:sp>
+        <p:nvSpPr>
+          <p:cNvPr id="12" name="Text 10"/>
+          <p:cNvSpPr/>
+          <p:nvPr/>
+        </p:nvSpPr>
+        <p:spPr>
+          <a:xfrm>
+            <a:off x="8074152" y="1563624"/>
+            <a:ext cx="2825496" cy="201168"/>
+          </a:xfrm>
+          <a:prstGeom prst="rect">
+            <a:avLst/>
+          </a:prstGeom>
+          <a:noFill/>
+          <a:ln/>
+        </p:spPr>
+        <p:txBody>
+          <a:bodyPr wrap="square" lIns="0" tIns="0" rIns="0" bIns="0" rtlCol="0" anchor="ctr"/>
+          <a:lstStyle/>
+          <a:p>
+            <a:pPr indent="0" marL="0">
+              <a:buNone/>
+            </a:pPr>
+            <a:r>
+              <a:rPr lang="en-US" sz="950" b="1" dirty="0">
+                <a:solidFill>
+                  <a:srgbClr val="0068B7"/>
+                </a:solidFill>
+                <a:latin typeface="Aptos" pitchFamily="34" charset="0"/>
+                <a:ea typeface="Aptos" pitchFamily="34" charset="-122"/>
+                <a:cs typeface="Aptos" pitchFamily="34" charset="-120"/>
+              </a:rPr>
+              <a:t>Key idea</a:t>
+            </a:r>
+            <a:endParaRPr lang="en-US" sz="950" dirty="0"/>
+          </a:p>
+        </p:txBody>
+      </p:sp>
+      <p:sp>
+        <p:nvSpPr>
+          <p:cNvPr id="13" name="Text 11"/>
+          <p:cNvSpPr/>
+          <p:nvPr/>
+        </p:nvSpPr>
+        <p:spPr>
+          <a:xfrm>
+            <a:off x="8074152" y="1856232"/>
+            <a:ext cx="2825496" cy="1261872"/>
+          </a:xfrm>
+          <a:prstGeom prst="rect">
+            <a:avLst/>
+          </a:prstGeom>
+          <a:noFill/>
+          <a:ln/>
+        </p:spPr>
+        <p:txBody>
+          <a:bodyPr wrap="square" lIns="0" tIns="0" rIns="0" bIns="0" rtlCol="0" anchor="t">
+            <a:normAutofit/>
+          </a:bodyPr>
+          <a:lstStyle/>
+          <a:p>
+            <a:pPr indent="0" marL="0">
+              <a:buNone/>
+            </a:pPr>
+            <a:r>
+              <a:rPr lang="en-US" sz="1250" dirty="0">
                 <a:solidFill>
                   <a:srgbClr val="17364A"/>
                 </a:solidFill>
@@ -5148,9 +7992,116 @@
                 <a:ea typeface="Aptos" pitchFamily="34" charset="-122"/>
                 <a:cs typeface="Aptos" pitchFamily="34" charset="-120"/>
               </a:rPr>
-              <a:t>Signal documentation template</a:t>
-            </a:r>
-            <a:endParaRPr lang="en-US" sz="1450" dirty="0"/>
+              <a:t>Anomaly detection review plan</a:t>
+            </a:r>
+            <a:endParaRPr lang="en-US" sz="1250" dirty="0"/>
+          </a:p>
+        </p:txBody>
+      </p:sp>
+      <p:sp>
+        <p:nvSpPr>
+          <p:cNvPr id="14" name="Shape 12"/>
+          <p:cNvSpPr/>
+          <p:nvPr/>
+        </p:nvSpPr>
+        <p:spPr>
+          <a:xfrm>
+            <a:off x="7909560" y="3520440"/>
+            <a:ext cx="3154680" cy="1737360"/>
+          </a:xfrm>
+          <a:prstGeom prst="roundRect">
+            <a:avLst>
+              <a:gd name="adj" fmla="val 6316"/>
+            </a:avLst>
+          </a:prstGeom>
+          <a:solidFill>
+            <a:srgbClr val="EAF6F8"/>
+          </a:solidFill>
+          <a:ln w="12700">
+            <a:solidFill>
+              <a:srgbClr val="B9D7E6"/>
+            </a:solidFill>
+            <a:prstDash val="solid"/>
+          </a:ln>
+        </p:spPr>
+      </p:sp>
+      <p:sp>
+        <p:nvSpPr>
+          <p:cNvPr id="15" name="Text 13"/>
+          <p:cNvSpPr/>
+          <p:nvPr/>
+        </p:nvSpPr>
+        <p:spPr>
+          <a:xfrm>
+            <a:off x="8074152" y="3666744"/>
+            <a:ext cx="2825496" cy="201168"/>
+          </a:xfrm>
+          <a:prstGeom prst="rect">
+            <a:avLst/>
+          </a:prstGeom>
+          <a:noFill/>
+          <a:ln/>
+        </p:spPr>
+        <p:txBody>
+          <a:bodyPr wrap="square" lIns="0" tIns="0" rIns="0" bIns="0" rtlCol="0" anchor="ctr"/>
+          <a:lstStyle/>
+          <a:p>
+            <a:pPr indent="0" marL="0">
+              <a:buNone/>
+            </a:pPr>
+            <a:r>
+              <a:rPr lang="en-US" sz="950" b="1" dirty="0">
+                <a:solidFill>
+                  <a:srgbClr val="0068B7"/>
+                </a:solidFill>
+                <a:latin typeface="Aptos" pitchFamily="34" charset="0"/>
+                <a:ea typeface="Aptos" pitchFamily="34" charset="-122"/>
+                <a:cs typeface="Aptos" pitchFamily="34" charset="-120"/>
+              </a:rPr>
+              <a:t>Use this for</a:t>
+            </a:r>
+            <a:endParaRPr lang="en-US" sz="950" dirty="0"/>
+          </a:p>
+        </p:txBody>
+      </p:sp>
+      <p:sp>
+        <p:nvSpPr>
+          <p:cNvPr id="16" name="Text 14"/>
+          <p:cNvSpPr/>
+          <p:nvPr/>
+        </p:nvSpPr>
+        <p:spPr>
+          <a:xfrm>
+            <a:off x="8074152" y="3959352"/>
+            <a:ext cx="2825496" cy="1170432"/>
+          </a:xfrm>
+          <a:prstGeom prst="rect">
+            <a:avLst/>
+          </a:prstGeom>
+          <a:noFill/>
+          <a:ln/>
+        </p:spPr>
+        <p:txBody>
+          <a:bodyPr wrap="square" lIns="0" tIns="0" rIns="0" bIns="0" rtlCol="0" anchor="t">
+            <a:normAutofit/>
+          </a:bodyPr>
+          <a:lstStyle/>
+          <a:p>
+            <a:pPr indent="0" marL="0">
+              <a:buNone/>
+            </a:pPr>
+            <a:r>
+              <a:rPr lang="en-US" sz="1250" dirty="0">
+                <a:solidFill>
+                  <a:srgbClr val="17364A"/>
+                </a:solidFill>
+                <a:latin typeface="Aptos" pitchFamily="34" charset="0"/>
+                <a:ea typeface="Aptos" pitchFamily="34" charset="-122"/>
+                <a:cs typeface="Aptos" pitchFamily="34" charset="-120"/>
+              </a:rPr>
+              <a:t>Connect the concept to public health decisions, safeguards, documentation, or implementation work.</a:t>
+            </a:r>
+            <a:endParaRPr lang="en-US" sz="1250" dirty="0"/>
           </a:p>
         </p:txBody>
       </p:sp>
@@ -5213,7 +8164,32 @@
       </p:sp>
       <p:sp>
         <p:nvSpPr>
-          <p:cNvPr id="3" name="Text 1"/>
+          <p:cNvPr id="3" name="Shape 1"/>
+          <p:cNvSpPr/>
+          <p:nvPr/>
+        </p:nvSpPr>
+        <p:spPr>
+          <a:xfrm>
+            <a:off x="0" y="164592"/>
+            <a:ext cx="146304" cy="6693408"/>
+          </a:xfrm>
+          <a:prstGeom prst="rect">
+            <a:avLst/>
+          </a:prstGeom>
+          <a:solidFill>
+            <a:srgbClr val="2F8A28"/>
+          </a:solidFill>
+          <a:ln w="12700">
+            <a:solidFill>
+              <a:srgbClr val="2F8A28"/>
+            </a:solidFill>
+            <a:prstDash val="solid"/>
+          </a:ln>
+        </p:spPr>
+      </p:sp>
+      <p:sp>
+        <p:nvSpPr>
+          <p:cNvPr id="4" name="Text 2"/>
           <p:cNvSpPr/>
           <p:nvPr/>
         </p:nvSpPr>
@@ -5252,7 +8228,7 @@
       </p:sp>
       <p:sp>
         <p:nvSpPr>
-          <p:cNvPr id="4" name="Text 2"/>
+          <p:cNvPr id="5" name="Text 3"/>
           <p:cNvSpPr/>
           <p:nvPr/>
         </p:nvSpPr>
@@ -5291,7 +8267,7 @@
       </p:sp>
       <p:sp>
         <p:nvSpPr>
-          <p:cNvPr id="5" name="Text 3"/>
+          <p:cNvPr id="6" name="Text 4"/>
           <p:cNvSpPr/>
           <p:nvPr/>
         </p:nvSpPr>
@@ -5330,7 +8306,7 @@
       </p:sp>
       <p:sp>
         <p:nvSpPr>
-          <p:cNvPr id="6" name="Text 4"/>
+          <p:cNvPr id="7" name="Text 5"/>
           <p:cNvSpPr/>
           <p:nvPr/>
         </p:nvSpPr>
@@ -5363,7 +8339,7 @@
                 <a:ea typeface="Aptos Display" pitchFamily="34" charset="-122"/>
                 <a:cs typeface="Aptos Display" pitchFamily="34" charset="-120"/>
               </a:rPr>
-              <a:t>Knowledge Check</a:t>
+              <a:t>Expected Artifact or Evidence Continued</a:t>
             </a:r>
             <a:endParaRPr lang="en-US" sz="2700" dirty="0"/>
           </a:p>
@@ -5371,14 +8347,14 @@
       </p:sp>
       <p:sp>
         <p:nvSpPr>
-          <p:cNvPr id="7" name="Text 5"/>
-          <p:cNvSpPr/>
-          <p:nvPr/>
-        </p:nvSpPr>
-        <p:spPr>
-          <a:xfrm>
-            <a:off x="822960" y="1325880"/>
-            <a:ext cx="10378440" cy="4800600"/>
+          <p:cNvPr id="8" name="Text 6"/>
+          <p:cNvSpPr/>
+          <p:nvPr/>
+        </p:nvSpPr>
+        <p:spPr>
+          <a:xfrm>
+            <a:off x="868680" y="1417320"/>
+            <a:ext cx="6675120" cy="4434840"/>
           </a:xfrm>
           <a:prstGeom prst="rect">
             <a:avLst/>
@@ -5393,7 +8369,7 @@
           <a:lstStyle/>
           <a:p>
             <a:r>
-              <a:rPr lang="en-US" sz="1450" dirty="0">
+              <a:rPr lang="en-US" sz="1700" dirty="0">
                 <a:solidFill>
                   <a:srgbClr val="17364A"/>
                 </a:solidFill>
@@ -5401,13 +8377,106 @@
                 <a:ea typeface="Aptos" pitchFamily="34" charset="-122"/>
                 <a:cs typeface="Aptos" pitchFamily="34" charset="-120"/>
               </a:rPr>
-              <a:t>1. What is an anomaly in a public health time series?</a:t>
-            </a:r>
-            <a:endParaRPr lang="en-US" sz="1450" dirty="0"/>
-          </a:p>
-          <a:p>
-            <a:r>
-              <a:rPr lang="en-US" sz="1450" dirty="0">
+              <a:t>Signal documentation template</a:t>
+            </a:r>
+            <a:endParaRPr lang="en-US" sz="1700" dirty="0"/>
+          </a:p>
+        </p:txBody>
+      </p:sp>
+      <p:sp>
+        <p:nvSpPr>
+          <p:cNvPr id="9" name="Shape 7"/>
+          <p:cNvSpPr/>
+          <p:nvPr/>
+        </p:nvSpPr>
+        <p:spPr>
+          <a:xfrm>
+            <a:off x="7909560" y="1417320"/>
+            <a:ext cx="3154680" cy="1828800"/>
+          </a:xfrm>
+          <a:prstGeom prst="roundRect">
+            <a:avLst>
+              <a:gd name="adj" fmla="val 6000"/>
+            </a:avLst>
+          </a:prstGeom>
+          <a:solidFill>
+            <a:srgbClr val="EEF8ED"/>
+          </a:solidFill>
+          <a:ln w="12700">
+            <a:solidFill>
+              <a:srgbClr val="B9D7E6"/>
+            </a:solidFill>
+            <a:prstDash val="solid"/>
+          </a:ln>
+        </p:spPr>
+      </p:sp>
+      <p:sp>
+        <p:nvSpPr>
+          <p:cNvPr id="10" name="Text 8"/>
+          <p:cNvSpPr/>
+          <p:nvPr/>
+        </p:nvSpPr>
+        <p:spPr>
+          <a:xfrm>
+            <a:off x="8074152" y="1563624"/>
+            <a:ext cx="2825496" cy="201168"/>
+          </a:xfrm>
+          <a:prstGeom prst="rect">
+            <a:avLst/>
+          </a:prstGeom>
+          <a:noFill/>
+          <a:ln/>
+        </p:spPr>
+        <p:txBody>
+          <a:bodyPr wrap="square" lIns="0" tIns="0" rIns="0" bIns="0" rtlCol="0" anchor="ctr"/>
+          <a:lstStyle/>
+          <a:p>
+            <a:pPr indent="0" marL="0">
+              <a:buNone/>
+            </a:pPr>
+            <a:r>
+              <a:rPr lang="en-US" sz="950" b="1" dirty="0">
+                <a:solidFill>
+                  <a:srgbClr val="0068B7"/>
+                </a:solidFill>
+                <a:latin typeface="Aptos" pitchFamily="34" charset="0"/>
+                <a:ea typeface="Aptos" pitchFamily="34" charset="-122"/>
+                <a:cs typeface="Aptos" pitchFamily="34" charset="-120"/>
+              </a:rPr>
+              <a:t>Key idea</a:t>
+            </a:r>
+            <a:endParaRPr lang="en-US" sz="950" dirty="0"/>
+          </a:p>
+        </p:txBody>
+      </p:sp>
+      <p:sp>
+        <p:nvSpPr>
+          <p:cNvPr id="11" name="Text 9"/>
+          <p:cNvSpPr/>
+          <p:nvPr/>
+        </p:nvSpPr>
+        <p:spPr>
+          <a:xfrm>
+            <a:off x="8074152" y="1856232"/>
+            <a:ext cx="2825496" cy="1261872"/>
+          </a:xfrm>
+          <a:prstGeom prst="rect">
+            <a:avLst/>
+          </a:prstGeom>
+          <a:noFill/>
+          <a:ln/>
+        </p:spPr>
+        <p:txBody>
+          <a:bodyPr wrap="square" lIns="0" tIns="0" rIns="0" bIns="0" rtlCol="0" anchor="t">
+            <a:normAutofit/>
+          </a:bodyPr>
+          <a:lstStyle/>
+          <a:p>
+            <a:pPr indent="0" marL="0">
+              <a:buNone/>
+            </a:pPr>
+            <a:r>
+              <a:rPr lang="en-US" sz="1250" dirty="0">
                 <a:solidFill>
                   <a:srgbClr val="17364A"/>
                 </a:solidFill>
@@ -5415,13 +8484,106 @@
                 <a:ea typeface="Aptos" pitchFamily="34" charset="-122"/>
                 <a:cs typeface="Aptos" pitchFamily="34" charset="-120"/>
               </a:rPr>
-              <a:t>2. Why does seasonality matter?</a:t>
-            </a:r>
-            <a:endParaRPr lang="en-US" sz="1450" dirty="0"/>
-          </a:p>
-          <a:p>
-            <a:r>
-              <a:rPr lang="en-US" sz="1450" dirty="0">
+              <a:t>Signal documentation template</a:t>
+            </a:r>
+            <a:endParaRPr lang="en-US" sz="1250" dirty="0"/>
+          </a:p>
+        </p:txBody>
+      </p:sp>
+      <p:sp>
+        <p:nvSpPr>
+          <p:cNvPr id="12" name="Shape 10"/>
+          <p:cNvSpPr/>
+          <p:nvPr/>
+        </p:nvSpPr>
+        <p:spPr>
+          <a:xfrm>
+            <a:off x="7909560" y="3520440"/>
+            <a:ext cx="3154680" cy="1737360"/>
+          </a:xfrm>
+          <a:prstGeom prst="roundRect">
+            <a:avLst>
+              <a:gd name="adj" fmla="val 6316"/>
+            </a:avLst>
+          </a:prstGeom>
+          <a:solidFill>
+            <a:srgbClr val="EAF6F8"/>
+          </a:solidFill>
+          <a:ln w="12700">
+            <a:solidFill>
+              <a:srgbClr val="B9D7E6"/>
+            </a:solidFill>
+            <a:prstDash val="solid"/>
+          </a:ln>
+        </p:spPr>
+      </p:sp>
+      <p:sp>
+        <p:nvSpPr>
+          <p:cNvPr id="13" name="Text 11"/>
+          <p:cNvSpPr/>
+          <p:nvPr/>
+        </p:nvSpPr>
+        <p:spPr>
+          <a:xfrm>
+            <a:off x="8074152" y="3666744"/>
+            <a:ext cx="2825496" cy="201168"/>
+          </a:xfrm>
+          <a:prstGeom prst="rect">
+            <a:avLst/>
+          </a:prstGeom>
+          <a:noFill/>
+          <a:ln/>
+        </p:spPr>
+        <p:txBody>
+          <a:bodyPr wrap="square" lIns="0" tIns="0" rIns="0" bIns="0" rtlCol="0" anchor="ctr"/>
+          <a:lstStyle/>
+          <a:p>
+            <a:pPr indent="0" marL="0">
+              <a:buNone/>
+            </a:pPr>
+            <a:r>
+              <a:rPr lang="en-US" sz="950" b="1" dirty="0">
+                <a:solidFill>
+                  <a:srgbClr val="0068B7"/>
+                </a:solidFill>
+                <a:latin typeface="Aptos" pitchFamily="34" charset="0"/>
+                <a:ea typeface="Aptos" pitchFamily="34" charset="-122"/>
+                <a:cs typeface="Aptos" pitchFamily="34" charset="-120"/>
+              </a:rPr>
+              <a:t>Use this for</a:t>
+            </a:r>
+            <a:endParaRPr lang="en-US" sz="950" dirty="0"/>
+          </a:p>
+        </p:txBody>
+      </p:sp>
+      <p:sp>
+        <p:nvSpPr>
+          <p:cNvPr id="14" name="Text 12"/>
+          <p:cNvSpPr/>
+          <p:nvPr/>
+        </p:nvSpPr>
+        <p:spPr>
+          <a:xfrm>
+            <a:off x="8074152" y="3959352"/>
+            <a:ext cx="2825496" cy="1170432"/>
+          </a:xfrm>
+          <a:prstGeom prst="rect">
+            <a:avLst/>
+          </a:prstGeom>
+          <a:noFill/>
+          <a:ln/>
+        </p:spPr>
+        <p:txBody>
+          <a:bodyPr wrap="square" lIns="0" tIns="0" rIns="0" bIns="0" rtlCol="0" anchor="t">
+            <a:normAutofit/>
+          </a:bodyPr>
+          <a:lstStyle/>
+          <a:p>
+            <a:pPr indent="0" marL="0">
+              <a:buNone/>
+            </a:pPr>
+            <a:r>
+              <a:rPr lang="en-US" sz="1250" dirty="0">
                 <a:solidFill>
                   <a:srgbClr val="17364A"/>
                 </a:solidFill>
@@ -5429,37 +8591,9 @@
                 <a:ea typeface="Aptos" pitchFamily="34" charset="-122"/>
                 <a:cs typeface="Aptos" pitchFamily="34" charset="-120"/>
               </a:rPr>
-              <a:t>3. What is a common risk of too many low-value alerts?</a:t>
-            </a:r>
-            <a:endParaRPr lang="en-US" sz="1450" dirty="0"/>
-          </a:p>
-          <a:p>
-            <a:r>
-              <a:rPr lang="en-US" sz="1450" dirty="0">
-                <a:solidFill>
-                  <a:srgbClr val="17364A"/>
-                </a:solidFill>
-                <a:latin typeface="Aptos" pitchFamily="34" charset="0"/>
-                <a:ea typeface="Aptos" pitchFamily="34" charset="-122"/>
-                <a:cs typeface="Aptos" pitchFamily="34" charset="-120"/>
-              </a:rPr>
-              <a:t>4. Which statement is most accurate?</a:t>
-            </a:r>
-            <a:endParaRPr lang="en-US" sz="1450" dirty="0"/>
-          </a:p>
-          <a:p>
-            <a:r>
-              <a:rPr lang="en-US" sz="1450" dirty="0">
-                <a:solidFill>
-                  <a:srgbClr val="17364A"/>
-                </a:solidFill>
-                <a:latin typeface="Aptos" pitchFamily="34" charset="0"/>
-                <a:ea typeface="Aptos" pitchFamily="34" charset="-122"/>
-                <a:cs typeface="Aptos" pitchFamily="34" charset="-120"/>
-              </a:rPr>
-              <a:t>5. What is strong completion evidence for this module?</a:t>
-            </a:r>
-            <a:endParaRPr lang="en-US" sz="1450" dirty="0"/>
+              <a:t>Connect the concept to public health decisions, safeguards, documentation, or implementation work.</a:t>
+            </a:r>
+            <a:endParaRPr lang="en-US" sz="1250" dirty="0"/>
           </a:p>
         </p:txBody>
       </p:sp>
@@ -5522,7 +8656,32 @@
       </p:sp>
       <p:sp>
         <p:nvSpPr>
-          <p:cNvPr id="3" name="Text 1"/>
+          <p:cNvPr id="3" name="Shape 1"/>
+          <p:cNvSpPr/>
+          <p:nvPr/>
+        </p:nvSpPr>
+        <p:spPr>
+          <a:xfrm>
+            <a:off x="0" y="164592"/>
+            <a:ext cx="146304" cy="6693408"/>
+          </a:xfrm>
+          <a:prstGeom prst="rect">
+            <a:avLst/>
+          </a:prstGeom>
+          <a:solidFill>
+            <a:srgbClr val="2F8A28"/>
+          </a:solidFill>
+          <a:ln w="12700">
+            <a:solidFill>
+              <a:srgbClr val="2F8A28"/>
+            </a:solidFill>
+            <a:prstDash val="solid"/>
+          </a:ln>
+        </p:spPr>
+      </p:sp>
+      <p:sp>
+        <p:nvSpPr>
+          <p:cNvPr id="4" name="Text 2"/>
           <p:cNvSpPr/>
           <p:nvPr/>
         </p:nvSpPr>
@@ -5561,7 +8720,7 @@
       </p:sp>
       <p:sp>
         <p:nvSpPr>
-          <p:cNvPr id="4" name="Text 2"/>
+          <p:cNvPr id="5" name="Text 3"/>
           <p:cNvSpPr/>
           <p:nvPr/>
         </p:nvSpPr>
@@ -5600,7 +8759,7 @@
       </p:sp>
       <p:sp>
         <p:nvSpPr>
-          <p:cNvPr id="5" name="Text 3"/>
+          <p:cNvPr id="6" name="Text 4"/>
           <p:cNvSpPr/>
           <p:nvPr/>
         </p:nvSpPr>
@@ -5639,7 +8798,7 @@
       </p:sp>
       <p:sp>
         <p:nvSpPr>
-          <p:cNvPr id="6" name="Text 4"/>
+          <p:cNvPr id="7" name="Text 5"/>
           <p:cNvSpPr/>
           <p:nvPr/>
         </p:nvSpPr>
@@ -5672,7 +8831,7 @@
                 <a:ea typeface="Aptos Display" pitchFamily="34" charset="-122"/>
                 <a:cs typeface="Aptos Display" pitchFamily="34" charset="-120"/>
               </a:rPr>
-              <a:t>Module Context</a:t>
+              <a:t>What this module helps you do</a:t>
             </a:r>
             <a:endParaRPr lang="en-US" sz="2700" dirty="0"/>
           </a:p>
@@ -5680,14 +8839,14 @@
       </p:sp>
       <p:sp>
         <p:nvSpPr>
-          <p:cNvPr id="7" name="Text 5"/>
-          <p:cNvSpPr/>
-          <p:nvPr/>
-        </p:nvSpPr>
-        <p:spPr>
-          <a:xfrm>
-            <a:off x="822960" y="1325880"/>
-            <a:ext cx="10378440" cy="1371600"/>
+          <p:cNvPr id="8" name="Text 6"/>
+          <p:cNvSpPr/>
+          <p:nvPr/>
+        </p:nvSpPr>
+        <p:spPr>
+          <a:xfrm>
+            <a:off x="868680" y="1417320"/>
+            <a:ext cx="6675120" cy="3291840"/>
           </a:xfrm>
           <a:prstGeom prst="rect">
             <a:avLst/>
@@ -5702,7 +8861,7 @@
           <a:lstStyle/>
           <a:p>
             <a:r>
-              <a:rPr lang="en-US" sz="1600" dirty="0">
+              <a:rPr lang="en-US" sz="1700" dirty="0">
                 <a:solidFill>
                   <a:srgbClr val="17364A"/>
                 </a:solidFill>
@@ -5710,13 +8869,13 @@
                 <a:ea typeface="Aptos" pitchFamily="34" charset="-122"/>
                 <a:cs typeface="Aptos" pitchFamily="34" charset="-120"/>
               </a:rPr>
-              <a:t>Level: applied/foundational</a:t>
-            </a:r>
-            <a:endParaRPr lang="en-US" sz="1600" dirty="0"/>
-          </a:p>
-          <a:p>
-            <a:r>
-              <a:rPr lang="en-US" sz="1600" dirty="0">
+              <a:t>Time-series analysis examines data collected over time.</a:t>
+            </a:r>
+            <a:endParaRPr lang="en-US" sz="1700" dirty="0"/>
+          </a:p>
+          <a:p>
+            <a:r>
+              <a:rPr lang="en-US" sz="1700" dirty="0">
                 <a:solidFill>
                   <a:srgbClr val="17364A"/>
                 </a:solidFill>
@@ -5724,13 +8883,13 @@
                 <a:ea typeface="Aptos" pitchFamily="34" charset="-122"/>
                 <a:cs typeface="Aptos" pitchFamily="34" charset="-120"/>
               </a:rPr>
-              <a:t>Primary track: Analytics and Modeling Track</a:t>
-            </a:r>
-            <a:endParaRPr lang="en-US" sz="1600" dirty="0"/>
-          </a:p>
-          <a:p>
-            <a:r>
-              <a:rPr lang="en-US" sz="1600" dirty="0">
+              <a:t>In public health, time patterns are central to surveillance, outbreak detection, syndromic monitoring, wastewater analysis, emergency response,.</a:t>
+            </a:r>
+            <a:endParaRPr lang="en-US" sz="1700" dirty="0"/>
+          </a:p>
+          <a:p>
+            <a:r>
+              <a:rPr lang="en-US" sz="1700" dirty="0">
                 <a:solidFill>
                   <a:srgbClr val="17364A"/>
                 </a:solidFill>
@@ -5738,31 +8897,111 @@
                 <a:ea typeface="Aptos" pitchFamily="34" charset="-122"/>
                 <a:cs typeface="Aptos" pitchFamily="34" charset="-120"/>
               </a:rPr>
-              <a:t>Appears in tracks: analytics-modeling</a:t>
-            </a:r>
-            <a:endParaRPr lang="en-US" sz="1600" dirty="0"/>
-          </a:p>
-        </p:txBody>
-      </p:sp>
-      <p:sp>
-        <p:nvSpPr>
-          <p:cNvPr id="8" name="Text 6"/>
-          <p:cNvSpPr/>
-          <p:nvPr/>
-        </p:nvSpPr>
-        <p:spPr>
-          <a:xfrm>
-            <a:off x="822960" y="2743200"/>
-            <a:ext cx="10378440" cy="2834640"/>
-          </a:xfrm>
-          <a:prstGeom prst="rect">
-            <a:avLst/>
-          </a:prstGeom>
-          <a:noFill/>
-          <a:ln/>
-        </p:spPr>
-        <p:txBody>
-          <a:bodyPr wrap="square" lIns="1016" tIns="1016" rIns="1016" bIns="1016" rtlCol="0" anchor="t">
+              <a:t>AI-supported anomaly detection can help identify unusual increases, decreases, or pattern changes that may require investigation.</a:t>
+            </a:r>
+            <a:endParaRPr lang="en-US" sz="1700" dirty="0"/>
+          </a:p>
+          <a:p>
+            <a:r>
+              <a:rPr lang="en-US" sz="1700" dirty="0">
+                <a:solidFill>
+                  <a:srgbClr val="17364A"/>
+                </a:solidFill>
+                <a:latin typeface="Aptos" pitchFamily="34" charset="0"/>
+                <a:ea typeface="Aptos" pitchFamily="34" charset="-122"/>
+                <a:cs typeface="Aptos" pitchFamily="34" charset="-120"/>
+              </a:rPr>
+              <a:t>This module explains how time-series and anomaly detection methods can support public health without replacing epidemiologic interpretation.</a:t>
+            </a:r>
+            <a:endParaRPr lang="en-US" sz="1700" dirty="0"/>
+          </a:p>
+        </p:txBody>
+      </p:sp>
+      <p:sp>
+        <p:nvSpPr>
+          <p:cNvPr id="9" name="Shape 7"/>
+          <p:cNvSpPr/>
+          <p:nvPr/>
+        </p:nvSpPr>
+        <p:spPr>
+          <a:xfrm>
+            <a:off x="7909560" y="1417320"/>
+            <a:ext cx="3154680" cy="1920240"/>
+          </a:xfrm>
+          <a:prstGeom prst="roundRect">
+            <a:avLst>
+              <a:gd name="adj" fmla="val 5714"/>
+            </a:avLst>
+          </a:prstGeom>
+          <a:solidFill>
+            <a:srgbClr val="EAF6F8"/>
+          </a:solidFill>
+          <a:ln w="12700">
+            <a:solidFill>
+              <a:srgbClr val="B9D7E6"/>
+            </a:solidFill>
+            <a:prstDash val="solid"/>
+          </a:ln>
+        </p:spPr>
+      </p:sp>
+      <p:sp>
+        <p:nvSpPr>
+          <p:cNvPr id="10" name="Text 8"/>
+          <p:cNvSpPr/>
+          <p:nvPr/>
+        </p:nvSpPr>
+        <p:spPr>
+          <a:xfrm>
+            <a:off x="8074152" y="1563624"/>
+            <a:ext cx="2825496" cy="201168"/>
+          </a:xfrm>
+          <a:prstGeom prst="rect">
+            <a:avLst/>
+          </a:prstGeom>
+          <a:noFill/>
+          <a:ln/>
+        </p:spPr>
+        <p:txBody>
+          <a:bodyPr wrap="square" lIns="0" tIns="0" rIns="0" bIns="0" rtlCol="0" anchor="ctr"/>
+          <a:lstStyle/>
+          <a:p>
+            <a:pPr indent="0" marL="0">
+              <a:buNone/>
+            </a:pPr>
+            <a:r>
+              <a:rPr lang="en-US" sz="950" b="1" dirty="0">
+                <a:solidFill>
+                  <a:srgbClr val="0068B7"/>
+                </a:solidFill>
+                <a:latin typeface="Aptos" pitchFamily="34" charset="0"/>
+                <a:ea typeface="Aptos" pitchFamily="34" charset="-122"/>
+                <a:cs typeface="Aptos" pitchFamily="34" charset="-120"/>
+              </a:rPr>
+              <a:t>Module details</a:t>
+            </a:r>
+            <a:endParaRPr lang="en-US" sz="950" dirty="0"/>
+          </a:p>
+        </p:txBody>
+      </p:sp>
+      <p:sp>
+        <p:nvSpPr>
+          <p:cNvPr id="11" name="Text 9"/>
+          <p:cNvSpPr/>
+          <p:nvPr/>
+        </p:nvSpPr>
+        <p:spPr>
+          <a:xfrm>
+            <a:off x="8074152" y="1856232"/>
+            <a:ext cx="2825496" cy="1353312"/>
+          </a:xfrm>
+          <a:prstGeom prst="rect">
+            <a:avLst/>
+          </a:prstGeom>
+          <a:noFill/>
+          <a:ln/>
+        </p:spPr>
+        <p:txBody>
+          <a:bodyPr wrap="square" lIns="0" tIns="0" rIns="0" bIns="0" rtlCol="0" anchor="t">
             <a:normAutofit/>
           </a:bodyPr>
           <a:lstStyle/>
@@ -5771,7 +9010,7 @@
               <a:buNone/>
             </a:pPr>
             <a:r>
-              <a:rPr lang="en-US" sz="1400" dirty="0">
+              <a:rPr lang="en-US" sz="1250" dirty="0">
                 <a:solidFill>
                   <a:srgbClr val="17364A"/>
                 </a:solidFill>
@@ -5779,9 +9018,150 @@
                 <a:ea typeface="Aptos" pitchFamily="34" charset="-122"/>
                 <a:cs typeface="Aptos" pitchFamily="34" charset="-120"/>
               </a:rPr>
-              <a:t>Time-series analysis examines data collected over time. In public health, time patterns are central to surveillance, outbreak detection, syndromic monitoring, wastewater analysis, emergency response, seasonal planning, and program performance. AI-supported anomaly detection can help identify unusual increases, decreases, or pattern changes that may require investigation. This module explains how time-series and anomaly detection methods can support public health without replacing epidemiologic interpretation. Automated alerts may identify signals faster, but signals are not diagnoses or confirmed events. Staff need to understand baselines, seasonality, reporting delays, thresholds, alert fatigue, and the difference between statistical anomalies and public health significance. Learners will practice designing an anomaly detection review plan that includes data quality checks, baseline selection, threshold rationale, human review, and escalation procedures.</a:t>
-            </a:r>
-            <a:endParaRPr lang="en-US" sz="1400" dirty="0"/>
+              <a:t>Level: applied/foundational</a:t>
+            </a:r>
+            <a:endParaRPr lang="en-US" sz="1250" dirty="0"/>
+          </a:p>
+          <a:p>
+            <a:pPr indent="0" marL="0">
+              <a:buNone/>
+            </a:pPr>
+            <a:r>
+              <a:rPr lang="en-US" sz="1250" dirty="0">
+                <a:solidFill>
+                  <a:srgbClr val="17364A"/>
+                </a:solidFill>
+                <a:latin typeface="Aptos" pitchFamily="34" charset="0"/>
+                <a:ea typeface="Aptos" pitchFamily="34" charset="-122"/>
+                <a:cs typeface="Aptos" pitchFamily="34" charset="-120"/>
+              </a:rPr>
+              <a:t>Primary track: Analytics and Modeling Track</a:t>
+            </a:r>
+            <a:endParaRPr lang="en-US" sz="1250" dirty="0"/>
+          </a:p>
+          <a:p>
+            <a:pPr indent="0" marL="0">
+              <a:buNone/>
+            </a:pPr>
+            <a:r>
+              <a:rPr lang="en-US" sz="1250" dirty="0">
+                <a:solidFill>
+                  <a:srgbClr val="17364A"/>
+                </a:solidFill>
+                <a:latin typeface="Aptos" pitchFamily="34" charset="0"/>
+                <a:ea typeface="Aptos" pitchFamily="34" charset="-122"/>
+                <a:cs typeface="Aptos" pitchFamily="34" charset="-120"/>
+              </a:rPr>
+              <a:t>Appears in tracks: analytics-modeling</a:t>
+            </a:r>
+            <a:endParaRPr lang="en-US" sz="1250" dirty="0"/>
+          </a:p>
+        </p:txBody>
+      </p:sp>
+      <p:sp>
+        <p:nvSpPr>
+          <p:cNvPr id="12" name="Shape 10"/>
+          <p:cNvSpPr/>
+          <p:nvPr/>
+        </p:nvSpPr>
+        <p:spPr>
+          <a:xfrm>
+            <a:off x="7909560" y="3611880"/>
+            <a:ext cx="3154680" cy="1783080"/>
+          </a:xfrm>
+          <a:prstGeom prst="roundRect">
+            <a:avLst>
+              <a:gd name="adj" fmla="val 6154"/>
+            </a:avLst>
+          </a:prstGeom>
+          <a:solidFill>
+            <a:srgbClr val="EEF8ED"/>
+          </a:solidFill>
+          <a:ln w="12700">
+            <a:solidFill>
+              <a:srgbClr val="B9D7E6"/>
+            </a:solidFill>
+            <a:prstDash val="solid"/>
+          </a:ln>
+        </p:spPr>
+      </p:sp>
+      <p:sp>
+        <p:nvSpPr>
+          <p:cNvPr id="13" name="Text 11"/>
+          <p:cNvSpPr/>
+          <p:nvPr/>
+        </p:nvSpPr>
+        <p:spPr>
+          <a:xfrm>
+            <a:off x="8074152" y="3758184"/>
+            <a:ext cx="2825496" cy="201168"/>
+          </a:xfrm>
+          <a:prstGeom prst="rect">
+            <a:avLst/>
+          </a:prstGeom>
+          <a:noFill/>
+          <a:ln/>
+        </p:spPr>
+        <p:txBody>
+          <a:bodyPr wrap="square" lIns="0" tIns="0" rIns="0" bIns="0" rtlCol="0" anchor="ctr"/>
+          <a:lstStyle/>
+          <a:p>
+            <a:pPr indent="0" marL="0">
+              <a:buNone/>
+            </a:pPr>
+            <a:r>
+              <a:rPr lang="en-US" sz="950" b="1" dirty="0">
+                <a:solidFill>
+                  <a:srgbClr val="0068B7"/>
+                </a:solidFill>
+                <a:latin typeface="Aptos" pitchFamily="34" charset="0"/>
+                <a:ea typeface="Aptos" pitchFamily="34" charset="-122"/>
+                <a:cs typeface="Aptos" pitchFamily="34" charset="-120"/>
+              </a:rPr>
+              <a:t>Learning approach</a:t>
+            </a:r>
+            <a:endParaRPr lang="en-US" sz="950" dirty="0"/>
+          </a:p>
+        </p:txBody>
+      </p:sp>
+      <p:sp>
+        <p:nvSpPr>
+          <p:cNvPr id="14" name="Text 12"/>
+          <p:cNvSpPr/>
+          <p:nvPr/>
+        </p:nvSpPr>
+        <p:spPr>
+          <a:xfrm>
+            <a:off x="8074152" y="4050792"/>
+            <a:ext cx="2825496" cy="1216152"/>
+          </a:xfrm>
+          <a:prstGeom prst="rect">
+            <a:avLst/>
+          </a:prstGeom>
+          <a:noFill/>
+          <a:ln/>
+        </p:spPr>
+        <p:txBody>
+          <a:bodyPr wrap="square" lIns="0" tIns="0" rIns="0" bIns="0" rtlCol="0" anchor="t">
+            <a:normAutofit/>
+          </a:bodyPr>
+          <a:lstStyle/>
+          <a:p>
+            <a:pPr indent="0" marL="0">
+              <a:buNone/>
+            </a:pPr>
+            <a:r>
+              <a:rPr lang="en-US" sz="1250" dirty="0">
+                <a:solidFill>
+                  <a:srgbClr val="17364A"/>
+                </a:solidFill>
+                <a:latin typeface="Aptos" pitchFamily="34" charset="0"/>
+                <a:ea typeface="Aptos" pitchFamily="34" charset="-122"/>
+                <a:cs typeface="Aptos" pitchFamily="34" charset="-120"/>
+              </a:rPr>
+              <a:t>Review the core ideas, complete the practical exercise, check your understanding, and use the related plays and tools to apply the lesson.</a:t>
+            </a:r>
+            <a:endParaRPr lang="en-US" sz="1250" dirty="0"/>
           </a:p>
         </p:txBody>
       </p:sp>
@@ -5844,7 +9224,32 @@
       </p:sp>
       <p:sp>
         <p:nvSpPr>
-          <p:cNvPr id="3" name="Text 1"/>
+          <p:cNvPr id="3" name="Shape 1"/>
+          <p:cNvSpPr/>
+          <p:nvPr/>
+        </p:nvSpPr>
+        <p:spPr>
+          <a:xfrm>
+            <a:off x="0" y="164592"/>
+            <a:ext cx="146304" cy="6693408"/>
+          </a:xfrm>
+          <a:prstGeom prst="rect">
+            <a:avLst/>
+          </a:prstGeom>
+          <a:solidFill>
+            <a:srgbClr val="2F8A28"/>
+          </a:solidFill>
+          <a:ln w="12700">
+            <a:solidFill>
+              <a:srgbClr val="2F8A28"/>
+            </a:solidFill>
+            <a:prstDash val="solid"/>
+          </a:ln>
+        </p:spPr>
+      </p:sp>
+      <p:sp>
+        <p:nvSpPr>
+          <p:cNvPr id="4" name="Text 2"/>
           <p:cNvSpPr/>
           <p:nvPr/>
         </p:nvSpPr>
@@ -5883,7 +9288,7 @@
       </p:sp>
       <p:sp>
         <p:nvSpPr>
-          <p:cNvPr id="4" name="Text 2"/>
+          <p:cNvPr id="5" name="Text 3"/>
           <p:cNvSpPr/>
           <p:nvPr/>
         </p:nvSpPr>
@@ -5922,7 +9327,7 @@
       </p:sp>
       <p:sp>
         <p:nvSpPr>
-          <p:cNvPr id="5" name="Text 3"/>
+          <p:cNvPr id="6" name="Text 4"/>
           <p:cNvSpPr/>
           <p:nvPr/>
         </p:nvSpPr>
@@ -5961,13 +9366,77 @@
       </p:sp>
       <p:sp>
         <p:nvSpPr>
-          <p:cNvPr id="6" name="Text 4"/>
+          <p:cNvPr id="7" name="Shape 5"/>
           <p:cNvSpPr/>
           <p:nvPr/>
         </p:nvSpPr>
         <p:spPr>
           <a:xfrm>
             <a:off x="640080" y="658368"/>
+            <a:ext cx="420624" cy="420624"/>
+          </a:xfrm>
+          <a:prstGeom prst="ellipse">
+            <a:avLst/>
+          </a:prstGeom>
+          <a:solidFill>
+            <a:srgbClr val="0068B7"/>
+          </a:solidFill>
+          <a:ln w="12700">
+            <a:solidFill>
+              <a:srgbClr val="0068B7"/>
+            </a:solidFill>
+            <a:prstDash val="solid"/>
+          </a:ln>
+        </p:spPr>
+      </p:sp>
+      <p:sp>
+        <p:nvSpPr>
+          <p:cNvPr id="8" name="Text 6"/>
+          <p:cNvSpPr/>
+          <p:nvPr/>
+        </p:nvSpPr>
+        <p:spPr>
+          <a:xfrm>
+            <a:off x="640080" y="731520"/>
+            <a:ext cx="420624" cy="164592"/>
+          </a:xfrm>
+          <a:prstGeom prst="rect">
+            <a:avLst/>
+          </a:prstGeom>
+          <a:noFill/>
+          <a:ln/>
+        </p:spPr>
+        <p:txBody>
+          <a:bodyPr wrap="square" lIns="0" tIns="0" rIns="0" bIns="0" rtlCol="0" anchor="ctr"/>
+          <a:lstStyle/>
+          <a:p>
+            <a:pPr algn="ctr" indent="0" marL="0">
+              <a:buNone/>
+            </a:pPr>
+            <a:r>
+              <a:rPr lang="en-US" sz="1100" b="1" dirty="0">
+                <a:solidFill>
+                  <a:srgbClr val="FFFFFF"/>
+                </a:solidFill>
+                <a:latin typeface="Aptos" pitchFamily="34" charset="0"/>
+                <a:ea typeface="Aptos" pitchFamily="34" charset="-122"/>
+                <a:cs typeface="Aptos" pitchFamily="34" charset="-120"/>
+              </a:rPr>
+              <a:t>11</a:t>
+            </a:r>
+            <a:endParaRPr lang="en-US" sz="1100" dirty="0"/>
+          </a:p>
+        </p:txBody>
+      </p:sp>
+      <p:sp>
+        <p:nvSpPr>
+          <p:cNvPr id="9" name="Text 7"/>
+          <p:cNvSpPr/>
+          <p:nvPr/>
+        </p:nvSpPr>
+        <p:spPr>
+          <a:xfrm>
+            <a:off x="640080" y="621792"/>
             <a:ext cx="10881360" cy="566928"/>
           </a:xfrm>
           <a:prstGeom prst="rect">
@@ -5994,7 +9463,7 @@
                 <a:ea typeface="Aptos Display" pitchFamily="34" charset="-122"/>
                 <a:cs typeface="Aptos Display" pitchFamily="34" charset="-120"/>
               </a:rPr>
-              <a:t>References and Resources</a:t>
+              <a:t>Expected Assignment</a:t>
             </a:r>
             <a:endParaRPr lang="en-US" sz="2700" dirty="0"/>
           </a:p>
@@ -6002,14 +9471,14 @@
       </p:sp>
       <p:sp>
         <p:nvSpPr>
-          <p:cNvPr id="7" name="Text 5"/>
-          <p:cNvSpPr/>
-          <p:nvPr/>
-        </p:nvSpPr>
-        <p:spPr>
-          <a:xfrm>
-            <a:off x="822960" y="1325880"/>
-            <a:ext cx="10378440" cy="4800600"/>
+          <p:cNvPr id="10" name="Text 8"/>
+          <p:cNvSpPr/>
+          <p:nvPr/>
+        </p:nvSpPr>
+        <p:spPr>
+          <a:xfrm>
+            <a:off x="868680" y="1417320"/>
+            <a:ext cx="6675120" cy="4434840"/>
           </a:xfrm>
           <a:prstGeom prst="rect">
             <a:avLst/>
@@ -6024,7 +9493,7 @@
           <a:lstStyle/>
           <a:p>
             <a:r>
-              <a:rPr lang="en-US" sz="1450" dirty="0">
+              <a:rPr lang="en-US" sz="1700" dirty="0">
                 <a:solidFill>
                   <a:srgbClr val="17364A"/>
                 </a:solidFill>
@@ -6032,13 +9501,1209 @@
                 <a:ea typeface="Aptos" pitchFamily="34" charset="-122"/>
                 <a:cs typeface="Aptos" pitchFamily="34" charset="-120"/>
               </a:rPr>
+              <a:t>Anomaly detection review plan</a:t>
+            </a:r>
+            <a:endParaRPr lang="en-US" sz="1700" dirty="0"/>
+          </a:p>
+          <a:p>
+            <a:r>
+              <a:rPr lang="en-US" sz="1700" dirty="0">
+                <a:solidFill>
+                  <a:srgbClr val="17364A"/>
+                </a:solidFill>
+                <a:latin typeface="Aptos" pitchFamily="34" charset="0"/>
+                <a:ea typeface="Aptos" pitchFamily="34" charset="-122"/>
+                <a:cs typeface="Aptos" pitchFamily="34" charset="-120"/>
+              </a:rPr>
+              <a:t>Baseline and threshold rationale</a:t>
+            </a:r>
+            <a:endParaRPr lang="en-US" sz="1700" dirty="0"/>
+          </a:p>
+          <a:p>
+            <a:r>
+              <a:rPr lang="en-US" sz="1700" dirty="0">
+                <a:solidFill>
+                  <a:srgbClr val="17364A"/>
+                </a:solidFill>
+                <a:latin typeface="Aptos" pitchFamily="34" charset="0"/>
+                <a:ea typeface="Aptos" pitchFamily="34" charset="-122"/>
+                <a:cs typeface="Aptos" pitchFamily="34" charset="-120"/>
+              </a:rPr>
+              <a:t>Alert review protocol</a:t>
+            </a:r>
+            <a:endParaRPr lang="en-US" sz="1700" dirty="0"/>
+          </a:p>
+          <a:p>
+            <a:r>
+              <a:rPr lang="en-US" sz="1700" dirty="0">
+                <a:solidFill>
+                  <a:srgbClr val="17364A"/>
+                </a:solidFill>
+                <a:latin typeface="Aptos" pitchFamily="34" charset="0"/>
+                <a:ea typeface="Aptos" pitchFamily="34" charset="-122"/>
+                <a:cs typeface="Aptos" pitchFamily="34" charset="-120"/>
+              </a:rPr>
+              <a:t>Signal documentation template</a:t>
+            </a:r>
+            <a:endParaRPr lang="en-US" sz="1700" dirty="0"/>
+          </a:p>
+        </p:txBody>
+      </p:sp>
+      <p:sp>
+        <p:nvSpPr>
+          <p:cNvPr id="11" name="Shape 9"/>
+          <p:cNvSpPr/>
+          <p:nvPr/>
+        </p:nvSpPr>
+        <p:spPr>
+          <a:xfrm>
+            <a:off x="7909560" y="1417320"/>
+            <a:ext cx="3154680" cy="1828800"/>
+          </a:xfrm>
+          <a:prstGeom prst="roundRect">
+            <a:avLst>
+              <a:gd name="adj" fmla="val 6000"/>
+            </a:avLst>
+          </a:prstGeom>
+          <a:solidFill>
+            <a:srgbClr val="EEF8ED"/>
+          </a:solidFill>
+          <a:ln w="12700">
+            <a:solidFill>
+              <a:srgbClr val="B9D7E6"/>
+            </a:solidFill>
+            <a:prstDash val="solid"/>
+          </a:ln>
+        </p:spPr>
+      </p:sp>
+      <p:sp>
+        <p:nvSpPr>
+          <p:cNvPr id="12" name="Text 10"/>
+          <p:cNvSpPr/>
+          <p:nvPr/>
+        </p:nvSpPr>
+        <p:spPr>
+          <a:xfrm>
+            <a:off x="8074152" y="1563624"/>
+            <a:ext cx="2825496" cy="201168"/>
+          </a:xfrm>
+          <a:prstGeom prst="rect">
+            <a:avLst/>
+          </a:prstGeom>
+          <a:noFill/>
+          <a:ln/>
+        </p:spPr>
+        <p:txBody>
+          <a:bodyPr wrap="square" lIns="0" tIns="0" rIns="0" bIns="0" rtlCol="0" anchor="ctr"/>
+          <a:lstStyle/>
+          <a:p>
+            <a:pPr indent="0" marL="0">
+              <a:buNone/>
+            </a:pPr>
+            <a:r>
+              <a:rPr lang="en-US" sz="950" b="1" dirty="0">
+                <a:solidFill>
+                  <a:srgbClr val="0068B7"/>
+                </a:solidFill>
+                <a:latin typeface="Aptos" pitchFamily="34" charset="0"/>
+                <a:ea typeface="Aptos" pitchFamily="34" charset="-122"/>
+                <a:cs typeface="Aptos" pitchFamily="34" charset="-120"/>
+              </a:rPr>
+              <a:t>Key idea</a:t>
+            </a:r>
+            <a:endParaRPr lang="en-US" sz="950" dirty="0"/>
+          </a:p>
+        </p:txBody>
+      </p:sp>
+      <p:sp>
+        <p:nvSpPr>
+          <p:cNvPr id="13" name="Text 11"/>
+          <p:cNvSpPr/>
+          <p:nvPr/>
+        </p:nvSpPr>
+        <p:spPr>
+          <a:xfrm>
+            <a:off x="8074152" y="1856232"/>
+            <a:ext cx="2825496" cy="1261872"/>
+          </a:xfrm>
+          <a:prstGeom prst="rect">
+            <a:avLst/>
+          </a:prstGeom>
+          <a:noFill/>
+          <a:ln/>
+        </p:spPr>
+        <p:txBody>
+          <a:bodyPr wrap="square" lIns="0" tIns="0" rIns="0" bIns="0" rtlCol="0" anchor="t">
+            <a:normAutofit/>
+          </a:bodyPr>
+          <a:lstStyle/>
+          <a:p>
+            <a:pPr indent="0" marL="0">
+              <a:buNone/>
+            </a:pPr>
+            <a:r>
+              <a:rPr lang="en-US" sz="1250" dirty="0">
+                <a:solidFill>
+                  <a:srgbClr val="17364A"/>
+                </a:solidFill>
+                <a:latin typeface="Aptos" pitchFamily="34" charset="0"/>
+                <a:ea typeface="Aptos" pitchFamily="34" charset="-122"/>
+                <a:cs typeface="Aptos" pitchFamily="34" charset="-120"/>
+              </a:rPr>
+              <a:t>Anomaly detection review plan</a:t>
+            </a:r>
+            <a:endParaRPr lang="en-US" sz="1250" dirty="0"/>
+          </a:p>
+        </p:txBody>
+      </p:sp>
+      <p:sp>
+        <p:nvSpPr>
+          <p:cNvPr id="14" name="Shape 12"/>
+          <p:cNvSpPr/>
+          <p:nvPr/>
+        </p:nvSpPr>
+        <p:spPr>
+          <a:xfrm>
+            <a:off x="7909560" y="3520440"/>
+            <a:ext cx="3154680" cy="1737360"/>
+          </a:xfrm>
+          <a:prstGeom prst="roundRect">
+            <a:avLst>
+              <a:gd name="adj" fmla="val 6316"/>
+            </a:avLst>
+          </a:prstGeom>
+          <a:solidFill>
+            <a:srgbClr val="EAF6F8"/>
+          </a:solidFill>
+          <a:ln w="12700">
+            <a:solidFill>
+              <a:srgbClr val="B9D7E6"/>
+            </a:solidFill>
+            <a:prstDash val="solid"/>
+          </a:ln>
+        </p:spPr>
+      </p:sp>
+      <p:sp>
+        <p:nvSpPr>
+          <p:cNvPr id="15" name="Text 13"/>
+          <p:cNvSpPr/>
+          <p:nvPr/>
+        </p:nvSpPr>
+        <p:spPr>
+          <a:xfrm>
+            <a:off x="8074152" y="3666744"/>
+            <a:ext cx="2825496" cy="201168"/>
+          </a:xfrm>
+          <a:prstGeom prst="rect">
+            <a:avLst/>
+          </a:prstGeom>
+          <a:noFill/>
+          <a:ln/>
+        </p:spPr>
+        <p:txBody>
+          <a:bodyPr wrap="square" lIns="0" tIns="0" rIns="0" bIns="0" rtlCol="0" anchor="ctr"/>
+          <a:lstStyle/>
+          <a:p>
+            <a:pPr indent="0" marL="0">
+              <a:buNone/>
+            </a:pPr>
+            <a:r>
+              <a:rPr lang="en-US" sz="950" b="1" dirty="0">
+                <a:solidFill>
+                  <a:srgbClr val="0068B7"/>
+                </a:solidFill>
+                <a:latin typeface="Aptos" pitchFamily="34" charset="0"/>
+                <a:ea typeface="Aptos" pitchFamily="34" charset="-122"/>
+                <a:cs typeface="Aptos" pitchFamily="34" charset="-120"/>
+              </a:rPr>
+              <a:t>Use this for</a:t>
+            </a:r>
+            <a:endParaRPr lang="en-US" sz="950" dirty="0"/>
+          </a:p>
+        </p:txBody>
+      </p:sp>
+      <p:sp>
+        <p:nvSpPr>
+          <p:cNvPr id="16" name="Text 14"/>
+          <p:cNvSpPr/>
+          <p:nvPr/>
+        </p:nvSpPr>
+        <p:spPr>
+          <a:xfrm>
+            <a:off x="8074152" y="3959352"/>
+            <a:ext cx="2825496" cy="1170432"/>
+          </a:xfrm>
+          <a:prstGeom prst="rect">
+            <a:avLst/>
+          </a:prstGeom>
+          <a:noFill/>
+          <a:ln/>
+        </p:spPr>
+        <p:txBody>
+          <a:bodyPr wrap="square" lIns="0" tIns="0" rIns="0" bIns="0" rtlCol="0" anchor="t">
+            <a:normAutofit/>
+          </a:bodyPr>
+          <a:lstStyle/>
+          <a:p>
+            <a:pPr indent="0" marL="0">
+              <a:buNone/>
+            </a:pPr>
+            <a:r>
+              <a:rPr lang="en-US" sz="1250" dirty="0">
+                <a:solidFill>
+                  <a:srgbClr val="17364A"/>
+                </a:solidFill>
+                <a:latin typeface="Aptos" pitchFamily="34" charset="0"/>
+                <a:ea typeface="Aptos" pitchFamily="34" charset="-122"/>
+                <a:cs typeface="Aptos" pitchFamily="34" charset="-120"/>
+              </a:rPr>
+              <a:t>Connect the concept to public health decisions, safeguards, documentation, or implementation work.</a:t>
+            </a:r>
+            <a:endParaRPr lang="en-US" sz="1250" dirty="0"/>
+          </a:p>
+        </p:txBody>
+      </p:sp>
+    </p:spTree>
+  </p:cSld>
+  <p:clrMapOvr>
+    <a:masterClrMapping/>
+  </p:clrMapOvr>
+</p:sld>
+</file>
+
+<file path=ppt/slides/slide21.xml><?xml version="1.0" encoding="utf-8"?>
+<p:sld xmlns:a="http://schemas.openxmlformats.org/drawingml/2006/main" xmlns:r="http://schemas.openxmlformats.org/officeDocument/2006/relationships" xmlns:p="http://schemas.openxmlformats.org/presentationml/2006/main">
+  <p:cSld name="Slide 21">
+    <p:bg>
+      <p:bgPr>
+        <a:solidFill>
+          <a:srgbClr val="F7FBFD"/>
+        </a:solidFill>
+      </p:bgPr>
+    </p:bg>
+    <p:spTree>
+      <p:nvGrpSpPr>
+        <p:cNvPr id="1" name=""/>
+        <p:cNvGrpSpPr/>
+        <p:nvPr/>
+      </p:nvGrpSpPr>
+      <p:grpSpPr>
+        <a:xfrm>
+          <a:off x="0" y="0"/>
+          <a:ext cx="0" cy="0"/>
+          <a:chOff x="0" y="0"/>
+          <a:chExt cx="0" cy="0"/>
+        </a:xfrm>
+      </p:grpSpPr>
+      <p:sp>
+        <p:nvSpPr>
+          <p:cNvPr id="2" name="Shape 0"/>
+          <p:cNvSpPr/>
+          <p:nvPr/>
+        </p:nvSpPr>
+        <p:spPr>
+          <a:xfrm>
+            <a:off x="0" y="0"/>
+            <a:ext cx="12191695" cy="164592"/>
+          </a:xfrm>
+          <a:prstGeom prst="rect">
+            <a:avLst/>
+          </a:prstGeom>
+          <a:solidFill>
+            <a:srgbClr val="0068B7"/>
+          </a:solidFill>
+          <a:ln w="12700">
+            <a:solidFill>
+              <a:srgbClr val="0068B7"/>
+            </a:solidFill>
+            <a:prstDash val="solid"/>
+          </a:ln>
+        </p:spPr>
+      </p:sp>
+      <p:sp>
+        <p:nvSpPr>
+          <p:cNvPr id="3" name="Shape 1"/>
+          <p:cNvSpPr/>
+          <p:nvPr/>
+        </p:nvSpPr>
+        <p:spPr>
+          <a:xfrm>
+            <a:off x="0" y="164592"/>
+            <a:ext cx="146304" cy="6693408"/>
+          </a:xfrm>
+          <a:prstGeom prst="rect">
+            <a:avLst/>
+          </a:prstGeom>
+          <a:solidFill>
+            <a:srgbClr val="2F8A28"/>
+          </a:solidFill>
+          <a:ln w="12700">
+            <a:solidFill>
+              <a:srgbClr val="2F8A28"/>
+            </a:solidFill>
+            <a:prstDash val="solid"/>
+          </a:ln>
+        </p:spPr>
+      </p:sp>
+      <p:sp>
+        <p:nvSpPr>
+          <p:cNvPr id="4" name="Text 2"/>
+          <p:cNvSpPr/>
+          <p:nvPr/>
+        </p:nvSpPr>
+        <p:spPr>
+          <a:xfrm>
+            <a:off x="502920" y="292608"/>
+            <a:ext cx="10149840" cy="256032"/>
+          </a:xfrm>
+          <a:prstGeom prst="rect">
+            <a:avLst/>
+          </a:prstGeom>
+          <a:noFill/>
+          <a:ln/>
+        </p:spPr>
+        <p:txBody>
+          <a:bodyPr wrap="square" lIns="0" tIns="0" rIns="0" bIns="0" rtlCol="0" anchor="ctr"/>
+          <a:lstStyle/>
+          <a:p>
+            <a:pPr indent="0" marL="0">
+              <a:buNone/>
+            </a:pPr>
+            <a:r>
+              <a:rPr lang="en-US" sz="900" b="1" dirty="0">
+                <a:solidFill>
+                  <a:srgbClr val="5F7181"/>
+                </a:solidFill>
+                <a:latin typeface="Aptos" pitchFamily="34" charset="0"/>
+                <a:ea typeface="Aptos" pitchFamily="34" charset="-122"/>
+                <a:cs typeface="Aptos" pitchFamily="34" charset="-120"/>
+              </a:rPr>
+              <a:t>Time-Series Analysis, Anomaly Detection, and Outbreak Signals</a:t>
+            </a:r>
+            <a:endParaRPr lang="en-US" sz="900" dirty="0"/>
+          </a:p>
+        </p:txBody>
+      </p:sp>
+      <p:sp>
+        <p:nvSpPr>
+          <p:cNvPr id="5" name="Text 3"/>
+          <p:cNvSpPr/>
+          <p:nvPr/>
+        </p:nvSpPr>
+        <p:spPr>
+          <a:xfrm>
+            <a:off x="502920" y="6537960"/>
+            <a:ext cx="7772400" cy="201168"/>
+          </a:xfrm>
+          <a:prstGeom prst="rect">
+            <a:avLst/>
+          </a:prstGeom>
+          <a:noFill/>
+          <a:ln/>
+        </p:spPr>
+        <p:txBody>
+          <a:bodyPr wrap="square" lIns="0" tIns="0" rIns="0" bIns="0" rtlCol="0" anchor="ctr"/>
+          <a:lstStyle/>
+          <a:p>
+            <a:pPr indent="0" marL="0">
+              <a:buNone/>
+            </a:pPr>
+            <a:r>
+              <a:rPr lang="en-US" sz="800" dirty="0">
+                <a:solidFill>
+                  <a:srgbClr val="5F7181"/>
+                </a:solidFill>
+                <a:latin typeface="Aptos" pitchFamily="34" charset="0"/>
+                <a:ea typeface="Aptos" pitchFamily="34" charset="-122"/>
+                <a:cs typeface="Aptos" pitchFamily="34" charset="-120"/>
+              </a:rPr>
+              <a:t>AI Playbook and Toolkit for Public Health Departments</a:t>
+            </a:r>
+            <a:endParaRPr lang="en-US" sz="800" dirty="0"/>
+          </a:p>
+        </p:txBody>
+      </p:sp>
+      <p:sp>
+        <p:nvSpPr>
+          <p:cNvPr id="6" name="Text 4"/>
+          <p:cNvSpPr/>
+          <p:nvPr/>
+        </p:nvSpPr>
+        <p:spPr>
+          <a:xfrm>
+            <a:off x="9966960" y="6537960"/>
+            <a:ext cx="1645920" cy="201168"/>
+          </a:xfrm>
+          <a:prstGeom prst="rect">
+            <a:avLst/>
+          </a:prstGeom>
+          <a:noFill/>
+          <a:ln/>
+        </p:spPr>
+        <p:txBody>
+          <a:bodyPr wrap="square" lIns="0" tIns="0" rIns="0" bIns="0" rtlCol="0" anchor="ctr"/>
+          <a:lstStyle/>
+          <a:p>
+            <a:pPr algn="r" indent="0" marL="0">
+              <a:buNone/>
+            </a:pPr>
+            <a:r>
+              <a:rPr lang="en-US" sz="800" dirty="0">
+                <a:solidFill>
+                  <a:srgbClr val="5F7181"/>
+                </a:solidFill>
+                <a:latin typeface="Aptos" pitchFamily="34" charset="0"/>
+                <a:ea typeface="Aptos" pitchFamily="34" charset="-122"/>
+                <a:cs typeface="Aptos" pitchFamily="34" charset="-120"/>
+              </a:rPr>
+              <a:t>© Paula Soper</a:t>
+            </a:r>
+            <a:endParaRPr lang="en-US" sz="800" dirty="0"/>
+          </a:p>
+        </p:txBody>
+      </p:sp>
+      <p:sp>
+        <p:nvSpPr>
+          <p:cNvPr id="7" name="Shape 5"/>
+          <p:cNvSpPr/>
+          <p:nvPr/>
+        </p:nvSpPr>
+        <p:spPr>
+          <a:xfrm>
+            <a:off x="640080" y="658368"/>
+            <a:ext cx="420624" cy="420624"/>
+          </a:xfrm>
+          <a:prstGeom prst="ellipse">
+            <a:avLst/>
+          </a:prstGeom>
+          <a:solidFill>
+            <a:srgbClr val="0068B7"/>
+          </a:solidFill>
+          <a:ln w="12700">
+            <a:solidFill>
+              <a:srgbClr val="0068B7"/>
+            </a:solidFill>
+            <a:prstDash val="solid"/>
+          </a:ln>
+        </p:spPr>
+      </p:sp>
+      <p:sp>
+        <p:nvSpPr>
+          <p:cNvPr id="8" name="Text 6"/>
+          <p:cNvSpPr/>
+          <p:nvPr/>
+        </p:nvSpPr>
+        <p:spPr>
+          <a:xfrm>
+            <a:off x="640080" y="731520"/>
+            <a:ext cx="420624" cy="164592"/>
+          </a:xfrm>
+          <a:prstGeom prst="rect">
+            <a:avLst/>
+          </a:prstGeom>
+          <a:noFill/>
+          <a:ln/>
+        </p:spPr>
+        <p:txBody>
+          <a:bodyPr wrap="square" lIns="0" tIns="0" rIns="0" bIns="0" rtlCol="0" anchor="ctr"/>
+          <a:lstStyle/>
+          <a:p>
+            <a:pPr algn="ctr" indent="0" marL="0">
+              <a:buNone/>
+            </a:pPr>
+            <a:r>
+              <a:rPr lang="en-US" sz="1100" b="1" dirty="0">
+                <a:solidFill>
+                  <a:srgbClr val="FFFFFF"/>
+                </a:solidFill>
+                <a:latin typeface="Aptos" pitchFamily="34" charset="0"/>
+                <a:ea typeface="Aptos" pitchFamily="34" charset="-122"/>
+                <a:cs typeface="Aptos" pitchFamily="34" charset="-120"/>
+              </a:rPr>
+              <a:t>12</a:t>
+            </a:r>
+            <a:endParaRPr lang="en-US" sz="1100" dirty="0"/>
+          </a:p>
+        </p:txBody>
+      </p:sp>
+      <p:sp>
+        <p:nvSpPr>
+          <p:cNvPr id="9" name="Text 7"/>
+          <p:cNvSpPr/>
+          <p:nvPr/>
+        </p:nvSpPr>
+        <p:spPr>
+          <a:xfrm>
+            <a:off x="640080" y="621792"/>
+            <a:ext cx="10881360" cy="566928"/>
+          </a:xfrm>
+          <a:prstGeom prst="rect">
+            <a:avLst/>
+          </a:prstGeom>
+          <a:noFill/>
+          <a:ln/>
+        </p:spPr>
+        <p:txBody>
+          <a:bodyPr wrap="square" lIns="0" tIns="0" rIns="0" bIns="0" rtlCol="0" anchor="ctr">
+            <a:normAutofit/>
+          </a:bodyPr>
+          <a:lstStyle/>
+          <a:p>
+            <a:pPr indent="0" marL="0">
+              <a:buNone/>
+            </a:pPr>
+            <a:r>
+              <a:rPr lang="en-US" sz="2700" b="1" dirty="0">
+                <a:solidFill>
+                  <a:srgbClr val="003A63"/>
+                </a:solidFill>
+                <a:latin typeface="Aptos Display" pitchFamily="34" charset="0"/>
+                <a:ea typeface="Aptos Display" pitchFamily="34" charset="-122"/>
+                <a:cs typeface="Aptos Display" pitchFamily="34" charset="-120"/>
+              </a:rPr>
+              <a:t>Knowledge Check</a:t>
+            </a:r>
+            <a:endParaRPr lang="en-US" sz="2700" dirty="0"/>
+          </a:p>
+        </p:txBody>
+      </p:sp>
+      <p:sp>
+        <p:nvSpPr>
+          <p:cNvPr id="10" name="Text 8"/>
+          <p:cNvSpPr/>
+          <p:nvPr/>
+        </p:nvSpPr>
+        <p:spPr>
+          <a:xfrm>
+            <a:off x="868680" y="1417320"/>
+            <a:ext cx="6675120" cy="4434840"/>
+          </a:xfrm>
+          <a:prstGeom prst="rect">
+            <a:avLst/>
+          </a:prstGeom>
+          <a:noFill/>
+          <a:ln/>
+        </p:spPr>
+        <p:txBody>
+          <a:bodyPr wrap="square" lIns="635" tIns="635" rIns="635" bIns="635" rtlCol="0" anchor="t">
+            <a:normAutofit/>
+          </a:bodyPr>
+          <a:lstStyle/>
+          <a:p>
+            <a:r>
+              <a:rPr lang="en-US" sz="1700" dirty="0">
+                <a:solidFill>
+                  <a:srgbClr val="17364A"/>
+                </a:solidFill>
+                <a:latin typeface="Aptos" pitchFamily="34" charset="0"/>
+                <a:ea typeface="Aptos" pitchFamily="34" charset="-122"/>
+                <a:cs typeface="Aptos" pitchFamily="34" charset="-120"/>
+              </a:rPr>
+              <a:t>1. What is an anomaly in a public health time series?</a:t>
+            </a:r>
+            <a:endParaRPr lang="en-US" sz="1700" dirty="0"/>
+          </a:p>
+          <a:p>
+            <a:r>
+              <a:rPr lang="en-US" sz="1700" dirty="0">
+                <a:solidFill>
+                  <a:srgbClr val="17364A"/>
+                </a:solidFill>
+                <a:latin typeface="Aptos" pitchFamily="34" charset="0"/>
+                <a:ea typeface="Aptos" pitchFamily="34" charset="-122"/>
+                <a:cs typeface="Aptos" pitchFamily="34" charset="-120"/>
+              </a:rPr>
+              <a:t>2. Why does seasonality matter?</a:t>
+            </a:r>
+            <a:endParaRPr lang="en-US" sz="1700" dirty="0"/>
+          </a:p>
+          <a:p>
+            <a:r>
+              <a:rPr lang="en-US" sz="1700" dirty="0">
+                <a:solidFill>
+                  <a:srgbClr val="17364A"/>
+                </a:solidFill>
+                <a:latin typeface="Aptos" pitchFamily="34" charset="0"/>
+                <a:ea typeface="Aptos" pitchFamily="34" charset="-122"/>
+                <a:cs typeface="Aptos" pitchFamily="34" charset="-120"/>
+              </a:rPr>
+              <a:t>3. What is a common risk of too many low-value alerts?</a:t>
+            </a:r>
+            <a:endParaRPr lang="en-US" sz="1700" dirty="0"/>
+          </a:p>
+          <a:p>
+            <a:r>
+              <a:rPr lang="en-US" sz="1700" dirty="0">
+                <a:solidFill>
+                  <a:srgbClr val="17364A"/>
+                </a:solidFill>
+                <a:latin typeface="Aptos" pitchFamily="34" charset="0"/>
+                <a:ea typeface="Aptos" pitchFamily="34" charset="-122"/>
+                <a:cs typeface="Aptos" pitchFamily="34" charset="-120"/>
+              </a:rPr>
+              <a:t>4. Which statement is most accurate?</a:t>
+            </a:r>
+            <a:endParaRPr lang="en-US" sz="1700" dirty="0"/>
+          </a:p>
+        </p:txBody>
+      </p:sp>
+      <p:sp>
+        <p:nvSpPr>
+          <p:cNvPr id="11" name="Shape 9"/>
+          <p:cNvSpPr/>
+          <p:nvPr/>
+        </p:nvSpPr>
+        <p:spPr>
+          <a:xfrm>
+            <a:off x="7909560" y="1417320"/>
+            <a:ext cx="3154680" cy="1828800"/>
+          </a:xfrm>
+          <a:prstGeom prst="roundRect">
+            <a:avLst>
+              <a:gd name="adj" fmla="val 6000"/>
+            </a:avLst>
+          </a:prstGeom>
+          <a:solidFill>
+            <a:srgbClr val="EEF8ED"/>
+          </a:solidFill>
+          <a:ln w="12700">
+            <a:solidFill>
+              <a:srgbClr val="B9D7E6"/>
+            </a:solidFill>
+            <a:prstDash val="solid"/>
+          </a:ln>
+        </p:spPr>
+      </p:sp>
+      <p:sp>
+        <p:nvSpPr>
+          <p:cNvPr id="12" name="Text 10"/>
+          <p:cNvSpPr/>
+          <p:nvPr/>
+        </p:nvSpPr>
+        <p:spPr>
+          <a:xfrm>
+            <a:off x="8074152" y="1563624"/>
+            <a:ext cx="2825496" cy="201168"/>
+          </a:xfrm>
+          <a:prstGeom prst="rect">
+            <a:avLst/>
+          </a:prstGeom>
+          <a:noFill/>
+          <a:ln/>
+        </p:spPr>
+        <p:txBody>
+          <a:bodyPr wrap="square" lIns="0" tIns="0" rIns="0" bIns="0" rtlCol="0" anchor="ctr"/>
+          <a:lstStyle/>
+          <a:p>
+            <a:pPr indent="0" marL="0">
+              <a:buNone/>
+            </a:pPr>
+            <a:r>
+              <a:rPr lang="en-US" sz="950" b="1" dirty="0">
+                <a:solidFill>
+                  <a:srgbClr val="0068B7"/>
+                </a:solidFill>
+                <a:latin typeface="Aptos" pitchFamily="34" charset="0"/>
+                <a:ea typeface="Aptos" pitchFamily="34" charset="-122"/>
+                <a:cs typeface="Aptos" pitchFamily="34" charset="-120"/>
+              </a:rPr>
+              <a:t>Key idea</a:t>
+            </a:r>
+            <a:endParaRPr lang="en-US" sz="950" dirty="0"/>
+          </a:p>
+        </p:txBody>
+      </p:sp>
+      <p:sp>
+        <p:nvSpPr>
+          <p:cNvPr id="13" name="Text 11"/>
+          <p:cNvSpPr/>
+          <p:nvPr/>
+        </p:nvSpPr>
+        <p:spPr>
+          <a:xfrm>
+            <a:off x="8074152" y="1856232"/>
+            <a:ext cx="2825496" cy="1261872"/>
+          </a:xfrm>
+          <a:prstGeom prst="rect">
+            <a:avLst/>
+          </a:prstGeom>
+          <a:noFill/>
+          <a:ln/>
+        </p:spPr>
+        <p:txBody>
+          <a:bodyPr wrap="square" lIns="0" tIns="0" rIns="0" bIns="0" rtlCol="0" anchor="t">
+            <a:normAutofit/>
+          </a:bodyPr>
+          <a:lstStyle/>
+          <a:p>
+            <a:pPr indent="0" marL="0">
+              <a:buNone/>
+            </a:pPr>
+            <a:r>
+              <a:rPr lang="en-US" sz="1250" dirty="0">
+                <a:solidFill>
+                  <a:srgbClr val="17364A"/>
+                </a:solidFill>
+                <a:latin typeface="Aptos" pitchFamily="34" charset="0"/>
+                <a:ea typeface="Aptos" pitchFamily="34" charset="-122"/>
+                <a:cs typeface="Aptos" pitchFamily="34" charset="-120"/>
+              </a:rPr>
+              <a:t>1. What is an anomaly in a public health time series?</a:t>
+            </a:r>
+            <a:endParaRPr lang="en-US" sz="1250" dirty="0"/>
+          </a:p>
+        </p:txBody>
+      </p:sp>
+      <p:sp>
+        <p:nvSpPr>
+          <p:cNvPr id="14" name="Shape 12"/>
+          <p:cNvSpPr/>
+          <p:nvPr/>
+        </p:nvSpPr>
+        <p:spPr>
+          <a:xfrm>
+            <a:off x="7909560" y="3520440"/>
+            <a:ext cx="3154680" cy="1737360"/>
+          </a:xfrm>
+          <a:prstGeom prst="roundRect">
+            <a:avLst>
+              <a:gd name="adj" fmla="val 6316"/>
+            </a:avLst>
+          </a:prstGeom>
+          <a:solidFill>
+            <a:srgbClr val="EAF6F8"/>
+          </a:solidFill>
+          <a:ln w="12700">
+            <a:solidFill>
+              <a:srgbClr val="B9D7E6"/>
+            </a:solidFill>
+            <a:prstDash val="solid"/>
+          </a:ln>
+        </p:spPr>
+      </p:sp>
+      <p:sp>
+        <p:nvSpPr>
+          <p:cNvPr id="15" name="Text 13"/>
+          <p:cNvSpPr/>
+          <p:nvPr/>
+        </p:nvSpPr>
+        <p:spPr>
+          <a:xfrm>
+            <a:off x="8074152" y="3666744"/>
+            <a:ext cx="2825496" cy="201168"/>
+          </a:xfrm>
+          <a:prstGeom prst="rect">
+            <a:avLst/>
+          </a:prstGeom>
+          <a:noFill/>
+          <a:ln/>
+        </p:spPr>
+        <p:txBody>
+          <a:bodyPr wrap="square" lIns="0" tIns="0" rIns="0" bIns="0" rtlCol="0" anchor="ctr"/>
+          <a:lstStyle/>
+          <a:p>
+            <a:pPr indent="0" marL="0">
+              <a:buNone/>
+            </a:pPr>
+            <a:r>
+              <a:rPr lang="en-US" sz="950" b="1" dirty="0">
+                <a:solidFill>
+                  <a:srgbClr val="0068B7"/>
+                </a:solidFill>
+                <a:latin typeface="Aptos" pitchFamily="34" charset="0"/>
+                <a:ea typeface="Aptos" pitchFamily="34" charset="-122"/>
+                <a:cs typeface="Aptos" pitchFamily="34" charset="-120"/>
+              </a:rPr>
+              <a:t>Use this for</a:t>
+            </a:r>
+            <a:endParaRPr lang="en-US" sz="950" dirty="0"/>
+          </a:p>
+        </p:txBody>
+      </p:sp>
+      <p:sp>
+        <p:nvSpPr>
+          <p:cNvPr id="16" name="Text 14"/>
+          <p:cNvSpPr/>
+          <p:nvPr/>
+        </p:nvSpPr>
+        <p:spPr>
+          <a:xfrm>
+            <a:off x="8074152" y="3959352"/>
+            <a:ext cx="2825496" cy="1170432"/>
+          </a:xfrm>
+          <a:prstGeom prst="rect">
+            <a:avLst/>
+          </a:prstGeom>
+          <a:noFill/>
+          <a:ln/>
+        </p:spPr>
+        <p:txBody>
+          <a:bodyPr wrap="square" lIns="0" tIns="0" rIns="0" bIns="0" rtlCol="0" anchor="t">
+            <a:normAutofit/>
+          </a:bodyPr>
+          <a:lstStyle/>
+          <a:p>
+            <a:pPr indent="0" marL="0">
+              <a:buNone/>
+            </a:pPr>
+            <a:r>
+              <a:rPr lang="en-US" sz="1250" dirty="0">
+                <a:solidFill>
+                  <a:srgbClr val="17364A"/>
+                </a:solidFill>
+                <a:latin typeface="Aptos" pitchFamily="34" charset="0"/>
+                <a:ea typeface="Aptos" pitchFamily="34" charset="-122"/>
+                <a:cs typeface="Aptos" pitchFamily="34" charset="-120"/>
+              </a:rPr>
+              <a:t>Connect the concept to public health decisions, safeguards, documentation, or implementation work.</a:t>
+            </a:r>
+            <a:endParaRPr lang="en-US" sz="1250" dirty="0"/>
+          </a:p>
+        </p:txBody>
+      </p:sp>
+    </p:spTree>
+  </p:cSld>
+  <p:clrMapOvr>
+    <a:masterClrMapping/>
+  </p:clrMapOvr>
+</p:sld>
+</file>
+
+<file path=ppt/slides/slide22.xml><?xml version="1.0" encoding="utf-8"?>
+<p:sld xmlns:a="http://schemas.openxmlformats.org/drawingml/2006/main" xmlns:r="http://schemas.openxmlformats.org/officeDocument/2006/relationships" xmlns:p="http://schemas.openxmlformats.org/presentationml/2006/main">
+  <p:cSld name="Slide 22">
+    <p:bg>
+      <p:bgPr>
+        <a:solidFill>
+          <a:srgbClr val="F7FBFD"/>
+        </a:solidFill>
+      </p:bgPr>
+    </p:bg>
+    <p:spTree>
+      <p:nvGrpSpPr>
+        <p:cNvPr id="1" name=""/>
+        <p:cNvGrpSpPr/>
+        <p:nvPr/>
+      </p:nvGrpSpPr>
+      <p:grpSpPr>
+        <a:xfrm>
+          <a:off x="0" y="0"/>
+          <a:ext cx="0" cy="0"/>
+          <a:chOff x="0" y="0"/>
+          <a:chExt cx="0" cy="0"/>
+        </a:xfrm>
+      </p:grpSpPr>
+      <p:sp>
+        <p:nvSpPr>
+          <p:cNvPr id="2" name="Shape 0"/>
+          <p:cNvSpPr/>
+          <p:nvPr/>
+        </p:nvSpPr>
+        <p:spPr>
+          <a:xfrm>
+            <a:off x="0" y="0"/>
+            <a:ext cx="12191695" cy="164592"/>
+          </a:xfrm>
+          <a:prstGeom prst="rect">
+            <a:avLst/>
+          </a:prstGeom>
+          <a:solidFill>
+            <a:srgbClr val="0068B7"/>
+          </a:solidFill>
+          <a:ln w="12700">
+            <a:solidFill>
+              <a:srgbClr val="0068B7"/>
+            </a:solidFill>
+            <a:prstDash val="solid"/>
+          </a:ln>
+        </p:spPr>
+      </p:sp>
+      <p:sp>
+        <p:nvSpPr>
+          <p:cNvPr id="3" name="Shape 1"/>
+          <p:cNvSpPr/>
+          <p:nvPr/>
+        </p:nvSpPr>
+        <p:spPr>
+          <a:xfrm>
+            <a:off x="0" y="164592"/>
+            <a:ext cx="146304" cy="6693408"/>
+          </a:xfrm>
+          <a:prstGeom prst="rect">
+            <a:avLst/>
+          </a:prstGeom>
+          <a:solidFill>
+            <a:srgbClr val="2F8A28"/>
+          </a:solidFill>
+          <a:ln w="12700">
+            <a:solidFill>
+              <a:srgbClr val="2F8A28"/>
+            </a:solidFill>
+            <a:prstDash val="solid"/>
+          </a:ln>
+        </p:spPr>
+      </p:sp>
+      <p:sp>
+        <p:nvSpPr>
+          <p:cNvPr id="4" name="Text 2"/>
+          <p:cNvSpPr/>
+          <p:nvPr/>
+        </p:nvSpPr>
+        <p:spPr>
+          <a:xfrm>
+            <a:off x="502920" y="292608"/>
+            <a:ext cx="10149840" cy="256032"/>
+          </a:xfrm>
+          <a:prstGeom prst="rect">
+            <a:avLst/>
+          </a:prstGeom>
+          <a:noFill/>
+          <a:ln/>
+        </p:spPr>
+        <p:txBody>
+          <a:bodyPr wrap="square" lIns="0" tIns="0" rIns="0" bIns="0" rtlCol="0" anchor="ctr"/>
+          <a:lstStyle/>
+          <a:p>
+            <a:pPr indent="0" marL="0">
+              <a:buNone/>
+            </a:pPr>
+            <a:r>
+              <a:rPr lang="en-US" sz="900" b="1" dirty="0">
+                <a:solidFill>
+                  <a:srgbClr val="5F7181"/>
+                </a:solidFill>
+                <a:latin typeface="Aptos" pitchFamily="34" charset="0"/>
+                <a:ea typeface="Aptos" pitchFamily="34" charset="-122"/>
+                <a:cs typeface="Aptos" pitchFamily="34" charset="-120"/>
+              </a:rPr>
+              <a:t>Time-Series Analysis, Anomaly Detection, and Outbreak Signals</a:t>
+            </a:r>
+            <a:endParaRPr lang="en-US" sz="900" dirty="0"/>
+          </a:p>
+        </p:txBody>
+      </p:sp>
+      <p:sp>
+        <p:nvSpPr>
+          <p:cNvPr id="5" name="Text 3"/>
+          <p:cNvSpPr/>
+          <p:nvPr/>
+        </p:nvSpPr>
+        <p:spPr>
+          <a:xfrm>
+            <a:off x="502920" y="6537960"/>
+            <a:ext cx="7772400" cy="201168"/>
+          </a:xfrm>
+          <a:prstGeom prst="rect">
+            <a:avLst/>
+          </a:prstGeom>
+          <a:noFill/>
+          <a:ln/>
+        </p:spPr>
+        <p:txBody>
+          <a:bodyPr wrap="square" lIns="0" tIns="0" rIns="0" bIns="0" rtlCol="0" anchor="ctr"/>
+          <a:lstStyle/>
+          <a:p>
+            <a:pPr indent="0" marL="0">
+              <a:buNone/>
+            </a:pPr>
+            <a:r>
+              <a:rPr lang="en-US" sz="800" dirty="0">
+                <a:solidFill>
+                  <a:srgbClr val="5F7181"/>
+                </a:solidFill>
+                <a:latin typeface="Aptos" pitchFamily="34" charset="0"/>
+                <a:ea typeface="Aptos" pitchFamily="34" charset="-122"/>
+                <a:cs typeface="Aptos" pitchFamily="34" charset="-120"/>
+              </a:rPr>
+              <a:t>AI Playbook and Toolkit for Public Health Departments</a:t>
+            </a:r>
+            <a:endParaRPr lang="en-US" sz="800" dirty="0"/>
+          </a:p>
+        </p:txBody>
+      </p:sp>
+      <p:sp>
+        <p:nvSpPr>
+          <p:cNvPr id="6" name="Text 4"/>
+          <p:cNvSpPr/>
+          <p:nvPr/>
+        </p:nvSpPr>
+        <p:spPr>
+          <a:xfrm>
+            <a:off x="9966960" y="6537960"/>
+            <a:ext cx="1645920" cy="201168"/>
+          </a:xfrm>
+          <a:prstGeom prst="rect">
+            <a:avLst/>
+          </a:prstGeom>
+          <a:noFill/>
+          <a:ln/>
+        </p:spPr>
+        <p:txBody>
+          <a:bodyPr wrap="square" lIns="0" tIns="0" rIns="0" bIns="0" rtlCol="0" anchor="ctr"/>
+          <a:lstStyle/>
+          <a:p>
+            <a:pPr algn="r" indent="0" marL="0">
+              <a:buNone/>
+            </a:pPr>
+            <a:r>
+              <a:rPr lang="en-US" sz="800" dirty="0">
+                <a:solidFill>
+                  <a:srgbClr val="5F7181"/>
+                </a:solidFill>
+                <a:latin typeface="Aptos" pitchFamily="34" charset="0"/>
+                <a:ea typeface="Aptos" pitchFamily="34" charset="-122"/>
+                <a:cs typeface="Aptos" pitchFamily="34" charset="-120"/>
+              </a:rPr>
+              <a:t>© Paula Soper</a:t>
+            </a:r>
+            <a:endParaRPr lang="en-US" sz="800" dirty="0"/>
+          </a:p>
+        </p:txBody>
+      </p:sp>
+      <p:sp>
+        <p:nvSpPr>
+          <p:cNvPr id="7" name="Shape 5"/>
+          <p:cNvSpPr/>
+          <p:nvPr/>
+        </p:nvSpPr>
+        <p:spPr>
+          <a:xfrm>
+            <a:off x="640080" y="658368"/>
+            <a:ext cx="420624" cy="420624"/>
+          </a:xfrm>
+          <a:prstGeom prst="ellipse">
+            <a:avLst/>
+          </a:prstGeom>
+          <a:solidFill>
+            <a:srgbClr val="0068B7"/>
+          </a:solidFill>
+          <a:ln w="12700">
+            <a:solidFill>
+              <a:srgbClr val="0068B7"/>
+            </a:solidFill>
+            <a:prstDash val="solid"/>
+          </a:ln>
+        </p:spPr>
+      </p:sp>
+      <p:sp>
+        <p:nvSpPr>
+          <p:cNvPr id="8" name="Text 6"/>
+          <p:cNvSpPr/>
+          <p:nvPr/>
+        </p:nvSpPr>
+        <p:spPr>
+          <a:xfrm>
+            <a:off x="640080" y="731520"/>
+            <a:ext cx="420624" cy="164592"/>
+          </a:xfrm>
+          <a:prstGeom prst="rect">
+            <a:avLst/>
+          </a:prstGeom>
+          <a:noFill/>
+          <a:ln/>
+        </p:spPr>
+        <p:txBody>
+          <a:bodyPr wrap="square" lIns="0" tIns="0" rIns="0" bIns="0" rtlCol="0" anchor="ctr"/>
+          <a:lstStyle/>
+          <a:p>
+            <a:pPr algn="ctr" indent="0" marL="0">
+              <a:buNone/>
+            </a:pPr>
+            <a:r>
+              <a:rPr lang="en-US" sz="1100" b="1" dirty="0">
+                <a:solidFill>
+                  <a:srgbClr val="FFFFFF"/>
+                </a:solidFill>
+                <a:latin typeface="Aptos" pitchFamily="34" charset="0"/>
+                <a:ea typeface="Aptos" pitchFamily="34" charset="-122"/>
+                <a:cs typeface="Aptos" pitchFamily="34" charset="-120"/>
+              </a:rPr>
+              <a:t>13</a:t>
+            </a:r>
+            <a:endParaRPr lang="en-US" sz="1100" dirty="0"/>
+          </a:p>
+        </p:txBody>
+      </p:sp>
+      <p:sp>
+        <p:nvSpPr>
+          <p:cNvPr id="9" name="Text 7"/>
+          <p:cNvSpPr/>
+          <p:nvPr/>
+        </p:nvSpPr>
+        <p:spPr>
+          <a:xfrm>
+            <a:off x="640080" y="621792"/>
+            <a:ext cx="10881360" cy="566928"/>
+          </a:xfrm>
+          <a:prstGeom prst="rect">
+            <a:avLst/>
+          </a:prstGeom>
+          <a:noFill/>
+          <a:ln/>
+        </p:spPr>
+        <p:txBody>
+          <a:bodyPr wrap="square" lIns="0" tIns="0" rIns="0" bIns="0" rtlCol="0" anchor="ctr">
+            <a:normAutofit/>
+          </a:bodyPr>
+          <a:lstStyle/>
+          <a:p>
+            <a:pPr indent="0" marL="0">
+              <a:buNone/>
+            </a:pPr>
+            <a:r>
+              <a:rPr lang="en-US" sz="2700" b="1" dirty="0">
+                <a:solidFill>
+                  <a:srgbClr val="003A63"/>
+                </a:solidFill>
+                <a:latin typeface="Aptos Display" pitchFamily="34" charset="0"/>
+                <a:ea typeface="Aptos Display" pitchFamily="34" charset="-122"/>
+                <a:cs typeface="Aptos Display" pitchFamily="34" charset="-120"/>
+              </a:rPr>
+              <a:t>References and Resources</a:t>
+            </a:r>
+            <a:endParaRPr lang="en-US" sz="2700" dirty="0"/>
+          </a:p>
+        </p:txBody>
+      </p:sp>
+      <p:sp>
+        <p:nvSpPr>
+          <p:cNvPr id="10" name="Text 8"/>
+          <p:cNvSpPr/>
+          <p:nvPr/>
+        </p:nvSpPr>
+        <p:spPr>
+          <a:xfrm>
+            <a:off x="868680" y="1417320"/>
+            <a:ext cx="6675120" cy="4434840"/>
+          </a:xfrm>
+          <a:prstGeom prst="rect">
+            <a:avLst/>
+          </a:prstGeom>
+          <a:noFill/>
+          <a:ln/>
+        </p:spPr>
+        <p:txBody>
+          <a:bodyPr wrap="square" lIns="635" tIns="635" rIns="635" bIns="635" rtlCol="0" anchor="t">
+            <a:normAutofit/>
+          </a:bodyPr>
+          <a:lstStyle/>
+          <a:p>
+            <a:r>
+              <a:rPr lang="en-US" sz="1700" dirty="0">
+                <a:solidFill>
+                  <a:srgbClr val="17364A"/>
+                </a:solidFill>
+                <a:latin typeface="Aptos" pitchFamily="34" charset="0"/>
+                <a:ea typeface="Aptos" pitchFamily="34" charset="-122"/>
+                <a:cs typeface="Aptos" pitchFamily="34" charset="-120"/>
+              </a:rPr>
               <a:t>CDC National Syndromic Surveillance Program: https://www.cdc.gov/nssp/</a:t>
             </a:r>
-            <a:endParaRPr lang="en-US" sz="1450" dirty="0"/>
-          </a:p>
-          <a:p>
-            <a:r>
-              <a:rPr lang="en-US" sz="1450" dirty="0">
+            <a:endParaRPr lang="en-US" sz="1700" dirty="0"/>
+          </a:p>
+          <a:p>
+            <a:r>
+              <a:rPr lang="en-US" sz="1700" dirty="0">
                 <a:solidFill>
                   <a:srgbClr val="17364A"/>
                 </a:solidFill>
@@ -6048,11 +10713,11 @@
               </a:rPr>
               <a:t>CDC Evaluation Framework: https://www.cdc.gov/evaluation/</a:t>
             </a:r>
-            <a:endParaRPr lang="en-US" sz="1450" dirty="0"/>
-          </a:p>
-          <a:p>
-            <a:r>
-              <a:rPr lang="en-US" sz="1450" dirty="0">
+            <a:endParaRPr lang="en-US" sz="1700" dirty="0"/>
+          </a:p>
+          <a:p>
+            <a:r>
+              <a:rPr lang="en-US" sz="1700" dirty="0">
                 <a:solidFill>
                   <a:srgbClr val="17364A"/>
                 </a:solidFill>
@@ -6062,11 +10727,11 @@
               </a:rPr>
               <a:t>NIST Artificial Intelligence Risk Management Framework: https://www.nist.gov/itl/ai-risk-management-framework</a:t>
             </a:r>
-            <a:endParaRPr lang="en-US" sz="1450" dirty="0"/>
-          </a:p>
-          <a:p>
-            <a:r>
-              <a:rPr lang="en-US" sz="1450" dirty="0">
+            <a:endParaRPr lang="en-US" sz="1700" dirty="0"/>
+          </a:p>
+          <a:p>
+            <a:r>
+              <a:rPr lang="en-US" sz="1700" dirty="0">
                 <a:solidFill>
                   <a:srgbClr val="17364A"/>
                 </a:solidFill>
@@ -6076,7 +10741,221 @@
               </a:rPr>
               <a:t>CDC Public Health Data Strategy: https://www.cdc.gov/public-health-data-strategy/php/about/index.html</a:t>
             </a:r>
-            <a:endParaRPr lang="en-US" sz="1450" dirty="0"/>
+            <a:endParaRPr lang="en-US" sz="1700" dirty="0"/>
+          </a:p>
+        </p:txBody>
+      </p:sp>
+      <p:sp>
+        <p:nvSpPr>
+          <p:cNvPr id="11" name="Shape 9"/>
+          <p:cNvSpPr/>
+          <p:nvPr/>
+        </p:nvSpPr>
+        <p:spPr>
+          <a:xfrm>
+            <a:off x="7909560" y="1417320"/>
+            <a:ext cx="3154680" cy="1828800"/>
+          </a:xfrm>
+          <a:prstGeom prst="roundRect">
+            <a:avLst>
+              <a:gd name="adj" fmla="val 6000"/>
+            </a:avLst>
+          </a:prstGeom>
+          <a:solidFill>
+            <a:srgbClr val="EEF8ED"/>
+          </a:solidFill>
+          <a:ln w="12700">
+            <a:solidFill>
+              <a:srgbClr val="B9D7E6"/>
+            </a:solidFill>
+            <a:prstDash val="solid"/>
+          </a:ln>
+        </p:spPr>
+      </p:sp>
+      <p:sp>
+        <p:nvSpPr>
+          <p:cNvPr id="12" name="Text 10"/>
+          <p:cNvSpPr/>
+          <p:nvPr/>
+        </p:nvSpPr>
+        <p:spPr>
+          <a:xfrm>
+            <a:off x="8074152" y="1563624"/>
+            <a:ext cx="2825496" cy="201168"/>
+          </a:xfrm>
+          <a:prstGeom prst="rect">
+            <a:avLst/>
+          </a:prstGeom>
+          <a:noFill/>
+          <a:ln/>
+        </p:spPr>
+        <p:txBody>
+          <a:bodyPr wrap="square" lIns="0" tIns="0" rIns="0" bIns="0" rtlCol="0" anchor="ctr"/>
+          <a:lstStyle/>
+          <a:p>
+            <a:pPr indent="0" marL="0">
+              <a:buNone/>
+            </a:pPr>
+            <a:r>
+              <a:rPr lang="en-US" sz="950" b="1" dirty="0">
+                <a:solidFill>
+                  <a:srgbClr val="0068B7"/>
+                </a:solidFill>
+                <a:latin typeface="Aptos" pitchFamily="34" charset="0"/>
+                <a:ea typeface="Aptos" pitchFamily="34" charset="-122"/>
+                <a:cs typeface="Aptos" pitchFamily="34" charset="-120"/>
+              </a:rPr>
+              <a:t>Key idea</a:t>
+            </a:r>
+            <a:endParaRPr lang="en-US" sz="950" dirty="0"/>
+          </a:p>
+        </p:txBody>
+      </p:sp>
+      <p:sp>
+        <p:nvSpPr>
+          <p:cNvPr id="13" name="Text 11"/>
+          <p:cNvSpPr/>
+          <p:nvPr/>
+        </p:nvSpPr>
+        <p:spPr>
+          <a:xfrm>
+            <a:off x="8074152" y="1856232"/>
+            <a:ext cx="2825496" cy="1261872"/>
+          </a:xfrm>
+          <a:prstGeom prst="rect">
+            <a:avLst/>
+          </a:prstGeom>
+          <a:noFill/>
+          <a:ln/>
+        </p:spPr>
+        <p:txBody>
+          <a:bodyPr wrap="square" lIns="0" tIns="0" rIns="0" bIns="0" rtlCol="0" anchor="t">
+            <a:normAutofit/>
+          </a:bodyPr>
+          <a:lstStyle/>
+          <a:p>
+            <a:pPr indent="0" marL="0">
+              <a:buNone/>
+            </a:pPr>
+            <a:r>
+              <a:rPr lang="en-US" sz="1250" dirty="0">
+                <a:solidFill>
+                  <a:srgbClr val="17364A"/>
+                </a:solidFill>
+                <a:latin typeface="Aptos" pitchFamily="34" charset="0"/>
+                <a:ea typeface="Aptos" pitchFamily="34" charset="-122"/>
+                <a:cs typeface="Aptos" pitchFamily="34" charset="-120"/>
+              </a:rPr>
+              <a:t>CDC National Syndromic Surveillance Program: https://www.cdc.gov/nssp/</a:t>
+            </a:r>
+            <a:endParaRPr lang="en-US" sz="1250" dirty="0"/>
+          </a:p>
+        </p:txBody>
+      </p:sp>
+      <p:sp>
+        <p:nvSpPr>
+          <p:cNvPr id="14" name="Shape 12"/>
+          <p:cNvSpPr/>
+          <p:nvPr/>
+        </p:nvSpPr>
+        <p:spPr>
+          <a:xfrm>
+            <a:off x="7909560" y="3520440"/>
+            <a:ext cx="3154680" cy="1737360"/>
+          </a:xfrm>
+          <a:prstGeom prst="roundRect">
+            <a:avLst>
+              <a:gd name="adj" fmla="val 6316"/>
+            </a:avLst>
+          </a:prstGeom>
+          <a:solidFill>
+            <a:srgbClr val="EAF6F8"/>
+          </a:solidFill>
+          <a:ln w="12700">
+            <a:solidFill>
+              <a:srgbClr val="B9D7E6"/>
+            </a:solidFill>
+            <a:prstDash val="solid"/>
+          </a:ln>
+        </p:spPr>
+      </p:sp>
+      <p:sp>
+        <p:nvSpPr>
+          <p:cNvPr id="15" name="Text 13"/>
+          <p:cNvSpPr/>
+          <p:nvPr/>
+        </p:nvSpPr>
+        <p:spPr>
+          <a:xfrm>
+            <a:off x="8074152" y="3666744"/>
+            <a:ext cx="2825496" cy="201168"/>
+          </a:xfrm>
+          <a:prstGeom prst="rect">
+            <a:avLst/>
+          </a:prstGeom>
+          <a:noFill/>
+          <a:ln/>
+        </p:spPr>
+        <p:txBody>
+          <a:bodyPr wrap="square" lIns="0" tIns="0" rIns="0" bIns="0" rtlCol="0" anchor="ctr"/>
+          <a:lstStyle/>
+          <a:p>
+            <a:pPr indent="0" marL="0">
+              <a:buNone/>
+            </a:pPr>
+            <a:r>
+              <a:rPr lang="en-US" sz="950" b="1" dirty="0">
+                <a:solidFill>
+                  <a:srgbClr val="0068B7"/>
+                </a:solidFill>
+                <a:latin typeface="Aptos" pitchFamily="34" charset="0"/>
+                <a:ea typeface="Aptos" pitchFamily="34" charset="-122"/>
+                <a:cs typeface="Aptos" pitchFamily="34" charset="-120"/>
+              </a:rPr>
+              <a:t>Use this for</a:t>
+            </a:r>
+            <a:endParaRPr lang="en-US" sz="950" dirty="0"/>
+          </a:p>
+        </p:txBody>
+      </p:sp>
+      <p:sp>
+        <p:nvSpPr>
+          <p:cNvPr id="16" name="Text 14"/>
+          <p:cNvSpPr/>
+          <p:nvPr/>
+        </p:nvSpPr>
+        <p:spPr>
+          <a:xfrm>
+            <a:off x="8074152" y="3959352"/>
+            <a:ext cx="2825496" cy="1170432"/>
+          </a:xfrm>
+          <a:prstGeom prst="rect">
+            <a:avLst/>
+          </a:prstGeom>
+          <a:noFill/>
+          <a:ln/>
+        </p:spPr>
+        <p:txBody>
+          <a:bodyPr wrap="square" lIns="0" tIns="0" rIns="0" bIns="0" rtlCol="0" anchor="t">
+            <a:normAutofit/>
+          </a:bodyPr>
+          <a:lstStyle/>
+          <a:p>
+            <a:pPr indent="0" marL="0">
+              <a:buNone/>
+            </a:pPr>
+            <a:r>
+              <a:rPr lang="en-US" sz="1250" dirty="0">
+                <a:solidFill>
+                  <a:srgbClr val="17364A"/>
+                </a:solidFill>
+                <a:latin typeface="Aptos" pitchFamily="34" charset="0"/>
+                <a:ea typeface="Aptos" pitchFamily="34" charset="-122"/>
+                <a:cs typeface="Aptos" pitchFamily="34" charset="-120"/>
+              </a:rPr>
+              <a:t>Connect the concept to public health decisions, safeguards, documentation, or implementation work.</a:t>
+            </a:r>
+            <a:endParaRPr lang="en-US" sz="1250" dirty="0"/>
           </a:p>
         </p:txBody>
       </p:sp>
@@ -6139,7 +11018,32 @@
       </p:sp>
       <p:sp>
         <p:nvSpPr>
-          <p:cNvPr id="3" name="Text 1"/>
+          <p:cNvPr id="3" name="Shape 1"/>
+          <p:cNvSpPr/>
+          <p:nvPr/>
+        </p:nvSpPr>
+        <p:spPr>
+          <a:xfrm>
+            <a:off x="0" y="164592"/>
+            <a:ext cx="146304" cy="6693408"/>
+          </a:xfrm>
+          <a:prstGeom prst="rect">
+            <a:avLst/>
+          </a:prstGeom>
+          <a:solidFill>
+            <a:srgbClr val="2F8A28"/>
+          </a:solidFill>
+          <a:ln w="12700">
+            <a:solidFill>
+              <a:srgbClr val="2F8A28"/>
+            </a:solidFill>
+            <a:prstDash val="solid"/>
+          </a:ln>
+        </p:spPr>
+      </p:sp>
+      <p:sp>
+        <p:nvSpPr>
+          <p:cNvPr id="4" name="Text 2"/>
           <p:cNvSpPr/>
           <p:nvPr/>
         </p:nvSpPr>
@@ -6178,7 +11082,7 @@
       </p:sp>
       <p:sp>
         <p:nvSpPr>
-          <p:cNvPr id="4" name="Text 2"/>
+          <p:cNvPr id="5" name="Text 3"/>
           <p:cNvSpPr/>
           <p:nvPr/>
         </p:nvSpPr>
@@ -6217,7 +11121,7 @@
       </p:sp>
       <p:sp>
         <p:nvSpPr>
-          <p:cNvPr id="5" name="Text 3"/>
+          <p:cNvPr id="6" name="Text 4"/>
           <p:cNvSpPr/>
           <p:nvPr/>
         </p:nvSpPr>
@@ -6256,7 +11160,7 @@
       </p:sp>
       <p:sp>
         <p:nvSpPr>
-          <p:cNvPr id="6" name="Text 4"/>
+          <p:cNvPr id="7" name="Text 5"/>
           <p:cNvSpPr/>
           <p:nvPr/>
         </p:nvSpPr>
@@ -6289,7 +11193,7 @@
                 <a:ea typeface="Aptos Display" pitchFamily="34" charset="-122"/>
                 <a:cs typeface="Aptos Display" pitchFamily="34" charset="-120"/>
               </a:rPr>
-              <a:t>Learning Objectives</a:t>
+              <a:t>How this module connects to the playbook</a:t>
             </a:r>
             <a:endParaRPr lang="en-US" sz="2700" dirty="0"/>
           </a:p>
@@ -6297,14 +11201,14 @@
       </p:sp>
       <p:sp>
         <p:nvSpPr>
-          <p:cNvPr id="7" name="Text 5"/>
-          <p:cNvSpPr/>
-          <p:nvPr/>
-        </p:nvSpPr>
-        <p:spPr>
-          <a:xfrm>
-            <a:off x="822960" y="1325880"/>
-            <a:ext cx="10378440" cy="4800600"/>
+          <p:cNvPr id="8" name="Text 6"/>
+          <p:cNvSpPr/>
+          <p:nvPr/>
+        </p:nvSpPr>
+        <p:spPr>
+          <a:xfrm>
+            <a:off x="868680" y="1417320"/>
+            <a:ext cx="6903720" cy="4480560"/>
           </a:xfrm>
           <a:prstGeom prst="rect">
             <a:avLst/>
@@ -6319,7 +11223,7 @@
           <a:lstStyle/>
           <a:p>
             <a:r>
-              <a:rPr lang="en-US" sz="1450" dirty="0">
+              <a:rPr lang="en-US" sz="1540" dirty="0">
                 <a:solidFill>
                   <a:srgbClr val="17364A"/>
                 </a:solidFill>
@@ -6327,13 +11231,13 @@
                 <a:ea typeface="Aptos" pitchFamily="34" charset="-122"/>
                 <a:cs typeface="Aptos" pitchFamily="34" charset="-120"/>
               </a:rPr>
-              <a:t>Define time-series analysis and anomaly detection in public health terms.</a:t>
-            </a:r>
-            <a:endParaRPr lang="en-US" sz="1450" dirty="0"/>
-          </a:p>
-          <a:p>
-            <a:r>
-              <a:rPr lang="en-US" sz="1450" dirty="0">
+              <a:t>Play 13: Monitor and Evaluate AI Systems - This lesson informs Play 13 by helping learners connect the lesson topic to monitor and.</a:t>
+            </a:r>
+            <a:endParaRPr lang="en-US" sz="1540" dirty="0"/>
+          </a:p>
+          <a:p>
+            <a:r>
+              <a:rPr lang="en-US" sz="1540" dirty="0">
                 <a:solidFill>
                   <a:srgbClr val="17364A"/>
                 </a:solidFill>
@@ -6341,13 +11245,13 @@
                 <a:ea typeface="Aptos" pitchFamily="34" charset="-122"/>
                 <a:cs typeface="Aptos" pitchFamily="34" charset="-120"/>
               </a:rPr>
-              <a:t>Explain baselines, seasonality, trends, reporting delays, and thresholds.</a:t>
-            </a:r>
-            <a:endParaRPr lang="en-US" sz="1450" dirty="0"/>
-          </a:p>
-          <a:p>
-            <a:r>
-              <a:rPr lang="en-US" sz="1450" dirty="0">
+              <a:t>Play 12: Execute Governance and Oversight - This lesson informs Play 12 by helping learners connect the lesson topic to execute.</a:t>
+            </a:r>
+            <a:endParaRPr lang="en-US" sz="1540" dirty="0"/>
+          </a:p>
+          <a:p>
+            <a:r>
+              <a:rPr lang="en-US" sz="1540" dirty="0">
                 <a:solidFill>
                   <a:srgbClr val="17364A"/>
                 </a:solidFill>
@@ -6355,13 +11259,13 @@
                 <a:ea typeface="Aptos" pitchFamily="34" charset="-122"/>
                 <a:cs typeface="Aptos" pitchFamily="34" charset="-120"/>
               </a:rPr>
-              <a:t>Distinguish statistical signals from confirmed outbreaks or public health events.</a:t>
-            </a:r>
-            <a:endParaRPr lang="en-US" sz="1450" dirty="0"/>
-          </a:p>
-          <a:p>
-            <a:r>
-              <a:rPr lang="en-US" sz="1450" dirty="0">
+              <a:t>Play 1: Vision &amp; Guardrails - This lesson informs Play 1 by helping learners connect the lesson topic to vision &amp; guardrails work in.</a:t>
+            </a:r>
+            <a:endParaRPr lang="en-US" sz="1540" dirty="0"/>
+          </a:p>
+          <a:p>
+            <a:r>
+              <a:rPr lang="en-US" sz="1540" dirty="0">
                 <a:solidFill>
                   <a:srgbClr val="17364A"/>
                 </a:solidFill>
@@ -6369,13 +11273,106 @@
                 <a:ea typeface="Aptos" pitchFamily="34" charset="-122"/>
                 <a:cs typeface="Aptos" pitchFamily="34" charset="-120"/>
               </a:rPr>
-              <a:t>Identify risks from alert fatigue, data artifacts, delayed reporting, and model drift.</a:t>
-            </a:r>
-            <a:endParaRPr lang="en-US" sz="1450" dirty="0"/>
-          </a:p>
-          <a:p>
-            <a:r>
-              <a:rPr lang="en-US" sz="1450" dirty="0">
+              <a:t>Play 11: Build and Deploy AI Solutions - This lesson informs Play 11 by helping learners connect the lesson topic to build and deploy.</a:t>
+            </a:r>
+            <a:endParaRPr lang="en-US" sz="1540" dirty="0"/>
+          </a:p>
+        </p:txBody>
+      </p:sp>
+      <p:sp>
+        <p:nvSpPr>
+          <p:cNvPr id="9" name="Shape 7"/>
+          <p:cNvSpPr/>
+          <p:nvPr/>
+        </p:nvSpPr>
+        <p:spPr>
+          <a:xfrm>
+            <a:off x="8046720" y="1417320"/>
+            <a:ext cx="3063240" cy="2103120"/>
+          </a:xfrm>
+          <a:prstGeom prst="roundRect">
+            <a:avLst>
+              <a:gd name="adj" fmla="val 5217"/>
+            </a:avLst>
+          </a:prstGeom>
+          <a:solidFill>
+            <a:srgbClr val="EEF8ED"/>
+          </a:solidFill>
+          <a:ln w="12700">
+            <a:solidFill>
+              <a:srgbClr val="B9D7E6"/>
+            </a:solidFill>
+            <a:prstDash val="solid"/>
+          </a:ln>
+        </p:spPr>
+      </p:sp>
+      <p:sp>
+        <p:nvSpPr>
+          <p:cNvPr id="10" name="Text 8"/>
+          <p:cNvSpPr/>
+          <p:nvPr/>
+        </p:nvSpPr>
+        <p:spPr>
+          <a:xfrm>
+            <a:off x="8211312" y="1563624"/>
+            <a:ext cx="2734056" cy="201168"/>
+          </a:xfrm>
+          <a:prstGeom prst="rect">
+            <a:avLst/>
+          </a:prstGeom>
+          <a:noFill/>
+          <a:ln/>
+        </p:spPr>
+        <p:txBody>
+          <a:bodyPr wrap="square" lIns="0" tIns="0" rIns="0" bIns="0" rtlCol="0" anchor="ctr"/>
+          <a:lstStyle/>
+          <a:p>
+            <a:pPr indent="0" marL="0">
+              <a:buNone/>
+            </a:pPr>
+            <a:r>
+              <a:rPr lang="en-US" sz="950" b="1" dirty="0">
+                <a:solidFill>
+                  <a:srgbClr val="0068B7"/>
+                </a:solidFill>
+                <a:latin typeface="Aptos" pitchFamily="34" charset="0"/>
+                <a:ea typeface="Aptos" pitchFamily="34" charset="-122"/>
+                <a:cs typeface="Aptos" pitchFamily="34" charset="-120"/>
+              </a:rPr>
+              <a:t>Apply the lesson</a:t>
+            </a:r>
+            <a:endParaRPr lang="en-US" sz="950" dirty="0"/>
+          </a:p>
+        </p:txBody>
+      </p:sp>
+      <p:sp>
+        <p:nvSpPr>
+          <p:cNvPr id="11" name="Text 9"/>
+          <p:cNvSpPr/>
+          <p:nvPr/>
+        </p:nvSpPr>
+        <p:spPr>
+          <a:xfrm>
+            <a:off x="8211312" y="1856232"/>
+            <a:ext cx="2734056" cy="1536192"/>
+          </a:xfrm>
+          <a:prstGeom prst="rect">
+            <a:avLst/>
+          </a:prstGeom>
+          <a:noFill/>
+          <a:ln/>
+        </p:spPr>
+        <p:txBody>
+          <a:bodyPr wrap="square" lIns="0" tIns="0" rIns="0" bIns="0" rtlCol="0" anchor="t">
+            <a:normAutofit/>
+          </a:bodyPr>
+          <a:lstStyle/>
+          <a:p>
+            <a:pPr indent="0" marL="0">
+              <a:buNone/>
+            </a:pPr>
+            <a:r>
+              <a:rPr lang="en-US" sz="1250" dirty="0">
                 <a:solidFill>
                   <a:srgbClr val="17364A"/>
                 </a:solidFill>
@@ -6383,9 +11380,116 @@
                 <a:ea typeface="Aptos" pitchFamily="34" charset="-122"/>
                 <a:cs typeface="Aptos" pitchFamily="34" charset="-120"/>
               </a:rPr>
-              <a:t>Design guardrails for AI-supported surveillance alerts.</a:t>
-            </a:r>
-            <a:endParaRPr lang="en-US" sz="1450" dirty="0"/>
+              <a:t>Use the related plays to identify decisions, participants, timing, approvals, and documentation needed for responsible implementation.</a:t>
+            </a:r>
+            <a:endParaRPr lang="en-US" sz="1250" dirty="0"/>
+          </a:p>
+        </p:txBody>
+      </p:sp>
+      <p:sp>
+        <p:nvSpPr>
+          <p:cNvPr id="12" name="Shape 10"/>
+          <p:cNvSpPr/>
+          <p:nvPr/>
+        </p:nvSpPr>
+        <p:spPr>
+          <a:xfrm>
+            <a:off x="8046720" y="3794760"/>
+            <a:ext cx="3063240" cy="1508760"/>
+          </a:xfrm>
+          <a:prstGeom prst="roundRect">
+            <a:avLst>
+              <a:gd name="adj" fmla="val 7273"/>
+            </a:avLst>
+          </a:prstGeom>
+          <a:solidFill>
+            <a:srgbClr val="FFF4D9"/>
+          </a:solidFill>
+          <a:ln w="12700">
+            <a:solidFill>
+              <a:srgbClr val="B9D7E6"/>
+            </a:solidFill>
+            <a:prstDash val="solid"/>
+          </a:ln>
+        </p:spPr>
+      </p:sp>
+      <p:sp>
+        <p:nvSpPr>
+          <p:cNvPr id="13" name="Text 11"/>
+          <p:cNvSpPr/>
+          <p:nvPr/>
+        </p:nvSpPr>
+        <p:spPr>
+          <a:xfrm>
+            <a:off x="8211312" y="3941064"/>
+            <a:ext cx="2734056" cy="201168"/>
+          </a:xfrm>
+          <a:prstGeom prst="rect">
+            <a:avLst/>
+          </a:prstGeom>
+          <a:noFill/>
+          <a:ln/>
+        </p:spPr>
+        <p:txBody>
+          <a:bodyPr wrap="square" lIns="0" tIns="0" rIns="0" bIns="0" rtlCol="0" anchor="ctr"/>
+          <a:lstStyle/>
+          <a:p>
+            <a:pPr indent="0" marL="0">
+              <a:buNone/>
+            </a:pPr>
+            <a:r>
+              <a:rPr lang="en-US" sz="950" b="1" dirty="0">
+                <a:solidFill>
+                  <a:srgbClr val="0068B7"/>
+                </a:solidFill>
+                <a:latin typeface="Aptos" pitchFamily="34" charset="0"/>
+                <a:ea typeface="Aptos" pitchFamily="34" charset="-122"/>
+                <a:cs typeface="Aptos" pitchFamily="34" charset="-120"/>
+              </a:rPr>
+              <a:t>Keep in mind</a:t>
+            </a:r>
+            <a:endParaRPr lang="en-US" sz="950" dirty="0"/>
+          </a:p>
+        </p:txBody>
+      </p:sp>
+      <p:sp>
+        <p:nvSpPr>
+          <p:cNvPr id="14" name="Text 12"/>
+          <p:cNvSpPr/>
+          <p:nvPr/>
+        </p:nvSpPr>
+        <p:spPr>
+          <a:xfrm>
+            <a:off x="8211312" y="4233672"/>
+            <a:ext cx="2734056" cy="941832"/>
+          </a:xfrm>
+          <a:prstGeom prst="rect">
+            <a:avLst/>
+          </a:prstGeom>
+          <a:noFill/>
+          <a:ln/>
+        </p:spPr>
+        <p:txBody>
+          <a:bodyPr wrap="square" lIns="0" tIns="0" rIns="0" bIns="0" rtlCol="0" anchor="t">
+            <a:normAutofit/>
+          </a:bodyPr>
+          <a:lstStyle/>
+          <a:p>
+            <a:pPr indent="0" marL="0">
+              <a:buNone/>
+            </a:pPr>
+            <a:r>
+              <a:rPr lang="en-US" sz="1250" dirty="0">
+                <a:solidFill>
+                  <a:srgbClr val="17364A"/>
+                </a:solidFill>
+                <a:latin typeface="Aptos" pitchFamily="34" charset="0"/>
+                <a:ea typeface="Aptos" pitchFamily="34" charset="-122"/>
+                <a:cs typeface="Aptos" pitchFamily="34" charset="-120"/>
+              </a:rPr>
+              <a:t>The playbook connection helps turn training into agency work, not just individual knowledge.</a:t>
+            </a:r>
+            <a:endParaRPr lang="en-US" sz="1250" dirty="0"/>
           </a:p>
         </p:txBody>
       </p:sp>
@@ -6448,7 +11552,32 @@
       </p:sp>
       <p:sp>
         <p:nvSpPr>
-          <p:cNvPr id="3" name="Text 1"/>
+          <p:cNvPr id="3" name="Shape 1"/>
+          <p:cNvSpPr/>
+          <p:nvPr/>
+        </p:nvSpPr>
+        <p:spPr>
+          <a:xfrm>
+            <a:off x="0" y="164592"/>
+            <a:ext cx="146304" cy="6693408"/>
+          </a:xfrm>
+          <a:prstGeom prst="rect">
+            <a:avLst/>
+          </a:prstGeom>
+          <a:solidFill>
+            <a:srgbClr val="2F8A28"/>
+          </a:solidFill>
+          <a:ln w="12700">
+            <a:solidFill>
+              <a:srgbClr val="2F8A28"/>
+            </a:solidFill>
+            <a:prstDash val="solid"/>
+          </a:ln>
+        </p:spPr>
+      </p:sp>
+      <p:sp>
+        <p:nvSpPr>
+          <p:cNvPr id="4" name="Text 2"/>
           <p:cNvSpPr/>
           <p:nvPr/>
         </p:nvSpPr>
@@ -6487,7 +11616,7 @@
       </p:sp>
       <p:sp>
         <p:nvSpPr>
-          <p:cNvPr id="4" name="Text 2"/>
+          <p:cNvPr id="5" name="Text 3"/>
           <p:cNvSpPr/>
           <p:nvPr/>
         </p:nvSpPr>
@@ -6526,7 +11655,7 @@
       </p:sp>
       <p:sp>
         <p:nvSpPr>
-          <p:cNvPr id="5" name="Text 3"/>
+          <p:cNvPr id="6" name="Text 4"/>
           <p:cNvSpPr/>
           <p:nvPr/>
         </p:nvSpPr>
@@ -6565,7 +11694,7 @@
       </p:sp>
       <p:sp>
         <p:nvSpPr>
-          <p:cNvPr id="6" name="Text 4"/>
+          <p:cNvPr id="7" name="Text 5"/>
           <p:cNvSpPr/>
           <p:nvPr/>
         </p:nvSpPr>
@@ -6598,7 +11727,7 @@
                 <a:ea typeface="Aptos Display" pitchFamily="34" charset="-122"/>
                 <a:cs typeface="Aptos Display" pitchFamily="34" charset="-120"/>
               </a:rPr>
-              <a:t>Learning Objectives Continued</a:t>
+              <a:t>Related toolkit resources</a:t>
             </a:r>
             <a:endParaRPr lang="en-US" sz="2700" dirty="0"/>
           </a:p>
@@ -6606,14 +11735,14 @@
       </p:sp>
       <p:sp>
         <p:nvSpPr>
-          <p:cNvPr id="7" name="Text 5"/>
-          <p:cNvSpPr/>
-          <p:nvPr/>
-        </p:nvSpPr>
-        <p:spPr>
-          <a:xfrm>
-            <a:off x="822960" y="1325880"/>
-            <a:ext cx="10378440" cy="4800600"/>
+          <p:cNvPr id="8" name="Text 6"/>
+          <p:cNvSpPr/>
+          <p:nvPr/>
+        </p:nvSpPr>
+        <p:spPr>
+          <a:xfrm>
+            <a:off x="868680" y="1417320"/>
+            <a:ext cx="6903720" cy="4480560"/>
           </a:xfrm>
           <a:prstGeom prst="rect">
             <a:avLst/>
@@ -6628,7 +11757,7 @@
           <a:lstStyle/>
           <a:p>
             <a:r>
-              <a:rPr lang="en-US" sz="1450" dirty="0">
+              <a:rPr lang="en-US" sz="1460" dirty="0">
                 <a:solidFill>
                   <a:srgbClr val="17364A"/>
                 </a:solidFill>
@@ -6636,9 +11765,279 @@
                 <a:ea typeface="Aptos" pitchFamily="34" charset="-122"/>
                 <a:cs typeface="Aptos" pitchFamily="34" charset="-120"/>
               </a:rPr>
-              <a:t>Produce an anomaly detection review plan for one public health data stream.</a:t>
-            </a:r>
-            <a:endParaRPr lang="en-US" sz="1450" dirty="0"/>
+              <a:t>Tool 44: Performance Monitoring Dashboard (Dashboard) - Use this tool to complete or strengthen the practical exercise for the module.</a:t>
+            </a:r>
+            <a:endParaRPr lang="en-US" sz="1460" dirty="0"/>
+          </a:p>
+          <a:p>
+            <a:r>
+              <a:rPr lang="en-US" sz="1460" dirty="0">
+                <a:solidFill>
+                  <a:srgbClr val="17364A"/>
+                </a:solidFill>
+                <a:latin typeface="Aptos" pitchFamily="34" charset="0"/>
+                <a:ea typeface="Aptos" pitchFamily="34" charset="-122"/>
+                <a:cs typeface="Aptos" pitchFamily="34" charset="-120"/>
+              </a:rPr>
+              <a:t>Tool 45: Continuous Improvement Log (Log) - Use Continuous Improvement Log to translate this lesson into a documented public health.</a:t>
+            </a:r>
+            <a:endParaRPr lang="en-US" sz="1460" dirty="0"/>
+          </a:p>
+          <a:p>
+            <a:r>
+              <a:rPr lang="en-US" sz="1460" dirty="0">
+                <a:solidFill>
+                  <a:srgbClr val="17364A"/>
+                </a:solidFill>
+                <a:latin typeface="Aptos" pitchFamily="34" charset="0"/>
+                <a:ea typeface="Aptos" pitchFamily="34" charset="-122"/>
+                <a:cs typeface="Aptos" pitchFamily="34" charset="-120"/>
+              </a:rPr>
+              <a:t>Tool 48: AI Evaluation &amp; Outcomes Reporting (Template) - Use this tool to complete or strengthen the practical exercise for the.</a:t>
+            </a:r>
+            <a:endParaRPr lang="en-US" sz="1460" dirty="0"/>
+          </a:p>
+          <a:p>
+            <a:r>
+              <a:rPr lang="en-US" sz="1460" dirty="0">
+                <a:solidFill>
+                  <a:srgbClr val="17364A"/>
+                </a:solidFill>
+                <a:latin typeface="Aptos" pitchFamily="34" charset="0"/>
+                <a:ea typeface="Aptos" pitchFamily="34" charset="-122"/>
+                <a:cs typeface="Aptos" pitchFamily="34" charset="-120"/>
+              </a:rPr>
+              <a:t>Tool 4: AI Policy Landscape Scan (Worksheet) - Use AI Policy Landscape Scan to translate this lesson into a documented public health.</a:t>
+            </a:r>
+            <a:endParaRPr lang="en-US" sz="1460" dirty="0"/>
+          </a:p>
+          <a:p>
+            <a:r>
+              <a:rPr lang="en-US" sz="1460" dirty="0">
+                <a:solidFill>
+                  <a:srgbClr val="17364A"/>
+                </a:solidFill>
+                <a:latin typeface="Aptos" pitchFamily="34" charset="0"/>
+                <a:ea typeface="Aptos" pitchFamily="34" charset="-122"/>
+                <a:cs typeface="Aptos" pitchFamily="34" charset="-120"/>
+              </a:rPr>
+              <a:t>Tool 5: AI Environmental and Resource Impact Review (Checklist) - Use AI Environmental and Resource Impact Review to translate this.</a:t>
+            </a:r>
+            <a:endParaRPr lang="en-US" sz="1460" dirty="0"/>
+          </a:p>
+        </p:txBody>
+      </p:sp>
+      <p:sp>
+        <p:nvSpPr>
+          <p:cNvPr id="9" name="Shape 7"/>
+          <p:cNvSpPr/>
+          <p:nvPr/>
+        </p:nvSpPr>
+        <p:spPr>
+          <a:xfrm>
+            <a:off x="8046720" y="1417320"/>
+            <a:ext cx="3063240" cy="2103120"/>
+          </a:xfrm>
+          <a:prstGeom prst="roundRect">
+            <a:avLst>
+              <a:gd name="adj" fmla="val 5217"/>
+            </a:avLst>
+          </a:prstGeom>
+          <a:solidFill>
+            <a:srgbClr val="EAF6F8"/>
+          </a:solidFill>
+          <a:ln w="12700">
+            <a:solidFill>
+              <a:srgbClr val="B9D7E6"/>
+            </a:solidFill>
+            <a:prstDash val="solid"/>
+          </a:ln>
+        </p:spPr>
+      </p:sp>
+      <p:sp>
+        <p:nvSpPr>
+          <p:cNvPr id="10" name="Text 8"/>
+          <p:cNvSpPr/>
+          <p:nvPr/>
+        </p:nvSpPr>
+        <p:spPr>
+          <a:xfrm>
+            <a:off x="8211312" y="1563624"/>
+            <a:ext cx="2734056" cy="201168"/>
+          </a:xfrm>
+          <a:prstGeom prst="rect">
+            <a:avLst/>
+          </a:prstGeom>
+          <a:noFill/>
+          <a:ln/>
+        </p:spPr>
+        <p:txBody>
+          <a:bodyPr wrap="square" lIns="0" tIns="0" rIns="0" bIns="0" rtlCol="0" anchor="ctr"/>
+          <a:lstStyle/>
+          <a:p>
+            <a:pPr indent="0" marL="0">
+              <a:buNone/>
+            </a:pPr>
+            <a:r>
+              <a:rPr lang="en-US" sz="950" b="1" dirty="0">
+                <a:solidFill>
+                  <a:srgbClr val="0068B7"/>
+                </a:solidFill>
+                <a:latin typeface="Aptos" pitchFamily="34" charset="0"/>
+                <a:ea typeface="Aptos" pitchFamily="34" charset="-122"/>
+                <a:cs typeface="Aptos" pitchFamily="34" charset="-120"/>
+              </a:rPr>
+              <a:t>Use the tools</a:t>
+            </a:r>
+            <a:endParaRPr lang="en-US" sz="950" dirty="0"/>
+          </a:p>
+        </p:txBody>
+      </p:sp>
+      <p:sp>
+        <p:nvSpPr>
+          <p:cNvPr id="11" name="Text 9"/>
+          <p:cNvSpPr/>
+          <p:nvPr/>
+        </p:nvSpPr>
+        <p:spPr>
+          <a:xfrm>
+            <a:off x="8211312" y="1856232"/>
+            <a:ext cx="2734056" cy="1536192"/>
+          </a:xfrm>
+          <a:prstGeom prst="rect">
+            <a:avLst/>
+          </a:prstGeom>
+          <a:noFill/>
+          <a:ln/>
+        </p:spPr>
+        <p:txBody>
+          <a:bodyPr wrap="square" lIns="0" tIns="0" rIns="0" bIns="0" rtlCol="0" anchor="t">
+            <a:normAutofit/>
+          </a:bodyPr>
+          <a:lstStyle/>
+          <a:p>
+            <a:pPr indent="0" marL="0">
+              <a:buNone/>
+            </a:pPr>
+            <a:r>
+              <a:rPr lang="en-US" sz="1250" dirty="0">
+                <a:solidFill>
+                  <a:srgbClr val="17364A"/>
+                </a:solidFill>
+                <a:latin typeface="Aptos" pitchFamily="34" charset="0"/>
+                <a:ea typeface="Aptos" pitchFamily="34" charset="-122"/>
+                <a:cs typeface="Aptos" pitchFamily="34" charset="-120"/>
+              </a:rPr>
+              <a:t>Use linked tools when your department needs a structured worksheet, template, checklist, review process, or documentation artifact.</a:t>
+            </a:r>
+            <a:endParaRPr lang="en-US" sz="1250" dirty="0"/>
+          </a:p>
+        </p:txBody>
+      </p:sp>
+      <p:sp>
+        <p:nvSpPr>
+          <p:cNvPr id="12" name="Shape 10"/>
+          <p:cNvSpPr/>
+          <p:nvPr/>
+        </p:nvSpPr>
+        <p:spPr>
+          <a:xfrm>
+            <a:off x="8046720" y="3794760"/>
+            <a:ext cx="3063240" cy="1508760"/>
+          </a:xfrm>
+          <a:prstGeom prst="roundRect">
+            <a:avLst>
+              <a:gd name="adj" fmla="val 7273"/>
+            </a:avLst>
+          </a:prstGeom>
+          <a:solidFill>
+            <a:srgbClr val="EEF8ED"/>
+          </a:solidFill>
+          <a:ln w="12700">
+            <a:solidFill>
+              <a:srgbClr val="B9D7E6"/>
+            </a:solidFill>
+            <a:prstDash val="solid"/>
+          </a:ln>
+        </p:spPr>
+      </p:sp>
+      <p:sp>
+        <p:nvSpPr>
+          <p:cNvPr id="13" name="Text 11"/>
+          <p:cNvSpPr/>
+          <p:nvPr/>
+        </p:nvSpPr>
+        <p:spPr>
+          <a:xfrm>
+            <a:off x="8211312" y="3941064"/>
+            <a:ext cx="2734056" cy="201168"/>
+          </a:xfrm>
+          <a:prstGeom prst="rect">
+            <a:avLst/>
+          </a:prstGeom>
+          <a:noFill/>
+          <a:ln/>
+        </p:spPr>
+        <p:txBody>
+          <a:bodyPr wrap="square" lIns="0" tIns="0" rIns="0" bIns="0" rtlCol="0" anchor="ctr"/>
+          <a:lstStyle/>
+          <a:p>
+            <a:pPr indent="0" marL="0">
+              <a:buNone/>
+            </a:pPr>
+            <a:r>
+              <a:rPr lang="en-US" sz="950" b="1" dirty="0">
+                <a:solidFill>
+                  <a:srgbClr val="0068B7"/>
+                </a:solidFill>
+                <a:latin typeface="Aptos" pitchFamily="34" charset="0"/>
+                <a:ea typeface="Aptos" pitchFamily="34" charset="-122"/>
+                <a:cs typeface="Aptos" pitchFamily="34" charset="-120"/>
+              </a:rPr>
+              <a:t>Avoid duplication</a:t>
+            </a:r>
+            <a:endParaRPr lang="en-US" sz="950" dirty="0"/>
+          </a:p>
+        </p:txBody>
+      </p:sp>
+      <p:sp>
+        <p:nvSpPr>
+          <p:cNvPr id="14" name="Text 12"/>
+          <p:cNvSpPr/>
+          <p:nvPr/>
+        </p:nvSpPr>
+        <p:spPr>
+          <a:xfrm>
+            <a:off x="8211312" y="4233672"/>
+            <a:ext cx="2734056" cy="941832"/>
+          </a:xfrm>
+          <a:prstGeom prst="rect">
+            <a:avLst/>
+          </a:prstGeom>
+          <a:noFill/>
+          <a:ln/>
+        </p:spPr>
+        <p:txBody>
+          <a:bodyPr wrap="square" lIns="0" tIns="0" rIns="0" bIns="0" rtlCol="0" anchor="t">
+            <a:normAutofit/>
+          </a:bodyPr>
+          <a:lstStyle/>
+          <a:p>
+            <a:pPr indent="0" marL="0">
+              <a:buNone/>
+            </a:pPr>
+            <a:r>
+              <a:rPr lang="en-US" sz="1250" dirty="0">
+                <a:solidFill>
+                  <a:srgbClr val="17364A"/>
+                </a:solidFill>
+                <a:latin typeface="Aptos" pitchFamily="34" charset="0"/>
+                <a:ea typeface="Aptos" pitchFamily="34" charset="-122"/>
+                <a:cs typeface="Aptos" pitchFamily="34" charset="-120"/>
+              </a:rPr>
+              <a:t>If your department already has a strong equivalent tool, adapt or use the existing process instead of recreating it.</a:t>
+            </a:r>
+            <a:endParaRPr lang="en-US" sz="1250" dirty="0"/>
           </a:p>
         </p:txBody>
       </p:sp>
@@ -6701,7 +12100,32 @@
       </p:sp>
       <p:sp>
         <p:nvSpPr>
-          <p:cNvPr id="3" name="Text 1"/>
+          <p:cNvPr id="3" name="Shape 1"/>
+          <p:cNvSpPr/>
+          <p:nvPr/>
+        </p:nvSpPr>
+        <p:spPr>
+          <a:xfrm>
+            <a:off x="0" y="164592"/>
+            <a:ext cx="146304" cy="6693408"/>
+          </a:xfrm>
+          <a:prstGeom prst="rect">
+            <a:avLst/>
+          </a:prstGeom>
+          <a:solidFill>
+            <a:srgbClr val="2F8A28"/>
+          </a:solidFill>
+          <a:ln w="12700">
+            <a:solidFill>
+              <a:srgbClr val="2F8A28"/>
+            </a:solidFill>
+            <a:prstDash val="solid"/>
+          </a:ln>
+        </p:spPr>
+      </p:sp>
+      <p:sp>
+        <p:nvSpPr>
+          <p:cNvPr id="4" name="Text 2"/>
           <p:cNvSpPr/>
           <p:nvPr/>
         </p:nvSpPr>
@@ -6740,7 +12164,7 @@
       </p:sp>
       <p:sp>
         <p:nvSpPr>
-          <p:cNvPr id="4" name="Text 2"/>
+          <p:cNvPr id="5" name="Text 3"/>
           <p:cNvSpPr/>
           <p:nvPr/>
         </p:nvSpPr>
@@ -6779,7 +12203,7 @@
       </p:sp>
       <p:sp>
         <p:nvSpPr>
-          <p:cNvPr id="5" name="Text 3"/>
+          <p:cNvPr id="6" name="Text 4"/>
           <p:cNvSpPr/>
           <p:nvPr/>
         </p:nvSpPr>
@@ -6818,13 +12242,77 @@
       </p:sp>
       <p:sp>
         <p:nvSpPr>
-          <p:cNvPr id="6" name="Text 4"/>
+          <p:cNvPr id="7" name="Shape 5"/>
           <p:cNvSpPr/>
           <p:nvPr/>
         </p:nvSpPr>
         <p:spPr>
           <a:xfrm>
             <a:off x="640080" y="658368"/>
+            <a:ext cx="420624" cy="420624"/>
+          </a:xfrm>
+          <a:prstGeom prst="ellipse">
+            <a:avLst/>
+          </a:prstGeom>
+          <a:solidFill>
+            <a:srgbClr val="0068B7"/>
+          </a:solidFill>
+          <a:ln w="12700">
+            <a:solidFill>
+              <a:srgbClr val="0068B7"/>
+            </a:solidFill>
+            <a:prstDash val="solid"/>
+          </a:ln>
+        </p:spPr>
+      </p:sp>
+      <p:sp>
+        <p:nvSpPr>
+          <p:cNvPr id="8" name="Text 6"/>
+          <p:cNvSpPr/>
+          <p:nvPr/>
+        </p:nvSpPr>
+        <p:spPr>
+          <a:xfrm>
+            <a:off x="640080" y="731520"/>
+            <a:ext cx="420624" cy="164592"/>
+          </a:xfrm>
+          <a:prstGeom prst="rect">
+            <a:avLst/>
+          </a:prstGeom>
+          <a:noFill/>
+          <a:ln/>
+        </p:spPr>
+        <p:txBody>
+          <a:bodyPr wrap="square" lIns="0" tIns="0" rIns="0" bIns="0" rtlCol="0" anchor="ctr"/>
+          <a:lstStyle/>
+          <a:p>
+            <a:pPr algn="ctr" indent="0" marL="0">
+              <a:buNone/>
+            </a:pPr>
+            <a:r>
+              <a:rPr lang="en-US" sz="1100" b="1" dirty="0">
+                <a:solidFill>
+                  <a:srgbClr val="FFFFFF"/>
+                </a:solidFill>
+                <a:latin typeface="Aptos" pitchFamily="34" charset="0"/>
+                <a:ea typeface="Aptos" pitchFamily="34" charset="-122"/>
+                <a:cs typeface="Aptos" pitchFamily="34" charset="-120"/>
+              </a:rPr>
+              <a:t>1</a:t>
+            </a:r>
+            <a:endParaRPr lang="en-US" sz="1100" dirty="0"/>
+          </a:p>
+        </p:txBody>
+      </p:sp>
+      <p:sp>
+        <p:nvSpPr>
+          <p:cNvPr id="9" name="Text 7"/>
+          <p:cNvSpPr/>
+          <p:nvPr/>
+        </p:nvSpPr>
+        <p:spPr>
+          <a:xfrm>
+            <a:off x="640080" y="621792"/>
             <a:ext cx="10881360" cy="566928"/>
           </a:xfrm>
           <a:prstGeom prst="rect">
@@ -6851,7 +12339,7 @@
                 <a:ea typeface="Aptos Display" pitchFamily="34" charset="-122"/>
                 <a:cs typeface="Aptos Display" pitchFamily="34" charset="-120"/>
               </a:rPr>
-              <a:t>Module Overview</a:t>
+              <a:t>Learning Objectives</a:t>
             </a:r>
             <a:endParaRPr lang="en-US" sz="2700" dirty="0"/>
           </a:p>
@@ -6859,32 +12347,178 @@
       </p:sp>
       <p:sp>
         <p:nvSpPr>
-          <p:cNvPr id="7" name="Text 5"/>
-          <p:cNvSpPr/>
-          <p:nvPr/>
-        </p:nvSpPr>
-        <p:spPr>
-          <a:xfrm>
-            <a:off x="822960" y="1325880"/>
-            <a:ext cx="10378440" cy="4800600"/>
-          </a:xfrm>
-          <a:prstGeom prst="rect">
-            <a:avLst/>
-          </a:prstGeom>
-          <a:noFill/>
-          <a:ln/>
-        </p:spPr>
-        <p:txBody>
-          <a:bodyPr wrap="square" lIns="1016" tIns="1016" rIns="1016" bIns="1016" rtlCol="0" anchor="t">
+          <p:cNvPr id="10" name="Text 8"/>
+          <p:cNvSpPr/>
+          <p:nvPr/>
+        </p:nvSpPr>
+        <p:spPr>
+          <a:xfrm>
+            <a:off x="868680" y="1417320"/>
+            <a:ext cx="6675120" cy="4434840"/>
+          </a:xfrm>
+          <a:prstGeom prst="rect">
+            <a:avLst/>
+          </a:prstGeom>
+          <a:noFill/>
+          <a:ln/>
+        </p:spPr>
+        <p:txBody>
+          <a:bodyPr wrap="square" lIns="635" tIns="635" rIns="635" bIns="635" rtlCol="0" anchor="t">
             <a:normAutofit/>
           </a:bodyPr>
           <a:lstStyle/>
           <a:p>
+            <a:r>
+              <a:rPr lang="en-US" sz="1700" dirty="0">
+                <a:solidFill>
+                  <a:srgbClr val="17364A"/>
+                </a:solidFill>
+                <a:latin typeface="Aptos" pitchFamily="34" charset="0"/>
+                <a:ea typeface="Aptos" pitchFamily="34" charset="-122"/>
+                <a:cs typeface="Aptos" pitchFamily="34" charset="-120"/>
+              </a:rPr>
+              <a:t>Define time-series analysis and anomaly detection in public health terms.</a:t>
+            </a:r>
+            <a:endParaRPr lang="en-US" sz="1700" dirty="0"/>
+          </a:p>
+          <a:p>
+            <a:r>
+              <a:rPr lang="en-US" sz="1700" dirty="0">
+                <a:solidFill>
+                  <a:srgbClr val="17364A"/>
+                </a:solidFill>
+                <a:latin typeface="Aptos" pitchFamily="34" charset="0"/>
+                <a:ea typeface="Aptos" pitchFamily="34" charset="-122"/>
+                <a:cs typeface="Aptos" pitchFamily="34" charset="-120"/>
+              </a:rPr>
+              <a:t>Explain baselines, seasonality, trends, reporting delays, and thresholds.</a:t>
+            </a:r>
+            <a:endParaRPr lang="en-US" sz="1700" dirty="0"/>
+          </a:p>
+          <a:p>
+            <a:r>
+              <a:rPr lang="en-US" sz="1700" dirty="0">
+                <a:solidFill>
+                  <a:srgbClr val="17364A"/>
+                </a:solidFill>
+                <a:latin typeface="Aptos" pitchFamily="34" charset="0"/>
+                <a:ea typeface="Aptos" pitchFamily="34" charset="-122"/>
+                <a:cs typeface="Aptos" pitchFamily="34" charset="-120"/>
+              </a:rPr>
+              <a:t>Distinguish statistical signals from confirmed outbreaks or public health events.</a:t>
+            </a:r>
+            <a:endParaRPr lang="en-US" sz="1700" dirty="0"/>
+          </a:p>
+          <a:p>
+            <a:r>
+              <a:rPr lang="en-US" sz="1700" dirty="0">
+                <a:solidFill>
+                  <a:srgbClr val="17364A"/>
+                </a:solidFill>
+                <a:latin typeface="Aptos" pitchFamily="34" charset="0"/>
+                <a:ea typeface="Aptos" pitchFamily="34" charset="-122"/>
+                <a:cs typeface="Aptos" pitchFamily="34" charset="-120"/>
+              </a:rPr>
+              <a:t>Identify risks from alert fatigue, data artifacts, delayed reporting, and model drift.</a:t>
+            </a:r>
+            <a:endParaRPr lang="en-US" sz="1700" dirty="0"/>
+          </a:p>
+        </p:txBody>
+      </p:sp>
+      <p:sp>
+        <p:nvSpPr>
+          <p:cNvPr id="11" name="Shape 9"/>
+          <p:cNvSpPr/>
+          <p:nvPr/>
+        </p:nvSpPr>
+        <p:spPr>
+          <a:xfrm>
+            <a:off x="7909560" y="1417320"/>
+            <a:ext cx="3154680" cy="1828800"/>
+          </a:xfrm>
+          <a:prstGeom prst="roundRect">
+            <a:avLst>
+              <a:gd name="adj" fmla="val 6000"/>
+            </a:avLst>
+          </a:prstGeom>
+          <a:solidFill>
+            <a:srgbClr val="EEF8ED"/>
+          </a:solidFill>
+          <a:ln w="12700">
+            <a:solidFill>
+              <a:srgbClr val="B9D7E6"/>
+            </a:solidFill>
+            <a:prstDash val="solid"/>
+          </a:ln>
+        </p:spPr>
+      </p:sp>
+      <p:sp>
+        <p:nvSpPr>
+          <p:cNvPr id="12" name="Text 10"/>
+          <p:cNvSpPr/>
+          <p:nvPr/>
+        </p:nvSpPr>
+        <p:spPr>
+          <a:xfrm>
+            <a:off x="8074152" y="1563624"/>
+            <a:ext cx="2825496" cy="201168"/>
+          </a:xfrm>
+          <a:prstGeom prst="rect">
+            <a:avLst/>
+          </a:prstGeom>
+          <a:noFill/>
+          <a:ln/>
+        </p:spPr>
+        <p:txBody>
+          <a:bodyPr wrap="square" lIns="0" tIns="0" rIns="0" bIns="0" rtlCol="0" anchor="ctr"/>
+          <a:lstStyle/>
+          <a:p>
             <a:pPr indent="0" marL="0">
               <a:buNone/>
             </a:pPr>
             <a:r>
-              <a:rPr lang="en-US" sz="1420" dirty="0">
+              <a:rPr lang="en-US" sz="950" b="1" dirty="0">
+                <a:solidFill>
+                  <a:srgbClr val="0068B7"/>
+                </a:solidFill>
+                <a:latin typeface="Aptos" pitchFamily="34" charset="0"/>
+                <a:ea typeface="Aptos" pitchFamily="34" charset="-122"/>
+                <a:cs typeface="Aptos" pitchFamily="34" charset="-120"/>
+              </a:rPr>
+              <a:t>Key idea</a:t>
+            </a:r>
+            <a:endParaRPr lang="en-US" sz="950" dirty="0"/>
+          </a:p>
+        </p:txBody>
+      </p:sp>
+      <p:sp>
+        <p:nvSpPr>
+          <p:cNvPr id="13" name="Text 11"/>
+          <p:cNvSpPr/>
+          <p:nvPr/>
+        </p:nvSpPr>
+        <p:spPr>
+          <a:xfrm>
+            <a:off x="8074152" y="1856232"/>
+            <a:ext cx="2825496" cy="1261872"/>
+          </a:xfrm>
+          <a:prstGeom prst="rect">
+            <a:avLst/>
+          </a:prstGeom>
+          <a:noFill/>
+          <a:ln/>
+        </p:spPr>
+        <p:txBody>
+          <a:bodyPr wrap="square" lIns="0" tIns="0" rIns="0" bIns="0" rtlCol="0" anchor="t">
+            <a:normAutofit/>
+          </a:bodyPr>
+          <a:lstStyle/>
+          <a:p>
+            <a:pPr indent="0" marL="0">
+              <a:buNone/>
+            </a:pPr>
+            <a:r>
+              <a:rPr lang="en-US" sz="1250" dirty="0">
                 <a:solidFill>
                   <a:srgbClr val="17364A"/>
                 </a:solidFill>
@@ -6892,9 +12526,116 @@
                 <a:ea typeface="Aptos" pitchFamily="34" charset="-122"/>
                 <a:cs typeface="Aptos" pitchFamily="34" charset="-120"/>
               </a:rPr>
-              <a:t>Time-series analysis examines data collected over time. In public health, time patterns are central to surveillance, outbreak detection, syndromic monitoring, wastewater analysis, emergency response, seasonal planning, and program performance. AI-supported anomaly detection can help identify unusual increases, decreases, or pattern changes that may require investigation. This module explains how time-series and anomaly detection methods can support public health without replacing epidemiologic interpretation. Automated alerts may identify signals faster, but signals are not diagnoses or confirmed events. Staff need to understand baselines, seasonality, reporting delays, thresholds, alert fatigue, and the difference between statistical anomalies and public health significance. Learners will practice designing an anomaly detection review plan that includes data quality checks, baseline selection, threshold rationale, human review, and escalation procedures.</a:t>
-            </a:r>
-            <a:endParaRPr lang="en-US" sz="1420" dirty="0"/>
+              <a:t>Define time-series analysis and anomaly detection in public health terms.</a:t>
+            </a:r>
+            <a:endParaRPr lang="en-US" sz="1250" dirty="0"/>
+          </a:p>
+        </p:txBody>
+      </p:sp>
+      <p:sp>
+        <p:nvSpPr>
+          <p:cNvPr id="14" name="Shape 12"/>
+          <p:cNvSpPr/>
+          <p:nvPr/>
+        </p:nvSpPr>
+        <p:spPr>
+          <a:xfrm>
+            <a:off x="7909560" y="3520440"/>
+            <a:ext cx="3154680" cy="1737360"/>
+          </a:xfrm>
+          <a:prstGeom prst="roundRect">
+            <a:avLst>
+              <a:gd name="adj" fmla="val 6316"/>
+            </a:avLst>
+          </a:prstGeom>
+          <a:solidFill>
+            <a:srgbClr val="EAF6F8"/>
+          </a:solidFill>
+          <a:ln w="12700">
+            <a:solidFill>
+              <a:srgbClr val="B9D7E6"/>
+            </a:solidFill>
+            <a:prstDash val="solid"/>
+          </a:ln>
+        </p:spPr>
+      </p:sp>
+      <p:sp>
+        <p:nvSpPr>
+          <p:cNvPr id="15" name="Text 13"/>
+          <p:cNvSpPr/>
+          <p:nvPr/>
+        </p:nvSpPr>
+        <p:spPr>
+          <a:xfrm>
+            <a:off x="8074152" y="3666744"/>
+            <a:ext cx="2825496" cy="201168"/>
+          </a:xfrm>
+          <a:prstGeom prst="rect">
+            <a:avLst/>
+          </a:prstGeom>
+          <a:noFill/>
+          <a:ln/>
+        </p:spPr>
+        <p:txBody>
+          <a:bodyPr wrap="square" lIns="0" tIns="0" rIns="0" bIns="0" rtlCol="0" anchor="ctr"/>
+          <a:lstStyle/>
+          <a:p>
+            <a:pPr indent="0" marL="0">
+              <a:buNone/>
+            </a:pPr>
+            <a:r>
+              <a:rPr lang="en-US" sz="950" b="1" dirty="0">
+                <a:solidFill>
+                  <a:srgbClr val="0068B7"/>
+                </a:solidFill>
+                <a:latin typeface="Aptos" pitchFamily="34" charset="0"/>
+                <a:ea typeface="Aptos" pitchFamily="34" charset="-122"/>
+                <a:cs typeface="Aptos" pitchFamily="34" charset="-120"/>
+              </a:rPr>
+              <a:t>Use this for</a:t>
+            </a:r>
+            <a:endParaRPr lang="en-US" sz="950" dirty="0"/>
+          </a:p>
+        </p:txBody>
+      </p:sp>
+      <p:sp>
+        <p:nvSpPr>
+          <p:cNvPr id="16" name="Text 14"/>
+          <p:cNvSpPr/>
+          <p:nvPr/>
+        </p:nvSpPr>
+        <p:spPr>
+          <a:xfrm>
+            <a:off x="8074152" y="3959352"/>
+            <a:ext cx="2825496" cy="1170432"/>
+          </a:xfrm>
+          <a:prstGeom prst="rect">
+            <a:avLst/>
+          </a:prstGeom>
+          <a:noFill/>
+          <a:ln/>
+        </p:spPr>
+        <p:txBody>
+          <a:bodyPr wrap="square" lIns="0" tIns="0" rIns="0" bIns="0" rtlCol="0" anchor="t">
+            <a:normAutofit/>
+          </a:bodyPr>
+          <a:lstStyle/>
+          <a:p>
+            <a:pPr indent="0" marL="0">
+              <a:buNone/>
+            </a:pPr>
+            <a:r>
+              <a:rPr lang="en-US" sz="1250" dirty="0">
+                <a:solidFill>
+                  <a:srgbClr val="17364A"/>
+                </a:solidFill>
+                <a:latin typeface="Aptos" pitchFamily="34" charset="0"/>
+                <a:ea typeface="Aptos" pitchFamily="34" charset="-122"/>
+                <a:cs typeface="Aptos" pitchFamily="34" charset="-120"/>
+              </a:rPr>
+              <a:t>Connect the concept to public health decisions, safeguards, documentation, or implementation work.</a:t>
+            </a:r>
+            <a:endParaRPr lang="en-US" sz="1250" dirty="0"/>
           </a:p>
         </p:txBody>
       </p:sp>
@@ -6957,7 +12698,32 @@
       </p:sp>
       <p:sp>
         <p:nvSpPr>
-          <p:cNvPr id="3" name="Text 1"/>
+          <p:cNvPr id="3" name="Shape 1"/>
+          <p:cNvSpPr/>
+          <p:nvPr/>
+        </p:nvSpPr>
+        <p:spPr>
+          <a:xfrm>
+            <a:off x="0" y="164592"/>
+            <a:ext cx="146304" cy="6693408"/>
+          </a:xfrm>
+          <a:prstGeom prst="rect">
+            <a:avLst/>
+          </a:prstGeom>
+          <a:solidFill>
+            <a:srgbClr val="2F8A28"/>
+          </a:solidFill>
+          <a:ln w="12700">
+            <a:solidFill>
+              <a:srgbClr val="2F8A28"/>
+            </a:solidFill>
+            <a:prstDash val="solid"/>
+          </a:ln>
+        </p:spPr>
+      </p:sp>
+      <p:sp>
+        <p:nvSpPr>
+          <p:cNvPr id="4" name="Text 2"/>
           <p:cNvSpPr/>
           <p:nvPr/>
         </p:nvSpPr>
@@ -6996,7 +12762,7 @@
       </p:sp>
       <p:sp>
         <p:nvSpPr>
-          <p:cNvPr id="4" name="Text 2"/>
+          <p:cNvPr id="5" name="Text 3"/>
           <p:cNvSpPr/>
           <p:nvPr/>
         </p:nvSpPr>
@@ -7035,7 +12801,7 @@
       </p:sp>
       <p:sp>
         <p:nvSpPr>
-          <p:cNvPr id="5" name="Text 3"/>
+          <p:cNvPr id="6" name="Text 4"/>
           <p:cNvSpPr/>
           <p:nvPr/>
         </p:nvSpPr>
@@ -7074,7 +12840,7 @@
       </p:sp>
       <p:sp>
         <p:nvSpPr>
-          <p:cNvPr id="6" name="Text 4"/>
+          <p:cNvPr id="7" name="Text 5"/>
           <p:cNvSpPr/>
           <p:nvPr/>
         </p:nvSpPr>
@@ -7107,7 +12873,7 @@
                 <a:ea typeface="Aptos Display" pitchFamily="34" charset="-122"/>
                 <a:cs typeface="Aptos Display" pitchFamily="34" charset="-120"/>
               </a:rPr>
-              <a:t>Why This Topic Matters for Public Health AI</a:t>
+              <a:t>Learning Objectives Continued</a:t>
             </a:r>
             <a:endParaRPr lang="en-US" sz="2700" dirty="0"/>
           </a:p>
@@ -7115,32 +12881,136 @@
       </p:sp>
       <p:sp>
         <p:nvSpPr>
-          <p:cNvPr id="7" name="Text 5"/>
-          <p:cNvSpPr/>
-          <p:nvPr/>
-        </p:nvSpPr>
-        <p:spPr>
-          <a:xfrm>
-            <a:off x="822960" y="1325880"/>
-            <a:ext cx="10378440" cy="4800600"/>
-          </a:xfrm>
-          <a:prstGeom prst="rect">
-            <a:avLst/>
-          </a:prstGeom>
-          <a:noFill/>
-          <a:ln/>
-        </p:spPr>
-        <p:txBody>
-          <a:bodyPr wrap="square" lIns="1016" tIns="1016" rIns="1016" bIns="1016" rtlCol="0" anchor="t">
+          <p:cNvPr id="8" name="Text 6"/>
+          <p:cNvSpPr/>
+          <p:nvPr/>
+        </p:nvSpPr>
+        <p:spPr>
+          <a:xfrm>
+            <a:off x="868680" y="1417320"/>
+            <a:ext cx="6675120" cy="4434840"/>
+          </a:xfrm>
+          <a:prstGeom prst="rect">
+            <a:avLst/>
+          </a:prstGeom>
+          <a:noFill/>
+          <a:ln/>
+        </p:spPr>
+        <p:txBody>
+          <a:bodyPr wrap="square" lIns="635" tIns="635" rIns="635" bIns="635" rtlCol="0" anchor="t">
             <a:normAutofit/>
           </a:bodyPr>
           <a:lstStyle/>
           <a:p>
+            <a:r>
+              <a:rPr lang="en-US" sz="1700" dirty="0">
+                <a:solidFill>
+                  <a:srgbClr val="17364A"/>
+                </a:solidFill>
+                <a:latin typeface="Aptos" pitchFamily="34" charset="0"/>
+                <a:ea typeface="Aptos" pitchFamily="34" charset="-122"/>
+                <a:cs typeface="Aptos" pitchFamily="34" charset="-120"/>
+              </a:rPr>
+              <a:t>Produce an anomaly detection review plan for one public health data stream.</a:t>
+            </a:r>
+            <a:endParaRPr lang="en-US" sz="1700" dirty="0"/>
+          </a:p>
+        </p:txBody>
+      </p:sp>
+      <p:sp>
+        <p:nvSpPr>
+          <p:cNvPr id="9" name="Shape 7"/>
+          <p:cNvSpPr/>
+          <p:nvPr/>
+        </p:nvSpPr>
+        <p:spPr>
+          <a:xfrm>
+            <a:off x="7909560" y="1417320"/>
+            <a:ext cx="3154680" cy="1828800"/>
+          </a:xfrm>
+          <a:prstGeom prst="roundRect">
+            <a:avLst>
+              <a:gd name="adj" fmla="val 6000"/>
+            </a:avLst>
+          </a:prstGeom>
+          <a:solidFill>
+            <a:srgbClr val="EEF8ED"/>
+          </a:solidFill>
+          <a:ln w="12700">
+            <a:solidFill>
+              <a:srgbClr val="B9D7E6"/>
+            </a:solidFill>
+            <a:prstDash val="solid"/>
+          </a:ln>
+        </p:spPr>
+      </p:sp>
+      <p:sp>
+        <p:nvSpPr>
+          <p:cNvPr id="10" name="Text 8"/>
+          <p:cNvSpPr/>
+          <p:nvPr/>
+        </p:nvSpPr>
+        <p:spPr>
+          <a:xfrm>
+            <a:off x="8074152" y="1563624"/>
+            <a:ext cx="2825496" cy="201168"/>
+          </a:xfrm>
+          <a:prstGeom prst="rect">
+            <a:avLst/>
+          </a:prstGeom>
+          <a:noFill/>
+          <a:ln/>
+        </p:spPr>
+        <p:txBody>
+          <a:bodyPr wrap="square" lIns="0" tIns="0" rIns="0" bIns="0" rtlCol="0" anchor="ctr"/>
+          <a:lstStyle/>
+          <a:p>
             <a:pPr indent="0" marL="0">
               <a:buNone/>
             </a:pPr>
             <a:r>
-              <a:rPr lang="en-US" sz="1420" dirty="0">
+              <a:rPr lang="en-US" sz="950" b="1" dirty="0">
+                <a:solidFill>
+                  <a:srgbClr val="0068B7"/>
+                </a:solidFill>
+                <a:latin typeface="Aptos" pitchFamily="34" charset="0"/>
+                <a:ea typeface="Aptos" pitchFamily="34" charset="-122"/>
+                <a:cs typeface="Aptos" pitchFamily="34" charset="-120"/>
+              </a:rPr>
+              <a:t>Key idea</a:t>
+            </a:r>
+            <a:endParaRPr lang="en-US" sz="950" dirty="0"/>
+          </a:p>
+        </p:txBody>
+      </p:sp>
+      <p:sp>
+        <p:nvSpPr>
+          <p:cNvPr id="11" name="Text 9"/>
+          <p:cNvSpPr/>
+          <p:nvPr/>
+        </p:nvSpPr>
+        <p:spPr>
+          <a:xfrm>
+            <a:off x="8074152" y="1856232"/>
+            <a:ext cx="2825496" cy="1261872"/>
+          </a:xfrm>
+          <a:prstGeom prst="rect">
+            <a:avLst/>
+          </a:prstGeom>
+          <a:noFill/>
+          <a:ln/>
+        </p:spPr>
+        <p:txBody>
+          <a:bodyPr wrap="square" lIns="0" tIns="0" rIns="0" bIns="0" rtlCol="0" anchor="t">
+            <a:normAutofit/>
+          </a:bodyPr>
+          <a:lstStyle/>
+          <a:p>
+            <a:pPr indent="0" marL="0">
+              <a:buNone/>
+            </a:pPr>
+            <a:r>
+              <a:rPr lang="en-US" sz="1250" dirty="0">
                 <a:solidFill>
                   <a:srgbClr val="17364A"/>
                 </a:solidFill>
@@ -7148,9 +13018,116 @@
                 <a:ea typeface="Aptos" pitchFamily="34" charset="-122"/>
                 <a:cs typeface="Aptos" pitchFamily="34" charset="-120"/>
               </a:rPr>
-              <a:t>Time-series methods matter because public health surveillance is often about change. A single count may be difficult to interpret without knowing whether it is higher than expected for that time, place, population, reporting source, and condition. AI-supported anomaly detection can help staff review large volumes of data and prioritize signals that deserve attention. However, public health time-series data are shaped by reporting systems as much as disease patterns. Weekends, holidays, provider onboarding, lab code changes, EHR outages, weather events, testing availability, and public attention can all change observed data. An anomaly may indicate an outbreak, but it may also indicate a data feed problem or behavior change. Responsible use requires a workflow that treats alerts as starting points for investigation. Staff must know what data are being monitored, how the baseline was selected, what triggers an alert, what review steps follow, and when a signal becomes an incident, outbreak investigation, or communication issue.</a:t>
-            </a:r>
-            <a:endParaRPr lang="en-US" sz="1420" dirty="0"/>
+              <a:t>Produce an anomaly detection review plan for one public health data stream.</a:t>
+            </a:r>
+            <a:endParaRPr lang="en-US" sz="1250" dirty="0"/>
+          </a:p>
+        </p:txBody>
+      </p:sp>
+      <p:sp>
+        <p:nvSpPr>
+          <p:cNvPr id="12" name="Shape 10"/>
+          <p:cNvSpPr/>
+          <p:nvPr/>
+        </p:nvSpPr>
+        <p:spPr>
+          <a:xfrm>
+            <a:off x="7909560" y="3520440"/>
+            <a:ext cx="3154680" cy="1737360"/>
+          </a:xfrm>
+          <a:prstGeom prst="roundRect">
+            <a:avLst>
+              <a:gd name="adj" fmla="val 6316"/>
+            </a:avLst>
+          </a:prstGeom>
+          <a:solidFill>
+            <a:srgbClr val="EAF6F8"/>
+          </a:solidFill>
+          <a:ln w="12700">
+            <a:solidFill>
+              <a:srgbClr val="B9D7E6"/>
+            </a:solidFill>
+            <a:prstDash val="solid"/>
+          </a:ln>
+        </p:spPr>
+      </p:sp>
+      <p:sp>
+        <p:nvSpPr>
+          <p:cNvPr id="13" name="Text 11"/>
+          <p:cNvSpPr/>
+          <p:nvPr/>
+        </p:nvSpPr>
+        <p:spPr>
+          <a:xfrm>
+            <a:off x="8074152" y="3666744"/>
+            <a:ext cx="2825496" cy="201168"/>
+          </a:xfrm>
+          <a:prstGeom prst="rect">
+            <a:avLst/>
+          </a:prstGeom>
+          <a:noFill/>
+          <a:ln/>
+        </p:spPr>
+        <p:txBody>
+          <a:bodyPr wrap="square" lIns="0" tIns="0" rIns="0" bIns="0" rtlCol="0" anchor="ctr"/>
+          <a:lstStyle/>
+          <a:p>
+            <a:pPr indent="0" marL="0">
+              <a:buNone/>
+            </a:pPr>
+            <a:r>
+              <a:rPr lang="en-US" sz="950" b="1" dirty="0">
+                <a:solidFill>
+                  <a:srgbClr val="0068B7"/>
+                </a:solidFill>
+                <a:latin typeface="Aptos" pitchFamily="34" charset="0"/>
+                <a:ea typeface="Aptos" pitchFamily="34" charset="-122"/>
+                <a:cs typeface="Aptos" pitchFamily="34" charset="-120"/>
+              </a:rPr>
+              <a:t>Use this for</a:t>
+            </a:r>
+            <a:endParaRPr lang="en-US" sz="950" dirty="0"/>
+          </a:p>
+        </p:txBody>
+      </p:sp>
+      <p:sp>
+        <p:nvSpPr>
+          <p:cNvPr id="14" name="Text 12"/>
+          <p:cNvSpPr/>
+          <p:nvPr/>
+        </p:nvSpPr>
+        <p:spPr>
+          <a:xfrm>
+            <a:off x="8074152" y="3959352"/>
+            <a:ext cx="2825496" cy="1170432"/>
+          </a:xfrm>
+          <a:prstGeom prst="rect">
+            <a:avLst/>
+          </a:prstGeom>
+          <a:noFill/>
+          <a:ln/>
+        </p:spPr>
+        <p:txBody>
+          <a:bodyPr wrap="square" lIns="0" tIns="0" rIns="0" bIns="0" rtlCol="0" anchor="t">
+            <a:normAutofit/>
+          </a:bodyPr>
+          <a:lstStyle/>
+          <a:p>
+            <a:pPr indent="0" marL="0">
+              <a:buNone/>
+            </a:pPr>
+            <a:r>
+              <a:rPr lang="en-US" sz="1250" dirty="0">
+                <a:solidFill>
+                  <a:srgbClr val="17364A"/>
+                </a:solidFill>
+                <a:latin typeface="Aptos" pitchFamily="34" charset="0"/>
+                <a:ea typeface="Aptos" pitchFamily="34" charset="-122"/>
+                <a:cs typeface="Aptos" pitchFamily="34" charset="-120"/>
+              </a:rPr>
+              <a:t>Connect the concept to public health decisions, safeguards, documentation, or implementation work.</a:t>
+            </a:r>
+            <a:endParaRPr lang="en-US" sz="1250" dirty="0"/>
           </a:p>
         </p:txBody>
       </p:sp>
@@ -7213,7 +13190,32 @@
       </p:sp>
       <p:sp>
         <p:nvSpPr>
-          <p:cNvPr id="3" name="Text 1"/>
+          <p:cNvPr id="3" name="Shape 1"/>
+          <p:cNvSpPr/>
+          <p:nvPr/>
+        </p:nvSpPr>
+        <p:spPr>
+          <a:xfrm>
+            <a:off x="0" y="164592"/>
+            <a:ext cx="146304" cy="6693408"/>
+          </a:xfrm>
+          <a:prstGeom prst="rect">
+            <a:avLst/>
+          </a:prstGeom>
+          <a:solidFill>
+            <a:srgbClr val="2F8A28"/>
+          </a:solidFill>
+          <a:ln w="12700">
+            <a:solidFill>
+              <a:srgbClr val="2F8A28"/>
+            </a:solidFill>
+            <a:prstDash val="solid"/>
+          </a:ln>
+        </p:spPr>
+      </p:sp>
+      <p:sp>
+        <p:nvSpPr>
+          <p:cNvPr id="4" name="Text 2"/>
           <p:cNvSpPr/>
           <p:nvPr/>
         </p:nvSpPr>
@@ -7252,7 +13254,7 @@
       </p:sp>
       <p:sp>
         <p:nvSpPr>
-          <p:cNvPr id="4" name="Text 2"/>
+          <p:cNvPr id="5" name="Text 3"/>
           <p:cNvSpPr/>
           <p:nvPr/>
         </p:nvSpPr>
@@ -7291,7 +13293,7 @@
       </p:sp>
       <p:sp>
         <p:nvSpPr>
-          <p:cNvPr id="5" name="Text 3"/>
+          <p:cNvPr id="6" name="Text 4"/>
           <p:cNvSpPr/>
           <p:nvPr/>
         </p:nvSpPr>
@@ -7330,13 +13332,77 @@
       </p:sp>
       <p:sp>
         <p:nvSpPr>
-          <p:cNvPr id="6" name="Text 4"/>
+          <p:cNvPr id="7" name="Shape 5"/>
           <p:cNvSpPr/>
           <p:nvPr/>
         </p:nvSpPr>
         <p:spPr>
           <a:xfrm>
             <a:off x="640080" y="658368"/>
+            <a:ext cx="420624" cy="420624"/>
+          </a:xfrm>
+          <a:prstGeom prst="ellipse">
+            <a:avLst/>
+          </a:prstGeom>
+          <a:solidFill>
+            <a:srgbClr val="0068B7"/>
+          </a:solidFill>
+          <a:ln w="12700">
+            <a:solidFill>
+              <a:srgbClr val="0068B7"/>
+            </a:solidFill>
+            <a:prstDash val="solid"/>
+          </a:ln>
+        </p:spPr>
+      </p:sp>
+      <p:sp>
+        <p:nvSpPr>
+          <p:cNvPr id="8" name="Text 6"/>
+          <p:cNvSpPr/>
+          <p:nvPr/>
+        </p:nvSpPr>
+        <p:spPr>
+          <a:xfrm>
+            <a:off x="640080" y="731520"/>
+            <a:ext cx="420624" cy="164592"/>
+          </a:xfrm>
+          <a:prstGeom prst="rect">
+            <a:avLst/>
+          </a:prstGeom>
+          <a:noFill/>
+          <a:ln/>
+        </p:spPr>
+        <p:txBody>
+          <a:bodyPr wrap="square" lIns="0" tIns="0" rIns="0" bIns="0" rtlCol="0" anchor="ctr"/>
+          <a:lstStyle/>
+          <a:p>
+            <a:pPr algn="ctr" indent="0" marL="0">
+              <a:buNone/>
+            </a:pPr>
+            <a:r>
+              <a:rPr lang="en-US" sz="1100" b="1" dirty="0">
+                <a:solidFill>
+                  <a:srgbClr val="FFFFFF"/>
+                </a:solidFill>
+                <a:latin typeface="Aptos" pitchFamily="34" charset="0"/>
+                <a:ea typeface="Aptos" pitchFamily="34" charset="-122"/>
+                <a:cs typeface="Aptos" pitchFamily="34" charset="-120"/>
+              </a:rPr>
+              <a:t>2</a:t>
+            </a:r>
+            <a:endParaRPr lang="en-US" sz="1100" dirty="0"/>
+          </a:p>
+        </p:txBody>
+      </p:sp>
+      <p:sp>
+        <p:nvSpPr>
+          <p:cNvPr id="9" name="Text 7"/>
+          <p:cNvSpPr/>
+          <p:nvPr/>
+        </p:nvSpPr>
+        <p:spPr>
+          <a:xfrm>
+            <a:off x="640080" y="621792"/>
             <a:ext cx="10881360" cy="566928"/>
           </a:xfrm>
           <a:prstGeom prst="rect">
@@ -7363,7 +13429,7 @@
                 <a:ea typeface="Aptos Display" pitchFamily="34" charset="-122"/>
                 <a:cs typeface="Aptos Display" pitchFamily="34" charset="-120"/>
               </a:rPr>
-              <a:t>Public Health Example</a:t>
+              <a:t>Module Overview</a:t>
             </a:r>
             <a:endParaRPr lang="en-US" sz="2700" dirty="0"/>
           </a:p>
@@ -7371,32 +13437,178 @@
       </p:sp>
       <p:sp>
         <p:nvSpPr>
-          <p:cNvPr id="7" name="Text 5"/>
-          <p:cNvSpPr/>
-          <p:nvPr/>
-        </p:nvSpPr>
-        <p:spPr>
-          <a:xfrm>
-            <a:off x="822960" y="1325880"/>
-            <a:ext cx="10378440" cy="4800600"/>
-          </a:xfrm>
-          <a:prstGeom prst="rect">
-            <a:avLst/>
-          </a:prstGeom>
-          <a:noFill/>
-          <a:ln/>
-        </p:spPr>
-        <p:txBody>
-          <a:bodyPr wrap="square" lIns="1016" tIns="1016" rIns="1016" bIns="1016" rtlCol="0" anchor="t">
+          <p:cNvPr id="10" name="Text 8"/>
+          <p:cNvSpPr/>
+          <p:nvPr/>
+        </p:nvSpPr>
+        <p:spPr>
+          <a:xfrm>
+            <a:off x="868680" y="1417320"/>
+            <a:ext cx="6675120" cy="4434840"/>
+          </a:xfrm>
+          <a:prstGeom prst="rect">
+            <a:avLst/>
+          </a:prstGeom>
+          <a:noFill/>
+          <a:ln/>
+        </p:spPr>
+        <p:txBody>
+          <a:bodyPr wrap="square" lIns="635" tIns="635" rIns="635" bIns="635" rtlCol="0" anchor="t">
             <a:normAutofit/>
           </a:bodyPr>
           <a:lstStyle/>
           <a:p>
+            <a:r>
+              <a:rPr lang="en-US" sz="1700" dirty="0">
+                <a:solidFill>
+                  <a:srgbClr val="17364A"/>
+                </a:solidFill>
+                <a:latin typeface="Aptos" pitchFamily="34" charset="0"/>
+                <a:ea typeface="Aptos" pitchFamily="34" charset="-122"/>
+                <a:cs typeface="Aptos" pitchFamily="34" charset="-120"/>
+              </a:rPr>
+              <a:t>Time-series analysis examines data collected over time.</a:t>
+            </a:r>
+            <a:endParaRPr lang="en-US" sz="1700" dirty="0"/>
+          </a:p>
+          <a:p>
+            <a:r>
+              <a:rPr lang="en-US" sz="1700" dirty="0">
+                <a:solidFill>
+                  <a:srgbClr val="17364A"/>
+                </a:solidFill>
+                <a:latin typeface="Aptos" pitchFamily="34" charset="0"/>
+                <a:ea typeface="Aptos" pitchFamily="34" charset="-122"/>
+                <a:cs typeface="Aptos" pitchFamily="34" charset="-120"/>
+              </a:rPr>
+              <a:t>In public health, time patterns are central to surveillance, outbreak detection, syndromic monitoring, wastewater analysis,.</a:t>
+            </a:r>
+            <a:endParaRPr lang="en-US" sz="1700" dirty="0"/>
+          </a:p>
+          <a:p>
+            <a:r>
+              <a:rPr lang="en-US" sz="1700" dirty="0">
+                <a:solidFill>
+                  <a:srgbClr val="17364A"/>
+                </a:solidFill>
+                <a:latin typeface="Aptos" pitchFamily="34" charset="0"/>
+                <a:ea typeface="Aptos" pitchFamily="34" charset="-122"/>
+                <a:cs typeface="Aptos" pitchFamily="34" charset="-120"/>
+              </a:rPr>
+              <a:t>AI-supported anomaly detection can help identify unusual increases, decreases, or pattern changes that may require.</a:t>
+            </a:r>
+            <a:endParaRPr lang="en-US" sz="1700" dirty="0"/>
+          </a:p>
+          <a:p>
+            <a:r>
+              <a:rPr lang="en-US" sz="1700" dirty="0">
+                <a:solidFill>
+                  <a:srgbClr val="17364A"/>
+                </a:solidFill>
+                <a:latin typeface="Aptos" pitchFamily="34" charset="0"/>
+                <a:ea typeface="Aptos" pitchFamily="34" charset="-122"/>
+                <a:cs typeface="Aptos" pitchFamily="34" charset="-120"/>
+              </a:rPr>
+              <a:t>This module explains how time-series and anomaly detection methods can support public health without replacing.</a:t>
+            </a:r>
+            <a:endParaRPr lang="en-US" sz="1700" dirty="0"/>
+          </a:p>
+        </p:txBody>
+      </p:sp>
+      <p:sp>
+        <p:nvSpPr>
+          <p:cNvPr id="11" name="Shape 9"/>
+          <p:cNvSpPr/>
+          <p:nvPr/>
+        </p:nvSpPr>
+        <p:spPr>
+          <a:xfrm>
+            <a:off x="7909560" y="1417320"/>
+            <a:ext cx="3154680" cy="1828800"/>
+          </a:xfrm>
+          <a:prstGeom prst="roundRect">
+            <a:avLst>
+              <a:gd name="adj" fmla="val 6000"/>
+            </a:avLst>
+          </a:prstGeom>
+          <a:solidFill>
+            <a:srgbClr val="EEF8ED"/>
+          </a:solidFill>
+          <a:ln w="12700">
+            <a:solidFill>
+              <a:srgbClr val="B9D7E6"/>
+            </a:solidFill>
+            <a:prstDash val="solid"/>
+          </a:ln>
+        </p:spPr>
+      </p:sp>
+      <p:sp>
+        <p:nvSpPr>
+          <p:cNvPr id="12" name="Text 10"/>
+          <p:cNvSpPr/>
+          <p:nvPr/>
+        </p:nvSpPr>
+        <p:spPr>
+          <a:xfrm>
+            <a:off x="8074152" y="1563624"/>
+            <a:ext cx="2825496" cy="201168"/>
+          </a:xfrm>
+          <a:prstGeom prst="rect">
+            <a:avLst/>
+          </a:prstGeom>
+          <a:noFill/>
+          <a:ln/>
+        </p:spPr>
+        <p:txBody>
+          <a:bodyPr wrap="square" lIns="0" tIns="0" rIns="0" bIns="0" rtlCol="0" anchor="ctr"/>
+          <a:lstStyle/>
+          <a:p>
             <a:pPr indent="0" marL="0">
               <a:buNone/>
             </a:pPr>
             <a:r>
-              <a:rPr lang="en-US" sz="1420" dirty="0">
+              <a:rPr lang="en-US" sz="950" b="1" dirty="0">
+                <a:solidFill>
+                  <a:srgbClr val="0068B7"/>
+                </a:solidFill>
+                <a:latin typeface="Aptos" pitchFamily="34" charset="0"/>
+                <a:ea typeface="Aptos" pitchFamily="34" charset="-122"/>
+                <a:cs typeface="Aptos" pitchFamily="34" charset="-120"/>
+              </a:rPr>
+              <a:t>Key idea</a:t>
+            </a:r>
+            <a:endParaRPr lang="en-US" sz="950" dirty="0"/>
+          </a:p>
+        </p:txBody>
+      </p:sp>
+      <p:sp>
+        <p:nvSpPr>
+          <p:cNvPr id="13" name="Text 11"/>
+          <p:cNvSpPr/>
+          <p:nvPr/>
+        </p:nvSpPr>
+        <p:spPr>
+          <a:xfrm>
+            <a:off x="8074152" y="1856232"/>
+            <a:ext cx="2825496" cy="1261872"/>
+          </a:xfrm>
+          <a:prstGeom prst="rect">
+            <a:avLst/>
+          </a:prstGeom>
+          <a:noFill/>
+          <a:ln/>
+        </p:spPr>
+        <p:txBody>
+          <a:bodyPr wrap="square" lIns="0" tIns="0" rIns="0" bIns="0" rtlCol="0" anchor="t">
+            <a:normAutofit/>
+          </a:bodyPr>
+          <a:lstStyle/>
+          <a:p>
+            <a:pPr indent="0" marL="0">
+              <a:buNone/>
+            </a:pPr>
+            <a:r>
+              <a:rPr lang="en-US" sz="1250" dirty="0">
                 <a:solidFill>
                   <a:srgbClr val="17364A"/>
                 </a:solidFill>
@@ -7404,9 +13616,116 @@
                 <a:ea typeface="Aptos" pitchFamily="34" charset="-122"/>
                 <a:cs typeface="Aptos" pitchFamily="34" charset="-120"/>
               </a:rPr>
-              <a:t>A syndromic surveillance team may use anomaly detection to monitor emergency department visits for respiratory symptoms. The system may flag a county when visits exceed the expected range for that day and season. The alert could prompt review of age groups, facilities, diagnosis text, lab data, school absenteeism, and local context. The alert is valuable only if it enters a disciplined review process. A sudden increase may reflect a true outbreak, a coding change, a new facility feed, a holiday effect, or a backlog. The analyst should review data quality, compare related indicators, assess geography and populations, and document whether the signal requires action or continued monitoring.</a:t>
-            </a:r>
-            <a:endParaRPr lang="en-US" sz="1420" dirty="0"/>
+              <a:t>Time-series analysis examines data collected over time.</a:t>
+            </a:r>
+            <a:endParaRPr lang="en-US" sz="1250" dirty="0"/>
+          </a:p>
+        </p:txBody>
+      </p:sp>
+      <p:sp>
+        <p:nvSpPr>
+          <p:cNvPr id="14" name="Shape 12"/>
+          <p:cNvSpPr/>
+          <p:nvPr/>
+        </p:nvSpPr>
+        <p:spPr>
+          <a:xfrm>
+            <a:off x="7909560" y="3520440"/>
+            <a:ext cx="3154680" cy="1737360"/>
+          </a:xfrm>
+          <a:prstGeom prst="roundRect">
+            <a:avLst>
+              <a:gd name="adj" fmla="val 6316"/>
+            </a:avLst>
+          </a:prstGeom>
+          <a:solidFill>
+            <a:srgbClr val="EAF6F8"/>
+          </a:solidFill>
+          <a:ln w="12700">
+            <a:solidFill>
+              <a:srgbClr val="B9D7E6"/>
+            </a:solidFill>
+            <a:prstDash val="solid"/>
+          </a:ln>
+        </p:spPr>
+      </p:sp>
+      <p:sp>
+        <p:nvSpPr>
+          <p:cNvPr id="15" name="Text 13"/>
+          <p:cNvSpPr/>
+          <p:nvPr/>
+        </p:nvSpPr>
+        <p:spPr>
+          <a:xfrm>
+            <a:off x="8074152" y="3666744"/>
+            <a:ext cx="2825496" cy="201168"/>
+          </a:xfrm>
+          <a:prstGeom prst="rect">
+            <a:avLst/>
+          </a:prstGeom>
+          <a:noFill/>
+          <a:ln/>
+        </p:spPr>
+        <p:txBody>
+          <a:bodyPr wrap="square" lIns="0" tIns="0" rIns="0" bIns="0" rtlCol="0" anchor="ctr"/>
+          <a:lstStyle/>
+          <a:p>
+            <a:pPr indent="0" marL="0">
+              <a:buNone/>
+            </a:pPr>
+            <a:r>
+              <a:rPr lang="en-US" sz="950" b="1" dirty="0">
+                <a:solidFill>
+                  <a:srgbClr val="0068B7"/>
+                </a:solidFill>
+                <a:latin typeface="Aptos" pitchFamily="34" charset="0"/>
+                <a:ea typeface="Aptos" pitchFamily="34" charset="-122"/>
+                <a:cs typeface="Aptos" pitchFamily="34" charset="-120"/>
+              </a:rPr>
+              <a:t>Use this for</a:t>
+            </a:r>
+            <a:endParaRPr lang="en-US" sz="950" dirty="0"/>
+          </a:p>
+        </p:txBody>
+      </p:sp>
+      <p:sp>
+        <p:nvSpPr>
+          <p:cNvPr id="16" name="Text 14"/>
+          <p:cNvSpPr/>
+          <p:nvPr/>
+        </p:nvSpPr>
+        <p:spPr>
+          <a:xfrm>
+            <a:off x="8074152" y="3959352"/>
+            <a:ext cx="2825496" cy="1170432"/>
+          </a:xfrm>
+          <a:prstGeom prst="rect">
+            <a:avLst/>
+          </a:prstGeom>
+          <a:noFill/>
+          <a:ln/>
+        </p:spPr>
+        <p:txBody>
+          <a:bodyPr wrap="square" lIns="0" tIns="0" rIns="0" bIns="0" rtlCol="0" anchor="t">
+            <a:normAutofit/>
+          </a:bodyPr>
+          <a:lstStyle/>
+          <a:p>
+            <a:pPr indent="0" marL="0">
+              <a:buNone/>
+            </a:pPr>
+            <a:r>
+              <a:rPr lang="en-US" sz="1250" dirty="0">
+                <a:solidFill>
+                  <a:srgbClr val="17364A"/>
+                </a:solidFill>
+                <a:latin typeface="Aptos" pitchFamily="34" charset="0"/>
+                <a:ea typeface="Aptos" pitchFamily="34" charset="-122"/>
+                <a:cs typeface="Aptos" pitchFamily="34" charset="-120"/>
+              </a:rPr>
+              <a:t>Connect the concept to public health decisions, safeguards, documentation, or implementation work.</a:t>
+            </a:r>
+            <a:endParaRPr lang="en-US" sz="1250" dirty="0"/>
           </a:p>
         </p:txBody>
       </p:sp>
@@ -7469,7 +13788,32 @@
       </p:sp>
       <p:sp>
         <p:nvSpPr>
-          <p:cNvPr id="3" name="Text 1"/>
+          <p:cNvPr id="3" name="Shape 1"/>
+          <p:cNvSpPr/>
+          <p:nvPr/>
+        </p:nvSpPr>
+        <p:spPr>
+          <a:xfrm>
+            <a:off x="0" y="164592"/>
+            <a:ext cx="146304" cy="6693408"/>
+          </a:xfrm>
+          <a:prstGeom prst="rect">
+            <a:avLst/>
+          </a:prstGeom>
+          <a:solidFill>
+            <a:srgbClr val="2F8A28"/>
+          </a:solidFill>
+          <a:ln w="12700">
+            <a:solidFill>
+              <a:srgbClr val="2F8A28"/>
+            </a:solidFill>
+            <a:prstDash val="solid"/>
+          </a:ln>
+        </p:spPr>
+      </p:sp>
+      <p:sp>
+        <p:nvSpPr>
+          <p:cNvPr id="4" name="Text 2"/>
           <p:cNvSpPr/>
           <p:nvPr/>
         </p:nvSpPr>
@@ -7508,7 +13852,7 @@
       </p:sp>
       <p:sp>
         <p:nvSpPr>
-          <p:cNvPr id="4" name="Text 2"/>
+          <p:cNvPr id="5" name="Text 3"/>
           <p:cNvSpPr/>
           <p:nvPr/>
         </p:nvSpPr>
@@ -7547,7 +13891,7 @@
       </p:sp>
       <p:sp>
         <p:nvSpPr>
-          <p:cNvPr id="5" name="Text 3"/>
+          <p:cNvPr id="6" name="Text 4"/>
           <p:cNvSpPr/>
           <p:nvPr/>
         </p:nvSpPr>
@@ -7586,13 +13930,77 @@
       </p:sp>
       <p:sp>
         <p:nvSpPr>
-          <p:cNvPr id="6" name="Text 4"/>
+          <p:cNvPr id="7" name="Shape 5"/>
           <p:cNvSpPr/>
           <p:nvPr/>
         </p:nvSpPr>
         <p:spPr>
           <a:xfrm>
             <a:off x="640080" y="658368"/>
+            <a:ext cx="420624" cy="420624"/>
+          </a:xfrm>
+          <a:prstGeom prst="ellipse">
+            <a:avLst/>
+          </a:prstGeom>
+          <a:solidFill>
+            <a:srgbClr val="0068B7"/>
+          </a:solidFill>
+          <a:ln w="12700">
+            <a:solidFill>
+              <a:srgbClr val="0068B7"/>
+            </a:solidFill>
+            <a:prstDash val="solid"/>
+          </a:ln>
+        </p:spPr>
+      </p:sp>
+      <p:sp>
+        <p:nvSpPr>
+          <p:cNvPr id="8" name="Text 6"/>
+          <p:cNvSpPr/>
+          <p:nvPr/>
+        </p:nvSpPr>
+        <p:spPr>
+          <a:xfrm>
+            <a:off x="640080" y="731520"/>
+            <a:ext cx="420624" cy="164592"/>
+          </a:xfrm>
+          <a:prstGeom prst="rect">
+            <a:avLst/>
+          </a:prstGeom>
+          <a:noFill/>
+          <a:ln/>
+        </p:spPr>
+        <p:txBody>
+          <a:bodyPr wrap="square" lIns="0" tIns="0" rIns="0" bIns="0" rtlCol="0" anchor="ctr"/>
+          <a:lstStyle/>
+          <a:p>
+            <a:pPr algn="ctr" indent="0" marL="0">
+              <a:buNone/>
+            </a:pPr>
+            <a:r>
+              <a:rPr lang="en-US" sz="1100" b="1" dirty="0">
+                <a:solidFill>
+                  <a:srgbClr val="FFFFFF"/>
+                </a:solidFill>
+                <a:latin typeface="Aptos" pitchFamily="34" charset="0"/>
+                <a:ea typeface="Aptos" pitchFamily="34" charset="-122"/>
+                <a:cs typeface="Aptos" pitchFamily="34" charset="-120"/>
+              </a:rPr>
+              <a:t>3</a:t>
+            </a:r>
+            <a:endParaRPr lang="en-US" sz="1100" dirty="0"/>
+          </a:p>
+        </p:txBody>
+      </p:sp>
+      <p:sp>
+        <p:nvSpPr>
+          <p:cNvPr id="9" name="Text 7"/>
+          <p:cNvSpPr/>
+          <p:nvPr/>
+        </p:nvSpPr>
+        <p:spPr>
+          <a:xfrm>
+            <a:off x="640080" y="621792"/>
             <a:ext cx="10881360" cy="566928"/>
           </a:xfrm>
           <a:prstGeom prst="rect">
@@ -7619,7 +14027,7 @@
                 <a:ea typeface="Aptos Display" pitchFamily="34" charset="-122"/>
                 <a:cs typeface="Aptos Display" pitchFamily="34" charset="-120"/>
               </a:rPr>
-              <a:t>Technical Deep Dive</a:t>
+              <a:t>Why This Topic Matters for Public Health AI</a:t>
             </a:r>
             <a:endParaRPr lang="en-US" sz="2700" dirty="0"/>
           </a:p>
@@ -7627,32 +14035,178 @@
       </p:sp>
       <p:sp>
         <p:nvSpPr>
-          <p:cNvPr id="7" name="Text 5"/>
-          <p:cNvSpPr/>
-          <p:nvPr/>
-        </p:nvSpPr>
-        <p:spPr>
-          <a:xfrm>
-            <a:off x="822960" y="1325880"/>
-            <a:ext cx="10378440" cy="4800600"/>
-          </a:xfrm>
-          <a:prstGeom prst="rect">
-            <a:avLst/>
-          </a:prstGeom>
-          <a:noFill/>
-          <a:ln/>
-        </p:spPr>
-        <p:txBody>
-          <a:bodyPr wrap="square" lIns="1016" tIns="1016" rIns="1016" bIns="1016" rtlCol="0" anchor="t">
+          <p:cNvPr id="10" name="Text 8"/>
+          <p:cNvSpPr/>
+          <p:nvPr/>
+        </p:nvSpPr>
+        <p:spPr>
+          <a:xfrm>
+            <a:off x="868680" y="1417320"/>
+            <a:ext cx="6675120" cy="4434840"/>
+          </a:xfrm>
+          <a:prstGeom prst="rect">
+            <a:avLst/>
+          </a:prstGeom>
+          <a:noFill/>
+          <a:ln/>
+        </p:spPr>
+        <p:txBody>
+          <a:bodyPr wrap="square" lIns="635" tIns="635" rIns="635" bIns="635" rtlCol="0" anchor="t">
             <a:normAutofit/>
           </a:bodyPr>
           <a:lstStyle/>
           <a:p>
+            <a:r>
+              <a:rPr lang="en-US" sz="1700" dirty="0">
+                <a:solidFill>
+                  <a:srgbClr val="17364A"/>
+                </a:solidFill>
+                <a:latin typeface="Aptos" pitchFamily="34" charset="0"/>
+                <a:ea typeface="Aptos" pitchFamily="34" charset="-122"/>
+                <a:cs typeface="Aptos" pitchFamily="34" charset="-120"/>
+              </a:rPr>
+              <a:t>Time-series methods matter because public health surveillance is often about change.</a:t>
+            </a:r>
+            <a:endParaRPr lang="en-US" sz="1700" dirty="0"/>
+          </a:p>
+          <a:p>
+            <a:r>
+              <a:rPr lang="en-US" sz="1700" dirty="0">
+                <a:solidFill>
+                  <a:srgbClr val="17364A"/>
+                </a:solidFill>
+                <a:latin typeface="Aptos" pitchFamily="34" charset="0"/>
+                <a:ea typeface="Aptos" pitchFamily="34" charset="-122"/>
+                <a:cs typeface="Aptos" pitchFamily="34" charset="-120"/>
+              </a:rPr>
+              <a:t>A single count may be difficult to interpret without knowing whether it is higher than expected for that time, place,.</a:t>
+            </a:r>
+            <a:endParaRPr lang="en-US" sz="1700" dirty="0"/>
+          </a:p>
+          <a:p>
+            <a:r>
+              <a:rPr lang="en-US" sz="1700" dirty="0">
+                <a:solidFill>
+                  <a:srgbClr val="17364A"/>
+                </a:solidFill>
+                <a:latin typeface="Aptos" pitchFamily="34" charset="0"/>
+                <a:ea typeface="Aptos" pitchFamily="34" charset="-122"/>
+                <a:cs typeface="Aptos" pitchFamily="34" charset="-120"/>
+              </a:rPr>
+              <a:t>AI-supported anomaly detection can help staff review large volumes of data and prioritize signals that deserve attention.</a:t>
+            </a:r>
+            <a:endParaRPr lang="en-US" sz="1700" dirty="0"/>
+          </a:p>
+          <a:p>
+            <a:r>
+              <a:rPr lang="en-US" sz="1700" dirty="0">
+                <a:solidFill>
+                  <a:srgbClr val="17364A"/>
+                </a:solidFill>
+                <a:latin typeface="Aptos" pitchFamily="34" charset="0"/>
+                <a:ea typeface="Aptos" pitchFamily="34" charset="-122"/>
+                <a:cs typeface="Aptos" pitchFamily="34" charset="-120"/>
+              </a:rPr>
+              <a:t>However, public health time-series data are shaped by reporting systems as much as disease patterns.</a:t>
+            </a:r>
+            <a:endParaRPr lang="en-US" sz="1700" dirty="0"/>
+          </a:p>
+        </p:txBody>
+      </p:sp>
+      <p:sp>
+        <p:nvSpPr>
+          <p:cNvPr id="11" name="Shape 9"/>
+          <p:cNvSpPr/>
+          <p:nvPr/>
+        </p:nvSpPr>
+        <p:spPr>
+          <a:xfrm>
+            <a:off x="7909560" y="1417320"/>
+            <a:ext cx="3154680" cy="1828800"/>
+          </a:xfrm>
+          <a:prstGeom prst="roundRect">
+            <a:avLst>
+              <a:gd name="adj" fmla="val 6000"/>
+            </a:avLst>
+          </a:prstGeom>
+          <a:solidFill>
+            <a:srgbClr val="EEF8ED"/>
+          </a:solidFill>
+          <a:ln w="12700">
+            <a:solidFill>
+              <a:srgbClr val="B9D7E6"/>
+            </a:solidFill>
+            <a:prstDash val="solid"/>
+          </a:ln>
+        </p:spPr>
+      </p:sp>
+      <p:sp>
+        <p:nvSpPr>
+          <p:cNvPr id="12" name="Text 10"/>
+          <p:cNvSpPr/>
+          <p:nvPr/>
+        </p:nvSpPr>
+        <p:spPr>
+          <a:xfrm>
+            <a:off x="8074152" y="1563624"/>
+            <a:ext cx="2825496" cy="201168"/>
+          </a:xfrm>
+          <a:prstGeom prst="rect">
+            <a:avLst/>
+          </a:prstGeom>
+          <a:noFill/>
+          <a:ln/>
+        </p:spPr>
+        <p:txBody>
+          <a:bodyPr wrap="square" lIns="0" tIns="0" rIns="0" bIns="0" rtlCol="0" anchor="ctr"/>
+          <a:lstStyle/>
+          <a:p>
             <a:pPr indent="0" marL="0">
               <a:buNone/>
             </a:pPr>
             <a:r>
-              <a:rPr lang="en-US" sz="1420" dirty="0">
+              <a:rPr lang="en-US" sz="950" b="1" dirty="0">
+                <a:solidFill>
+                  <a:srgbClr val="0068B7"/>
+                </a:solidFill>
+                <a:latin typeface="Aptos" pitchFamily="34" charset="0"/>
+                <a:ea typeface="Aptos" pitchFamily="34" charset="-122"/>
+                <a:cs typeface="Aptos" pitchFamily="34" charset="-120"/>
+              </a:rPr>
+              <a:t>Key idea</a:t>
+            </a:r>
+            <a:endParaRPr lang="en-US" sz="950" dirty="0"/>
+          </a:p>
+        </p:txBody>
+      </p:sp>
+      <p:sp>
+        <p:nvSpPr>
+          <p:cNvPr id="13" name="Text 11"/>
+          <p:cNvSpPr/>
+          <p:nvPr/>
+        </p:nvSpPr>
+        <p:spPr>
+          <a:xfrm>
+            <a:off x="8074152" y="1856232"/>
+            <a:ext cx="2825496" cy="1261872"/>
+          </a:xfrm>
+          <a:prstGeom prst="rect">
+            <a:avLst/>
+          </a:prstGeom>
+          <a:noFill/>
+          <a:ln/>
+        </p:spPr>
+        <p:txBody>
+          <a:bodyPr wrap="square" lIns="0" tIns="0" rIns="0" bIns="0" rtlCol="0" anchor="t">
+            <a:normAutofit/>
+          </a:bodyPr>
+          <a:lstStyle/>
+          <a:p>
+            <a:pPr indent="0" marL="0">
+              <a:buNone/>
+            </a:pPr>
+            <a:r>
+              <a:rPr lang="en-US" sz="1250" dirty="0">
                 <a:solidFill>
                   <a:srgbClr val="17364A"/>
                 </a:solidFill>
@@ -7660,9 +14214,116 @@
                 <a:ea typeface="Aptos" pitchFamily="34" charset="-122"/>
                 <a:cs typeface="Aptos" pitchFamily="34" charset="-120"/>
               </a:rPr>
-              <a:t>Baseline selection is one of the most important technical decisions. A baseline may use several prior weeks, several prior years, a regression model, seasonal decomposition, or more complex algorithms. The baseline should match the public health question. A short baseline may adapt quickly but miss seasonal context. A long baseline may capture seasonality but fail when underlying systems change. Time-series data often require preprocessing. Analysts may need to address missing days, duplicate submissions, delayed reporting, facility onboarding, outliers, and known holidays. Data corrections can appear as sudden spikes or drops. AI tools should distinguish between raw signals and quality-adjusted signals whenever possible. Thresholds control alert volume and sensitivity. A very sensitive threshold may detect early signals but generate many false alarms. A conservative threshold may reduce workload but delay detection. Thresholds should be chosen with input from epidemiologists, program staff, and emergency response leads because operational capacity and consequences matter.</a:t>
-            </a:r>
-            <a:endParaRPr lang="en-US" sz="1420" dirty="0"/>
+              <a:t>Time-series methods matter because public health surveillance is often about change.</a:t>
+            </a:r>
+            <a:endParaRPr lang="en-US" sz="1250" dirty="0"/>
+          </a:p>
+        </p:txBody>
+      </p:sp>
+      <p:sp>
+        <p:nvSpPr>
+          <p:cNvPr id="14" name="Shape 12"/>
+          <p:cNvSpPr/>
+          <p:nvPr/>
+        </p:nvSpPr>
+        <p:spPr>
+          <a:xfrm>
+            <a:off x="7909560" y="3520440"/>
+            <a:ext cx="3154680" cy="1737360"/>
+          </a:xfrm>
+          <a:prstGeom prst="roundRect">
+            <a:avLst>
+              <a:gd name="adj" fmla="val 6316"/>
+            </a:avLst>
+          </a:prstGeom>
+          <a:solidFill>
+            <a:srgbClr val="EAF6F8"/>
+          </a:solidFill>
+          <a:ln w="12700">
+            <a:solidFill>
+              <a:srgbClr val="B9D7E6"/>
+            </a:solidFill>
+            <a:prstDash val="solid"/>
+          </a:ln>
+        </p:spPr>
+      </p:sp>
+      <p:sp>
+        <p:nvSpPr>
+          <p:cNvPr id="15" name="Text 13"/>
+          <p:cNvSpPr/>
+          <p:nvPr/>
+        </p:nvSpPr>
+        <p:spPr>
+          <a:xfrm>
+            <a:off x="8074152" y="3666744"/>
+            <a:ext cx="2825496" cy="201168"/>
+          </a:xfrm>
+          <a:prstGeom prst="rect">
+            <a:avLst/>
+          </a:prstGeom>
+          <a:noFill/>
+          <a:ln/>
+        </p:spPr>
+        <p:txBody>
+          <a:bodyPr wrap="square" lIns="0" tIns="0" rIns="0" bIns="0" rtlCol="0" anchor="ctr"/>
+          <a:lstStyle/>
+          <a:p>
+            <a:pPr indent="0" marL="0">
+              <a:buNone/>
+            </a:pPr>
+            <a:r>
+              <a:rPr lang="en-US" sz="950" b="1" dirty="0">
+                <a:solidFill>
+                  <a:srgbClr val="0068B7"/>
+                </a:solidFill>
+                <a:latin typeface="Aptos" pitchFamily="34" charset="0"/>
+                <a:ea typeface="Aptos" pitchFamily="34" charset="-122"/>
+                <a:cs typeface="Aptos" pitchFamily="34" charset="-120"/>
+              </a:rPr>
+              <a:t>Use this for</a:t>
+            </a:r>
+            <a:endParaRPr lang="en-US" sz="950" dirty="0"/>
+          </a:p>
+        </p:txBody>
+      </p:sp>
+      <p:sp>
+        <p:nvSpPr>
+          <p:cNvPr id="16" name="Text 14"/>
+          <p:cNvSpPr/>
+          <p:nvPr/>
+        </p:nvSpPr>
+        <p:spPr>
+          <a:xfrm>
+            <a:off x="8074152" y="3959352"/>
+            <a:ext cx="2825496" cy="1170432"/>
+          </a:xfrm>
+          <a:prstGeom prst="rect">
+            <a:avLst/>
+          </a:prstGeom>
+          <a:noFill/>
+          <a:ln/>
+        </p:spPr>
+        <p:txBody>
+          <a:bodyPr wrap="square" lIns="0" tIns="0" rIns="0" bIns="0" rtlCol="0" anchor="t">
+            <a:normAutofit/>
+          </a:bodyPr>
+          <a:lstStyle/>
+          <a:p>
+            <a:pPr indent="0" marL="0">
+              <a:buNone/>
+            </a:pPr>
+            <a:r>
+              <a:rPr lang="en-US" sz="1250" dirty="0">
+                <a:solidFill>
+                  <a:srgbClr val="17364A"/>
+                </a:solidFill>
+                <a:latin typeface="Aptos" pitchFamily="34" charset="0"/>
+                <a:ea typeface="Aptos" pitchFamily="34" charset="-122"/>
+                <a:cs typeface="Aptos" pitchFamily="34" charset="-120"/>
+              </a:rPr>
+              <a:t>Connect the concept to public health decisions, safeguards, documentation, or implementation work.</a:t>
+            </a:r>
+            <a:endParaRPr lang="en-US" sz="1250" dirty="0"/>
           </a:p>
         </p:txBody>
       </p:sp>
@@ -7725,7 +14386,32 @@
       </p:sp>
       <p:sp>
         <p:nvSpPr>
-          <p:cNvPr id="3" name="Text 1"/>
+          <p:cNvPr id="3" name="Shape 1"/>
+          <p:cNvSpPr/>
+          <p:nvPr/>
+        </p:nvSpPr>
+        <p:spPr>
+          <a:xfrm>
+            <a:off x="0" y="164592"/>
+            <a:ext cx="146304" cy="6693408"/>
+          </a:xfrm>
+          <a:prstGeom prst="rect">
+            <a:avLst/>
+          </a:prstGeom>
+          <a:solidFill>
+            <a:srgbClr val="2F8A28"/>
+          </a:solidFill>
+          <a:ln w="12700">
+            <a:solidFill>
+              <a:srgbClr val="2F8A28"/>
+            </a:solidFill>
+            <a:prstDash val="solid"/>
+          </a:ln>
+        </p:spPr>
+      </p:sp>
+      <p:sp>
+        <p:nvSpPr>
+          <p:cNvPr id="4" name="Text 2"/>
           <p:cNvSpPr/>
           <p:nvPr/>
         </p:nvSpPr>
@@ -7764,7 +14450,7 @@
       </p:sp>
       <p:sp>
         <p:nvSpPr>
-          <p:cNvPr id="4" name="Text 2"/>
+          <p:cNvPr id="5" name="Text 3"/>
           <p:cNvSpPr/>
           <p:nvPr/>
         </p:nvSpPr>
@@ -7803,7 +14489,7 @@
       </p:sp>
       <p:sp>
         <p:nvSpPr>
-          <p:cNvPr id="5" name="Text 3"/>
+          <p:cNvPr id="6" name="Text 4"/>
           <p:cNvSpPr/>
           <p:nvPr/>
         </p:nvSpPr>
@@ -7842,13 +14528,77 @@
       </p:sp>
       <p:sp>
         <p:nvSpPr>
-          <p:cNvPr id="6" name="Text 4"/>
+          <p:cNvPr id="7" name="Shape 5"/>
           <p:cNvSpPr/>
           <p:nvPr/>
         </p:nvSpPr>
         <p:spPr>
           <a:xfrm>
             <a:off x="640080" y="658368"/>
+            <a:ext cx="420624" cy="420624"/>
+          </a:xfrm>
+          <a:prstGeom prst="ellipse">
+            <a:avLst/>
+          </a:prstGeom>
+          <a:solidFill>
+            <a:srgbClr val="0068B7"/>
+          </a:solidFill>
+          <a:ln w="12700">
+            <a:solidFill>
+              <a:srgbClr val="0068B7"/>
+            </a:solidFill>
+            <a:prstDash val="solid"/>
+          </a:ln>
+        </p:spPr>
+      </p:sp>
+      <p:sp>
+        <p:nvSpPr>
+          <p:cNvPr id="8" name="Text 6"/>
+          <p:cNvSpPr/>
+          <p:nvPr/>
+        </p:nvSpPr>
+        <p:spPr>
+          <a:xfrm>
+            <a:off x="640080" y="731520"/>
+            <a:ext cx="420624" cy="164592"/>
+          </a:xfrm>
+          <a:prstGeom prst="rect">
+            <a:avLst/>
+          </a:prstGeom>
+          <a:noFill/>
+          <a:ln/>
+        </p:spPr>
+        <p:txBody>
+          <a:bodyPr wrap="square" lIns="0" tIns="0" rIns="0" bIns="0" rtlCol="0" anchor="ctr"/>
+          <a:lstStyle/>
+          <a:p>
+            <a:pPr algn="ctr" indent="0" marL="0">
+              <a:buNone/>
+            </a:pPr>
+            <a:r>
+              <a:rPr lang="en-US" sz="1100" b="1" dirty="0">
+                <a:solidFill>
+                  <a:srgbClr val="FFFFFF"/>
+                </a:solidFill>
+                <a:latin typeface="Aptos" pitchFamily="34" charset="0"/>
+                <a:ea typeface="Aptos" pitchFamily="34" charset="-122"/>
+                <a:cs typeface="Aptos" pitchFamily="34" charset="-120"/>
+              </a:rPr>
+              <a:t>4</a:t>
+            </a:r>
+            <a:endParaRPr lang="en-US" sz="1100" dirty="0"/>
+          </a:p>
+        </p:txBody>
+      </p:sp>
+      <p:sp>
+        <p:nvSpPr>
+          <p:cNvPr id="9" name="Text 7"/>
+          <p:cNvSpPr/>
+          <p:nvPr/>
+        </p:nvSpPr>
+        <p:spPr>
+          <a:xfrm>
+            <a:off x="640080" y="621792"/>
             <a:ext cx="10881360" cy="566928"/>
           </a:xfrm>
           <a:prstGeom prst="rect">
@@ -7875,7 +14625,7 @@
                 <a:ea typeface="Aptos Display" pitchFamily="34" charset="-122"/>
                 <a:cs typeface="Aptos Display" pitchFamily="34" charset="-120"/>
               </a:rPr>
-              <a:t>Technical Deep Dive Continued</a:t>
+              <a:t>Public Health Example</a:t>
             </a:r>
             <a:endParaRPr lang="en-US" sz="2700" dirty="0"/>
           </a:p>
@@ -7883,32 +14633,178 @@
       </p:sp>
       <p:sp>
         <p:nvSpPr>
-          <p:cNvPr id="7" name="Text 5"/>
-          <p:cNvSpPr/>
-          <p:nvPr/>
-        </p:nvSpPr>
-        <p:spPr>
-          <a:xfrm>
-            <a:off x="822960" y="1325880"/>
-            <a:ext cx="10378440" cy="4800600"/>
-          </a:xfrm>
-          <a:prstGeom prst="rect">
-            <a:avLst/>
-          </a:prstGeom>
-          <a:noFill/>
-          <a:ln/>
-        </p:spPr>
-        <p:txBody>
-          <a:bodyPr wrap="square" lIns="1016" tIns="1016" rIns="1016" bIns="1016" rtlCol="0" anchor="t">
+          <p:cNvPr id="10" name="Text 8"/>
+          <p:cNvSpPr/>
+          <p:nvPr/>
+        </p:nvSpPr>
+        <p:spPr>
+          <a:xfrm>
+            <a:off x="868680" y="1417320"/>
+            <a:ext cx="6675120" cy="4434840"/>
+          </a:xfrm>
+          <a:prstGeom prst="rect">
+            <a:avLst/>
+          </a:prstGeom>
+          <a:noFill/>
+          <a:ln/>
+        </p:spPr>
+        <p:txBody>
+          <a:bodyPr wrap="square" lIns="635" tIns="635" rIns="635" bIns="635" rtlCol="0" anchor="t">
             <a:normAutofit/>
           </a:bodyPr>
           <a:lstStyle/>
           <a:p>
+            <a:r>
+              <a:rPr lang="en-US" sz="1700" dirty="0">
+                <a:solidFill>
+                  <a:srgbClr val="17364A"/>
+                </a:solidFill>
+                <a:latin typeface="Aptos" pitchFamily="34" charset="0"/>
+                <a:ea typeface="Aptos" pitchFamily="34" charset="-122"/>
+                <a:cs typeface="Aptos" pitchFamily="34" charset="-120"/>
+              </a:rPr>
+              <a:t>A syndromic surveillance team may use anomaly detection to monitor emergency department visits for respiratory symptoms.</a:t>
+            </a:r>
+            <a:endParaRPr lang="en-US" sz="1700" dirty="0"/>
+          </a:p>
+          <a:p>
+            <a:r>
+              <a:rPr lang="en-US" sz="1700" dirty="0">
+                <a:solidFill>
+                  <a:srgbClr val="17364A"/>
+                </a:solidFill>
+                <a:latin typeface="Aptos" pitchFamily="34" charset="0"/>
+                <a:ea typeface="Aptos" pitchFamily="34" charset="-122"/>
+                <a:cs typeface="Aptos" pitchFamily="34" charset="-120"/>
+              </a:rPr>
+              <a:t>The system may flag a county when visits exceed the expected range for that day and season.</a:t>
+            </a:r>
+            <a:endParaRPr lang="en-US" sz="1700" dirty="0"/>
+          </a:p>
+          <a:p>
+            <a:r>
+              <a:rPr lang="en-US" sz="1700" dirty="0">
+                <a:solidFill>
+                  <a:srgbClr val="17364A"/>
+                </a:solidFill>
+                <a:latin typeface="Aptos" pitchFamily="34" charset="0"/>
+                <a:ea typeface="Aptos" pitchFamily="34" charset="-122"/>
+                <a:cs typeface="Aptos" pitchFamily="34" charset="-120"/>
+              </a:rPr>
+              <a:t>The alert could prompt review of age groups, facilities, diagnosis text, lab data, school absenteeism, and local context.</a:t>
+            </a:r>
+            <a:endParaRPr lang="en-US" sz="1700" dirty="0"/>
+          </a:p>
+          <a:p>
+            <a:r>
+              <a:rPr lang="en-US" sz="1700" dirty="0">
+                <a:solidFill>
+                  <a:srgbClr val="17364A"/>
+                </a:solidFill>
+                <a:latin typeface="Aptos" pitchFamily="34" charset="0"/>
+                <a:ea typeface="Aptos" pitchFamily="34" charset="-122"/>
+                <a:cs typeface="Aptos" pitchFamily="34" charset="-120"/>
+              </a:rPr>
+              <a:t>The alert is valuable only if it enters a disciplined review process.</a:t>
+            </a:r>
+            <a:endParaRPr lang="en-US" sz="1700" dirty="0"/>
+          </a:p>
+        </p:txBody>
+      </p:sp>
+      <p:sp>
+        <p:nvSpPr>
+          <p:cNvPr id="11" name="Shape 9"/>
+          <p:cNvSpPr/>
+          <p:nvPr/>
+        </p:nvSpPr>
+        <p:spPr>
+          <a:xfrm>
+            <a:off x="7909560" y="1417320"/>
+            <a:ext cx="3154680" cy="1828800"/>
+          </a:xfrm>
+          <a:prstGeom prst="roundRect">
+            <a:avLst>
+              <a:gd name="adj" fmla="val 6000"/>
+            </a:avLst>
+          </a:prstGeom>
+          <a:solidFill>
+            <a:srgbClr val="EEF8ED"/>
+          </a:solidFill>
+          <a:ln w="12700">
+            <a:solidFill>
+              <a:srgbClr val="B9D7E6"/>
+            </a:solidFill>
+            <a:prstDash val="solid"/>
+          </a:ln>
+        </p:spPr>
+      </p:sp>
+      <p:sp>
+        <p:nvSpPr>
+          <p:cNvPr id="12" name="Text 10"/>
+          <p:cNvSpPr/>
+          <p:nvPr/>
+        </p:nvSpPr>
+        <p:spPr>
+          <a:xfrm>
+            <a:off x="8074152" y="1563624"/>
+            <a:ext cx="2825496" cy="201168"/>
+          </a:xfrm>
+          <a:prstGeom prst="rect">
+            <a:avLst/>
+          </a:prstGeom>
+          <a:noFill/>
+          <a:ln/>
+        </p:spPr>
+        <p:txBody>
+          <a:bodyPr wrap="square" lIns="0" tIns="0" rIns="0" bIns="0" rtlCol="0" anchor="ctr"/>
+          <a:lstStyle/>
+          <a:p>
             <a:pPr indent="0" marL="0">
               <a:buNone/>
             </a:pPr>
             <a:r>
-              <a:rPr lang="en-US" sz="1420" dirty="0">
+              <a:rPr lang="en-US" sz="950" b="1" dirty="0">
+                <a:solidFill>
+                  <a:srgbClr val="0068B7"/>
+                </a:solidFill>
+                <a:latin typeface="Aptos" pitchFamily="34" charset="0"/>
+                <a:ea typeface="Aptos" pitchFamily="34" charset="-122"/>
+                <a:cs typeface="Aptos" pitchFamily="34" charset="-120"/>
+              </a:rPr>
+              <a:t>Key idea</a:t>
+            </a:r>
+            <a:endParaRPr lang="en-US" sz="950" dirty="0"/>
+          </a:p>
+        </p:txBody>
+      </p:sp>
+      <p:sp>
+        <p:nvSpPr>
+          <p:cNvPr id="13" name="Text 11"/>
+          <p:cNvSpPr/>
+          <p:nvPr/>
+        </p:nvSpPr>
+        <p:spPr>
+          <a:xfrm>
+            <a:off x="8074152" y="1856232"/>
+            <a:ext cx="2825496" cy="1261872"/>
+          </a:xfrm>
+          <a:prstGeom prst="rect">
+            <a:avLst/>
+          </a:prstGeom>
+          <a:noFill/>
+          <a:ln/>
+        </p:spPr>
+        <p:txBody>
+          <a:bodyPr wrap="square" lIns="0" tIns="0" rIns="0" bIns="0" rtlCol="0" anchor="t">
+            <a:normAutofit/>
+          </a:bodyPr>
+          <a:lstStyle/>
+          <a:p>
+            <a:pPr indent="0" marL="0">
+              <a:buNone/>
+            </a:pPr>
+            <a:r>
+              <a:rPr lang="en-US" sz="1250" dirty="0">
                 <a:solidFill>
                   <a:srgbClr val="17364A"/>
                 </a:solidFill>
@@ -7916,9 +14812,116 @@
                 <a:ea typeface="Aptos" pitchFamily="34" charset="-122"/>
                 <a:cs typeface="Aptos" pitchFamily="34" charset="-120"/>
               </a:rPr>
-              <a:t>Anomaly detection methods vary in complexity. Simple methods may compare counts to moving averages or standard deviations. More advanced methods may use regression, Bayesian approaches, control charts, machine learning, or ensemble models. More complex methods are not automatically better. In public health practice, interpretability, stability, transparency, and workflow fit often matter as much as statistical sophistication. Alert review should be documented. Staff should record what signal occurred, what data were reviewed, what explanation was considered, what action was taken, and whether the alert was useful. Over time, these review notes can improve thresholds, reduce alert fatigue, and support accountability.</a:t>
-            </a:r>
-            <a:endParaRPr lang="en-US" sz="1420" dirty="0"/>
+              <a:t>A syndromic surveillance team may use anomaly detection to monitor emergency department visits for respiratory symptoms.</a:t>
+            </a:r>
+            <a:endParaRPr lang="en-US" sz="1250" dirty="0"/>
+          </a:p>
+        </p:txBody>
+      </p:sp>
+      <p:sp>
+        <p:nvSpPr>
+          <p:cNvPr id="14" name="Shape 12"/>
+          <p:cNvSpPr/>
+          <p:nvPr/>
+        </p:nvSpPr>
+        <p:spPr>
+          <a:xfrm>
+            <a:off x="7909560" y="3520440"/>
+            <a:ext cx="3154680" cy="1737360"/>
+          </a:xfrm>
+          <a:prstGeom prst="roundRect">
+            <a:avLst>
+              <a:gd name="adj" fmla="val 6316"/>
+            </a:avLst>
+          </a:prstGeom>
+          <a:solidFill>
+            <a:srgbClr val="EAF6F8"/>
+          </a:solidFill>
+          <a:ln w="12700">
+            <a:solidFill>
+              <a:srgbClr val="B9D7E6"/>
+            </a:solidFill>
+            <a:prstDash val="solid"/>
+          </a:ln>
+        </p:spPr>
+      </p:sp>
+      <p:sp>
+        <p:nvSpPr>
+          <p:cNvPr id="15" name="Text 13"/>
+          <p:cNvSpPr/>
+          <p:nvPr/>
+        </p:nvSpPr>
+        <p:spPr>
+          <a:xfrm>
+            <a:off x="8074152" y="3666744"/>
+            <a:ext cx="2825496" cy="201168"/>
+          </a:xfrm>
+          <a:prstGeom prst="rect">
+            <a:avLst/>
+          </a:prstGeom>
+          <a:noFill/>
+          <a:ln/>
+        </p:spPr>
+        <p:txBody>
+          <a:bodyPr wrap="square" lIns="0" tIns="0" rIns="0" bIns="0" rtlCol="0" anchor="ctr"/>
+          <a:lstStyle/>
+          <a:p>
+            <a:pPr indent="0" marL="0">
+              <a:buNone/>
+            </a:pPr>
+            <a:r>
+              <a:rPr lang="en-US" sz="950" b="1" dirty="0">
+                <a:solidFill>
+                  <a:srgbClr val="0068B7"/>
+                </a:solidFill>
+                <a:latin typeface="Aptos" pitchFamily="34" charset="0"/>
+                <a:ea typeface="Aptos" pitchFamily="34" charset="-122"/>
+                <a:cs typeface="Aptos" pitchFamily="34" charset="-120"/>
+              </a:rPr>
+              <a:t>Use this for</a:t>
+            </a:r>
+            <a:endParaRPr lang="en-US" sz="950" dirty="0"/>
+          </a:p>
+        </p:txBody>
+      </p:sp>
+      <p:sp>
+        <p:nvSpPr>
+          <p:cNvPr id="16" name="Text 14"/>
+          <p:cNvSpPr/>
+          <p:nvPr/>
+        </p:nvSpPr>
+        <p:spPr>
+          <a:xfrm>
+            <a:off x="8074152" y="3959352"/>
+            <a:ext cx="2825496" cy="1170432"/>
+          </a:xfrm>
+          <a:prstGeom prst="rect">
+            <a:avLst/>
+          </a:prstGeom>
+          <a:noFill/>
+          <a:ln/>
+        </p:spPr>
+        <p:txBody>
+          <a:bodyPr wrap="square" lIns="0" tIns="0" rIns="0" bIns="0" rtlCol="0" anchor="t">
+            <a:normAutofit/>
+          </a:bodyPr>
+          <a:lstStyle/>
+          <a:p>
+            <a:pPr indent="0" marL="0">
+              <a:buNone/>
+            </a:pPr>
+            <a:r>
+              <a:rPr lang="en-US" sz="1250" dirty="0">
+                <a:solidFill>
+                  <a:srgbClr val="17364A"/>
+                </a:solidFill>
+                <a:latin typeface="Aptos" pitchFamily="34" charset="0"/>
+                <a:ea typeface="Aptos" pitchFamily="34" charset="-122"/>
+                <a:cs typeface="Aptos" pitchFamily="34" charset="-120"/>
+              </a:rPr>
+              <a:t>Connect the concept to public health decisions, safeguards, documentation, or implementation work.</a:t>
+            </a:r>
+            <a:endParaRPr lang="en-US" sz="1250" dirty="0"/>
           </a:p>
         </p:txBody>
       </p:sp>

--- a/downloads/presentations/modules/lesson-06-time-series-analysis-anomaly-detection-and-outbreak-signals.pptx
+++ b/downloads/presentations/modules/lesson-06-time-series-analysis-anomaly-detection-and-outbreak-signals.pptx
@@ -2999,6 +2999,45 @@
           </a:p>
         </p:txBody>
       </p:sp>
+      <p:sp>
+        <p:nvSpPr>
+          <p:cNvPr id="8" name="Text 5"/>
+          <p:cNvSpPr/>
+          <p:nvPr/>
+        </p:nvSpPr>
+        <p:spPr>
+          <a:xfrm>
+            <a:off x="11137392" y="6510528"/>
+            <a:ext cx="411480" cy="201168"/>
+          </a:xfrm>
+          <a:prstGeom prst="rect">
+            <a:avLst/>
+          </a:prstGeom>
+          <a:noFill/>
+          <a:ln/>
+        </p:spPr>
+        <p:txBody>
+          <a:bodyPr wrap="square" lIns="0" tIns="0" rIns="0" bIns="0" rtlCol="0" anchor="ctr"/>
+          <a:lstStyle/>
+          <a:p>
+            <a:pPr algn="r" indent="0" marL="0">
+              <a:buNone/>
+            </a:pPr>
+            <a:r>
+              <a:rPr lang="en-US" sz="900" dirty="0">
+                <a:solidFill>
+                  <a:srgbClr val="5F7181"/>
+                </a:solidFill>
+                <a:latin typeface="Aptos" pitchFamily="34" charset="0"/>
+                <a:ea typeface="Aptos" pitchFamily="34" charset="-122"/>
+                <a:cs typeface="Aptos" pitchFamily="34" charset="-120"/>
+              </a:rPr>
+              <a:t>1</a:t>
+            </a:r>
+            <a:endParaRPr lang="en-US" sz="900" dirty="0"/>
+          </a:p>
+        </p:txBody>
+      </p:sp>
     </p:spTree>
   </p:cSld>
   <p:clrMapOvr>
@@ -3192,7 +3231,7 @@
                 <a:ea typeface="Aptos" pitchFamily="34" charset="-122"/>
                 <a:cs typeface="Aptos" pitchFamily="34" charset="-120"/>
               </a:rPr>
-              <a:t>© Paula Soper</a:t>
+              <a:t>Â© Paula Soper</a:t>
             </a:r>
             <a:endParaRPr lang="en-US" sz="800" dirty="0"/>
           </a:p>
@@ -3200,7 +3239,46 @@
       </p:sp>
       <p:sp>
         <p:nvSpPr>
-          <p:cNvPr id="7" name="Shape 5"/>
+          <p:cNvPr id="7" name="Text 5"/>
+          <p:cNvSpPr/>
+          <p:nvPr/>
+        </p:nvSpPr>
+        <p:spPr>
+          <a:xfrm>
+            <a:off x="11137392" y="6510528"/>
+            <a:ext cx="411480" cy="201168"/>
+          </a:xfrm>
+          <a:prstGeom prst="rect">
+            <a:avLst/>
+          </a:prstGeom>
+          <a:noFill/>
+          <a:ln/>
+        </p:spPr>
+        <p:txBody>
+          <a:bodyPr wrap="square" lIns="0" tIns="0" rIns="0" bIns="0" rtlCol="0" anchor="ctr"/>
+          <a:lstStyle/>
+          <a:p>
+            <a:pPr algn="r" indent="0" marL="0">
+              <a:buNone/>
+            </a:pPr>
+            <a:r>
+              <a:rPr lang="en-US" sz="900" dirty="0">
+                <a:solidFill>
+                  <a:srgbClr val="5F7181"/>
+                </a:solidFill>
+                <a:latin typeface="Aptos" pitchFamily="34" charset="0"/>
+                <a:ea typeface="Aptos" pitchFamily="34" charset="-122"/>
+                <a:cs typeface="Aptos" pitchFamily="34" charset="-120"/>
+              </a:rPr>
+              <a:t>10</a:t>
+            </a:r>
+            <a:endParaRPr lang="en-US" sz="900" dirty="0"/>
+          </a:p>
+        </p:txBody>
+      </p:sp>
+      <p:sp>
+        <p:nvSpPr>
+          <p:cNvPr id="8" name="Shape 6"/>
           <p:cNvSpPr/>
           <p:nvPr/>
         </p:nvSpPr>
@@ -3225,7 +3303,7 @@
       </p:sp>
       <p:sp>
         <p:nvSpPr>
-          <p:cNvPr id="8" name="Text 6"/>
+          <p:cNvPr id="9" name="Text 7"/>
           <p:cNvSpPr/>
           <p:nvPr/>
         </p:nvSpPr>
@@ -3264,14 +3342,14 @@
       </p:sp>
       <p:sp>
         <p:nvSpPr>
-          <p:cNvPr id="9" name="Text 7"/>
+          <p:cNvPr id="10" name="Text 8"/>
           <p:cNvSpPr/>
           <p:nvPr/>
         </p:nvSpPr>
         <p:spPr>
           <a:xfrm>
             <a:off x="640080" y="621792"/>
-            <a:ext cx="10881360" cy="566928"/>
+            <a:ext cx="10881360" cy="713232"/>
           </a:xfrm>
           <a:prstGeom prst="rect">
             <a:avLst/>
@@ -3289,7 +3367,7 @@
               <a:buNone/>
             </a:pPr>
             <a:r>
-              <a:rPr lang="en-US" sz="2700" b="1" dirty="0">
+              <a:rPr lang="en-US" sz="3400" b="1" dirty="0">
                 <a:solidFill>
                   <a:srgbClr val="003A63"/>
                 </a:solidFill>
@@ -3299,20 +3377,20 @@
               </a:rPr>
               <a:t>Technical Deep Dive</a:t>
             </a:r>
-            <a:endParaRPr lang="en-US" sz="2700" dirty="0"/>
-          </a:p>
-        </p:txBody>
-      </p:sp>
-      <p:sp>
-        <p:nvSpPr>
-          <p:cNvPr id="10" name="Text 8"/>
-          <p:cNvSpPr/>
-          <p:nvPr/>
-        </p:nvSpPr>
-        <p:spPr>
-          <a:xfrm>
-            <a:off x="868680" y="1417320"/>
-            <a:ext cx="6675120" cy="4434840"/>
+            <a:endParaRPr lang="en-US" sz="3400" dirty="0"/>
+          </a:p>
+        </p:txBody>
+      </p:sp>
+      <p:sp>
+        <p:nvSpPr>
+          <p:cNvPr id="11" name="Text 9"/>
+          <p:cNvSpPr/>
+          <p:nvPr/>
+        </p:nvSpPr>
+        <p:spPr>
+          <a:xfrm>
+            <a:off x="868680" y="1508760"/>
+            <a:ext cx="6537960" cy="4160520"/>
           </a:xfrm>
           <a:prstGeom prst="rect">
             <a:avLst/>
@@ -3327,7 +3405,7 @@
           <a:lstStyle/>
           <a:p>
             <a:r>
-              <a:rPr lang="en-US" sz="1700" dirty="0">
+              <a:rPr lang="en-US" sz="2100" dirty="0">
                 <a:solidFill>
                   <a:srgbClr val="17364A"/>
                 </a:solidFill>
@@ -3337,11 +3415,11 @@
               </a:rPr>
               <a:t>Baseline selection is one of the most important technical decisions.</a:t>
             </a:r>
-            <a:endParaRPr lang="en-US" sz="1700" dirty="0"/>
-          </a:p>
-          <a:p>
-            <a:r>
-              <a:rPr lang="en-US" sz="1700" dirty="0">
+            <a:endParaRPr lang="en-US" sz="2100" dirty="0"/>
+          </a:p>
+          <a:p>
+            <a:r>
+              <a:rPr lang="en-US" sz="2100" dirty="0">
                 <a:solidFill>
                   <a:srgbClr val="17364A"/>
                 </a:solidFill>
@@ -3349,13 +3427,13 @@
                 <a:ea typeface="Aptos" pitchFamily="34" charset="-122"/>
                 <a:cs typeface="Aptos" pitchFamily="34" charset="-120"/>
               </a:rPr>
-              <a:t>A baseline may use several prior weeks, several prior years, a regression model, seasonal decomposition, or more complex.</a:t>
-            </a:r>
-            <a:endParaRPr lang="en-US" sz="1700" dirty="0"/>
-          </a:p>
-          <a:p>
-            <a:r>
-              <a:rPr lang="en-US" sz="1700" dirty="0">
+              <a:t>A baseline may use several prior weeks, several prior years, a regression model, seasonal.</a:t>
+            </a:r>
+            <a:endParaRPr lang="en-US" sz="2100" dirty="0"/>
+          </a:p>
+          <a:p>
+            <a:r>
+              <a:rPr lang="en-US" sz="2100" dirty="0">
                 <a:solidFill>
                   <a:srgbClr val="17364A"/>
                 </a:solidFill>
@@ -3365,27 +3443,13 @@
               </a:rPr>
               <a:t>The baseline should match the public health question.</a:t>
             </a:r>
-            <a:endParaRPr lang="en-US" sz="1700" dirty="0"/>
-          </a:p>
-          <a:p>
-            <a:r>
-              <a:rPr lang="en-US" sz="1700" dirty="0">
-                <a:solidFill>
-                  <a:srgbClr val="17364A"/>
-                </a:solidFill>
-                <a:latin typeface="Aptos" pitchFamily="34" charset="0"/>
-                <a:ea typeface="Aptos" pitchFamily="34" charset="-122"/>
-                <a:cs typeface="Aptos" pitchFamily="34" charset="-120"/>
-              </a:rPr>
-              <a:t>A short baseline may adapt quickly but miss seasonal context.</a:t>
-            </a:r>
-            <a:endParaRPr lang="en-US" sz="1700" dirty="0"/>
-          </a:p>
-        </p:txBody>
-      </p:sp>
-      <p:sp>
-        <p:nvSpPr>
-          <p:cNvPr id="11" name="Shape 9"/>
+            <a:endParaRPr lang="en-US" sz="2100" dirty="0"/>
+          </a:p>
+        </p:txBody>
+      </p:sp>
+      <p:sp>
+        <p:nvSpPr>
+          <p:cNvPr id="12" name="Shape 10"/>
           <p:cNvSpPr/>
           <p:nvPr/>
         </p:nvSpPr>
@@ -3412,14 +3476,14 @@
       </p:sp>
       <p:sp>
         <p:nvSpPr>
-          <p:cNvPr id="12" name="Text 10"/>
+          <p:cNvPr id="13" name="Text 11"/>
           <p:cNvSpPr/>
           <p:nvPr/>
         </p:nvSpPr>
         <p:spPr>
           <a:xfrm>
             <a:off x="8074152" y="1563624"/>
-            <a:ext cx="2825496" cy="201168"/>
+            <a:ext cx="2825496" cy="256032"/>
           </a:xfrm>
           <a:prstGeom prst="rect">
             <a:avLst/>
@@ -3435,7 +3499,7 @@
               <a:buNone/>
             </a:pPr>
             <a:r>
-              <a:rPr lang="en-US" sz="950" b="1" dirty="0">
+              <a:rPr lang="en-US" sz="1300" b="1" dirty="0">
                 <a:solidFill>
                   <a:srgbClr val="0068B7"/>
                 </a:solidFill>
@@ -3445,20 +3509,20 @@
               </a:rPr>
               <a:t>Key idea</a:t>
             </a:r>
-            <a:endParaRPr lang="en-US" sz="950" dirty="0"/>
-          </a:p>
-        </p:txBody>
-      </p:sp>
-      <p:sp>
-        <p:nvSpPr>
-          <p:cNvPr id="13" name="Text 11"/>
-          <p:cNvSpPr/>
-          <p:nvPr/>
-        </p:nvSpPr>
-        <p:spPr>
-          <a:xfrm>
-            <a:off x="8074152" y="1856232"/>
-            <a:ext cx="2825496" cy="1261872"/>
+            <a:endParaRPr lang="en-US" sz="1300" dirty="0"/>
+          </a:p>
+        </p:txBody>
+      </p:sp>
+      <p:sp>
+        <p:nvSpPr>
+          <p:cNvPr id="14" name="Text 12"/>
+          <p:cNvSpPr/>
+          <p:nvPr/>
+        </p:nvSpPr>
+        <p:spPr>
+          <a:xfrm>
+            <a:off x="8074152" y="1920240"/>
+            <a:ext cx="2825496" cy="1188720"/>
           </a:xfrm>
           <a:prstGeom prst="rect">
             <a:avLst/>
@@ -3476,7 +3540,7 @@
               <a:buNone/>
             </a:pPr>
             <a:r>
-              <a:rPr lang="en-US" sz="1250" dirty="0">
+              <a:rPr lang="en-US" sz="1550" dirty="0">
                 <a:solidFill>
                   <a:srgbClr val="17364A"/>
                 </a:solidFill>
@@ -3486,13 +3550,13 @@
               </a:rPr>
               <a:t>Baseline selection is one of the most important technical decisions.</a:t>
             </a:r>
-            <a:endParaRPr lang="en-US" sz="1250" dirty="0"/>
-          </a:p>
-        </p:txBody>
-      </p:sp>
-      <p:sp>
-        <p:nvSpPr>
-          <p:cNvPr id="14" name="Shape 12"/>
+            <a:endParaRPr lang="en-US" sz="1550" dirty="0"/>
+          </a:p>
+        </p:txBody>
+      </p:sp>
+      <p:sp>
+        <p:nvSpPr>
+          <p:cNvPr id="15" name="Shape 13"/>
           <p:cNvSpPr/>
           <p:nvPr/>
         </p:nvSpPr>
@@ -3519,14 +3583,14 @@
       </p:sp>
       <p:sp>
         <p:nvSpPr>
-          <p:cNvPr id="15" name="Text 13"/>
+          <p:cNvPr id="16" name="Text 14"/>
           <p:cNvSpPr/>
           <p:nvPr/>
         </p:nvSpPr>
         <p:spPr>
           <a:xfrm>
             <a:off x="8074152" y="3666744"/>
-            <a:ext cx="2825496" cy="201168"/>
+            <a:ext cx="2825496" cy="256032"/>
           </a:xfrm>
           <a:prstGeom prst="rect">
             <a:avLst/>
@@ -3542,7 +3606,7 @@
               <a:buNone/>
             </a:pPr>
             <a:r>
-              <a:rPr lang="en-US" sz="950" b="1" dirty="0">
+              <a:rPr lang="en-US" sz="1300" b="1" dirty="0">
                 <a:solidFill>
                   <a:srgbClr val="0068B7"/>
                 </a:solidFill>
@@ -3552,20 +3616,20 @@
               </a:rPr>
               <a:t>Use this for</a:t>
             </a:r>
-            <a:endParaRPr lang="en-US" sz="950" dirty="0"/>
-          </a:p>
-        </p:txBody>
-      </p:sp>
-      <p:sp>
-        <p:nvSpPr>
-          <p:cNvPr id="16" name="Text 14"/>
-          <p:cNvSpPr/>
-          <p:nvPr/>
-        </p:nvSpPr>
-        <p:spPr>
-          <a:xfrm>
-            <a:off x="8074152" y="3959352"/>
-            <a:ext cx="2825496" cy="1170432"/>
+            <a:endParaRPr lang="en-US" sz="1300" dirty="0"/>
+          </a:p>
+        </p:txBody>
+      </p:sp>
+      <p:sp>
+        <p:nvSpPr>
+          <p:cNvPr id="17" name="Text 15"/>
+          <p:cNvSpPr/>
+          <p:nvPr/>
+        </p:nvSpPr>
+        <p:spPr>
+          <a:xfrm>
+            <a:off x="8074152" y="4023360"/>
+            <a:ext cx="2825496" cy="1097280"/>
           </a:xfrm>
           <a:prstGeom prst="rect">
             <a:avLst/>
@@ -3583,7 +3647,7 @@
               <a:buNone/>
             </a:pPr>
             <a:r>
-              <a:rPr lang="en-US" sz="1250" dirty="0">
+              <a:rPr lang="en-US" sz="1550" dirty="0">
                 <a:solidFill>
                   <a:srgbClr val="17364A"/>
                 </a:solidFill>
@@ -3593,7 +3657,7 @@
               </a:rPr>
               <a:t>Connect the concept to public health decisions, safeguards, documentation, or implementation work.</a:t>
             </a:r>
-            <a:endParaRPr lang="en-US" sz="1250" dirty="0"/>
+            <a:endParaRPr lang="en-US" sz="1550" dirty="0"/>
           </a:p>
         </p:txBody>
       </p:sp>
@@ -3790,7 +3854,7 @@
                 <a:ea typeface="Aptos" pitchFamily="34" charset="-122"/>
                 <a:cs typeface="Aptos" pitchFamily="34" charset="-120"/>
               </a:rPr>
-              <a:t>© Paula Soper</a:t>
+              <a:t>Â© Paula Soper</a:t>
             </a:r>
             <a:endParaRPr lang="en-US" sz="800" dirty="0"/>
           </a:p>
@@ -3804,8 +3868,47 @@
         </p:nvSpPr>
         <p:spPr>
           <a:xfrm>
+            <a:off x="11137392" y="6510528"/>
+            <a:ext cx="411480" cy="201168"/>
+          </a:xfrm>
+          <a:prstGeom prst="rect">
+            <a:avLst/>
+          </a:prstGeom>
+          <a:noFill/>
+          <a:ln/>
+        </p:spPr>
+        <p:txBody>
+          <a:bodyPr wrap="square" lIns="0" tIns="0" rIns="0" bIns="0" rtlCol="0" anchor="ctr"/>
+          <a:lstStyle/>
+          <a:p>
+            <a:pPr algn="r" indent="0" marL="0">
+              <a:buNone/>
+            </a:pPr>
+            <a:r>
+              <a:rPr lang="en-US" sz="900" dirty="0">
+                <a:solidFill>
+                  <a:srgbClr val="5F7181"/>
+                </a:solidFill>
+                <a:latin typeface="Aptos" pitchFamily="34" charset="0"/>
+                <a:ea typeface="Aptos" pitchFamily="34" charset="-122"/>
+                <a:cs typeface="Aptos" pitchFamily="34" charset="-120"/>
+              </a:rPr>
+              <a:t>11</a:t>
+            </a:r>
+            <a:endParaRPr lang="en-US" sz="900" dirty="0"/>
+          </a:p>
+        </p:txBody>
+      </p:sp>
+      <p:sp>
+        <p:nvSpPr>
+          <p:cNvPr id="8" name="Text 6"/>
+          <p:cNvSpPr/>
+          <p:nvPr/>
+        </p:nvSpPr>
+        <p:spPr>
+          <a:xfrm>
             <a:off x="640080" y="658368"/>
-            <a:ext cx="10881360" cy="566928"/>
+            <a:ext cx="10881360" cy="713232"/>
           </a:xfrm>
           <a:prstGeom prst="rect">
             <a:avLst/>
@@ -3823,7 +3926,7 @@
               <a:buNone/>
             </a:pPr>
             <a:r>
-              <a:rPr lang="en-US" sz="2700" b="1" dirty="0">
+              <a:rPr lang="en-US" sz="3400" b="1" dirty="0">
                 <a:solidFill>
                   <a:srgbClr val="003A63"/>
                 </a:solidFill>
@@ -3833,20 +3936,20 @@
               </a:rPr>
               <a:t>Technical Deep Dive Continued</a:t>
             </a:r>
-            <a:endParaRPr lang="en-US" sz="2700" dirty="0"/>
-          </a:p>
-        </p:txBody>
-      </p:sp>
-      <p:sp>
-        <p:nvSpPr>
-          <p:cNvPr id="8" name="Text 6"/>
-          <p:cNvSpPr/>
-          <p:nvPr/>
-        </p:nvSpPr>
-        <p:spPr>
-          <a:xfrm>
-            <a:off x="868680" y="1417320"/>
-            <a:ext cx="6675120" cy="4434840"/>
+            <a:endParaRPr lang="en-US" sz="3400" dirty="0"/>
+          </a:p>
+        </p:txBody>
+      </p:sp>
+      <p:sp>
+        <p:nvSpPr>
+          <p:cNvPr id="9" name="Text 7"/>
+          <p:cNvSpPr/>
+          <p:nvPr/>
+        </p:nvSpPr>
+        <p:spPr>
+          <a:xfrm>
+            <a:off x="868680" y="1508760"/>
+            <a:ext cx="6537960" cy="4160520"/>
           </a:xfrm>
           <a:prstGeom prst="rect">
             <a:avLst/>
@@ -3861,7 +3964,7 @@
           <a:lstStyle/>
           <a:p>
             <a:r>
-              <a:rPr lang="en-US" sz="1700" dirty="0">
+              <a:rPr lang="en-US" sz="2100" dirty="0">
                 <a:solidFill>
                   <a:srgbClr val="17364A"/>
                 </a:solidFill>
@@ -3871,11 +3974,11 @@
               </a:rPr>
               <a:t>Anomaly detection methods vary in complexity.</a:t>
             </a:r>
-            <a:endParaRPr lang="en-US" sz="1700" dirty="0"/>
-          </a:p>
-          <a:p>
-            <a:r>
-              <a:rPr lang="en-US" sz="1700" dirty="0">
+            <a:endParaRPr lang="en-US" sz="2100" dirty="0"/>
+          </a:p>
+          <a:p>
+            <a:r>
+              <a:rPr lang="en-US" sz="2100" dirty="0">
                 <a:solidFill>
                   <a:srgbClr val="17364A"/>
                 </a:solidFill>
@@ -3885,11 +3988,11 @@
               </a:rPr>
               <a:t>Simple methods may compare counts to moving averages or standard deviations.</a:t>
             </a:r>
-            <a:endParaRPr lang="en-US" sz="1700" dirty="0"/>
-          </a:p>
-          <a:p>
-            <a:r>
-              <a:rPr lang="en-US" sz="1700" dirty="0">
+            <a:endParaRPr lang="en-US" sz="2100" dirty="0"/>
+          </a:p>
+          <a:p>
+            <a:r>
+              <a:rPr lang="en-US" sz="2100" dirty="0">
                 <a:solidFill>
                   <a:srgbClr val="17364A"/>
                 </a:solidFill>
@@ -3897,29 +4000,15 @@
                 <a:ea typeface="Aptos" pitchFamily="34" charset="-122"/>
                 <a:cs typeface="Aptos" pitchFamily="34" charset="-120"/>
               </a:rPr>
-              <a:t>More advanced methods may use regression, Bayesian approaches, control charts, machine learning, or ensemble models.</a:t>
-            </a:r>
-            <a:endParaRPr lang="en-US" sz="1700" dirty="0"/>
-          </a:p>
-          <a:p>
-            <a:r>
-              <a:rPr lang="en-US" sz="1700" dirty="0">
-                <a:solidFill>
-                  <a:srgbClr val="17364A"/>
-                </a:solidFill>
-                <a:latin typeface="Aptos" pitchFamily="34" charset="0"/>
-                <a:ea typeface="Aptos" pitchFamily="34" charset="-122"/>
-                <a:cs typeface="Aptos" pitchFamily="34" charset="-120"/>
-              </a:rPr>
-              <a:t>More complex methods are not automatically better.</a:t>
-            </a:r>
-            <a:endParaRPr lang="en-US" sz="1700" dirty="0"/>
-          </a:p>
-        </p:txBody>
-      </p:sp>
-      <p:sp>
-        <p:nvSpPr>
-          <p:cNvPr id="9" name="Shape 7"/>
+              <a:t>More advanced methods may use regression, Bayesian approaches, control charts, machine learning, or.</a:t>
+            </a:r>
+            <a:endParaRPr lang="en-US" sz="2100" dirty="0"/>
+          </a:p>
+        </p:txBody>
+      </p:sp>
+      <p:sp>
+        <p:nvSpPr>
+          <p:cNvPr id="10" name="Shape 8"/>
           <p:cNvSpPr/>
           <p:nvPr/>
         </p:nvSpPr>
@@ -3946,14 +4035,14 @@
       </p:sp>
       <p:sp>
         <p:nvSpPr>
-          <p:cNvPr id="10" name="Text 8"/>
+          <p:cNvPr id="11" name="Text 9"/>
           <p:cNvSpPr/>
           <p:nvPr/>
         </p:nvSpPr>
         <p:spPr>
           <a:xfrm>
             <a:off x="8074152" y="1563624"/>
-            <a:ext cx="2825496" cy="201168"/>
+            <a:ext cx="2825496" cy="256032"/>
           </a:xfrm>
           <a:prstGeom prst="rect">
             <a:avLst/>
@@ -3969,7 +4058,7 @@
               <a:buNone/>
             </a:pPr>
             <a:r>
-              <a:rPr lang="en-US" sz="950" b="1" dirty="0">
+              <a:rPr lang="en-US" sz="1300" b="1" dirty="0">
                 <a:solidFill>
                   <a:srgbClr val="0068B7"/>
                 </a:solidFill>
@@ -3979,20 +4068,20 @@
               </a:rPr>
               <a:t>Key idea</a:t>
             </a:r>
-            <a:endParaRPr lang="en-US" sz="950" dirty="0"/>
-          </a:p>
-        </p:txBody>
-      </p:sp>
-      <p:sp>
-        <p:nvSpPr>
-          <p:cNvPr id="11" name="Text 9"/>
-          <p:cNvSpPr/>
-          <p:nvPr/>
-        </p:nvSpPr>
-        <p:spPr>
-          <a:xfrm>
-            <a:off x="8074152" y="1856232"/>
-            <a:ext cx="2825496" cy="1261872"/>
+            <a:endParaRPr lang="en-US" sz="1300" dirty="0"/>
+          </a:p>
+        </p:txBody>
+      </p:sp>
+      <p:sp>
+        <p:nvSpPr>
+          <p:cNvPr id="12" name="Text 10"/>
+          <p:cNvSpPr/>
+          <p:nvPr/>
+        </p:nvSpPr>
+        <p:spPr>
+          <a:xfrm>
+            <a:off x="8074152" y="1920240"/>
+            <a:ext cx="2825496" cy="1188720"/>
           </a:xfrm>
           <a:prstGeom prst="rect">
             <a:avLst/>
@@ -4010,7 +4099,7 @@
               <a:buNone/>
             </a:pPr>
             <a:r>
-              <a:rPr lang="en-US" sz="1250" dirty="0">
+              <a:rPr lang="en-US" sz="1550" dirty="0">
                 <a:solidFill>
                   <a:srgbClr val="17364A"/>
                 </a:solidFill>
@@ -4020,13 +4109,13 @@
               </a:rPr>
               <a:t>Anomaly detection methods vary in complexity.</a:t>
             </a:r>
-            <a:endParaRPr lang="en-US" sz="1250" dirty="0"/>
-          </a:p>
-        </p:txBody>
-      </p:sp>
-      <p:sp>
-        <p:nvSpPr>
-          <p:cNvPr id="12" name="Shape 10"/>
+            <a:endParaRPr lang="en-US" sz="1550" dirty="0"/>
+          </a:p>
+        </p:txBody>
+      </p:sp>
+      <p:sp>
+        <p:nvSpPr>
+          <p:cNvPr id="13" name="Shape 11"/>
           <p:cNvSpPr/>
           <p:nvPr/>
         </p:nvSpPr>
@@ -4053,14 +4142,14 @@
       </p:sp>
       <p:sp>
         <p:nvSpPr>
-          <p:cNvPr id="13" name="Text 11"/>
+          <p:cNvPr id="14" name="Text 12"/>
           <p:cNvSpPr/>
           <p:nvPr/>
         </p:nvSpPr>
         <p:spPr>
           <a:xfrm>
             <a:off x="8074152" y="3666744"/>
-            <a:ext cx="2825496" cy="201168"/>
+            <a:ext cx="2825496" cy="256032"/>
           </a:xfrm>
           <a:prstGeom prst="rect">
             <a:avLst/>
@@ -4076,7 +4165,7 @@
               <a:buNone/>
             </a:pPr>
             <a:r>
-              <a:rPr lang="en-US" sz="950" b="1" dirty="0">
+              <a:rPr lang="en-US" sz="1300" b="1" dirty="0">
                 <a:solidFill>
                   <a:srgbClr val="0068B7"/>
                 </a:solidFill>
@@ -4086,20 +4175,20 @@
               </a:rPr>
               <a:t>Use this for</a:t>
             </a:r>
-            <a:endParaRPr lang="en-US" sz="950" dirty="0"/>
-          </a:p>
-        </p:txBody>
-      </p:sp>
-      <p:sp>
-        <p:nvSpPr>
-          <p:cNvPr id="14" name="Text 12"/>
-          <p:cNvSpPr/>
-          <p:nvPr/>
-        </p:nvSpPr>
-        <p:spPr>
-          <a:xfrm>
-            <a:off x="8074152" y="3959352"/>
-            <a:ext cx="2825496" cy="1170432"/>
+            <a:endParaRPr lang="en-US" sz="1300" dirty="0"/>
+          </a:p>
+        </p:txBody>
+      </p:sp>
+      <p:sp>
+        <p:nvSpPr>
+          <p:cNvPr id="15" name="Text 13"/>
+          <p:cNvSpPr/>
+          <p:nvPr/>
+        </p:nvSpPr>
+        <p:spPr>
+          <a:xfrm>
+            <a:off x="8074152" y="4023360"/>
+            <a:ext cx="2825496" cy="1097280"/>
           </a:xfrm>
           <a:prstGeom prst="rect">
             <a:avLst/>
@@ -4117,7 +4206,7 @@
               <a:buNone/>
             </a:pPr>
             <a:r>
-              <a:rPr lang="en-US" sz="1250" dirty="0">
+              <a:rPr lang="en-US" sz="1550" dirty="0">
                 <a:solidFill>
                   <a:srgbClr val="17364A"/>
                 </a:solidFill>
@@ -4127,7 +4216,7 @@
               </a:rPr>
               <a:t>Connect the concept to public health decisions, safeguards, documentation, or implementation work.</a:t>
             </a:r>
-            <a:endParaRPr lang="en-US" sz="1250" dirty="0"/>
+            <a:endParaRPr lang="en-US" sz="1550" dirty="0"/>
           </a:p>
         </p:txBody>
       </p:sp>
@@ -4324,7 +4413,7 @@
                 <a:ea typeface="Aptos" pitchFamily="34" charset="-122"/>
                 <a:cs typeface="Aptos" pitchFamily="34" charset="-120"/>
               </a:rPr>
-              <a:t>© Paula Soper</a:t>
+              <a:t>Â© Paula Soper</a:t>
             </a:r>
             <a:endParaRPr lang="en-US" sz="800" dirty="0"/>
           </a:p>
@@ -4332,7 +4421,46 @@
       </p:sp>
       <p:sp>
         <p:nvSpPr>
-          <p:cNvPr id="7" name="Shape 5"/>
+          <p:cNvPr id="7" name="Text 5"/>
+          <p:cNvSpPr/>
+          <p:nvPr/>
+        </p:nvSpPr>
+        <p:spPr>
+          <a:xfrm>
+            <a:off x="11137392" y="6510528"/>
+            <a:ext cx="411480" cy="201168"/>
+          </a:xfrm>
+          <a:prstGeom prst="rect">
+            <a:avLst/>
+          </a:prstGeom>
+          <a:noFill/>
+          <a:ln/>
+        </p:spPr>
+        <p:txBody>
+          <a:bodyPr wrap="square" lIns="0" tIns="0" rIns="0" bIns="0" rtlCol="0" anchor="ctr"/>
+          <a:lstStyle/>
+          <a:p>
+            <a:pPr algn="r" indent="0" marL="0">
+              <a:buNone/>
+            </a:pPr>
+            <a:r>
+              <a:rPr lang="en-US" sz="900" dirty="0">
+                <a:solidFill>
+                  <a:srgbClr val="5F7181"/>
+                </a:solidFill>
+                <a:latin typeface="Aptos" pitchFamily="34" charset="0"/>
+                <a:ea typeface="Aptos" pitchFamily="34" charset="-122"/>
+                <a:cs typeface="Aptos" pitchFamily="34" charset="-120"/>
+              </a:rPr>
+              <a:t>12</a:t>
+            </a:r>
+            <a:endParaRPr lang="en-US" sz="900" dirty="0"/>
+          </a:p>
+        </p:txBody>
+      </p:sp>
+      <p:sp>
+        <p:nvSpPr>
+          <p:cNvPr id="8" name="Shape 6"/>
           <p:cNvSpPr/>
           <p:nvPr/>
         </p:nvSpPr>
@@ -4357,7 +4485,7 @@
       </p:sp>
       <p:sp>
         <p:nvSpPr>
-          <p:cNvPr id="8" name="Text 6"/>
+          <p:cNvPr id="9" name="Text 7"/>
           <p:cNvSpPr/>
           <p:nvPr/>
         </p:nvSpPr>
@@ -4396,14 +4524,14 @@
       </p:sp>
       <p:sp>
         <p:nvSpPr>
-          <p:cNvPr id="9" name="Text 7"/>
+          <p:cNvPr id="10" name="Text 8"/>
           <p:cNvSpPr/>
           <p:nvPr/>
         </p:nvSpPr>
         <p:spPr>
           <a:xfrm>
             <a:off x="640080" y="621792"/>
-            <a:ext cx="10881360" cy="566928"/>
+            <a:ext cx="10881360" cy="713232"/>
           </a:xfrm>
           <a:prstGeom prst="rect">
             <a:avLst/>
@@ -4421,7 +4549,7 @@
               <a:buNone/>
             </a:pPr>
             <a:r>
-              <a:rPr lang="en-US" sz="2700" b="1" dirty="0">
+              <a:rPr lang="en-US" sz="3400" b="1" dirty="0">
                 <a:solidFill>
                   <a:srgbClr val="003A63"/>
                 </a:solidFill>
@@ -4431,20 +4559,20 @@
               </a:rPr>
               <a:t>Risks, Failure Modes, and Guardrails</a:t>
             </a:r>
-            <a:endParaRPr lang="en-US" sz="2700" dirty="0"/>
-          </a:p>
-        </p:txBody>
-      </p:sp>
-      <p:sp>
-        <p:nvSpPr>
-          <p:cNvPr id="10" name="Text 8"/>
-          <p:cNvSpPr/>
-          <p:nvPr/>
-        </p:nvSpPr>
-        <p:spPr>
-          <a:xfrm>
-            <a:off x="868680" y="1417320"/>
-            <a:ext cx="6675120" cy="4434840"/>
+            <a:endParaRPr lang="en-US" sz="3400" dirty="0"/>
+          </a:p>
+        </p:txBody>
+      </p:sp>
+      <p:sp>
+        <p:nvSpPr>
+          <p:cNvPr id="11" name="Text 9"/>
+          <p:cNvSpPr/>
+          <p:nvPr/>
+        </p:nvSpPr>
+        <p:spPr>
+          <a:xfrm>
+            <a:off x="868680" y="1508760"/>
+            <a:ext cx="6537960" cy="4160520"/>
           </a:xfrm>
           <a:prstGeom prst="rect">
             <a:avLst/>
@@ -4459,7 +4587,7 @@
           <a:lstStyle/>
           <a:p>
             <a:r>
-              <a:rPr lang="en-US" sz="1700" dirty="0">
+              <a:rPr lang="en-US" sz="2100" dirty="0">
                 <a:solidFill>
                   <a:srgbClr val="17364A"/>
                 </a:solidFill>
@@ -4469,11 +4597,11 @@
               </a:rPr>
               <a:t>Reporting artifacts.</a:t>
             </a:r>
-            <a:endParaRPr lang="en-US" sz="1700" dirty="0"/>
-          </a:p>
-          <a:p>
-            <a:r>
-              <a:rPr lang="en-US" sz="1700" dirty="0">
+            <a:endParaRPr lang="en-US" sz="2100" dirty="0"/>
+          </a:p>
+          <a:p>
+            <a:r>
+              <a:rPr lang="en-US" sz="2100" dirty="0">
                 <a:solidFill>
                   <a:srgbClr val="17364A"/>
                 </a:solidFill>
@@ -4483,11 +4611,11 @@
               </a:rPr>
               <a:t>Feed failures, delayed batches, or coding changes can trigger false alerts.</a:t>
             </a:r>
-            <a:endParaRPr lang="en-US" sz="1700" dirty="0"/>
-          </a:p>
-          <a:p>
-            <a:r>
-              <a:rPr lang="en-US" sz="1700" dirty="0">
+            <a:endParaRPr lang="en-US" sz="2100" dirty="0"/>
+          </a:p>
+          <a:p>
+            <a:r>
+              <a:rPr lang="en-US" sz="2100" dirty="0">
                 <a:solidFill>
                   <a:srgbClr val="17364A"/>
                 </a:solidFill>
@@ -4497,27 +4625,13 @@
               </a:rPr>
               <a:t>Guardrails include data quality checks, feed monitoring, and partner change logs.</a:t>
             </a:r>
-            <a:endParaRPr lang="en-US" sz="1700" dirty="0"/>
-          </a:p>
-          <a:p>
-            <a:r>
-              <a:rPr lang="en-US" sz="1700" dirty="0">
-                <a:solidFill>
-                  <a:srgbClr val="17364A"/>
-                </a:solidFill>
-                <a:latin typeface="Aptos" pitchFamily="34" charset="0"/>
-                <a:ea typeface="Aptos" pitchFamily="34" charset="-122"/>
-                <a:cs typeface="Aptos" pitchFamily="34" charset="-120"/>
-              </a:rPr>
-              <a:t>Alert fatigue.</a:t>
-            </a:r>
-            <a:endParaRPr lang="en-US" sz="1700" dirty="0"/>
-          </a:p>
-        </p:txBody>
-      </p:sp>
-      <p:sp>
-        <p:nvSpPr>
-          <p:cNvPr id="11" name="Shape 9"/>
+            <a:endParaRPr lang="en-US" sz="2100" dirty="0"/>
+          </a:p>
+        </p:txBody>
+      </p:sp>
+      <p:sp>
+        <p:nvSpPr>
+          <p:cNvPr id="12" name="Shape 10"/>
           <p:cNvSpPr/>
           <p:nvPr/>
         </p:nvSpPr>
@@ -4544,14 +4658,14 @@
       </p:sp>
       <p:sp>
         <p:nvSpPr>
-          <p:cNvPr id="12" name="Text 10"/>
+          <p:cNvPr id="13" name="Text 11"/>
           <p:cNvSpPr/>
           <p:nvPr/>
         </p:nvSpPr>
         <p:spPr>
           <a:xfrm>
             <a:off x="8074152" y="1563624"/>
-            <a:ext cx="2825496" cy="201168"/>
+            <a:ext cx="2825496" cy="256032"/>
           </a:xfrm>
           <a:prstGeom prst="rect">
             <a:avLst/>
@@ -4567,7 +4681,7 @@
               <a:buNone/>
             </a:pPr>
             <a:r>
-              <a:rPr lang="en-US" sz="950" b="1" dirty="0">
+              <a:rPr lang="en-US" sz="1300" b="1" dirty="0">
                 <a:solidFill>
                   <a:srgbClr val="0068B7"/>
                 </a:solidFill>
@@ -4577,20 +4691,20 @@
               </a:rPr>
               <a:t>Key idea</a:t>
             </a:r>
-            <a:endParaRPr lang="en-US" sz="950" dirty="0"/>
-          </a:p>
-        </p:txBody>
-      </p:sp>
-      <p:sp>
-        <p:nvSpPr>
-          <p:cNvPr id="13" name="Text 11"/>
-          <p:cNvSpPr/>
-          <p:nvPr/>
-        </p:nvSpPr>
-        <p:spPr>
-          <a:xfrm>
-            <a:off x="8074152" y="1856232"/>
-            <a:ext cx="2825496" cy="1261872"/>
+            <a:endParaRPr lang="en-US" sz="1300" dirty="0"/>
+          </a:p>
+        </p:txBody>
+      </p:sp>
+      <p:sp>
+        <p:nvSpPr>
+          <p:cNvPr id="14" name="Text 12"/>
+          <p:cNvSpPr/>
+          <p:nvPr/>
+        </p:nvSpPr>
+        <p:spPr>
+          <a:xfrm>
+            <a:off x="8074152" y="1920240"/>
+            <a:ext cx="2825496" cy="1188720"/>
           </a:xfrm>
           <a:prstGeom prst="rect">
             <a:avLst/>
@@ -4608,7 +4722,7 @@
               <a:buNone/>
             </a:pPr>
             <a:r>
-              <a:rPr lang="en-US" sz="1250" dirty="0">
+              <a:rPr lang="en-US" sz="1550" dirty="0">
                 <a:solidFill>
                   <a:srgbClr val="17364A"/>
                 </a:solidFill>
@@ -4618,13 +4732,13 @@
               </a:rPr>
               <a:t>Reporting artifacts.</a:t>
             </a:r>
-            <a:endParaRPr lang="en-US" sz="1250" dirty="0"/>
-          </a:p>
-        </p:txBody>
-      </p:sp>
-      <p:sp>
-        <p:nvSpPr>
-          <p:cNvPr id="14" name="Shape 12"/>
+            <a:endParaRPr lang="en-US" sz="1550" dirty="0"/>
+          </a:p>
+        </p:txBody>
+      </p:sp>
+      <p:sp>
+        <p:nvSpPr>
+          <p:cNvPr id="15" name="Shape 13"/>
           <p:cNvSpPr/>
           <p:nvPr/>
         </p:nvSpPr>
@@ -4651,14 +4765,14 @@
       </p:sp>
       <p:sp>
         <p:nvSpPr>
-          <p:cNvPr id="15" name="Text 13"/>
+          <p:cNvPr id="16" name="Text 14"/>
           <p:cNvSpPr/>
           <p:nvPr/>
         </p:nvSpPr>
         <p:spPr>
           <a:xfrm>
             <a:off x="8074152" y="3666744"/>
-            <a:ext cx="2825496" cy="201168"/>
+            <a:ext cx="2825496" cy="256032"/>
           </a:xfrm>
           <a:prstGeom prst="rect">
             <a:avLst/>
@@ -4674,7 +4788,7 @@
               <a:buNone/>
             </a:pPr>
             <a:r>
-              <a:rPr lang="en-US" sz="950" b="1" dirty="0">
+              <a:rPr lang="en-US" sz="1300" b="1" dirty="0">
                 <a:solidFill>
                   <a:srgbClr val="0068B7"/>
                 </a:solidFill>
@@ -4684,20 +4798,20 @@
               </a:rPr>
               <a:t>Use this for</a:t>
             </a:r>
-            <a:endParaRPr lang="en-US" sz="950" dirty="0"/>
-          </a:p>
-        </p:txBody>
-      </p:sp>
-      <p:sp>
-        <p:nvSpPr>
-          <p:cNvPr id="16" name="Text 14"/>
-          <p:cNvSpPr/>
-          <p:nvPr/>
-        </p:nvSpPr>
-        <p:spPr>
-          <a:xfrm>
-            <a:off x="8074152" y="3959352"/>
-            <a:ext cx="2825496" cy="1170432"/>
+            <a:endParaRPr lang="en-US" sz="1300" dirty="0"/>
+          </a:p>
+        </p:txBody>
+      </p:sp>
+      <p:sp>
+        <p:nvSpPr>
+          <p:cNvPr id="17" name="Text 15"/>
+          <p:cNvSpPr/>
+          <p:nvPr/>
+        </p:nvSpPr>
+        <p:spPr>
+          <a:xfrm>
+            <a:off x="8074152" y="4023360"/>
+            <a:ext cx="2825496" cy="1097280"/>
           </a:xfrm>
           <a:prstGeom prst="rect">
             <a:avLst/>
@@ -4715,7 +4829,7 @@
               <a:buNone/>
             </a:pPr>
             <a:r>
-              <a:rPr lang="en-US" sz="1250" dirty="0">
+              <a:rPr lang="en-US" sz="1550" dirty="0">
                 <a:solidFill>
                   <a:srgbClr val="17364A"/>
                 </a:solidFill>
@@ -4725,7 +4839,7 @@
               </a:rPr>
               <a:t>Connect the concept to public health decisions, safeguards, documentation, or implementation work.</a:t>
             </a:r>
-            <a:endParaRPr lang="en-US" sz="1250" dirty="0"/>
+            <a:endParaRPr lang="en-US" sz="1550" dirty="0"/>
           </a:p>
         </p:txBody>
       </p:sp>
@@ -4922,7 +5036,7 @@
                 <a:ea typeface="Aptos" pitchFamily="34" charset="-122"/>
                 <a:cs typeface="Aptos" pitchFamily="34" charset="-120"/>
               </a:rPr>
-              <a:t>© Paula Soper</a:t>
+              <a:t>Â© Paula Soper</a:t>
             </a:r>
             <a:endParaRPr lang="en-US" sz="800" dirty="0"/>
           </a:p>
@@ -4936,8 +5050,47 @@
         </p:nvSpPr>
         <p:spPr>
           <a:xfrm>
+            <a:off x="11137392" y="6510528"/>
+            <a:ext cx="411480" cy="201168"/>
+          </a:xfrm>
+          <a:prstGeom prst="rect">
+            <a:avLst/>
+          </a:prstGeom>
+          <a:noFill/>
+          <a:ln/>
+        </p:spPr>
+        <p:txBody>
+          <a:bodyPr wrap="square" lIns="0" tIns="0" rIns="0" bIns="0" rtlCol="0" anchor="ctr"/>
+          <a:lstStyle/>
+          <a:p>
+            <a:pPr algn="r" indent="0" marL="0">
+              <a:buNone/>
+            </a:pPr>
+            <a:r>
+              <a:rPr lang="en-US" sz="900" dirty="0">
+                <a:solidFill>
+                  <a:srgbClr val="5F7181"/>
+                </a:solidFill>
+                <a:latin typeface="Aptos" pitchFamily="34" charset="0"/>
+                <a:ea typeface="Aptos" pitchFamily="34" charset="-122"/>
+                <a:cs typeface="Aptos" pitchFamily="34" charset="-120"/>
+              </a:rPr>
+              <a:t>13</a:t>
+            </a:r>
+            <a:endParaRPr lang="en-US" sz="900" dirty="0"/>
+          </a:p>
+        </p:txBody>
+      </p:sp>
+      <p:sp>
+        <p:nvSpPr>
+          <p:cNvPr id="8" name="Text 6"/>
+          <p:cNvSpPr/>
+          <p:nvPr/>
+        </p:nvSpPr>
+        <p:spPr>
+          <a:xfrm>
             <a:off x="640080" y="658368"/>
-            <a:ext cx="10881360" cy="566928"/>
+            <a:ext cx="10881360" cy="713232"/>
           </a:xfrm>
           <a:prstGeom prst="rect">
             <a:avLst/>
@@ -4955,7 +5108,7 @@
               <a:buNone/>
             </a:pPr>
             <a:r>
-              <a:rPr lang="en-US" sz="2700" b="1" dirty="0">
+              <a:rPr lang="en-US" sz="3400" b="1" dirty="0">
                 <a:solidFill>
                   <a:srgbClr val="003A63"/>
                 </a:solidFill>
@@ -4965,20 +5118,20 @@
               </a:rPr>
               <a:t>Risks, Failure Modes, and Guardrails Continued</a:t>
             </a:r>
-            <a:endParaRPr lang="en-US" sz="2700" dirty="0"/>
-          </a:p>
-        </p:txBody>
-      </p:sp>
-      <p:sp>
-        <p:nvSpPr>
-          <p:cNvPr id="8" name="Text 6"/>
-          <p:cNvSpPr/>
-          <p:nvPr/>
-        </p:nvSpPr>
-        <p:spPr>
-          <a:xfrm>
-            <a:off x="868680" y="1417320"/>
-            <a:ext cx="6675120" cy="4434840"/>
+            <a:endParaRPr lang="en-US" sz="3400" dirty="0"/>
+          </a:p>
+        </p:txBody>
+      </p:sp>
+      <p:sp>
+        <p:nvSpPr>
+          <p:cNvPr id="9" name="Text 7"/>
+          <p:cNvSpPr/>
+          <p:nvPr/>
+        </p:nvSpPr>
+        <p:spPr>
+          <a:xfrm>
+            <a:off x="868680" y="1508760"/>
+            <a:ext cx="6537960" cy="4160520"/>
           </a:xfrm>
           <a:prstGeom prst="rect">
             <a:avLst/>
@@ -4993,7 +5146,7 @@
           <a:lstStyle/>
           <a:p>
             <a:r>
-              <a:rPr lang="en-US" sz="1700" dirty="0">
+              <a:rPr lang="en-US" sz="2100" dirty="0">
                 <a:solidFill>
                   <a:srgbClr val="17364A"/>
                 </a:solidFill>
@@ -5003,11 +5156,11 @@
               </a:rPr>
               <a:t>Missed emerging events.</a:t>
             </a:r>
-            <a:endParaRPr lang="en-US" sz="1700" dirty="0"/>
-          </a:p>
-          <a:p>
-            <a:r>
-              <a:rPr lang="en-US" sz="1700" dirty="0">
+            <a:endParaRPr lang="en-US" sz="2100" dirty="0"/>
+          </a:p>
+          <a:p>
+            <a:r>
+              <a:rPr lang="en-US" sz="2100" dirty="0">
                 <a:solidFill>
                   <a:srgbClr val="17364A"/>
                 </a:solidFill>
@@ -5017,11 +5170,11 @@
               </a:rPr>
               <a:t>Overly conservative thresholds may miss early signals.</a:t>
             </a:r>
-            <a:endParaRPr lang="en-US" sz="1700" dirty="0"/>
-          </a:p>
-          <a:p>
-            <a:r>
-              <a:rPr lang="en-US" sz="1700" dirty="0">
+            <a:endParaRPr lang="en-US" sz="2100" dirty="0"/>
+          </a:p>
+          <a:p>
+            <a:r>
+              <a:rPr lang="en-US" sz="2100" dirty="0">
                 <a:solidFill>
                   <a:srgbClr val="17364A"/>
                 </a:solidFill>
@@ -5031,13 +5184,13 @@
               </a:rPr>
               <a:t>Guardrails include multiple indicators, sensitivity review, and escalation pathways for staff concerns.</a:t>
             </a:r>
-            <a:endParaRPr lang="en-US" sz="1700" dirty="0"/>
-          </a:p>
-        </p:txBody>
-      </p:sp>
-      <p:sp>
-        <p:nvSpPr>
-          <p:cNvPr id="9" name="Shape 7"/>
+            <a:endParaRPr lang="en-US" sz="2100" dirty="0"/>
+          </a:p>
+        </p:txBody>
+      </p:sp>
+      <p:sp>
+        <p:nvSpPr>
+          <p:cNvPr id="10" name="Shape 8"/>
           <p:cNvSpPr/>
           <p:nvPr/>
         </p:nvSpPr>
@@ -5064,14 +5217,14 @@
       </p:sp>
       <p:sp>
         <p:nvSpPr>
-          <p:cNvPr id="10" name="Text 8"/>
+          <p:cNvPr id="11" name="Text 9"/>
           <p:cNvSpPr/>
           <p:nvPr/>
         </p:nvSpPr>
         <p:spPr>
           <a:xfrm>
             <a:off x="8074152" y="1563624"/>
-            <a:ext cx="2825496" cy="201168"/>
+            <a:ext cx="2825496" cy="256032"/>
           </a:xfrm>
           <a:prstGeom prst="rect">
             <a:avLst/>
@@ -5087,7 +5240,7 @@
               <a:buNone/>
             </a:pPr>
             <a:r>
-              <a:rPr lang="en-US" sz="950" b="1" dirty="0">
+              <a:rPr lang="en-US" sz="1300" b="1" dirty="0">
                 <a:solidFill>
                   <a:srgbClr val="0068B7"/>
                 </a:solidFill>
@@ -5097,20 +5250,20 @@
               </a:rPr>
               <a:t>Key idea</a:t>
             </a:r>
-            <a:endParaRPr lang="en-US" sz="950" dirty="0"/>
-          </a:p>
-        </p:txBody>
-      </p:sp>
-      <p:sp>
-        <p:nvSpPr>
-          <p:cNvPr id="11" name="Text 9"/>
-          <p:cNvSpPr/>
-          <p:nvPr/>
-        </p:nvSpPr>
-        <p:spPr>
-          <a:xfrm>
-            <a:off x="8074152" y="1856232"/>
-            <a:ext cx="2825496" cy="1261872"/>
+            <a:endParaRPr lang="en-US" sz="1300" dirty="0"/>
+          </a:p>
+        </p:txBody>
+      </p:sp>
+      <p:sp>
+        <p:nvSpPr>
+          <p:cNvPr id="12" name="Text 10"/>
+          <p:cNvSpPr/>
+          <p:nvPr/>
+        </p:nvSpPr>
+        <p:spPr>
+          <a:xfrm>
+            <a:off x="8074152" y="1920240"/>
+            <a:ext cx="2825496" cy="1188720"/>
           </a:xfrm>
           <a:prstGeom prst="rect">
             <a:avLst/>
@@ -5128,7 +5281,7 @@
               <a:buNone/>
             </a:pPr>
             <a:r>
-              <a:rPr lang="en-US" sz="1250" dirty="0">
+              <a:rPr lang="en-US" sz="1550" dirty="0">
                 <a:solidFill>
                   <a:srgbClr val="17364A"/>
                 </a:solidFill>
@@ -5138,13 +5291,13 @@
               </a:rPr>
               <a:t>Missed emerging events.</a:t>
             </a:r>
-            <a:endParaRPr lang="en-US" sz="1250" dirty="0"/>
-          </a:p>
-        </p:txBody>
-      </p:sp>
-      <p:sp>
-        <p:nvSpPr>
-          <p:cNvPr id="12" name="Shape 10"/>
+            <a:endParaRPr lang="en-US" sz="1550" dirty="0"/>
+          </a:p>
+        </p:txBody>
+      </p:sp>
+      <p:sp>
+        <p:nvSpPr>
+          <p:cNvPr id="13" name="Shape 11"/>
           <p:cNvSpPr/>
           <p:nvPr/>
         </p:nvSpPr>
@@ -5171,14 +5324,14 @@
       </p:sp>
       <p:sp>
         <p:nvSpPr>
-          <p:cNvPr id="13" name="Text 11"/>
+          <p:cNvPr id="14" name="Text 12"/>
           <p:cNvSpPr/>
           <p:nvPr/>
         </p:nvSpPr>
         <p:spPr>
           <a:xfrm>
             <a:off x="8074152" y="3666744"/>
-            <a:ext cx="2825496" cy="201168"/>
+            <a:ext cx="2825496" cy="256032"/>
           </a:xfrm>
           <a:prstGeom prst="rect">
             <a:avLst/>
@@ -5194,7 +5347,7 @@
               <a:buNone/>
             </a:pPr>
             <a:r>
-              <a:rPr lang="en-US" sz="950" b="1" dirty="0">
+              <a:rPr lang="en-US" sz="1300" b="1" dirty="0">
                 <a:solidFill>
                   <a:srgbClr val="0068B7"/>
                 </a:solidFill>
@@ -5204,20 +5357,20 @@
               </a:rPr>
               <a:t>Use this for</a:t>
             </a:r>
-            <a:endParaRPr lang="en-US" sz="950" dirty="0"/>
-          </a:p>
-        </p:txBody>
-      </p:sp>
-      <p:sp>
-        <p:nvSpPr>
-          <p:cNvPr id="14" name="Text 12"/>
-          <p:cNvSpPr/>
-          <p:nvPr/>
-        </p:nvSpPr>
-        <p:spPr>
-          <a:xfrm>
-            <a:off x="8074152" y="3959352"/>
-            <a:ext cx="2825496" cy="1170432"/>
+            <a:endParaRPr lang="en-US" sz="1300" dirty="0"/>
+          </a:p>
+        </p:txBody>
+      </p:sp>
+      <p:sp>
+        <p:nvSpPr>
+          <p:cNvPr id="15" name="Text 13"/>
+          <p:cNvSpPr/>
+          <p:nvPr/>
+        </p:nvSpPr>
+        <p:spPr>
+          <a:xfrm>
+            <a:off x="8074152" y="4023360"/>
+            <a:ext cx="2825496" cy="1097280"/>
           </a:xfrm>
           <a:prstGeom prst="rect">
             <a:avLst/>
@@ -5235,7 +5388,7 @@
               <a:buNone/>
             </a:pPr>
             <a:r>
-              <a:rPr lang="en-US" sz="1250" dirty="0">
+              <a:rPr lang="en-US" sz="1550" dirty="0">
                 <a:solidFill>
                   <a:srgbClr val="17364A"/>
                 </a:solidFill>
@@ -5245,7 +5398,7 @@
               </a:rPr>
               <a:t>Connect the concept to public health decisions, safeguards, documentation, or implementation work.</a:t>
             </a:r>
-            <a:endParaRPr lang="en-US" sz="1250" dirty="0"/>
+            <a:endParaRPr lang="en-US" sz="1550" dirty="0"/>
           </a:p>
         </p:txBody>
       </p:sp>
@@ -5442,7 +5595,7 @@
                 <a:ea typeface="Aptos" pitchFamily="34" charset="-122"/>
                 <a:cs typeface="Aptos" pitchFamily="34" charset="-120"/>
               </a:rPr>
-              <a:t>© Paula Soper</a:t>
+              <a:t>Â© Paula Soper</a:t>
             </a:r>
             <a:endParaRPr lang="en-US" sz="800" dirty="0"/>
           </a:p>
@@ -5450,7 +5603,46 @@
       </p:sp>
       <p:sp>
         <p:nvSpPr>
-          <p:cNvPr id="7" name="Shape 5"/>
+          <p:cNvPr id="7" name="Text 5"/>
+          <p:cNvSpPr/>
+          <p:nvPr/>
+        </p:nvSpPr>
+        <p:spPr>
+          <a:xfrm>
+            <a:off x="11137392" y="6510528"/>
+            <a:ext cx="411480" cy="201168"/>
+          </a:xfrm>
+          <a:prstGeom prst="rect">
+            <a:avLst/>
+          </a:prstGeom>
+          <a:noFill/>
+          <a:ln/>
+        </p:spPr>
+        <p:txBody>
+          <a:bodyPr wrap="square" lIns="0" tIns="0" rIns="0" bIns="0" rtlCol="0" anchor="ctr"/>
+          <a:lstStyle/>
+          <a:p>
+            <a:pPr algn="r" indent="0" marL="0">
+              <a:buNone/>
+            </a:pPr>
+            <a:r>
+              <a:rPr lang="en-US" sz="900" dirty="0">
+                <a:solidFill>
+                  <a:srgbClr val="5F7181"/>
+                </a:solidFill>
+                <a:latin typeface="Aptos" pitchFamily="34" charset="0"/>
+                <a:ea typeface="Aptos" pitchFamily="34" charset="-122"/>
+                <a:cs typeface="Aptos" pitchFamily="34" charset="-120"/>
+              </a:rPr>
+              <a:t>14</a:t>
+            </a:r>
+            <a:endParaRPr lang="en-US" sz="900" dirty="0"/>
+          </a:p>
+        </p:txBody>
+      </p:sp>
+      <p:sp>
+        <p:nvSpPr>
+          <p:cNvPr id="8" name="Shape 6"/>
           <p:cNvSpPr/>
           <p:nvPr/>
         </p:nvSpPr>
@@ -5475,7 +5667,7 @@
       </p:sp>
       <p:sp>
         <p:nvSpPr>
-          <p:cNvPr id="8" name="Text 6"/>
+          <p:cNvPr id="9" name="Text 7"/>
           <p:cNvSpPr/>
           <p:nvPr/>
         </p:nvSpPr>
@@ -5514,14 +5706,14 @@
       </p:sp>
       <p:sp>
         <p:nvSpPr>
-          <p:cNvPr id="9" name="Text 7"/>
+          <p:cNvPr id="10" name="Text 8"/>
           <p:cNvSpPr/>
           <p:nvPr/>
         </p:nvSpPr>
         <p:spPr>
           <a:xfrm>
             <a:off x="640080" y="621792"/>
-            <a:ext cx="10881360" cy="566928"/>
+            <a:ext cx="10881360" cy="713232"/>
           </a:xfrm>
           <a:prstGeom prst="rect">
             <a:avLst/>
@@ -5539,7 +5731,7 @@
               <a:buNone/>
             </a:pPr>
             <a:r>
-              <a:rPr lang="en-US" sz="2700" b="1" dirty="0">
+              <a:rPr lang="en-US" sz="3400" b="1" dirty="0">
                 <a:solidFill>
                   <a:srgbClr val="003A63"/>
                 </a:solidFill>
@@ -5549,20 +5741,20 @@
               </a:rPr>
               <a:t>Application to AI-Supported Workflows</a:t>
             </a:r>
-            <a:endParaRPr lang="en-US" sz="2700" dirty="0"/>
-          </a:p>
-        </p:txBody>
-      </p:sp>
-      <p:sp>
-        <p:nvSpPr>
-          <p:cNvPr id="10" name="Text 8"/>
-          <p:cNvSpPr/>
-          <p:nvPr/>
-        </p:nvSpPr>
-        <p:spPr>
-          <a:xfrm>
-            <a:off x="868680" y="1417320"/>
-            <a:ext cx="6675120" cy="4434840"/>
+            <a:endParaRPr lang="en-US" sz="3400" dirty="0"/>
+          </a:p>
+        </p:txBody>
+      </p:sp>
+      <p:sp>
+        <p:nvSpPr>
+          <p:cNvPr id="11" name="Text 9"/>
+          <p:cNvSpPr/>
+          <p:nvPr/>
+        </p:nvSpPr>
+        <p:spPr>
+          <a:xfrm>
+            <a:off x="868680" y="1508760"/>
+            <a:ext cx="6537960" cy="4160520"/>
           </a:xfrm>
           <a:prstGeom prst="rect">
             <a:avLst/>
@@ -5577,7 +5769,7 @@
           <a:lstStyle/>
           <a:p>
             <a:r>
-              <a:rPr lang="en-US" sz="1700" dirty="0">
+              <a:rPr lang="en-US" sz="2100" dirty="0">
                 <a:solidFill>
                   <a:srgbClr val="17364A"/>
                 </a:solidFill>
@@ -5585,13 +5777,13 @@
                 <a:ea typeface="Aptos" pitchFamily="34" charset="-122"/>
                 <a:cs typeface="Aptos" pitchFamily="34" charset="-120"/>
               </a:rPr>
-              <a:t>Time-series and anomaly detection methods can support predictive dashboards, syndromic surveillance, wastewater monitoring,.</a:t>
-            </a:r>
-            <a:endParaRPr lang="en-US" sz="1700" dirty="0"/>
-          </a:p>
-          <a:p>
-            <a:r>
-              <a:rPr lang="en-US" sz="1700" dirty="0">
+              <a:t>Time-series and anomaly detection methods can support predictive dashboards, syndromic surveillance,.</a:t>
+            </a:r>
+            <a:endParaRPr lang="en-US" sz="2100" dirty="0"/>
+          </a:p>
+          <a:p>
+            <a:r>
+              <a:rPr lang="en-US" sz="2100" dirty="0">
                 <a:solidFill>
                   <a:srgbClr val="17364A"/>
                 </a:solidFill>
@@ -5601,11 +5793,11 @@
               </a:rPr>
               <a:t>Generative AI may summarize signal review, but it should include uncertainty and source indicators.</a:t>
             </a:r>
-            <a:endParaRPr lang="en-US" sz="1700" dirty="0"/>
-          </a:p>
-          <a:p>
-            <a:r>
-              <a:rPr lang="en-US" sz="1700" dirty="0">
+            <a:endParaRPr lang="en-US" sz="2100" dirty="0"/>
+          </a:p>
+          <a:p>
+            <a:r>
+              <a:rPr lang="en-US" sz="2100" dirty="0">
                 <a:solidFill>
                   <a:srgbClr val="17364A"/>
                 </a:solidFill>
@@ -5613,29 +5805,15 @@
                 <a:ea typeface="Aptos" pitchFamily="34" charset="-122"/>
                 <a:cs typeface="Aptos" pitchFamily="34" charset="-120"/>
               </a:rPr>
-              <a:t>Agentic workflows may route alerts or create tasks, but those actions should be limited to defined protocols and human.</a:t>
-            </a:r>
-            <a:endParaRPr lang="en-US" sz="1700" dirty="0"/>
-          </a:p>
-          <a:p>
-            <a:r>
-              <a:rPr lang="en-US" sz="1700" dirty="0">
-                <a:solidFill>
-                  <a:srgbClr val="17364A"/>
-                </a:solidFill>
-                <a:latin typeface="Aptos" pitchFamily="34" charset="0"/>
-                <a:ea typeface="Aptos" pitchFamily="34" charset="-122"/>
-                <a:cs typeface="Aptos" pitchFamily="34" charset="-120"/>
-              </a:rPr>
-              <a:t>The best AI-supported surveillance workflows combine automation with epidemiologic judgment.</a:t>
-            </a:r>
-            <a:endParaRPr lang="en-US" sz="1700" dirty="0"/>
-          </a:p>
-        </p:txBody>
-      </p:sp>
-      <p:sp>
-        <p:nvSpPr>
-          <p:cNvPr id="11" name="Shape 9"/>
+              <a:t>Agentic workflows may route alerts or create tasks, but those actions should be limited to defined.</a:t>
+            </a:r>
+            <a:endParaRPr lang="en-US" sz="2100" dirty="0"/>
+          </a:p>
+        </p:txBody>
+      </p:sp>
+      <p:sp>
+        <p:nvSpPr>
+          <p:cNvPr id="12" name="Shape 10"/>
           <p:cNvSpPr/>
           <p:nvPr/>
         </p:nvSpPr>
@@ -5662,14 +5840,14 @@
       </p:sp>
       <p:sp>
         <p:nvSpPr>
-          <p:cNvPr id="12" name="Text 10"/>
+          <p:cNvPr id="13" name="Text 11"/>
           <p:cNvSpPr/>
           <p:nvPr/>
         </p:nvSpPr>
         <p:spPr>
           <a:xfrm>
             <a:off x="8074152" y="1563624"/>
-            <a:ext cx="2825496" cy="201168"/>
+            <a:ext cx="2825496" cy="256032"/>
           </a:xfrm>
           <a:prstGeom prst="rect">
             <a:avLst/>
@@ -5685,7 +5863,7 @@
               <a:buNone/>
             </a:pPr>
             <a:r>
-              <a:rPr lang="en-US" sz="950" b="1" dirty="0">
+              <a:rPr lang="en-US" sz="1300" b="1" dirty="0">
                 <a:solidFill>
                   <a:srgbClr val="0068B7"/>
                 </a:solidFill>
@@ -5695,20 +5873,20 @@
               </a:rPr>
               <a:t>Key idea</a:t>
             </a:r>
-            <a:endParaRPr lang="en-US" sz="950" dirty="0"/>
-          </a:p>
-        </p:txBody>
-      </p:sp>
-      <p:sp>
-        <p:nvSpPr>
-          <p:cNvPr id="13" name="Text 11"/>
-          <p:cNvSpPr/>
-          <p:nvPr/>
-        </p:nvSpPr>
-        <p:spPr>
-          <a:xfrm>
-            <a:off x="8074152" y="1856232"/>
-            <a:ext cx="2825496" cy="1261872"/>
+            <a:endParaRPr lang="en-US" sz="1300" dirty="0"/>
+          </a:p>
+        </p:txBody>
+      </p:sp>
+      <p:sp>
+        <p:nvSpPr>
+          <p:cNvPr id="14" name="Text 12"/>
+          <p:cNvSpPr/>
+          <p:nvPr/>
+        </p:nvSpPr>
+        <p:spPr>
+          <a:xfrm>
+            <a:off x="8074152" y="1920240"/>
+            <a:ext cx="2825496" cy="1188720"/>
           </a:xfrm>
           <a:prstGeom prst="rect">
             <a:avLst/>
@@ -5726,7 +5904,7 @@
               <a:buNone/>
             </a:pPr>
             <a:r>
-              <a:rPr lang="en-US" sz="1250" dirty="0">
+              <a:rPr lang="en-US" sz="1550" dirty="0">
                 <a:solidFill>
                   <a:srgbClr val="17364A"/>
                 </a:solidFill>
@@ -5734,15 +5912,15 @@
                 <a:ea typeface="Aptos" pitchFamily="34" charset="-122"/>
                 <a:cs typeface="Aptos" pitchFamily="34" charset="-120"/>
               </a:rPr>
-              <a:t>Time-series and anomaly detection methods can support predictive dashboards, syndromic surveillance, wastewater monitoring,.</a:t>
-            </a:r>
-            <a:endParaRPr lang="en-US" sz="1250" dirty="0"/>
-          </a:p>
-        </p:txBody>
-      </p:sp>
-      <p:sp>
-        <p:nvSpPr>
-          <p:cNvPr id="14" name="Shape 12"/>
+              <a:t>Time-series and anomaly detection methods can support predictive dashboards, syndromic surveillance,.</a:t>
+            </a:r>
+            <a:endParaRPr lang="en-US" sz="1550" dirty="0"/>
+          </a:p>
+        </p:txBody>
+      </p:sp>
+      <p:sp>
+        <p:nvSpPr>
+          <p:cNvPr id="15" name="Shape 13"/>
           <p:cNvSpPr/>
           <p:nvPr/>
         </p:nvSpPr>
@@ -5769,14 +5947,14 @@
       </p:sp>
       <p:sp>
         <p:nvSpPr>
-          <p:cNvPr id="15" name="Text 13"/>
+          <p:cNvPr id="16" name="Text 14"/>
           <p:cNvSpPr/>
           <p:nvPr/>
         </p:nvSpPr>
         <p:spPr>
           <a:xfrm>
             <a:off x="8074152" y="3666744"/>
-            <a:ext cx="2825496" cy="201168"/>
+            <a:ext cx="2825496" cy="256032"/>
           </a:xfrm>
           <a:prstGeom prst="rect">
             <a:avLst/>
@@ -5792,7 +5970,7 @@
               <a:buNone/>
             </a:pPr>
             <a:r>
-              <a:rPr lang="en-US" sz="950" b="1" dirty="0">
+              <a:rPr lang="en-US" sz="1300" b="1" dirty="0">
                 <a:solidFill>
                   <a:srgbClr val="0068B7"/>
                 </a:solidFill>
@@ -5802,20 +5980,20 @@
               </a:rPr>
               <a:t>Use this for</a:t>
             </a:r>
-            <a:endParaRPr lang="en-US" sz="950" dirty="0"/>
-          </a:p>
-        </p:txBody>
-      </p:sp>
-      <p:sp>
-        <p:nvSpPr>
-          <p:cNvPr id="16" name="Text 14"/>
-          <p:cNvSpPr/>
-          <p:nvPr/>
-        </p:nvSpPr>
-        <p:spPr>
-          <a:xfrm>
-            <a:off x="8074152" y="3959352"/>
-            <a:ext cx="2825496" cy="1170432"/>
+            <a:endParaRPr lang="en-US" sz="1300" dirty="0"/>
+          </a:p>
+        </p:txBody>
+      </p:sp>
+      <p:sp>
+        <p:nvSpPr>
+          <p:cNvPr id="17" name="Text 15"/>
+          <p:cNvSpPr/>
+          <p:nvPr/>
+        </p:nvSpPr>
+        <p:spPr>
+          <a:xfrm>
+            <a:off x="8074152" y="4023360"/>
+            <a:ext cx="2825496" cy="1097280"/>
           </a:xfrm>
           <a:prstGeom prst="rect">
             <a:avLst/>
@@ -5833,7 +6011,7 @@
               <a:buNone/>
             </a:pPr>
             <a:r>
-              <a:rPr lang="en-US" sz="1250" dirty="0">
+              <a:rPr lang="en-US" sz="1550" dirty="0">
                 <a:solidFill>
                   <a:srgbClr val="17364A"/>
                 </a:solidFill>
@@ -5843,7 +6021,7 @@
               </a:rPr>
               <a:t>Connect the concept to public health decisions, safeguards, documentation, or implementation work.</a:t>
             </a:r>
-            <a:endParaRPr lang="en-US" sz="1250" dirty="0"/>
+            <a:endParaRPr lang="en-US" sz="1550" dirty="0"/>
           </a:p>
         </p:txBody>
       </p:sp>
@@ -6040,7 +6218,7 @@
                 <a:ea typeface="Aptos" pitchFamily="34" charset="-122"/>
                 <a:cs typeface="Aptos" pitchFamily="34" charset="-120"/>
               </a:rPr>
-              <a:t>© Paula Soper</a:t>
+              <a:t>Â© Paula Soper</a:t>
             </a:r>
             <a:endParaRPr lang="en-US" sz="800" dirty="0"/>
           </a:p>
@@ -6048,7 +6226,46 @@
       </p:sp>
       <p:sp>
         <p:nvSpPr>
-          <p:cNvPr id="7" name="Shape 5"/>
+          <p:cNvPr id="7" name="Text 5"/>
+          <p:cNvSpPr/>
+          <p:nvPr/>
+        </p:nvSpPr>
+        <p:spPr>
+          <a:xfrm>
+            <a:off x="11137392" y="6510528"/>
+            <a:ext cx="411480" cy="201168"/>
+          </a:xfrm>
+          <a:prstGeom prst="rect">
+            <a:avLst/>
+          </a:prstGeom>
+          <a:noFill/>
+          <a:ln/>
+        </p:spPr>
+        <p:txBody>
+          <a:bodyPr wrap="square" lIns="0" tIns="0" rIns="0" bIns="0" rtlCol="0" anchor="ctr"/>
+          <a:lstStyle/>
+          <a:p>
+            <a:pPr algn="r" indent="0" marL="0">
+              <a:buNone/>
+            </a:pPr>
+            <a:r>
+              <a:rPr lang="en-US" sz="900" dirty="0">
+                <a:solidFill>
+                  <a:srgbClr val="5F7181"/>
+                </a:solidFill>
+                <a:latin typeface="Aptos" pitchFamily="34" charset="0"/>
+                <a:ea typeface="Aptos" pitchFamily="34" charset="-122"/>
+                <a:cs typeface="Aptos" pitchFamily="34" charset="-120"/>
+              </a:rPr>
+              <a:t>15</a:t>
+            </a:r>
+            <a:endParaRPr lang="en-US" sz="900" dirty="0"/>
+          </a:p>
+        </p:txBody>
+      </p:sp>
+      <p:sp>
+        <p:nvSpPr>
+          <p:cNvPr id="8" name="Shape 6"/>
           <p:cNvSpPr/>
           <p:nvPr/>
         </p:nvSpPr>
@@ -6073,7 +6290,7 @@
       </p:sp>
       <p:sp>
         <p:nvSpPr>
-          <p:cNvPr id="8" name="Text 6"/>
+          <p:cNvPr id="9" name="Text 7"/>
           <p:cNvSpPr/>
           <p:nvPr/>
         </p:nvSpPr>
@@ -6112,14 +6329,14 @@
       </p:sp>
       <p:sp>
         <p:nvSpPr>
-          <p:cNvPr id="9" name="Text 7"/>
+          <p:cNvPr id="10" name="Text 8"/>
           <p:cNvSpPr/>
           <p:nvPr/>
         </p:nvSpPr>
         <p:spPr>
           <a:xfrm>
             <a:off x="640080" y="621792"/>
-            <a:ext cx="10881360" cy="566928"/>
+            <a:ext cx="10881360" cy="713232"/>
           </a:xfrm>
           <a:prstGeom prst="rect">
             <a:avLst/>
@@ -6137,7 +6354,7 @@
               <a:buNone/>
             </a:pPr>
             <a:r>
-              <a:rPr lang="en-US" sz="2700" b="1" dirty="0">
+              <a:rPr lang="en-US" sz="3400" b="1" dirty="0">
                 <a:solidFill>
                   <a:srgbClr val="003A63"/>
                 </a:solidFill>
@@ -6147,20 +6364,20 @@
               </a:rPr>
               <a:t>Reflection Questions</a:t>
             </a:r>
-            <a:endParaRPr lang="en-US" sz="2700" dirty="0"/>
-          </a:p>
-        </p:txBody>
-      </p:sp>
-      <p:sp>
-        <p:nvSpPr>
-          <p:cNvPr id="10" name="Text 8"/>
-          <p:cNvSpPr/>
-          <p:nvPr/>
-        </p:nvSpPr>
-        <p:spPr>
-          <a:xfrm>
-            <a:off x="868680" y="1417320"/>
-            <a:ext cx="6675120" cy="4434840"/>
+            <a:endParaRPr lang="en-US" sz="3400" dirty="0"/>
+          </a:p>
+        </p:txBody>
+      </p:sp>
+      <p:sp>
+        <p:nvSpPr>
+          <p:cNvPr id="11" name="Text 9"/>
+          <p:cNvSpPr/>
+          <p:nvPr/>
+        </p:nvSpPr>
+        <p:spPr>
+          <a:xfrm>
+            <a:off x="868680" y="1508760"/>
+            <a:ext cx="6537960" cy="4160520"/>
           </a:xfrm>
           <a:prstGeom prst="rect">
             <a:avLst/>
@@ -6175,7 +6392,7 @@
           <a:lstStyle/>
           <a:p>
             <a:r>
-              <a:rPr lang="en-US" sz="1700" dirty="0">
+              <a:rPr lang="en-US" sz="2100" dirty="0">
                 <a:solidFill>
                   <a:srgbClr val="17364A"/>
                 </a:solidFill>
@@ -6185,11 +6402,11 @@
               </a:rPr>
               <a:t>What time-series data stream would benefit from automated signal review?</a:t>
             </a:r>
-            <a:endParaRPr lang="en-US" sz="1700" dirty="0"/>
-          </a:p>
-          <a:p>
-            <a:r>
-              <a:rPr lang="en-US" sz="1700" dirty="0">
+            <a:endParaRPr lang="en-US" sz="2100" dirty="0"/>
+          </a:p>
+          <a:p>
+            <a:r>
+              <a:rPr lang="en-US" sz="2100" dirty="0">
                 <a:solidFill>
                   <a:srgbClr val="17364A"/>
                 </a:solidFill>
@@ -6199,11 +6416,11 @@
               </a:rPr>
               <a:t>What baseline is appropriate for the condition, data source, and decision?</a:t>
             </a:r>
-            <a:endParaRPr lang="en-US" sz="1700" dirty="0"/>
-          </a:p>
-          <a:p>
-            <a:r>
-              <a:rPr lang="en-US" sz="1700" dirty="0">
+            <a:endParaRPr lang="en-US" sz="2100" dirty="0"/>
+          </a:p>
+          <a:p>
+            <a:r>
+              <a:rPr lang="en-US" sz="2100" dirty="0">
                 <a:solidFill>
                   <a:srgbClr val="17364A"/>
                 </a:solidFill>
@@ -6213,13 +6430,13 @@
               </a:rPr>
               <a:t>Which reporting artifacts could create false signals?</a:t>
             </a:r>
-            <a:endParaRPr lang="en-US" sz="1700" dirty="0"/>
-          </a:p>
-        </p:txBody>
-      </p:sp>
-      <p:sp>
-        <p:nvSpPr>
-          <p:cNvPr id="11" name="Shape 9"/>
+            <a:endParaRPr lang="en-US" sz="2100" dirty="0"/>
+          </a:p>
+        </p:txBody>
+      </p:sp>
+      <p:sp>
+        <p:nvSpPr>
+          <p:cNvPr id="12" name="Shape 10"/>
           <p:cNvSpPr/>
           <p:nvPr/>
         </p:nvSpPr>
@@ -6246,14 +6463,14 @@
       </p:sp>
       <p:sp>
         <p:nvSpPr>
-          <p:cNvPr id="12" name="Text 10"/>
+          <p:cNvPr id="13" name="Text 11"/>
           <p:cNvSpPr/>
           <p:nvPr/>
         </p:nvSpPr>
         <p:spPr>
           <a:xfrm>
             <a:off x="8074152" y="1563624"/>
-            <a:ext cx="2825496" cy="201168"/>
+            <a:ext cx="2825496" cy="256032"/>
           </a:xfrm>
           <a:prstGeom prst="rect">
             <a:avLst/>
@@ -6269,7 +6486,7 @@
               <a:buNone/>
             </a:pPr>
             <a:r>
-              <a:rPr lang="en-US" sz="950" b="1" dirty="0">
+              <a:rPr lang="en-US" sz="1300" b="1" dirty="0">
                 <a:solidFill>
                   <a:srgbClr val="0068B7"/>
                 </a:solidFill>
@@ -6279,20 +6496,20 @@
               </a:rPr>
               <a:t>Key idea</a:t>
             </a:r>
-            <a:endParaRPr lang="en-US" sz="950" dirty="0"/>
-          </a:p>
-        </p:txBody>
-      </p:sp>
-      <p:sp>
-        <p:nvSpPr>
-          <p:cNvPr id="13" name="Text 11"/>
-          <p:cNvSpPr/>
-          <p:nvPr/>
-        </p:nvSpPr>
-        <p:spPr>
-          <a:xfrm>
-            <a:off x="8074152" y="1856232"/>
-            <a:ext cx="2825496" cy="1261872"/>
+            <a:endParaRPr lang="en-US" sz="1300" dirty="0"/>
+          </a:p>
+        </p:txBody>
+      </p:sp>
+      <p:sp>
+        <p:nvSpPr>
+          <p:cNvPr id="14" name="Text 12"/>
+          <p:cNvSpPr/>
+          <p:nvPr/>
+        </p:nvSpPr>
+        <p:spPr>
+          <a:xfrm>
+            <a:off x="8074152" y="1920240"/>
+            <a:ext cx="2825496" cy="1188720"/>
           </a:xfrm>
           <a:prstGeom prst="rect">
             <a:avLst/>
@@ -6310,7 +6527,7 @@
               <a:buNone/>
             </a:pPr>
             <a:r>
-              <a:rPr lang="en-US" sz="1250" dirty="0">
+              <a:rPr lang="en-US" sz="1550" dirty="0">
                 <a:solidFill>
                   <a:srgbClr val="17364A"/>
                 </a:solidFill>
@@ -6320,13 +6537,13 @@
               </a:rPr>
               <a:t>What time-series data stream would benefit from automated signal review?</a:t>
             </a:r>
-            <a:endParaRPr lang="en-US" sz="1250" dirty="0"/>
-          </a:p>
-        </p:txBody>
-      </p:sp>
-      <p:sp>
-        <p:nvSpPr>
-          <p:cNvPr id="14" name="Shape 12"/>
+            <a:endParaRPr lang="en-US" sz="1550" dirty="0"/>
+          </a:p>
+        </p:txBody>
+      </p:sp>
+      <p:sp>
+        <p:nvSpPr>
+          <p:cNvPr id="15" name="Shape 13"/>
           <p:cNvSpPr/>
           <p:nvPr/>
         </p:nvSpPr>
@@ -6353,14 +6570,14 @@
       </p:sp>
       <p:sp>
         <p:nvSpPr>
-          <p:cNvPr id="15" name="Text 13"/>
+          <p:cNvPr id="16" name="Text 14"/>
           <p:cNvSpPr/>
           <p:nvPr/>
         </p:nvSpPr>
         <p:spPr>
           <a:xfrm>
             <a:off x="8074152" y="3666744"/>
-            <a:ext cx="2825496" cy="201168"/>
+            <a:ext cx="2825496" cy="256032"/>
           </a:xfrm>
           <a:prstGeom prst="rect">
             <a:avLst/>
@@ -6376,7 +6593,7 @@
               <a:buNone/>
             </a:pPr>
             <a:r>
-              <a:rPr lang="en-US" sz="950" b="1" dirty="0">
+              <a:rPr lang="en-US" sz="1300" b="1" dirty="0">
                 <a:solidFill>
                   <a:srgbClr val="0068B7"/>
                 </a:solidFill>
@@ -6386,20 +6603,20 @@
               </a:rPr>
               <a:t>Use this for</a:t>
             </a:r>
-            <a:endParaRPr lang="en-US" sz="950" dirty="0"/>
-          </a:p>
-        </p:txBody>
-      </p:sp>
-      <p:sp>
-        <p:nvSpPr>
-          <p:cNvPr id="16" name="Text 14"/>
-          <p:cNvSpPr/>
-          <p:nvPr/>
-        </p:nvSpPr>
-        <p:spPr>
-          <a:xfrm>
-            <a:off x="8074152" y="3959352"/>
-            <a:ext cx="2825496" cy="1170432"/>
+            <a:endParaRPr lang="en-US" sz="1300" dirty="0"/>
+          </a:p>
+        </p:txBody>
+      </p:sp>
+      <p:sp>
+        <p:nvSpPr>
+          <p:cNvPr id="17" name="Text 15"/>
+          <p:cNvSpPr/>
+          <p:nvPr/>
+        </p:nvSpPr>
+        <p:spPr>
+          <a:xfrm>
+            <a:off x="8074152" y="4023360"/>
+            <a:ext cx="2825496" cy="1097280"/>
           </a:xfrm>
           <a:prstGeom prst="rect">
             <a:avLst/>
@@ -6417,7 +6634,7 @@
               <a:buNone/>
             </a:pPr>
             <a:r>
-              <a:rPr lang="en-US" sz="1250" dirty="0">
+              <a:rPr lang="en-US" sz="1550" dirty="0">
                 <a:solidFill>
                   <a:srgbClr val="17364A"/>
                 </a:solidFill>
@@ -6427,7 +6644,7 @@
               </a:rPr>
               <a:t>Connect the concept to public health decisions, safeguards, documentation, or implementation work.</a:t>
             </a:r>
-            <a:endParaRPr lang="en-US" sz="1250" dirty="0"/>
+            <a:endParaRPr lang="en-US" sz="1550" dirty="0"/>
           </a:p>
         </p:txBody>
       </p:sp>
@@ -6624,7 +6841,7 @@
                 <a:ea typeface="Aptos" pitchFamily="34" charset="-122"/>
                 <a:cs typeface="Aptos" pitchFamily="34" charset="-120"/>
               </a:rPr>
-              <a:t>© Paula Soper</a:t>
+              <a:t>Â© Paula Soper</a:t>
             </a:r>
             <a:endParaRPr lang="en-US" sz="800" dirty="0"/>
           </a:p>
@@ -6638,8 +6855,47 @@
         </p:nvSpPr>
         <p:spPr>
           <a:xfrm>
+            <a:off x="11137392" y="6510528"/>
+            <a:ext cx="411480" cy="201168"/>
+          </a:xfrm>
+          <a:prstGeom prst="rect">
+            <a:avLst/>
+          </a:prstGeom>
+          <a:noFill/>
+          <a:ln/>
+        </p:spPr>
+        <p:txBody>
+          <a:bodyPr wrap="square" lIns="0" tIns="0" rIns="0" bIns="0" rtlCol="0" anchor="ctr"/>
+          <a:lstStyle/>
+          <a:p>
+            <a:pPr algn="r" indent="0" marL="0">
+              <a:buNone/>
+            </a:pPr>
+            <a:r>
+              <a:rPr lang="en-US" sz="900" dirty="0">
+                <a:solidFill>
+                  <a:srgbClr val="5F7181"/>
+                </a:solidFill>
+                <a:latin typeface="Aptos" pitchFamily="34" charset="0"/>
+                <a:ea typeface="Aptos" pitchFamily="34" charset="-122"/>
+                <a:cs typeface="Aptos" pitchFamily="34" charset="-120"/>
+              </a:rPr>
+              <a:t>16</a:t>
+            </a:r>
+            <a:endParaRPr lang="en-US" sz="900" dirty="0"/>
+          </a:p>
+        </p:txBody>
+      </p:sp>
+      <p:sp>
+        <p:nvSpPr>
+          <p:cNvPr id="8" name="Text 6"/>
+          <p:cNvSpPr/>
+          <p:nvPr/>
+        </p:nvSpPr>
+        <p:spPr>
+          <a:xfrm>
             <a:off x="640080" y="658368"/>
-            <a:ext cx="10881360" cy="566928"/>
+            <a:ext cx="10881360" cy="713232"/>
           </a:xfrm>
           <a:prstGeom prst="rect">
             <a:avLst/>
@@ -6657,7 +6913,7 @@
               <a:buNone/>
             </a:pPr>
             <a:r>
-              <a:rPr lang="en-US" sz="2700" b="1" dirty="0">
+              <a:rPr lang="en-US" sz="3400" b="1" dirty="0">
                 <a:solidFill>
                   <a:srgbClr val="003A63"/>
                 </a:solidFill>
@@ -6667,20 +6923,20 @@
               </a:rPr>
               <a:t>Reflection Questions Continued</a:t>
             </a:r>
-            <a:endParaRPr lang="en-US" sz="2700" dirty="0"/>
-          </a:p>
-        </p:txBody>
-      </p:sp>
-      <p:sp>
-        <p:nvSpPr>
-          <p:cNvPr id="8" name="Text 6"/>
-          <p:cNvSpPr/>
-          <p:nvPr/>
-        </p:nvSpPr>
-        <p:spPr>
-          <a:xfrm>
-            <a:off x="868680" y="1417320"/>
-            <a:ext cx="6675120" cy="4434840"/>
+            <a:endParaRPr lang="en-US" sz="3400" dirty="0"/>
+          </a:p>
+        </p:txBody>
+      </p:sp>
+      <p:sp>
+        <p:nvSpPr>
+          <p:cNvPr id="9" name="Text 7"/>
+          <p:cNvSpPr/>
+          <p:nvPr/>
+        </p:nvSpPr>
+        <p:spPr>
+          <a:xfrm>
+            <a:off x="868680" y="1508760"/>
+            <a:ext cx="6537960" cy="4160520"/>
           </a:xfrm>
           <a:prstGeom prst="rect">
             <a:avLst/>
@@ -6695,7 +6951,7 @@
           <a:lstStyle/>
           <a:p>
             <a:r>
-              <a:rPr lang="en-US" sz="1700" dirty="0">
+              <a:rPr lang="en-US" sz="2100" dirty="0">
                 <a:solidFill>
                   <a:srgbClr val="17364A"/>
                 </a:solidFill>
@@ -6705,11 +6961,11 @@
               </a:rPr>
               <a:t>What threshold balances early detection and alert fatigue?</a:t>
             </a:r>
-            <a:endParaRPr lang="en-US" sz="1700" dirty="0"/>
-          </a:p>
-          <a:p>
-            <a:r>
-              <a:rPr lang="en-US" sz="1700" dirty="0">
+            <a:endParaRPr lang="en-US" sz="2100" dirty="0"/>
+          </a:p>
+          <a:p>
+            <a:r>
+              <a:rPr lang="en-US" sz="2100" dirty="0">
                 <a:solidFill>
                   <a:srgbClr val="17364A"/>
                 </a:solidFill>
@@ -6719,13 +6975,13 @@
               </a:rPr>
               <a:t>How will staff document review, decisions, and lessons learned?</a:t>
             </a:r>
-            <a:endParaRPr lang="en-US" sz="1700" dirty="0"/>
-          </a:p>
-        </p:txBody>
-      </p:sp>
-      <p:sp>
-        <p:nvSpPr>
-          <p:cNvPr id="9" name="Shape 7"/>
+            <a:endParaRPr lang="en-US" sz="2100" dirty="0"/>
+          </a:p>
+        </p:txBody>
+      </p:sp>
+      <p:sp>
+        <p:nvSpPr>
+          <p:cNvPr id="10" name="Shape 8"/>
           <p:cNvSpPr/>
           <p:nvPr/>
         </p:nvSpPr>
@@ -6752,14 +7008,14 @@
       </p:sp>
       <p:sp>
         <p:nvSpPr>
-          <p:cNvPr id="10" name="Text 8"/>
+          <p:cNvPr id="11" name="Text 9"/>
           <p:cNvSpPr/>
           <p:nvPr/>
         </p:nvSpPr>
         <p:spPr>
           <a:xfrm>
             <a:off x="8074152" y="1563624"/>
-            <a:ext cx="2825496" cy="201168"/>
+            <a:ext cx="2825496" cy="256032"/>
           </a:xfrm>
           <a:prstGeom prst="rect">
             <a:avLst/>
@@ -6775,7 +7031,7 @@
               <a:buNone/>
             </a:pPr>
             <a:r>
-              <a:rPr lang="en-US" sz="950" b="1" dirty="0">
+              <a:rPr lang="en-US" sz="1300" b="1" dirty="0">
                 <a:solidFill>
                   <a:srgbClr val="0068B7"/>
                 </a:solidFill>
@@ -6785,20 +7041,20 @@
               </a:rPr>
               <a:t>Key idea</a:t>
             </a:r>
-            <a:endParaRPr lang="en-US" sz="950" dirty="0"/>
-          </a:p>
-        </p:txBody>
-      </p:sp>
-      <p:sp>
-        <p:nvSpPr>
-          <p:cNvPr id="11" name="Text 9"/>
-          <p:cNvSpPr/>
-          <p:nvPr/>
-        </p:nvSpPr>
-        <p:spPr>
-          <a:xfrm>
-            <a:off x="8074152" y="1856232"/>
-            <a:ext cx="2825496" cy="1261872"/>
+            <a:endParaRPr lang="en-US" sz="1300" dirty="0"/>
+          </a:p>
+        </p:txBody>
+      </p:sp>
+      <p:sp>
+        <p:nvSpPr>
+          <p:cNvPr id="12" name="Text 10"/>
+          <p:cNvSpPr/>
+          <p:nvPr/>
+        </p:nvSpPr>
+        <p:spPr>
+          <a:xfrm>
+            <a:off x="8074152" y="1920240"/>
+            <a:ext cx="2825496" cy="1188720"/>
           </a:xfrm>
           <a:prstGeom prst="rect">
             <a:avLst/>
@@ -6816,7 +7072,7 @@
               <a:buNone/>
             </a:pPr>
             <a:r>
-              <a:rPr lang="en-US" sz="1250" dirty="0">
+              <a:rPr lang="en-US" sz="1550" dirty="0">
                 <a:solidFill>
                   <a:srgbClr val="17364A"/>
                 </a:solidFill>
@@ -6826,13 +7082,13 @@
               </a:rPr>
               <a:t>What threshold balances early detection and alert fatigue?</a:t>
             </a:r>
-            <a:endParaRPr lang="en-US" sz="1250" dirty="0"/>
-          </a:p>
-        </p:txBody>
-      </p:sp>
-      <p:sp>
-        <p:nvSpPr>
-          <p:cNvPr id="12" name="Shape 10"/>
+            <a:endParaRPr lang="en-US" sz="1550" dirty="0"/>
+          </a:p>
+        </p:txBody>
+      </p:sp>
+      <p:sp>
+        <p:nvSpPr>
+          <p:cNvPr id="13" name="Shape 11"/>
           <p:cNvSpPr/>
           <p:nvPr/>
         </p:nvSpPr>
@@ -6859,14 +7115,14 @@
       </p:sp>
       <p:sp>
         <p:nvSpPr>
-          <p:cNvPr id="13" name="Text 11"/>
+          <p:cNvPr id="14" name="Text 12"/>
           <p:cNvSpPr/>
           <p:nvPr/>
         </p:nvSpPr>
         <p:spPr>
           <a:xfrm>
             <a:off x="8074152" y="3666744"/>
-            <a:ext cx="2825496" cy="201168"/>
+            <a:ext cx="2825496" cy="256032"/>
           </a:xfrm>
           <a:prstGeom prst="rect">
             <a:avLst/>
@@ -6882,7 +7138,7 @@
               <a:buNone/>
             </a:pPr>
             <a:r>
-              <a:rPr lang="en-US" sz="950" b="1" dirty="0">
+              <a:rPr lang="en-US" sz="1300" b="1" dirty="0">
                 <a:solidFill>
                   <a:srgbClr val="0068B7"/>
                 </a:solidFill>
@@ -6892,20 +7148,20 @@
               </a:rPr>
               <a:t>Use this for</a:t>
             </a:r>
-            <a:endParaRPr lang="en-US" sz="950" dirty="0"/>
-          </a:p>
-        </p:txBody>
-      </p:sp>
-      <p:sp>
-        <p:nvSpPr>
-          <p:cNvPr id="14" name="Text 12"/>
-          <p:cNvSpPr/>
-          <p:nvPr/>
-        </p:nvSpPr>
-        <p:spPr>
-          <a:xfrm>
-            <a:off x="8074152" y="3959352"/>
-            <a:ext cx="2825496" cy="1170432"/>
+            <a:endParaRPr lang="en-US" sz="1300" dirty="0"/>
+          </a:p>
+        </p:txBody>
+      </p:sp>
+      <p:sp>
+        <p:nvSpPr>
+          <p:cNvPr id="15" name="Text 13"/>
+          <p:cNvSpPr/>
+          <p:nvPr/>
+        </p:nvSpPr>
+        <p:spPr>
+          <a:xfrm>
+            <a:off x="8074152" y="4023360"/>
+            <a:ext cx="2825496" cy="1097280"/>
           </a:xfrm>
           <a:prstGeom prst="rect">
             <a:avLst/>
@@ -6923,7 +7179,7 @@
               <a:buNone/>
             </a:pPr>
             <a:r>
-              <a:rPr lang="en-US" sz="1250" dirty="0">
+              <a:rPr lang="en-US" sz="1550" dirty="0">
                 <a:solidFill>
                   <a:srgbClr val="17364A"/>
                 </a:solidFill>
@@ -6933,7 +7189,7 @@
               </a:rPr>
               <a:t>Connect the concept to public health decisions, safeguards, documentation, or implementation work.</a:t>
             </a:r>
-            <a:endParaRPr lang="en-US" sz="1250" dirty="0"/>
+            <a:endParaRPr lang="en-US" sz="1550" dirty="0"/>
           </a:p>
         </p:txBody>
       </p:sp>
@@ -7130,7 +7386,7 @@
                 <a:ea typeface="Aptos" pitchFamily="34" charset="-122"/>
                 <a:cs typeface="Aptos" pitchFamily="34" charset="-120"/>
               </a:rPr>
-              <a:t>© Paula Soper</a:t>
+              <a:t>Â© Paula Soper</a:t>
             </a:r>
             <a:endParaRPr lang="en-US" sz="800" dirty="0"/>
           </a:p>
@@ -7138,7 +7394,46 @@
       </p:sp>
       <p:sp>
         <p:nvSpPr>
-          <p:cNvPr id="7" name="Shape 5"/>
+          <p:cNvPr id="7" name="Text 5"/>
+          <p:cNvSpPr/>
+          <p:nvPr/>
+        </p:nvSpPr>
+        <p:spPr>
+          <a:xfrm>
+            <a:off x="11137392" y="6510528"/>
+            <a:ext cx="411480" cy="201168"/>
+          </a:xfrm>
+          <a:prstGeom prst="rect">
+            <a:avLst/>
+          </a:prstGeom>
+          <a:noFill/>
+          <a:ln/>
+        </p:spPr>
+        <p:txBody>
+          <a:bodyPr wrap="square" lIns="0" tIns="0" rIns="0" bIns="0" rtlCol="0" anchor="ctr"/>
+          <a:lstStyle/>
+          <a:p>
+            <a:pPr algn="r" indent="0" marL="0">
+              <a:buNone/>
+            </a:pPr>
+            <a:r>
+              <a:rPr lang="en-US" sz="900" dirty="0">
+                <a:solidFill>
+                  <a:srgbClr val="5F7181"/>
+                </a:solidFill>
+                <a:latin typeface="Aptos" pitchFamily="34" charset="0"/>
+                <a:ea typeface="Aptos" pitchFamily="34" charset="-122"/>
+                <a:cs typeface="Aptos" pitchFamily="34" charset="-120"/>
+              </a:rPr>
+              <a:t>17</a:t>
+            </a:r>
+            <a:endParaRPr lang="en-US" sz="900" dirty="0"/>
+          </a:p>
+        </p:txBody>
+      </p:sp>
+      <p:sp>
+        <p:nvSpPr>
+          <p:cNvPr id="8" name="Shape 6"/>
           <p:cNvSpPr/>
           <p:nvPr/>
         </p:nvSpPr>
@@ -7163,7 +7458,7 @@
       </p:sp>
       <p:sp>
         <p:nvSpPr>
-          <p:cNvPr id="8" name="Text 6"/>
+          <p:cNvPr id="9" name="Text 7"/>
           <p:cNvSpPr/>
           <p:nvPr/>
         </p:nvSpPr>
@@ -7202,14 +7497,14 @@
       </p:sp>
       <p:sp>
         <p:nvSpPr>
-          <p:cNvPr id="9" name="Text 7"/>
+          <p:cNvPr id="10" name="Text 8"/>
           <p:cNvSpPr/>
           <p:nvPr/>
         </p:nvSpPr>
         <p:spPr>
           <a:xfrm>
             <a:off x="640080" y="621792"/>
-            <a:ext cx="10881360" cy="566928"/>
+            <a:ext cx="10881360" cy="713232"/>
           </a:xfrm>
           <a:prstGeom prst="rect">
             <a:avLst/>
@@ -7227,7 +7522,7 @@
               <a:buNone/>
             </a:pPr>
             <a:r>
-              <a:rPr lang="en-US" sz="2700" b="1" dirty="0">
+              <a:rPr lang="en-US" sz="3400" b="1" dirty="0">
                 <a:solidFill>
                   <a:srgbClr val="003A63"/>
                 </a:solidFill>
@@ -7237,20 +7532,20 @@
               </a:rPr>
               <a:t>Practical Exercise</a:t>
             </a:r>
-            <a:endParaRPr lang="en-US" sz="2700" dirty="0"/>
-          </a:p>
-        </p:txBody>
-      </p:sp>
-      <p:sp>
-        <p:nvSpPr>
-          <p:cNvPr id="10" name="Text 8"/>
-          <p:cNvSpPr/>
-          <p:nvPr/>
-        </p:nvSpPr>
-        <p:spPr>
-          <a:xfrm>
-            <a:off x="868680" y="1417320"/>
-            <a:ext cx="6675120" cy="4434840"/>
+            <a:endParaRPr lang="en-US" sz="3400" dirty="0"/>
+          </a:p>
+        </p:txBody>
+      </p:sp>
+      <p:sp>
+        <p:nvSpPr>
+          <p:cNvPr id="11" name="Text 9"/>
+          <p:cNvSpPr/>
+          <p:nvPr/>
+        </p:nvSpPr>
+        <p:spPr>
+          <a:xfrm>
+            <a:off x="868680" y="1508760"/>
+            <a:ext cx="6537960" cy="4160520"/>
           </a:xfrm>
           <a:prstGeom prst="rect">
             <a:avLst/>
@@ -7265,7 +7560,7 @@
           <a:lstStyle/>
           <a:p>
             <a:r>
-              <a:rPr lang="en-US" sz="1700" dirty="0">
+              <a:rPr lang="en-US" sz="2100" dirty="0">
                 <a:solidFill>
                   <a:srgbClr val="17364A"/>
                 </a:solidFill>
@@ -7275,11 +7570,11 @@
               </a:rPr>
               <a:t>Create an anomaly detection review plan for one public health data stream.</a:t>
             </a:r>
-            <a:endParaRPr lang="en-US" sz="1700" dirty="0"/>
-          </a:p>
-          <a:p>
-            <a:r>
-              <a:rPr lang="en-US" sz="1700" dirty="0">
+            <a:endParaRPr lang="en-US" sz="2100" dirty="0"/>
+          </a:p>
+          <a:p>
+            <a:r>
+              <a:rPr lang="en-US" sz="2100" dirty="0">
                 <a:solidFill>
                   <a:srgbClr val="17364A"/>
                 </a:solidFill>
@@ -7287,13 +7582,13 @@
                 <a:ea typeface="Aptos" pitchFamily="34" charset="-122"/>
                 <a:cs typeface="Aptos" pitchFamily="34" charset="-120"/>
               </a:rPr>
-              <a:t>Include the monitored indicator, data source, update frequency, baseline approach, known reporting patterns, threshold.</a:t>
-            </a:r>
-            <a:endParaRPr lang="en-US" sz="1700" dirty="0"/>
-          </a:p>
-          <a:p>
-            <a:r>
-              <a:rPr lang="en-US" sz="1700" dirty="0">
+              <a:t>Include the monitored indicator, data source, update frequency, baseline approach, known reporting.</a:t>
+            </a:r>
+            <a:endParaRPr lang="en-US" sz="2100" dirty="0"/>
+          </a:p>
+          <a:p>
+            <a:r>
+              <a:rPr lang="en-US" sz="2100" dirty="0">
                 <a:solidFill>
                   <a:srgbClr val="17364A"/>
                 </a:solidFill>
@@ -7301,15 +7596,15 @@
                 <a:ea typeface="Aptos" pitchFamily="34" charset="-122"/>
                 <a:cs typeface="Aptos" pitchFamily="34" charset="-120"/>
               </a:rPr>
-              <a:t>The plan should identify how staff will distinguish statistical anomalies from data quality issues and public health events.</a:t>
-            </a:r>
-            <a:endParaRPr lang="en-US" sz="1700" dirty="0"/>
-          </a:p>
-        </p:txBody>
-      </p:sp>
-      <p:sp>
-        <p:nvSpPr>
-          <p:cNvPr id="11" name="Shape 9"/>
+              <a:t>The plan should identify how staff will distinguish statistical anomalies from data quality issues and.</a:t>
+            </a:r>
+            <a:endParaRPr lang="en-US" sz="2100" dirty="0"/>
+          </a:p>
+        </p:txBody>
+      </p:sp>
+      <p:sp>
+        <p:nvSpPr>
+          <p:cNvPr id="12" name="Shape 10"/>
           <p:cNvSpPr/>
           <p:nvPr/>
         </p:nvSpPr>
@@ -7336,14 +7631,14 @@
       </p:sp>
       <p:sp>
         <p:nvSpPr>
-          <p:cNvPr id="12" name="Text 10"/>
+          <p:cNvPr id="13" name="Text 11"/>
           <p:cNvSpPr/>
           <p:nvPr/>
         </p:nvSpPr>
         <p:spPr>
           <a:xfrm>
             <a:off x="8074152" y="1563624"/>
-            <a:ext cx="2825496" cy="201168"/>
+            <a:ext cx="2825496" cy="256032"/>
           </a:xfrm>
           <a:prstGeom prst="rect">
             <a:avLst/>
@@ -7359,7 +7654,7 @@
               <a:buNone/>
             </a:pPr>
             <a:r>
-              <a:rPr lang="en-US" sz="950" b="1" dirty="0">
+              <a:rPr lang="en-US" sz="1300" b="1" dirty="0">
                 <a:solidFill>
                   <a:srgbClr val="0068B7"/>
                 </a:solidFill>
@@ -7369,20 +7664,20 @@
               </a:rPr>
               <a:t>Key idea</a:t>
             </a:r>
-            <a:endParaRPr lang="en-US" sz="950" dirty="0"/>
-          </a:p>
-        </p:txBody>
-      </p:sp>
-      <p:sp>
-        <p:nvSpPr>
-          <p:cNvPr id="13" name="Text 11"/>
-          <p:cNvSpPr/>
-          <p:nvPr/>
-        </p:nvSpPr>
-        <p:spPr>
-          <a:xfrm>
-            <a:off x="8074152" y="1856232"/>
-            <a:ext cx="2825496" cy="1261872"/>
+            <a:endParaRPr lang="en-US" sz="1300" dirty="0"/>
+          </a:p>
+        </p:txBody>
+      </p:sp>
+      <p:sp>
+        <p:nvSpPr>
+          <p:cNvPr id="14" name="Text 12"/>
+          <p:cNvSpPr/>
+          <p:nvPr/>
+        </p:nvSpPr>
+        <p:spPr>
+          <a:xfrm>
+            <a:off x="8074152" y="1920240"/>
+            <a:ext cx="2825496" cy="1188720"/>
           </a:xfrm>
           <a:prstGeom prst="rect">
             <a:avLst/>
@@ -7400,7 +7695,7 @@
               <a:buNone/>
             </a:pPr>
             <a:r>
-              <a:rPr lang="en-US" sz="1250" dirty="0">
+              <a:rPr lang="en-US" sz="1550" dirty="0">
                 <a:solidFill>
                   <a:srgbClr val="17364A"/>
                 </a:solidFill>
@@ -7410,13 +7705,13 @@
               </a:rPr>
               <a:t>Create an anomaly detection review plan for one public health data stream.</a:t>
             </a:r>
-            <a:endParaRPr lang="en-US" sz="1250" dirty="0"/>
-          </a:p>
-        </p:txBody>
-      </p:sp>
-      <p:sp>
-        <p:nvSpPr>
-          <p:cNvPr id="14" name="Shape 12"/>
+            <a:endParaRPr lang="en-US" sz="1550" dirty="0"/>
+          </a:p>
+        </p:txBody>
+      </p:sp>
+      <p:sp>
+        <p:nvSpPr>
+          <p:cNvPr id="15" name="Shape 13"/>
           <p:cNvSpPr/>
           <p:nvPr/>
         </p:nvSpPr>
@@ -7443,14 +7738,14 @@
       </p:sp>
       <p:sp>
         <p:nvSpPr>
-          <p:cNvPr id="15" name="Text 13"/>
+          <p:cNvPr id="16" name="Text 14"/>
           <p:cNvSpPr/>
           <p:nvPr/>
         </p:nvSpPr>
         <p:spPr>
           <a:xfrm>
             <a:off x="8074152" y="3666744"/>
-            <a:ext cx="2825496" cy="201168"/>
+            <a:ext cx="2825496" cy="256032"/>
           </a:xfrm>
           <a:prstGeom prst="rect">
             <a:avLst/>
@@ -7466,7 +7761,7 @@
               <a:buNone/>
             </a:pPr>
             <a:r>
-              <a:rPr lang="en-US" sz="950" b="1" dirty="0">
+              <a:rPr lang="en-US" sz="1300" b="1" dirty="0">
                 <a:solidFill>
                   <a:srgbClr val="0068B7"/>
                 </a:solidFill>
@@ -7476,20 +7771,20 @@
               </a:rPr>
               <a:t>Use this for</a:t>
             </a:r>
-            <a:endParaRPr lang="en-US" sz="950" dirty="0"/>
-          </a:p>
-        </p:txBody>
-      </p:sp>
-      <p:sp>
-        <p:nvSpPr>
-          <p:cNvPr id="16" name="Text 14"/>
-          <p:cNvSpPr/>
-          <p:nvPr/>
-        </p:nvSpPr>
-        <p:spPr>
-          <a:xfrm>
-            <a:off x="8074152" y="3959352"/>
-            <a:ext cx="2825496" cy="1170432"/>
+            <a:endParaRPr lang="en-US" sz="1300" dirty="0"/>
+          </a:p>
+        </p:txBody>
+      </p:sp>
+      <p:sp>
+        <p:nvSpPr>
+          <p:cNvPr id="17" name="Text 15"/>
+          <p:cNvSpPr/>
+          <p:nvPr/>
+        </p:nvSpPr>
+        <p:spPr>
+          <a:xfrm>
+            <a:off x="8074152" y="4023360"/>
+            <a:ext cx="2825496" cy="1097280"/>
           </a:xfrm>
           <a:prstGeom prst="rect">
             <a:avLst/>
@@ -7507,7 +7802,7 @@
               <a:buNone/>
             </a:pPr>
             <a:r>
-              <a:rPr lang="en-US" sz="1250" dirty="0">
+              <a:rPr lang="en-US" sz="1550" dirty="0">
                 <a:solidFill>
                   <a:srgbClr val="17364A"/>
                 </a:solidFill>
@@ -7517,7 +7812,7 @@
               </a:rPr>
               <a:t>Connect the concept to public health decisions, safeguards, documentation, or implementation work.</a:t>
             </a:r>
-            <a:endParaRPr lang="en-US" sz="1250" dirty="0"/>
+            <a:endParaRPr lang="en-US" sz="1550" dirty="0"/>
           </a:p>
         </p:txBody>
       </p:sp>
@@ -7714,7 +8009,7 @@
                 <a:ea typeface="Aptos" pitchFamily="34" charset="-122"/>
                 <a:cs typeface="Aptos" pitchFamily="34" charset="-120"/>
               </a:rPr>
-              <a:t>© Paula Soper</a:t>
+              <a:t>Â© Paula Soper</a:t>
             </a:r>
             <a:endParaRPr lang="en-US" sz="800" dirty="0"/>
           </a:p>
@@ -7722,7 +8017,46 @@
       </p:sp>
       <p:sp>
         <p:nvSpPr>
-          <p:cNvPr id="7" name="Shape 5"/>
+          <p:cNvPr id="7" name="Text 5"/>
+          <p:cNvSpPr/>
+          <p:nvPr/>
+        </p:nvSpPr>
+        <p:spPr>
+          <a:xfrm>
+            <a:off x="11137392" y="6510528"/>
+            <a:ext cx="411480" cy="201168"/>
+          </a:xfrm>
+          <a:prstGeom prst="rect">
+            <a:avLst/>
+          </a:prstGeom>
+          <a:noFill/>
+          <a:ln/>
+        </p:spPr>
+        <p:txBody>
+          <a:bodyPr wrap="square" lIns="0" tIns="0" rIns="0" bIns="0" rtlCol="0" anchor="ctr"/>
+          <a:lstStyle/>
+          <a:p>
+            <a:pPr algn="r" indent="0" marL="0">
+              <a:buNone/>
+            </a:pPr>
+            <a:r>
+              <a:rPr lang="en-US" sz="900" dirty="0">
+                <a:solidFill>
+                  <a:srgbClr val="5F7181"/>
+                </a:solidFill>
+                <a:latin typeface="Aptos" pitchFamily="34" charset="0"/>
+                <a:ea typeface="Aptos" pitchFamily="34" charset="-122"/>
+                <a:cs typeface="Aptos" pitchFamily="34" charset="-120"/>
+              </a:rPr>
+              <a:t>18</a:t>
+            </a:r>
+            <a:endParaRPr lang="en-US" sz="900" dirty="0"/>
+          </a:p>
+        </p:txBody>
+      </p:sp>
+      <p:sp>
+        <p:nvSpPr>
+          <p:cNvPr id="8" name="Shape 6"/>
           <p:cNvSpPr/>
           <p:nvPr/>
         </p:nvSpPr>
@@ -7747,7 +8081,7 @@
       </p:sp>
       <p:sp>
         <p:nvSpPr>
-          <p:cNvPr id="8" name="Text 6"/>
+          <p:cNvPr id="9" name="Text 7"/>
           <p:cNvSpPr/>
           <p:nvPr/>
         </p:nvSpPr>
@@ -7786,14 +8120,14 @@
       </p:sp>
       <p:sp>
         <p:nvSpPr>
-          <p:cNvPr id="9" name="Text 7"/>
+          <p:cNvPr id="10" name="Text 8"/>
           <p:cNvSpPr/>
           <p:nvPr/>
         </p:nvSpPr>
         <p:spPr>
           <a:xfrm>
             <a:off x="640080" y="621792"/>
-            <a:ext cx="10881360" cy="566928"/>
+            <a:ext cx="10881360" cy="713232"/>
           </a:xfrm>
           <a:prstGeom prst="rect">
             <a:avLst/>
@@ -7811,7 +8145,7 @@
               <a:buNone/>
             </a:pPr>
             <a:r>
-              <a:rPr lang="en-US" sz="2700" b="1" dirty="0">
+              <a:rPr lang="en-US" sz="3400" b="1" dirty="0">
                 <a:solidFill>
                   <a:srgbClr val="003A63"/>
                 </a:solidFill>
@@ -7821,20 +8155,20 @@
               </a:rPr>
               <a:t>Expected Artifact or Evidence</a:t>
             </a:r>
-            <a:endParaRPr lang="en-US" sz="2700" dirty="0"/>
-          </a:p>
-        </p:txBody>
-      </p:sp>
-      <p:sp>
-        <p:nvSpPr>
-          <p:cNvPr id="10" name="Text 8"/>
-          <p:cNvSpPr/>
-          <p:nvPr/>
-        </p:nvSpPr>
-        <p:spPr>
-          <a:xfrm>
-            <a:off x="868680" y="1417320"/>
-            <a:ext cx="6675120" cy="4434840"/>
+            <a:endParaRPr lang="en-US" sz="3400" dirty="0"/>
+          </a:p>
+        </p:txBody>
+      </p:sp>
+      <p:sp>
+        <p:nvSpPr>
+          <p:cNvPr id="11" name="Text 9"/>
+          <p:cNvSpPr/>
+          <p:nvPr/>
+        </p:nvSpPr>
+        <p:spPr>
+          <a:xfrm>
+            <a:off x="868680" y="1508760"/>
+            <a:ext cx="6537960" cy="4160520"/>
           </a:xfrm>
           <a:prstGeom prst="rect">
             <a:avLst/>
@@ -7849,7 +8183,7 @@
           <a:lstStyle/>
           <a:p>
             <a:r>
-              <a:rPr lang="en-US" sz="1700" dirty="0">
+              <a:rPr lang="en-US" sz="2100" dirty="0">
                 <a:solidFill>
                   <a:srgbClr val="17364A"/>
                 </a:solidFill>
@@ -7859,11 +8193,11 @@
               </a:rPr>
               <a:t>Anomaly detection review plan</a:t>
             </a:r>
-            <a:endParaRPr lang="en-US" sz="1700" dirty="0"/>
-          </a:p>
-          <a:p>
-            <a:r>
-              <a:rPr lang="en-US" sz="1700" dirty="0">
+            <a:endParaRPr lang="en-US" sz="2100" dirty="0"/>
+          </a:p>
+          <a:p>
+            <a:r>
+              <a:rPr lang="en-US" sz="2100" dirty="0">
                 <a:solidFill>
                   <a:srgbClr val="17364A"/>
                 </a:solidFill>
@@ -7873,11 +8207,11 @@
               </a:rPr>
               <a:t>Baseline and threshold rationale</a:t>
             </a:r>
-            <a:endParaRPr lang="en-US" sz="1700" dirty="0"/>
-          </a:p>
-          <a:p>
-            <a:r>
-              <a:rPr lang="en-US" sz="1700" dirty="0">
+            <a:endParaRPr lang="en-US" sz="2100" dirty="0"/>
+          </a:p>
+          <a:p>
+            <a:r>
+              <a:rPr lang="en-US" sz="2100" dirty="0">
                 <a:solidFill>
                   <a:srgbClr val="17364A"/>
                 </a:solidFill>
@@ -7887,13 +8221,13 @@
               </a:rPr>
               <a:t>Alert review protocol</a:t>
             </a:r>
-            <a:endParaRPr lang="en-US" sz="1700" dirty="0"/>
-          </a:p>
-        </p:txBody>
-      </p:sp>
-      <p:sp>
-        <p:nvSpPr>
-          <p:cNvPr id="11" name="Shape 9"/>
+            <a:endParaRPr lang="en-US" sz="2100" dirty="0"/>
+          </a:p>
+        </p:txBody>
+      </p:sp>
+      <p:sp>
+        <p:nvSpPr>
+          <p:cNvPr id="12" name="Shape 10"/>
           <p:cNvSpPr/>
           <p:nvPr/>
         </p:nvSpPr>
@@ -7920,14 +8254,14 @@
       </p:sp>
       <p:sp>
         <p:nvSpPr>
-          <p:cNvPr id="12" name="Text 10"/>
+          <p:cNvPr id="13" name="Text 11"/>
           <p:cNvSpPr/>
           <p:nvPr/>
         </p:nvSpPr>
         <p:spPr>
           <a:xfrm>
             <a:off x="8074152" y="1563624"/>
-            <a:ext cx="2825496" cy="201168"/>
+            <a:ext cx="2825496" cy="256032"/>
           </a:xfrm>
           <a:prstGeom prst="rect">
             <a:avLst/>
@@ -7943,7 +8277,7 @@
               <a:buNone/>
             </a:pPr>
             <a:r>
-              <a:rPr lang="en-US" sz="950" b="1" dirty="0">
+              <a:rPr lang="en-US" sz="1300" b="1" dirty="0">
                 <a:solidFill>
                   <a:srgbClr val="0068B7"/>
                 </a:solidFill>
@@ -7953,20 +8287,20 @@
               </a:rPr>
               <a:t>Key idea</a:t>
             </a:r>
-            <a:endParaRPr lang="en-US" sz="950" dirty="0"/>
-          </a:p>
-        </p:txBody>
-      </p:sp>
-      <p:sp>
-        <p:nvSpPr>
-          <p:cNvPr id="13" name="Text 11"/>
-          <p:cNvSpPr/>
-          <p:nvPr/>
-        </p:nvSpPr>
-        <p:spPr>
-          <a:xfrm>
-            <a:off x="8074152" y="1856232"/>
-            <a:ext cx="2825496" cy="1261872"/>
+            <a:endParaRPr lang="en-US" sz="1300" dirty="0"/>
+          </a:p>
+        </p:txBody>
+      </p:sp>
+      <p:sp>
+        <p:nvSpPr>
+          <p:cNvPr id="14" name="Text 12"/>
+          <p:cNvSpPr/>
+          <p:nvPr/>
+        </p:nvSpPr>
+        <p:spPr>
+          <a:xfrm>
+            <a:off x="8074152" y="1920240"/>
+            <a:ext cx="2825496" cy="1188720"/>
           </a:xfrm>
           <a:prstGeom prst="rect">
             <a:avLst/>
@@ -7984,7 +8318,7 @@
               <a:buNone/>
             </a:pPr>
             <a:r>
-              <a:rPr lang="en-US" sz="1250" dirty="0">
+              <a:rPr lang="en-US" sz="1550" dirty="0">
                 <a:solidFill>
                   <a:srgbClr val="17364A"/>
                 </a:solidFill>
@@ -7994,13 +8328,13 @@
               </a:rPr>
               <a:t>Anomaly detection review plan</a:t>
             </a:r>
-            <a:endParaRPr lang="en-US" sz="1250" dirty="0"/>
-          </a:p>
-        </p:txBody>
-      </p:sp>
-      <p:sp>
-        <p:nvSpPr>
-          <p:cNvPr id="14" name="Shape 12"/>
+            <a:endParaRPr lang="en-US" sz="1550" dirty="0"/>
+          </a:p>
+        </p:txBody>
+      </p:sp>
+      <p:sp>
+        <p:nvSpPr>
+          <p:cNvPr id="15" name="Shape 13"/>
           <p:cNvSpPr/>
           <p:nvPr/>
         </p:nvSpPr>
@@ -8027,14 +8361,14 @@
       </p:sp>
       <p:sp>
         <p:nvSpPr>
-          <p:cNvPr id="15" name="Text 13"/>
+          <p:cNvPr id="16" name="Text 14"/>
           <p:cNvSpPr/>
           <p:nvPr/>
         </p:nvSpPr>
         <p:spPr>
           <a:xfrm>
             <a:off x="8074152" y="3666744"/>
-            <a:ext cx="2825496" cy="201168"/>
+            <a:ext cx="2825496" cy="256032"/>
           </a:xfrm>
           <a:prstGeom prst="rect">
             <a:avLst/>
@@ -8050,7 +8384,7 @@
               <a:buNone/>
             </a:pPr>
             <a:r>
-              <a:rPr lang="en-US" sz="950" b="1" dirty="0">
+              <a:rPr lang="en-US" sz="1300" b="1" dirty="0">
                 <a:solidFill>
                   <a:srgbClr val="0068B7"/>
                 </a:solidFill>
@@ -8060,20 +8394,20 @@
               </a:rPr>
               <a:t>Use this for</a:t>
             </a:r>
-            <a:endParaRPr lang="en-US" sz="950" dirty="0"/>
-          </a:p>
-        </p:txBody>
-      </p:sp>
-      <p:sp>
-        <p:nvSpPr>
-          <p:cNvPr id="16" name="Text 14"/>
-          <p:cNvSpPr/>
-          <p:nvPr/>
-        </p:nvSpPr>
-        <p:spPr>
-          <a:xfrm>
-            <a:off x="8074152" y="3959352"/>
-            <a:ext cx="2825496" cy="1170432"/>
+            <a:endParaRPr lang="en-US" sz="1300" dirty="0"/>
+          </a:p>
+        </p:txBody>
+      </p:sp>
+      <p:sp>
+        <p:nvSpPr>
+          <p:cNvPr id="17" name="Text 15"/>
+          <p:cNvSpPr/>
+          <p:nvPr/>
+        </p:nvSpPr>
+        <p:spPr>
+          <a:xfrm>
+            <a:off x="8074152" y="4023360"/>
+            <a:ext cx="2825496" cy="1097280"/>
           </a:xfrm>
           <a:prstGeom prst="rect">
             <a:avLst/>
@@ -8091,7 +8425,7 @@
               <a:buNone/>
             </a:pPr>
             <a:r>
-              <a:rPr lang="en-US" sz="1250" dirty="0">
+              <a:rPr lang="en-US" sz="1550" dirty="0">
                 <a:solidFill>
                   <a:srgbClr val="17364A"/>
                 </a:solidFill>
@@ -8101,7 +8435,7 @@
               </a:rPr>
               <a:t>Connect the concept to public health decisions, safeguards, documentation, or implementation work.</a:t>
             </a:r>
-            <a:endParaRPr lang="en-US" sz="1250" dirty="0"/>
+            <a:endParaRPr lang="en-US" sz="1550" dirty="0"/>
           </a:p>
         </p:txBody>
       </p:sp>
@@ -8298,7 +8632,7 @@
                 <a:ea typeface="Aptos" pitchFamily="34" charset="-122"/>
                 <a:cs typeface="Aptos" pitchFamily="34" charset="-120"/>
               </a:rPr>
-              <a:t>© Paula Soper</a:t>
+              <a:t>Â© Paula Soper</a:t>
             </a:r>
             <a:endParaRPr lang="en-US" sz="800" dirty="0"/>
           </a:p>
@@ -8312,8 +8646,47 @@
         </p:nvSpPr>
         <p:spPr>
           <a:xfrm>
+            <a:off x="11137392" y="6510528"/>
+            <a:ext cx="411480" cy="201168"/>
+          </a:xfrm>
+          <a:prstGeom prst="rect">
+            <a:avLst/>
+          </a:prstGeom>
+          <a:noFill/>
+          <a:ln/>
+        </p:spPr>
+        <p:txBody>
+          <a:bodyPr wrap="square" lIns="0" tIns="0" rIns="0" bIns="0" rtlCol="0" anchor="ctr"/>
+          <a:lstStyle/>
+          <a:p>
+            <a:pPr algn="r" indent="0" marL="0">
+              <a:buNone/>
+            </a:pPr>
+            <a:r>
+              <a:rPr lang="en-US" sz="900" dirty="0">
+                <a:solidFill>
+                  <a:srgbClr val="5F7181"/>
+                </a:solidFill>
+                <a:latin typeface="Aptos" pitchFamily="34" charset="0"/>
+                <a:ea typeface="Aptos" pitchFamily="34" charset="-122"/>
+                <a:cs typeface="Aptos" pitchFamily="34" charset="-120"/>
+              </a:rPr>
+              <a:t>19</a:t>
+            </a:r>
+            <a:endParaRPr lang="en-US" sz="900" dirty="0"/>
+          </a:p>
+        </p:txBody>
+      </p:sp>
+      <p:sp>
+        <p:nvSpPr>
+          <p:cNvPr id="8" name="Text 6"/>
+          <p:cNvSpPr/>
+          <p:nvPr/>
+        </p:nvSpPr>
+        <p:spPr>
+          <a:xfrm>
             <a:off x="640080" y="658368"/>
-            <a:ext cx="10881360" cy="566928"/>
+            <a:ext cx="10881360" cy="713232"/>
           </a:xfrm>
           <a:prstGeom prst="rect">
             <a:avLst/>
@@ -8331,7 +8704,7 @@
               <a:buNone/>
             </a:pPr>
             <a:r>
-              <a:rPr lang="en-US" sz="2700" b="1" dirty="0">
+              <a:rPr lang="en-US" sz="3400" b="1" dirty="0">
                 <a:solidFill>
                   <a:srgbClr val="003A63"/>
                 </a:solidFill>
@@ -8341,20 +8714,20 @@
               </a:rPr>
               <a:t>Expected Artifact or Evidence Continued</a:t>
             </a:r>
-            <a:endParaRPr lang="en-US" sz="2700" dirty="0"/>
-          </a:p>
-        </p:txBody>
-      </p:sp>
-      <p:sp>
-        <p:nvSpPr>
-          <p:cNvPr id="8" name="Text 6"/>
-          <p:cNvSpPr/>
-          <p:nvPr/>
-        </p:nvSpPr>
-        <p:spPr>
-          <a:xfrm>
-            <a:off x="868680" y="1417320"/>
-            <a:ext cx="6675120" cy="4434840"/>
+            <a:endParaRPr lang="en-US" sz="3400" dirty="0"/>
+          </a:p>
+        </p:txBody>
+      </p:sp>
+      <p:sp>
+        <p:nvSpPr>
+          <p:cNvPr id="9" name="Text 7"/>
+          <p:cNvSpPr/>
+          <p:nvPr/>
+        </p:nvSpPr>
+        <p:spPr>
+          <a:xfrm>
+            <a:off x="868680" y="1508760"/>
+            <a:ext cx="6537960" cy="4160520"/>
           </a:xfrm>
           <a:prstGeom prst="rect">
             <a:avLst/>
@@ -8369,7 +8742,7 @@
           <a:lstStyle/>
           <a:p>
             <a:r>
-              <a:rPr lang="en-US" sz="1700" dirty="0">
+              <a:rPr lang="en-US" sz="2100" dirty="0">
                 <a:solidFill>
                   <a:srgbClr val="17364A"/>
                 </a:solidFill>
@@ -8379,13 +8752,13 @@
               </a:rPr>
               <a:t>Signal documentation template</a:t>
             </a:r>
-            <a:endParaRPr lang="en-US" sz="1700" dirty="0"/>
-          </a:p>
-        </p:txBody>
-      </p:sp>
-      <p:sp>
-        <p:nvSpPr>
-          <p:cNvPr id="9" name="Shape 7"/>
+            <a:endParaRPr lang="en-US" sz="2100" dirty="0"/>
+          </a:p>
+        </p:txBody>
+      </p:sp>
+      <p:sp>
+        <p:nvSpPr>
+          <p:cNvPr id="10" name="Shape 8"/>
           <p:cNvSpPr/>
           <p:nvPr/>
         </p:nvSpPr>
@@ -8412,14 +8785,14 @@
       </p:sp>
       <p:sp>
         <p:nvSpPr>
-          <p:cNvPr id="10" name="Text 8"/>
+          <p:cNvPr id="11" name="Text 9"/>
           <p:cNvSpPr/>
           <p:nvPr/>
         </p:nvSpPr>
         <p:spPr>
           <a:xfrm>
             <a:off x="8074152" y="1563624"/>
-            <a:ext cx="2825496" cy="201168"/>
+            <a:ext cx="2825496" cy="256032"/>
           </a:xfrm>
           <a:prstGeom prst="rect">
             <a:avLst/>
@@ -8435,7 +8808,7 @@
               <a:buNone/>
             </a:pPr>
             <a:r>
-              <a:rPr lang="en-US" sz="950" b="1" dirty="0">
+              <a:rPr lang="en-US" sz="1300" b="1" dirty="0">
                 <a:solidFill>
                   <a:srgbClr val="0068B7"/>
                 </a:solidFill>
@@ -8445,20 +8818,20 @@
               </a:rPr>
               <a:t>Key idea</a:t>
             </a:r>
-            <a:endParaRPr lang="en-US" sz="950" dirty="0"/>
-          </a:p>
-        </p:txBody>
-      </p:sp>
-      <p:sp>
-        <p:nvSpPr>
-          <p:cNvPr id="11" name="Text 9"/>
-          <p:cNvSpPr/>
-          <p:nvPr/>
-        </p:nvSpPr>
-        <p:spPr>
-          <a:xfrm>
-            <a:off x="8074152" y="1856232"/>
-            <a:ext cx="2825496" cy="1261872"/>
+            <a:endParaRPr lang="en-US" sz="1300" dirty="0"/>
+          </a:p>
+        </p:txBody>
+      </p:sp>
+      <p:sp>
+        <p:nvSpPr>
+          <p:cNvPr id="12" name="Text 10"/>
+          <p:cNvSpPr/>
+          <p:nvPr/>
+        </p:nvSpPr>
+        <p:spPr>
+          <a:xfrm>
+            <a:off x="8074152" y="1920240"/>
+            <a:ext cx="2825496" cy="1188720"/>
           </a:xfrm>
           <a:prstGeom prst="rect">
             <a:avLst/>
@@ -8476,7 +8849,7 @@
               <a:buNone/>
             </a:pPr>
             <a:r>
-              <a:rPr lang="en-US" sz="1250" dirty="0">
+              <a:rPr lang="en-US" sz="1550" dirty="0">
                 <a:solidFill>
                   <a:srgbClr val="17364A"/>
                 </a:solidFill>
@@ -8486,13 +8859,13 @@
               </a:rPr>
               <a:t>Signal documentation template</a:t>
             </a:r>
-            <a:endParaRPr lang="en-US" sz="1250" dirty="0"/>
-          </a:p>
-        </p:txBody>
-      </p:sp>
-      <p:sp>
-        <p:nvSpPr>
-          <p:cNvPr id="12" name="Shape 10"/>
+            <a:endParaRPr lang="en-US" sz="1550" dirty="0"/>
+          </a:p>
+        </p:txBody>
+      </p:sp>
+      <p:sp>
+        <p:nvSpPr>
+          <p:cNvPr id="13" name="Shape 11"/>
           <p:cNvSpPr/>
           <p:nvPr/>
         </p:nvSpPr>
@@ -8519,14 +8892,14 @@
       </p:sp>
       <p:sp>
         <p:nvSpPr>
-          <p:cNvPr id="13" name="Text 11"/>
+          <p:cNvPr id="14" name="Text 12"/>
           <p:cNvSpPr/>
           <p:nvPr/>
         </p:nvSpPr>
         <p:spPr>
           <a:xfrm>
             <a:off x="8074152" y="3666744"/>
-            <a:ext cx="2825496" cy="201168"/>
+            <a:ext cx="2825496" cy="256032"/>
           </a:xfrm>
           <a:prstGeom prst="rect">
             <a:avLst/>
@@ -8542,7 +8915,7 @@
               <a:buNone/>
             </a:pPr>
             <a:r>
-              <a:rPr lang="en-US" sz="950" b="1" dirty="0">
+              <a:rPr lang="en-US" sz="1300" b="1" dirty="0">
                 <a:solidFill>
                   <a:srgbClr val="0068B7"/>
                 </a:solidFill>
@@ -8552,20 +8925,20 @@
               </a:rPr>
               <a:t>Use this for</a:t>
             </a:r>
-            <a:endParaRPr lang="en-US" sz="950" dirty="0"/>
-          </a:p>
-        </p:txBody>
-      </p:sp>
-      <p:sp>
-        <p:nvSpPr>
-          <p:cNvPr id="14" name="Text 12"/>
-          <p:cNvSpPr/>
-          <p:nvPr/>
-        </p:nvSpPr>
-        <p:spPr>
-          <a:xfrm>
-            <a:off x="8074152" y="3959352"/>
-            <a:ext cx="2825496" cy="1170432"/>
+            <a:endParaRPr lang="en-US" sz="1300" dirty="0"/>
+          </a:p>
+        </p:txBody>
+      </p:sp>
+      <p:sp>
+        <p:nvSpPr>
+          <p:cNvPr id="15" name="Text 13"/>
+          <p:cNvSpPr/>
+          <p:nvPr/>
+        </p:nvSpPr>
+        <p:spPr>
+          <a:xfrm>
+            <a:off x="8074152" y="4023360"/>
+            <a:ext cx="2825496" cy="1097280"/>
           </a:xfrm>
           <a:prstGeom prst="rect">
             <a:avLst/>
@@ -8583,7 +8956,7 @@
               <a:buNone/>
             </a:pPr>
             <a:r>
-              <a:rPr lang="en-US" sz="1250" dirty="0">
+              <a:rPr lang="en-US" sz="1550" dirty="0">
                 <a:solidFill>
                   <a:srgbClr val="17364A"/>
                 </a:solidFill>
@@ -8593,7 +8966,7 @@
               </a:rPr>
               <a:t>Connect the concept to public health decisions, safeguards, documentation, or implementation work.</a:t>
             </a:r>
-            <a:endParaRPr lang="en-US" sz="1250" dirty="0"/>
+            <a:endParaRPr lang="en-US" sz="1550" dirty="0"/>
           </a:p>
         </p:txBody>
       </p:sp>
@@ -8790,7 +9163,7 @@
                 <a:ea typeface="Aptos" pitchFamily="34" charset="-122"/>
                 <a:cs typeface="Aptos" pitchFamily="34" charset="-120"/>
               </a:rPr>
-              <a:t>© Paula Soper</a:t>
+              <a:t>Â© Paula Soper</a:t>
             </a:r>
             <a:endParaRPr lang="en-US" sz="800" dirty="0"/>
           </a:p>
@@ -8804,8 +9177,47 @@
         </p:nvSpPr>
         <p:spPr>
           <a:xfrm>
+            <a:off x="11137392" y="6510528"/>
+            <a:ext cx="411480" cy="201168"/>
+          </a:xfrm>
+          <a:prstGeom prst="rect">
+            <a:avLst/>
+          </a:prstGeom>
+          <a:noFill/>
+          <a:ln/>
+        </p:spPr>
+        <p:txBody>
+          <a:bodyPr wrap="square" lIns="0" tIns="0" rIns="0" bIns="0" rtlCol="0" anchor="ctr"/>
+          <a:lstStyle/>
+          <a:p>
+            <a:pPr algn="r" indent="0" marL="0">
+              <a:buNone/>
+            </a:pPr>
+            <a:r>
+              <a:rPr lang="en-US" sz="900" dirty="0">
+                <a:solidFill>
+                  <a:srgbClr val="5F7181"/>
+                </a:solidFill>
+                <a:latin typeface="Aptos" pitchFamily="34" charset="0"/>
+                <a:ea typeface="Aptos" pitchFamily="34" charset="-122"/>
+                <a:cs typeface="Aptos" pitchFamily="34" charset="-120"/>
+              </a:rPr>
+              <a:t>2</a:t>
+            </a:r>
+            <a:endParaRPr lang="en-US" sz="900" dirty="0"/>
+          </a:p>
+        </p:txBody>
+      </p:sp>
+      <p:sp>
+        <p:nvSpPr>
+          <p:cNvPr id="8" name="Text 6"/>
+          <p:cNvSpPr/>
+          <p:nvPr/>
+        </p:nvSpPr>
+        <p:spPr>
+          <a:xfrm>
             <a:off x="640080" y="658368"/>
-            <a:ext cx="10881360" cy="566928"/>
+            <a:ext cx="10881360" cy="713232"/>
           </a:xfrm>
           <a:prstGeom prst="rect">
             <a:avLst/>
@@ -8823,7 +9235,7 @@
               <a:buNone/>
             </a:pPr>
             <a:r>
-              <a:rPr lang="en-US" sz="2700" b="1" dirty="0">
+              <a:rPr lang="en-US" sz="3400" b="1" dirty="0">
                 <a:solidFill>
                   <a:srgbClr val="003A63"/>
                 </a:solidFill>
@@ -8833,20 +9245,20 @@
               </a:rPr>
               <a:t>What this module helps you do</a:t>
             </a:r>
-            <a:endParaRPr lang="en-US" sz="2700" dirty="0"/>
-          </a:p>
-        </p:txBody>
-      </p:sp>
-      <p:sp>
-        <p:nvSpPr>
-          <p:cNvPr id="8" name="Text 6"/>
-          <p:cNvSpPr/>
-          <p:nvPr/>
-        </p:nvSpPr>
-        <p:spPr>
-          <a:xfrm>
-            <a:off x="868680" y="1417320"/>
-            <a:ext cx="6675120" cy="3291840"/>
+            <a:endParaRPr lang="en-US" sz="3400" dirty="0"/>
+          </a:p>
+        </p:txBody>
+      </p:sp>
+      <p:sp>
+        <p:nvSpPr>
+          <p:cNvPr id="9" name="Text 7"/>
+          <p:cNvSpPr/>
+          <p:nvPr/>
+        </p:nvSpPr>
+        <p:spPr>
+          <a:xfrm>
+            <a:off x="868680" y="1508760"/>
+            <a:ext cx="6446520" cy="2926080"/>
           </a:xfrm>
           <a:prstGeom prst="rect">
             <a:avLst/>
@@ -8861,7 +9273,7 @@
           <a:lstStyle/>
           <a:p>
             <a:r>
-              <a:rPr lang="en-US" sz="1700" dirty="0">
+              <a:rPr lang="en-US" sz="2100" dirty="0">
                 <a:solidFill>
                   <a:srgbClr val="17364A"/>
                 </a:solidFill>
@@ -8871,11 +9283,11 @@
               </a:rPr>
               <a:t>Time-series analysis examines data collected over time.</a:t>
             </a:r>
-            <a:endParaRPr lang="en-US" sz="1700" dirty="0"/>
-          </a:p>
-          <a:p>
-            <a:r>
-              <a:rPr lang="en-US" sz="1700" dirty="0">
+            <a:endParaRPr lang="en-US" sz="2100" dirty="0"/>
+          </a:p>
+          <a:p>
+            <a:r>
+              <a:rPr lang="en-US" sz="2100" dirty="0">
                 <a:solidFill>
                   <a:srgbClr val="17364A"/>
                 </a:solidFill>
@@ -8883,13 +9295,13 @@
                 <a:ea typeface="Aptos" pitchFamily="34" charset="-122"/>
                 <a:cs typeface="Aptos" pitchFamily="34" charset="-120"/>
               </a:rPr>
-              <a:t>In public health, time patterns are central to surveillance, outbreak detection, syndromic monitoring, wastewater analysis, emergency response,.</a:t>
-            </a:r>
-            <a:endParaRPr lang="en-US" sz="1700" dirty="0"/>
-          </a:p>
-          <a:p>
-            <a:r>
-              <a:rPr lang="en-US" sz="1700" dirty="0">
+              <a:t>In public health, time patterns are central to surveillance, outbreak detection, syndromic monitoring, wastewater.</a:t>
+            </a:r>
+            <a:endParaRPr lang="en-US" sz="2100" dirty="0"/>
+          </a:p>
+          <a:p>
+            <a:r>
+              <a:rPr lang="en-US" sz="2100" dirty="0">
                 <a:solidFill>
                   <a:srgbClr val="17364A"/>
                 </a:solidFill>
@@ -8897,29 +9309,15 @@
                 <a:ea typeface="Aptos" pitchFamily="34" charset="-122"/>
                 <a:cs typeface="Aptos" pitchFamily="34" charset="-120"/>
               </a:rPr>
-              <a:t>AI-supported anomaly detection can help identify unusual increases, decreases, or pattern changes that may require investigation.</a:t>
-            </a:r>
-            <a:endParaRPr lang="en-US" sz="1700" dirty="0"/>
-          </a:p>
-          <a:p>
-            <a:r>
-              <a:rPr lang="en-US" sz="1700" dirty="0">
-                <a:solidFill>
-                  <a:srgbClr val="17364A"/>
-                </a:solidFill>
-                <a:latin typeface="Aptos" pitchFamily="34" charset="0"/>
-                <a:ea typeface="Aptos" pitchFamily="34" charset="-122"/>
-                <a:cs typeface="Aptos" pitchFamily="34" charset="-120"/>
-              </a:rPr>
-              <a:t>This module explains how time-series and anomaly detection methods can support public health without replacing epidemiologic interpretation.</a:t>
-            </a:r>
-            <a:endParaRPr lang="en-US" sz="1700" dirty="0"/>
-          </a:p>
-        </p:txBody>
-      </p:sp>
-      <p:sp>
-        <p:nvSpPr>
-          <p:cNvPr id="9" name="Shape 7"/>
+              <a:t>AI-supported anomaly detection can help identify unusual increases, decreases, or pattern changes that may.</a:t>
+            </a:r>
+            <a:endParaRPr lang="en-US" sz="2100" dirty="0"/>
+          </a:p>
+        </p:txBody>
+      </p:sp>
+      <p:sp>
+        <p:nvSpPr>
+          <p:cNvPr id="10" name="Shape 8"/>
           <p:cNvSpPr/>
           <p:nvPr/>
         </p:nvSpPr>
@@ -8946,14 +9344,14 @@
       </p:sp>
       <p:sp>
         <p:nvSpPr>
-          <p:cNvPr id="10" name="Text 8"/>
+          <p:cNvPr id="11" name="Text 9"/>
           <p:cNvSpPr/>
           <p:nvPr/>
         </p:nvSpPr>
         <p:spPr>
           <a:xfrm>
             <a:off x="8074152" y="1563624"/>
-            <a:ext cx="2825496" cy="201168"/>
+            <a:ext cx="2825496" cy="256032"/>
           </a:xfrm>
           <a:prstGeom prst="rect">
             <a:avLst/>
@@ -8969,7 +9367,7 @@
               <a:buNone/>
             </a:pPr>
             <a:r>
-              <a:rPr lang="en-US" sz="950" b="1" dirty="0">
+              <a:rPr lang="en-US" sz="1300" b="1" dirty="0">
                 <a:solidFill>
                   <a:srgbClr val="0068B7"/>
                 </a:solidFill>
@@ -8979,20 +9377,20 @@
               </a:rPr>
               <a:t>Module details</a:t>
             </a:r>
-            <a:endParaRPr lang="en-US" sz="950" dirty="0"/>
-          </a:p>
-        </p:txBody>
-      </p:sp>
-      <p:sp>
-        <p:nvSpPr>
-          <p:cNvPr id="11" name="Text 9"/>
-          <p:cNvSpPr/>
-          <p:nvPr/>
-        </p:nvSpPr>
-        <p:spPr>
-          <a:xfrm>
-            <a:off x="8074152" y="1856232"/>
-            <a:ext cx="2825496" cy="1353312"/>
+            <a:endParaRPr lang="en-US" sz="1300" dirty="0"/>
+          </a:p>
+        </p:txBody>
+      </p:sp>
+      <p:sp>
+        <p:nvSpPr>
+          <p:cNvPr id="12" name="Text 10"/>
+          <p:cNvSpPr/>
+          <p:nvPr/>
+        </p:nvSpPr>
+        <p:spPr>
+          <a:xfrm>
+            <a:off x="8074152" y="1920240"/>
+            <a:ext cx="2825496" cy="1280160"/>
           </a:xfrm>
           <a:prstGeom prst="rect">
             <a:avLst/>
@@ -9010,7 +9408,7 @@
               <a:buNone/>
             </a:pPr>
             <a:r>
-              <a:rPr lang="en-US" sz="1250" dirty="0">
+              <a:rPr lang="en-US" sz="1550" dirty="0">
                 <a:solidFill>
                   <a:srgbClr val="17364A"/>
                 </a:solidFill>
@@ -9020,14 +9418,14 @@
               </a:rPr>
               <a:t>Level: applied/foundational</a:t>
             </a:r>
-            <a:endParaRPr lang="en-US" sz="1250" dirty="0"/>
+            <a:endParaRPr lang="en-US" sz="1550" dirty="0"/>
           </a:p>
           <a:p>
             <a:pPr indent="0" marL="0">
               <a:buNone/>
             </a:pPr>
             <a:r>
-              <a:rPr lang="en-US" sz="1250" dirty="0">
+              <a:rPr lang="en-US" sz="1550" dirty="0">
                 <a:solidFill>
                   <a:srgbClr val="17364A"/>
                 </a:solidFill>
@@ -9037,14 +9435,14 @@
               </a:rPr>
               <a:t>Primary track: Analytics and Modeling Track</a:t>
             </a:r>
-            <a:endParaRPr lang="en-US" sz="1250" dirty="0"/>
+            <a:endParaRPr lang="en-US" sz="1550" dirty="0"/>
           </a:p>
           <a:p>
             <a:pPr indent="0" marL="0">
               <a:buNone/>
             </a:pPr>
             <a:r>
-              <a:rPr lang="en-US" sz="1250" dirty="0">
+              <a:rPr lang="en-US" sz="1550" dirty="0">
                 <a:solidFill>
                   <a:srgbClr val="17364A"/>
                 </a:solidFill>
@@ -9054,32 +9452,32 @@
               </a:rPr>
               <a:t>Appears in tracks: analytics-modeling</a:t>
             </a:r>
-            <a:endParaRPr lang="en-US" sz="1250" dirty="0"/>
-          </a:p>
-        </p:txBody>
-      </p:sp>
-      <p:sp>
-        <p:nvSpPr>
-          <p:cNvPr id="12" name="Shape 10"/>
-          <p:cNvSpPr/>
-          <p:nvPr/>
-        </p:nvSpPr>
-        <p:spPr>
-          <a:xfrm>
-            <a:off x="7909560" y="3611880"/>
-            <a:ext cx="3154680" cy="1783080"/>
+            <a:endParaRPr lang="en-US" sz="1550" dirty="0"/>
+          </a:p>
+        </p:txBody>
+      </p:sp>
+      <p:sp>
+        <p:nvSpPr>
+          <p:cNvPr id="13" name="Shape 11"/>
+          <p:cNvSpPr/>
+          <p:nvPr/>
+        </p:nvSpPr>
+        <p:spPr>
+          <a:xfrm>
+            <a:off x="7635240" y="3730752"/>
+            <a:ext cx="1033272" cy="749808"/>
           </a:xfrm>
           <a:prstGeom prst="roundRect">
             <a:avLst>
-              <a:gd name="adj" fmla="val 6154"/>
+              <a:gd name="adj" fmla="val 14634"/>
             </a:avLst>
           </a:prstGeom>
           <a:solidFill>
-            <a:srgbClr val="EEF8ED"/>
+            <a:srgbClr val="0068B7"/>
           </a:solidFill>
           <a:ln w="12700">
             <a:solidFill>
-              <a:srgbClr val="B9D7E6"/>
+              <a:srgbClr val="0068B7"/>
             </a:solidFill>
             <a:prstDash val="solid"/>
           </a:ln>
@@ -9087,81 +9485,256 @@
       </p:sp>
       <p:sp>
         <p:nvSpPr>
-          <p:cNvPr id="13" name="Text 11"/>
-          <p:cNvSpPr/>
-          <p:nvPr/>
-        </p:nvSpPr>
-        <p:spPr>
-          <a:xfrm>
-            <a:off x="8074152" y="3758184"/>
-            <a:ext cx="2825496" cy="201168"/>
-          </a:xfrm>
-          <a:prstGeom prst="rect">
-            <a:avLst/>
-          </a:prstGeom>
-          <a:noFill/>
-          <a:ln/>
-        </p:spPr>
-        <p:txBody>
-          <a:bodyPr wrap="square" lIns="0" tIns="0" rIns="0" bIns="0" rtlCol="0" anchor="ctr"/>
-          <a:lstStyle/>
-          <a:p>
-            <a:pPr indent="0" marL="0">
-              <a:buNone/>
-            </a:pPr>
-            <a:r>
-              <a:rPr lang="en-US" sz="950" b="1" dirty="0">
-                <a:solidFill>
-                  <a:srgbClr val="0068B7"/>
-                </a:solidFill>
-                <a:latin typeface="Aptos" pitchFamily="34" charset="0"/>
-                <a:ea typeface="Aptos" pitchFamily="34" charset="-122"/>
-                <a:cs typeface="Aptos" pitchFamily="34" charset="-120"/>
-              </a:rPr>
-              <a:t>Learning approach</a:t>
-            </a:r>
-            <a:endParaRPr lang="en-US" sz="950" dirty="0"/>
-          </a:p>
-        </p:txBody>
-      </p:sp>
-      <p:sp>
-        <p:nvSpPr>
           <p:cNvPr id="14" name="Text 12"/>
           <p:cNvSpPr/>
           <p:nvPr/>
         </p:nvSpPr>
         <p:spPr>
           <a:xfrm>
-            <a:off x="8074152" y="4050792"/>
-            <a:ext cx="2825496" cy="1216152"/>
-          </a:xfrm>
-          <a:prstGeom prst="rect">
-            <a:avLst/>
-          </a:prstGeom>
-          <a:noFill/>
-          <a:ln/>
-        </p:spPr>
-        <p:txBody>
-          <a:bodyPr wrap="square" lIns="0" tIns="0" rIns="0" bIns="0" rtlCol="0" anchor="t">
+            <a:off x="7708392" y="3922776"/>
+            <a:ext cx="886968" cy="310896"/>
+          </a:xfrm>
+          <a:prstGeom prst="rect">
+            <a:avLst/>
+          </a:prstGeom>
+          <a:noFill/>
+          <a:ln/>
+        </p:spPr>
+        <p:txBody>
+          <a:bodyPr wrap="square" lIns="0" tIns="0" rIns="0" bIns="0" rtlCol="0" anchor="ctr">
             <a:normAutofit/>
           </a:bodyPr>
           <a:lstStyle/>
           <a:p>
-            <a:pPr indent="0" marL="0">
-              <a:buNone/>
-            </a:pPr>
-            <a:r>
-              <a:rPr lang="en-US" sz="1250" dirty="0">
-                <a:solidFill>
-                  <a:srgbClr val="17364A"/>
-                </a:solidFill>
-                <a:latin typeface="Aptos" pitchFamily="34" charset="0"/>
-                <a:ea typeface="Aptos" pitchFamily="34" charset="-122"/>
-                <a:cs typeface="Aptos" pitchFamily="34" charset="-120"/>
-              </a:rPr>
-              <a:t>Review the core ideas, complete the practical exercise, check your understanding, and use the related plays and tools to apply the lesson.</a:t>
-            </a:r>
-            <a:endParaRPr lang="en-US" sz="1250" dirty="0"/>
+            <a:pPr algn="ctr" indent="0" marL="0">
+              <a:buNone/>
+            </a:pPr>
+            <a:r>
+              <a:rPr lang="en-US" sz="1500" b="1" dirty="0">
+                <a:solidFill>
+                  <a:srgbClr val="FFFFFF"/>
+                </a:solidFill>
+                <a:latin typeface="Aptos" pitchFamily="34" charset="0"/>
+                <a:ea typeface="Aptos" pitchFamily="34" charset="-122"/>
+                <a:cs typeface="Aptos" pitchFamily="34" charset="-120"/>
+              </a:rPr>
+              <a:t>Learn</a:t>
+            </a:r>
+            <a:endParaRPr lang="en-US" sz="1500" dirty="0"/>
+          </a:p>
+        </p:txBody>
+      </p:sp>
+      <p:sp>
+        <p:nvSpPr>
+          <p:cNvPr id="15" name="Text 13"/>
+          <p:cNvSpPr/>
+          <p:nvPr/>
+        </p:nvSpPr>
+        <p:spPr>
+          <a:xfrm>
+            <a:off x="8695944" y="3941064"/>
+            <a:ext cx="201168" cy="256032"/>
+          </a:xfrm>
+          <a:prstGeom prst="rect">
+            <a:avLst/>
+          </a:prstGeom>
+          <a:noFill/>
+          <a:ln/>
+        </p:spPr>
+        <p:txBody>
+          <a:bodyPr wrap="square" lIns="0" tIns="0" rIns="0" bIns="0" rtlCol="0" anchor="ctr"/>
+          <a:lstStyle/>
+          <a:p>
+            <a:pPr algn="ctr" indent="0" marL="0">
+              <a:buNone/>
+            </a:pPr>
+            <a:r>
+              <a:rPr lang="en-US" sz="1800" b="1" dirty="0">
+                <a:solidFill>
+                  <a:srgbClr val="0068B7"/>
+                </a:solidFill>
+                <a:latin typeface="Aptos" pitchFamily="34" charset="0"/>
+                <a:ea typeface="Aptos" pitchFamily="34" charset="-122"/>
+                <a:cs typeface="Aptos" pitchFamily="34" charset="-120"/>
+              </a:rPr>
+              <a:t>â†’</a:t>
+            </a:r>
+            <a:endParaRPr lang="en-US" sz="1800" dirty="0"/>
+          </a:p>
+        </p:txBody>
+      </p:sp>
+      <p:sp>
+        <p:nvSpPr>
+          <p:cNvPr id="16" name="Shape 14"/>
+          <p:cNvSpPr/>
+          <p:nvPr/>
+        </p:nvSpPr>
+        <p:spPr>
+          <a:xfrm>
+            <a:off x="8924544" y="3730752"/>
+            <a:ext cx="1033272" cy="749808"/>
+          </a:xfrm>
+          <a:prstGeom prst="roundRect">
+            <a:avLst>
+              <a:gd name="adj" fmla="val 14634"/>
+            </a:avLst>
+          </a:prstGeom>
+          <a:solidFill>
+            <a:srgbClr val="2F8A28"/>
+          </a:solidFill>
+          <a:ln w="12700">
+            <a:solidFill>
+              <a:srgbClr val="2F8A28"/>
+            </a:solidFill>
+            <a:prstDash val="solid"/>
+          </a:ln>
+        </p:spPr>
+      </p:sp>
+      <p:sp>
+        <p:nvSpPr>
+          <p:cNvPr id="17" name="Text 15"/>
+          <p:cNvSpPr/>
+          <p:nvPr/>
+        </p:nvSpPr>
+        <p:spPr>
+          <a:xfrm>
+            <a:off x="8997696" y="3922776"/>
+            <a:ext cx="886968" cy="310896"/>
+          </a:xfrm>
+          <a:prstGeom prst="rect">
+            <a:avLst/>
+          </a:prstGeom>
+          <a:noFill/>
+          <a:ln/>
+        </p:spPr>
+        <p:txBody>
+          <a:bodyPr wrap="square" lIns="0" tIns="0" rIns="0" bIns="0" rtlCol="0" anchor="ctr">
+            <a:normAutofit/>
+          </a:bodyPr>
+          <a:lstStyle/>
+          <a:p>
+            <a:pPr algn="ctr" indent="0" marL="0">
+              <a:buNone/>
+            </a:pPr>
+            <a:r>
+              <a:rPr lang="en-US" sz="1500" b="1" dirty="0">
+                <a:solidFill>
+                  <a:srgbClr val="FFFFFF"/>
+                </a:solidFill>
+                <a:latin typeface="Aptos" pitchFamily="34" charset="0"/>
+                <a:ea typeface="Aptos" pitchFamily="34" charset="-122"/>
+                <a:cs typeface="Aptos" pitchFamily="34" charset="-120"/>
+              </a:rPr>
+              <a:t>Apply</a:t>
+            </a:r>
+            <a:endParaRPr lang="en-US" sz="1500" dirty="0"/>
+          </a:p>
+        </p:txBody>
+      </p:sp>
+      <p:sp>
+        <p:nvSpPr>
+          <p:cNvPr id="18" name="Text 16"/>
+          <p:cNvSpPr/>
+          <p:nvPr/>
+        </p:nvSpPr>
+        <p:spPr>
+          <a:xfrm>
+            <a:off x="9985248" y="3941064"/>
+            <a:ext cx="201168" cy="256032"/>
+          </a:xfrm>
+          <a:prstGeom prst="rect">
+            <a:avLst/>
+          </a:prstGeom>
+          <a:noFill/>
+          <a:ln/>
+        </p:spPr>
+        <p:txBody>
+          <a:bodyPr wrap="square" lIns="0" tIns="0" rIns="0" bIns="0" rtlCol="0" anchor="ctr"/>
+          <a:lstStyle/>
+          <a:p>
+            <a:pPr algn="ctr" indent="0" marL="0">
+              <a:buNone/>
+            </a:pPr>
+            <a:r>
+              <a:rPr lang="en-US" sz="1800" b="1" dirty="0">
+                <a:solidFill>
+                  <a:srgbClr val="0068B7"/>
+                </a:solidFill>
+                <a:latin typeface="Aptos" pitchFamily="34" charset="0"/>
+                <a:ea typeface="Aptos" pitchFamily="34" charset="-122"/>
+                <a:cs typeface="Aptos" pitchFamily="34" charset="-120"/>
+              </a:rPr>
+              <a:t>â†’</a:t>
+            </a:r>
+            <a:endParaRPr lang="en-US" sz="1800" dirty="0"/>
+          </a:p>
+        </p:txBody>
+      </p:sp>
+      <p:sp>
+        <p:nvSpPr>
+          <p:cNvPr id="19" name="Shape 17"/>
+          <p:cNvSpPr/>
+          <p:nvPr/>
+        </p:nvSpPr>
+        <p:spPr>
+          <a:xfrm>
+            <a:off x="10213848" y="3730752"/>
+            <a:ext cx="1033272" cy="749808"/>
+          </a:xfrm>
+          <a:prstGeom prst="roundRect">
+            <a:avLst>
+              <a:gd name="adj" fmla="val 14634"/>
+            </a:avLst>
+          </a:prstGeom>
+          <a:solidFill>
+            <a:srgbClr val="6A4CA3"/>
+          </a:solidFill>
+          <a:ln w="12700">
+            <a:solidFill>
+              <a:srgbClr val="6A4CA3"/>
+            </a:solidFill>
+            <a:prstDash val="solid"/>
+          </a:ln>
+        </p:spPr>
+      </p:sp>
+      <p:sp>
+        <p:nvSpPr>
+          <p:cNvPr id="20" name="Text 18"/>
+          <p:cNvSpPr/>
+          <p:nvPr/>
+        </p:nvSpPr>
+        <p:spPr>
+          <a:xfrm>
+            <a:off x="10287000" y="3922776"/>
+            <a:ext cx="886968" cy="310896"/>
+          </a:xfrm>
+          <a:prstGeom prst="rect">
+            <a:avLst/>
+          </a:prstGeom>
+          <a:noFill/>
+          <a:ln/>
+        </p:spPr>
+        <p:txBody>
+          <a:bodyPr wrap="square" lIns="0" tIns="0" rIns="0" bIns="0" rtlCol="0" anchor="ctr">
+            <a:normAutofit/>
+          </a:bodyPr>
+          <a:lstStyle/>
+          <a:p>
+            <a:pPr algn="ctr" indent="0" marL="0">
+              <a:buNone/>
+            </a:pPr>
+            <a:r>
+              <a:rPr lang="en-US" sz="1500" b="1" dirty="0">
+                <a:solidFill>
+                  <a:srgbClr val="FFFFFF"/>
+                </a:solidFill>
+                <a:latin typeface="Aptos" pitchFamily="34" charset="0"/>
+                <a:ea typeface="Aptos" pitchFamily="34" charset="-122"/>
+                <a:cs typeface="Aptos" pitchFamily="34" charset="-120"/>
+              </a:rPr>
+              <a:t>Document</a:t>
+            </a:r>
+            <a:endParaRPr lang="en-US" sz="1500" dirty="0"/>
           </a:p>
         </p:txBody>
       </p:sp>
@@ -9358,7 +9931,7 @@
                 <a:ea typeface="Aptos" pitchFamily="34" charset="-122"/>
                 <a:cs typeface="Aptos" pitchFamily="34" charset="-120"/>
               </a:rPr>
-              <a:t>© Paula Soper</a:t>
+              <a:t>Â© Paula Soper</a:t>
             </a:r>
             <a:endParaRPr lang="en-US" sz="800" dirty="0"/>
           </a:p>
@@ -9366,7 +9939,46 @@
       </p:sp>
       <p:sp>
         <p:nvSpPr>
-          <p:cNvPr id="7" name="Shape 5"/>
+          <p:cNvPr id="7" name="Text 5"/>
+          <p:cNvSpPr/>
+          <p:nvPr/>
+        </p:nvSpPr>
+        <p:spPr>
+          <a:xfrm>
+            <a:off x="11137392" y="6510528"/>
+            <a:ext cx="411480" cy="201168"/>
+          </a:xfrm>
+          <a:prstGeom prst="rect">
+            <a:avLst/>
+          </a:prstGeom>
+          <a:noFill/>
+          <a:ln/>
+        </p:spPr>
+        <p:txBody>
+          <a:bodyPr wrap="square" lIns="0" tIns="0" rIns="0" bIns="0" rtlCol="0" anchor="ctr"/>
+          <a:lstStyle/>
+          <a:p>
+            <a:pPr algn="r" indent="0" marL="0">
+              <a:buNone/>
+            </a:pPr>
+            <a:r>
+              <a:rPr lang="en-US" sz="900" dirty="0">
+                <a:solidFill>
+                  <a:srgbClr val="5F7181"/>
+                </a:solidFill>
+                <a:latin typeface="Aptos" pitchFamily="34" charset="0"/>
+                <a:ea typeface="Aptos" pitchFamily="34" charset="-122"/>
+                <a:cs typeface="Aptos" pitchFamily="34" charset="-120"/>
+              </a:rPr>
+              <a:t>20</a:t>
+            </a:r>
+            <a:endParaRPr lang="en-US" sz="900" dirty="0"/>
+          </a:p>
+        </p:txBody>
+      </p:sp>
+      <p:sp>
+        <p:nvSpPr>
+          <p:cNvPr id="8" name="Shape 6"/>
           <p:cNvSpPr/>
           <p:nvPr/>
         </p:nvSpPr>
@@ -9391,7 +10003,7 @@
       </p:sp>
       <p:sp>
         <p:nvSpPr>
-          <p:cNvPr id="8" name="Text 6"/>
+          <p:cNvPr id="9" name="Text 7"/>
           <p:cNvSpPr/>
           <p:nvPr/>
         </p:nvSpPr>
@@ -9430,14 +10042,14 @@
       </p:sp>
       <p:sp>
         <p:nvSpPr>
-          <p:cNvPr id="9" name="Text 7"/>
+          <p:cNvPr id="10" name="Text 8"/>
           <p:cNvSpPr/>
           <p:nvPr/>
         </p:nvSpPr>
         <p:spPr>
           <a:xfrm>
             <a:off x="640080" y="621792"/>
-            <a:ext cx="10881360" cy="566928"/>
+            <a:ext cx="10881360" cy="713232"/>
           </a:xfrm>
           <a:prstGeom prst="rect">
             <a:avLst/>
@@ -9455,7 +10067,7 @@
               <a:buNone/>
             </a:pPr>
             <a:r>
-              <a:rPr lang="en-US" sz="2700" b="1" dirty="0">
+              <a:rPr lang="en-US" sz="3400" b="1" dirty="0">
                 <a:solidFill>
                   <a:srgbClr val="003A63"/>
                 </a:solidFill>
@@ -9465,20 +10077,20 @@
               </a:rPr>
               <a:t>Expected Assignment</a:t>
             </a:r>
-            <a:endParaRPr lang="en-US" sz="2700" dirty="0"/>
-          </a:p>
-        </p:txBody>
-      </p:sp>
-      <p:sp>
-        <p:nvSpPr>
-          <p:cNvPr id="10" name="Text 8"/>
-          <p:cNvSpPr/>
-          <p:nvPr/>
-        </p:nvSpPr>
-        <p:spPr>
-          <a:xfrm>
-            <a:off x="868680" y="1417320"/>
-            <a:ext cx="6675120" cy="4434840"/>
+            <a:endParaRPr lang="en-US" sz="3400" dirty="0"/>
+          </a:p>
+        </p:txBody>
+      </p:sp>
+      <p:sp>
+        <p:nvSpPr>
+          <p:cNvPr id="11" name="Text 9"/>
+          <p:cNvSpPr/>
+          <p:nvPr/>
+        </p:nvSpPr>
+        <p:spPr>
+          <a:xfrm>
+            <a:off x="868680" y="1508760"/>
+            <a:ext cx="6537960" cy="4160520"/>
           </a:xfrm>
           <a:prstGeom prst="rect">
             <a:avLst/>
@@ -9493,7 +10105,7 @@
           <a:lstStyle/>
           <a:p>
             <a:r>
-              <a:rPr lang="en-US" sz="1700" dirty="0">
+              <a:rPr lang="en-US" sz="2100" dirty="0">
                 <a:solidFill>
                   <a:srgbClr val="17364A"/>
                 </a:solidFill>
@@ -9503,11 +10115,11 @@
               </a:rPr>
               <a:t>Anomaly detection review plan</a:t>
             </a:r>
-            <a:endParaRPr lang="en-US" sz="1700" dirty="0"/>
-          </a:p>
-          <a:p>
-            <a:r>
-              <a:rPr lang="en-US" sz="1700" dirty="0">
+            <a:endParaRPr lang="en-US" sz="2100" dirty="0"/>
+          </a:p>
+          <a:p>
+            <a:r>
+              <a:rPr lang="en-US" sz="2100" dirty="0">
                 <a:solidFill>
                   <a:srgbClr val="17364A"/>
                 </a:solidFill>
@@ -9517,11 +10129,11 @@
               </a:rPr>
               <a:t>Baseline and threshold rationale</a:t>
             </a:r>
-            <a:endParaRPr lang="en-US" sz="1700" dirty="0"/>
-          </a:p>
-          <a:p>
-            <a:r>
-              <a:rPr lang="en-US" sz="1700" dirty="0">
+            <a:endParaRPr lang="en-US" sz="2100" dirty="0"/>
+          </a:p>
+          <a:p>
+            <a:r>
+              <a:rPr lang="en-US" sz="2100" dirty="0">
                 <a:solidFill>
                   <a:srgbClr val="17364A"/>
                 </a:solidFill>
@@ -9531,27 +10143,13 @@
               </a:rPr>
               <a:t>Alert review protocol</a:t>
             </a:r>
-            <a:endParaRPr lang="en-US" sz="1700" dirty="0"/>
-          </a:p>
-          <a:p>
-            <a:r>
-              <a:rPr lang="en-US" sz="1700" dirty="0">
-                <a:solidFill>
-                  <a:srgbClr val="17364A"/>
-                </a:solidFill>
-                <a:latin typeface="Aptos" pitchFamily="34" charset="0"/>
-                <a:ea typeface="Aptos" pitchFamily="34" charset="-122"/>
-                <a:cs typeface="Aptos" pitchFamily="34" charset="-120"/>
-              </a:rPr>
-              <a:t>Signal documentation template</a:t>
-            </a:r>
-            <a:endParaRPr lang="en-US" sz="1700" dirty="0"/>
-          </a:p>
-        </p:txBody>
-      </p:sp>
-      <p:sp>
-        <p:nvSpPr>
-          <p:cNvPr id="11" name="Shape 9"/>
+            <a:endParaRPr lang="en-US" sz="2100" dirty="0"/>
+          </a:p>
+        </p:txBody>
+      </p:sp>
+      <p:sp>
+        <p:nvSpPr>
+          <p:cNvPr id="12" name="Shape 10"/>
           <p:cNvSpPr/>
           <p:nvPr/>
         </p:nvSpPr>
@@ -9578,14 +10176,14 @@
       </p:sp>
       <p:sp>
         <p:nvSpPr>
-          <p:cNvPr id="12" name="Text 10"/>
+          <p:cNvPr id="13" name="Text 11"/>
           <p:cNvSpPr/>
           <p:nvPr/>
         </p:nvSpPr>
         <p:spPr>
           <a:xfrm>
             <a:off x="8074152" y="1563624"/>
-            <a:ext cx="2825496" cy="201168"/>
+            <a:ext cx="2825496" cy="256032"/>
           </a:xfrm>
           <a:prstGeom prst="rect">
             <a:avLst/>
@@ -9601,7 +10199,7 @@
               <a:buNone/>
             </a:pPr>
             <a:r>
-              <a:rPr lang="en-US" sz="950" b="1" dirty="0">
+              <a:rPr lang="en-US" sz="1300" b="1" dirty="0">
                 <a:solidFill>
                   <a:srgbClr val="0068B7"/>
                 </a:solidFill>
@@ -9611,20 +10209,20 @@
               </a:rPr>
               <a:t>Key idea</a:t>
             </a:r>
-            <a:endParaRPr lang="en-US" sz="950" dirty="0"/>
-          </a:p>
-        </p:txBody>
-      </p:sp>
-      <p:sp>
-        <p:nvSpPr>
-          <p:cNvPr id="13" name="Text 11"/>
-          <p:cNvSpPr/>
-          <p:nvPr/>
-        </p:nvSpPr>
-        <p:spPr>
-          <a:xfrm>
-            <a:off x="8074152" y="1856232"/>
-            <a:ext cx="2825496" cy="1261872"/>
+            <a:endParaRPr lang="en-US" sz="1300" dirty="0"/>
+          </a:p>
+        </p:txBody>
+      </p:sp>
+      <p:sp>
+        <p:nvSpPr>
+          <p:cNvPr id="14" name="Text 12"/>
+          <p:cNvSpPr/>
+          <p:nvPr/>
+        </p:nvSpPr>
+        <p:spPr>
+          <a:xfrm>
+            <a:off x="8074152" y="1920240"/>
+            <a:ext cx="2825496" cy="1188720"/>
           </a:xfrm>
           <a:prstGeom prst="rect">
             <a:avLst/>
@@ -9642,7 +10240,7 @@
               <a:buNone/>
             </a:pPr>
             <a:r>
-              <a:rPr lang="en-US" sz="1250" dirty="0">
+              <a:rPr lang="en-US" sz="1550" dirty="0">
                 <a:solidFill>
                   <a:srgbClr val="17364A"/>
                 </a:solidFill>
@@ -9652,13 +10250,13 @@
               </a:rPr>
               <a:t>Anomaly detection review plan</a:t>
             </a:r>
-            <a:endParaRPr lang="en-US" sz="1250" dirty="0"/>
-          </a:p>
-        </p:txBody>
-      </p:sp>
-      <p:sp>
-        <p:nvSpPr>
-          <p:cNvPr id="14" name="Shape 12"/>
+            <a:endParaRPr lang="en-US" sz="1550" dirty="0"/>
+          </a:p>
+        </p:txBody>
+      </p:sp>
+      <p:sp>
+        <p:nvSpPr>
+          <p:cNvPr id="15" name="Shape 13"/>
           <p:cNvSpPr/>
           <p:nvPr/>
         </p:nvSpPr>
@@ -9685,14 +10283,14 @@
       </p:sp>
       <p:sp>
         <p:nvSpPr>
-          <p:cNvPr id="15" name="Text 13"/>
+          <p:cNvPr id="16" name="Text 14"/>
           <p:cNvSpPr/>
           <p:nvPr/>
         </p:nvSpPr>
         <p:spPr>
           <a:xfrm>
             <a:off x="8074152" y="3666744"/>
-            <a:ext cx="2825496" cy="201168"/>
+            <a:ext cx="2825496" cy="256032"/>
           </a:xfrm>
           <a:prstGeom prst="rect">
             <a:avLst/>
@@ -9708,7 +10306,7 @@
               <a:buNone/>
             </a:pPr>
             <a:r>
-              <a:rPr lang="en-US" sz="950" b="1" dirty="0">
+              <a:rPr lang="en-US" sz="1300" b="1" dirty="0">
                 <a:solidFill>
                   <a:srgbClr val="0068B7"/>
                 </a:solidFill>
@@ -9718,20 +10316,20 @@
               </a:rPr>
               <a:t>Use this for</a:t>
             </a:r>
-            <a:endParaRPr lang="en-US" sz="950" dirty="0"/>
-          </a:p>
-        </p:txBody>
-      </p:sp>
-      <p:sp>
-        <p:nvSpPr>
-          <p:cNvPr id="16" name="Text 14"/>
-          <p:cNvSpPr/>
-          <p:nvPr/>
-        </p:nvSpPr>
-        <p:spPr>
-          <a:xfrm>
-            <a:off x="8074152" y="3959352"/>
-            <a:ext cx="2825496" cy="1170432"/>
+            <a:endParaRPr lang="en-US" sz="1300" dirty="0"/>
+          </a:p>
+        </p:txBody>
+      </p:sp>
+      <p:sp>
+        <p:nvSpPr>
+          <p:cNvPr id="17" name="Text 15"/>
+          <p:cNvSpPr/>
+          <p:nvPr/>
+        </p:nvSpPr>
+        <p:spPr>
+          <a:xfrm>
+            <a:off x="8074152" y="4023360"/>
+            <a:ext cx="2825496" cy="1097280"/>
           </a:xfrm>
           <a:prstGeom prst="rect">
             <a:avLst/>
@@ -9749,7 +10347,7 @@
               <a:buNone/>
             </a:pPr>
             <a:r>
-              <a:rPr lang="en-US" sz="1250" dirty="0">
+              <a:rPr lang="en-US" sz="1550" dirty="0">
                 <a:solidFill>
                   <a:srgbClr val="17364A"/>
                 </a:solidFill>
@@ -9759,7 +10357,7 @@
               </a:rPr>
               <a:t>Connect the concept to public health decisions, safeguards, documentation, or implementation work.</a:t>
             </a:r>
-            <a:endParaRPr lang="en-US" sz="1250" dirty="0"/>
+            <a:endParaRPr lang="en-US" sz="1550" dirty="0"/>
           </a:p>
         </p:txBody>
       </p:sp>
@@ -9956,7 +10554,7 @@
                 <a:ea typeface="Aptos" pitchFamily="34" charset="-122"/>
                 <a:cs typeface="Aptos" pitchFamily="34" charset="-120"/>
               </a:rPr>
-              <a:t>© Paula Soper</a:t>
+              <a:t>Â© Paula Soper</a:t>
             </a:r>
             <a:endParaRPr lang="en-US" sz="800" dirty="0"/>
           </a:p>
@@ -9964,7 +10562,46 @@
       </p:sp>
       <p:sp>
         <p:nvSpPr>
-          <p:cNvPr id="7" name="Shape 5"/>
+          <p:cNvPr id="7" name="Text 5"/>
+          <p:cNvSpPr/>
+          <p:nvPr/>
+        </p:nvSpPr>
+        <p:spPr>
+          <a:xfrm>
+            <a:off x="11137392" y="6510528"/>
+            <a:ext cx="411480" cy="201168"/>
+          </a:xfrm>
+          <a:prstGeom prst="rect">
+            <a:avLst/>
+          </a:prstGeom>
+          <a:noFill/>
+          <a:ln/>
+        </p:spPr>
+        <p:txBody>
+          <a:bodyPr wrap="square" lIns="0" tIns="0" rIns="0" bIns="0" rtlCol="0" anchor="ctr"/>
+          <a:lstStyle/>
+          <a:p>
+            <a:pPr algn="r" indent="0" marL="0">
+              <a:buNone/>
+            </a:pPr>
+            <a:r>
+              <a:rPr lang="en-US" sz="900" dirty="0">
+                <a:solidFill>
+                  <a:srgbClr val="5F7181"/>
+                </a:solidFill>
+                <a:latin typeface="Aptos" pitchFamily="34" charset="0"/>
+                <a:ea typeface="Aptos" pitchFamily="34" charset="-122"/>
+                <a:cs typeface="Aptos" pitchFamily="34" charset="-120"/>
+              </a:rPr>
+              <a:t>21</a:t>
+            </a:r>
+            <a:endParaRPr lang="en-US" sz="900" dirty="0"/>
+          </a:p>
+        </p:txBody>
+      </p:sp>
+      <p:sp>
+        <p:nvSpPr>
+          <p:cNvPr id="8" name="Shape 6"/>
           <p:cNvSpPr/>
           <p:nvPr/>
         </p:nvSpPr>
@@ -9989,7 +10626,7 @@
       </p:sp>
       <p:sp>
         <p:nvSpPr>
-          <p:cNvPr id="8" name="Text 6"/>
+          <p:cNvPr id="9" name="Text 7"/>
           <p:cNvSpPr/>
           <p:nvPr/>
         </p:nvSpPr>
@@ -10028,14 +10665,14 @@
       </p:sp>
       <p:sp>
         <p:nvSpPr>
-          <p:cNvPr id="9" name="Text 7"/>
+          <p:cNvPr id="10" name="Text 8"/>
           <p:cNvSpPr/>
           <p:nvPr/>
         </p:nvSpPr>
         <p:spPr>
           <a:xfrm>
             <a:off x="640080" y="621792"/>
-            <a:ext cx="10881360" cy="566928"/>
+            <a:ext cx="10881360" cy="713232"/>
           </a:xfrm>
           <a:prstGeom prst="rect">
             <a:avLst/>
@@ -10053,7 +10690,7 @@
               <a:buNone/>
             </a:pPr>
             <a:r>
-              <a:rPr lang="en-US" sz="2700" b="1" dirty="0">
+              <a:rPr lang="en-US" sz="3400" b="1" dirty="0">
                 <a:solidFill>
                   <a:srgbClr val="003A63"/>
                 </a:solidFill>
@@ -10063,20 +10700,20 @@
               </a:rPr>
               <a:t>Knowledge Check</a:t>
             </a:r>
-            <a:endParaRPr lang="en-US" sz="2700" dirty="0"/>
-          </a:p>
-        </p:txBody>
-      </p:sp>
-      <p:sp>
-        <p:nvSpPr>
-          <p:cNvPr id="10" name="Text 8"/>
-          <p:cNvSpPr/>
-          <p:nvPr/>
-        </p:nvSpPr>
-        <p:spPr>
-          <a:xfrm>
-            <a:off x="868680" y="1417320"/>
-            <a:ext cx="6675120" cy="4434840"/>
+            <a:endParaRPr lang="en-US" sz="3400" dirty="0"/>
+          </a:p>
+        </p:txBody>
+      </p:sp>
+      <p:sp>
+        <p:nvSpPr>
+          <p:cNvPr id="11" name="Text 9"/>
+          <p:cNvSpPr/>
+          <p:nvPr/>
+        </p:nvSpPr>
+        <p:spPr>
+          <a:xfrm>
+            <a:off x="868680" y="1508760"/>
+            <a:ext cx="6537960" cy="4160520"/>
           </a:xfrm>
           <a:prstGeom prst="rect">
             <a:avLst/>
@@ -10091,7 +10728,7 @@
           <a:lstStyle/>
           <a:p>
             <a:r>
-              <a:rPr lang="en-US" sz="1700" dirty="0">
+              <a:rPr lang="en-US" sz="2100" dirty="0">
                 <a:solidFill>
                   <a:srgbClr val="17364A"/>
                 </a:solidFill>
@@ -10101,11 +10738,11 @@
               </a:rPr>
               <a:t>1. What is an anomaly in a public health time series?</a:t>
             </a:r>
-            <a:endParaRPr lang="en-US" sz="1700" dirty="0"/>
-          </a:p>
-          <a:p>
-            <a:r>
-              <a:rPr lang="en-US" sz="1700" dirty="0">
+            <a:endParaRPr lang="en-US" sz="2100" dirty="0"/>
+          </a:p>
+          <a:p>
+            <a:r>
+              <a:rPr lang="en-US" sz="2100" dirty="0">
                 <a:solidFill>
                   <a:srgbClr val="17364A"/>
                 </a:solidFill>
@@ -10115,11 +10752,11 @@
               </a:rPr>
               <a:t>2. Why does seasonality matter?</a:t>
             </a:r>
-            <a:endParaRPr lang="en-US" sz="1700" dirty="0"/>
-          </a:p>
-          <a:p>
-            <a:r>
-              <a:rPr lang="en-US" sz="1700" dirty="0">
+            <a:endParaRPr lang="en-US" sz="2100" dirty="0"/>
+          </a:p>
+          <a:p>
+            <a:r>
+              <a:rPr lang="en-US" sz="2100" dirty="0">
                 <a:solidFill>
                   <a:srgbClr val="17364A"/>
                 </a:solidFill>
@@ -10129,27 +10766,13 @@
               </a:rPr>
               <a:t>3. What is a common risk of too many low-value alerts?</a:t>
             </a:r>
-            <a:endParaRPr lang="en-US" sz="1700" dirty="0"/>
-          </a:p>
-          <a:p>
-            <a:r>
-              <a:rPr lang="en-US" sz="1700" dirty="0">
-                <a:solidFill>
-                  <a:srgbClr val="17364A"/>
-                </a:solidFill>
-                <a:latin typeface="Aptos" pitchFamily="34" charset="0"/>
-                <a:ea typeface="Aptos" pitchFamily="34" charset="-122"/>
-                <a:cs typeface="Aptos" pitchFamily="34" charset="-120"/>
-              </a:rPr>
-              <a:t>4. Which statement is most accurate?</a:t>
-            </a:r>
-            <a:endParaRPr lang="en-US" sz="1700" dirty="0"/>
-          </a:p>
-        </p:txBody>
-      </p:sp>
-      <p:sp>
-        <p:nvSpPr>
-          <p:cNvPr id="11" name="Shape 9"/>
+            <a:endParaRPr lang="en-US" sz="2100" dirty="0"/>
+          </a:p>
+        </p:txBody>
+      </p:sp>
+      <p:sp>
+        <p:nvSpPr>
+          <p:cNvPr id="12" name="Shape 10"/>
           <p:cNvSpPr/>
           <p:nvPr/>
         </p:nvSpPr>
@@ -10176,14 +10799,14 @@
       </p:sp>
       <p:sp>
         <p:nvSpPr>
-          <p:cNvPr id="12" name="Text 10"/>
+          <p:cNvPr id="13" name="Text 11"/>
           <p:cNvSpPr/>
           <p:nvPr/>
         </p:nvSpPr>
         <p:spPr>
           <a:xfrm>
             <a:off x="8074152" y="1563624"/>
-            <a:ext cx="2825496" cy="201168"/>
+            <a:ext cx="2825496" cy="256032"/>
           </a:xfrm>
           <a:prstGeom prst="rect">
             <a:avLst/>
@@ -10199,7 +10822,7 @@
               <a:buNone/>
             </a:pPr>
             <a:r>
-              <a:rPr lang="en-US" sz="950" b="1" dirty="0">
+              <a:rPr lang="en-US" sz="1300" b="1" dirty="0">
                 <a:solidFill>
                   <a:srgbClr val="0068B7"/>
                 </a:solidFill>
@@ -10209,20 +10832,20 @@
               </a:rPr>
               <a:t>Key idea</a:t>
             </a:r>
-            <a:endParaRPr lang="en-US" sz="950" dirty="0"/>
-          </a:p>
-        </p:txBody>
-      </p:sp>
-      <p:sp>
-        <p:nvSpPr>
-          <p:cNvPr id="13" name="Text 11"/>
-          <p:cNvSpPr/>
-          <p:nvPr/>
-        </p:nvSpPr>
-        <p:spPr>
-          <a:xfrm>
-            <a:off x="8074152" y="1856232"/>
-            <a:ext cx="2825496" cy="1261872"/>
+            <a:endParaRPr lang="en-US" sz="1300" dirty="0"/>
+          </a:p>
+        </p:txBody>
+      </p:sp>
+      <p:sp>
+        <p:nvSpPr>
+          <p:cNvPr id="14" name="Text 12"/>
+          <p:cNvSpPr/>
+          <p:nvPr/>
+        </p:nvSpPr>
+        <p:spPr>
+          <a:xfrm>
+            <a:off x="8074152" y="1920240"/>
+            <a:ext cx="2825496" cy="1188720"/>
           </a:xfrm>
           <a:prstGeom prst="rect">
             <a:avLst/>
@@ -10240,7 +10863,7 @@
               <a:buNone/>
             </a:pPr>
             <a:r>
-              <a:rPr lang="en-US" sz="1250" dirty="0">
+              <a:rPr lang="en-US" sz="1550" dirty="0">
                 <a:solidFill>
                   <a:srgbClr val="17364A"/>
                 </a:solidFill>
@@ -10250,13 +10873,13 @@
               </a:rPr>
               <a:t>1. What is an anomaly in a public health time series?</a:t>
             </a:r>
-            <a:endParaRPr lang="en-US" sz="1250" dirty="0"/>
-          </a:p>
-        </p:txBody>
-      </p:sp>
-      <p:sp>
-        <p:nvSpPr>
-          <p:cNvPr id="14" name="Shape 12"/>
+            <a:endParaRPr lang="en-US" sz="1550" dirty="0"/>
+          </a:p>
+        </p:txBody>
+      </p:sp>
+      <p:sp>
+        <p:nvSpPr>
+          <p:cNvPr id="15" name="Shape 13"/>
           <p:cNvSpPr/>
           <p:nvPr/>
         </p:nvSpPr>
@@ -10283,14 +10906,14 @@
       </p:sp>
       <p:sp>
         <p:nvSpPr>
-          <p:cNvPr id="15" name="Text 13"/>
+          <p:cNvPr id="16" name="Text 14"/>
           <p:cNvSpPr/>
           <p:nvPr/>
         </p:nvSpPr>
         <p:spPr>
           <a:xfrm>
             <a:off x="8074152" y="3666744"/>
-            <a:ext cx="2825496" cy="201168"/>
+            <a:ext cx="2825496" cy="256032"/>
           </a:xfrm>
           <a:prstGeom prst="rect">
             <a:avLst/>
@@ -10306,7 +10929,7 @@
               <a:buNone/>
             </a:pPr>
             <a:r>
-              <a:rPr lang="en-US" sz="950" b="1" dirty="0">
+              <a:rPr lang="en-US" sz="1300" b="1" dirty="0">
                 <a:solidFill>
                   <a:srgbClr val="0068B7"/>
                 </a:solidFill>
@@ -10316,20 +10939,20 @@
               </a:rPr>
               <a:t>Use this for</a:t>
             </a:r>
-            <a:endParaRPr lang="en-US" sz="950" dirty="0"/>
-          </a:p>
-        </p:txBody>
-      </p:sp>
-      <p:sp>
-        <p:nvSpPr>
-          <p:cNvPr id="16" name="Text 14"/>
-          <p:cNvSpPr/>
-          <p:nvPr/>
-        </p:nvSpPr>
-        <p:spPr>
-          <a:xfrm>
-            <a:off x="8074152" y="3959352"/>
-            <a:ext cx="2825496" cy="1170432"/>
+            <a:endParaRPr lang="en-US" sz="1300" dirty="0"/>
+          </a:p>
+        </p:txBody>
+      </p:sp>
+      <p:sp>
+        <p:nvSpPr>
+          <p:cNvPr id="17" name="Text 15"/>
+          <p:cNvSpPr/>
+          <p:nvPr/>
+        </p:nvSpPr>
+        <p:spPr>
+          <a:xfrm>
+            <a:off x="8074152" y="4023360"/>
+            <a:ext cx="2825496" cy="1097280"/>
           </a:xfrm>
           <a:prstGeom prst="rect">
             <a:avLst/>
@@ -10347,7 +10970,7 @@
               <a:buNone/>
             </a:pPr>
             <a:r>
-              <a:rPr lang="en-US" sz="1250" dirty="0">
+              <a:rPr lang="en-US" sz="1550" dirty="0">
                 <a:solidFill>
                   <a:srgbClr val="17364A"/>
                 </a:solidFill>
@@ -10357,7 +10980,7 @@
               </a:rPr>
               <a:t>Connect the concept to public health decisions, safeguards, documentation, or implementation work.</a:t>
             </a:r>
-            <a:endParaRPr lang="en-US" sz="1250" dirty="0"/>
+            <a:endParaRPr lang="en-US" sz="1550" dirty="0"/>
           </a:p>
         </p:txBody>
       </p:sp>
@@ -10554,7 +11177,7 @@
                 <a:ea typeface="Aptos" pitchFamily="34" charset="-122"/>
                 <a:cs typeface="Aptos" pitchFamily="34" charset="-120"/>
               </a:rPr>
-              <a:t>© Paula Soper</a:t>
+              <a:t>Â© Paula Soper</a:t>
             </a:r>
             <a:endParaRPr lang="en-US" sz="800" dirty="0"/>
           </a:p>
@@ -10562,7 +11185,46 @@
       </p:sp>
       <p:sp>
         <p:nvSpPr>
-          <p:cNvPr id="7" name="Shape 5"/>
+          <p:cNvPr id="7" name="Text 5"/>
+          <p:cNvSpPr/>
+          <p:nvPr/>
+        </p:nvSpPr>
+        <p:spPr>
+          <a:xfrm>
+            <a:off x="11137392" y="6510528"/>
+            <a:ext cx="411480" cy="201168"/>
+          </a:xfrm>
+          <a:prstGeom prst="rect">
+            <a:avLst/>
+          </a:prstGeom>
+          <a:noFill/>
+          <a:ln/>
+        </p:spPr>
+        <p:txBody>
+          <a:bodyPr wrap="square" lIns="0" tIns="0" rIns="0" bIns="0" rtlCol="0" anchor="ctr"/>
+          <a:lstStyle/>
+          <a:p>
+            <a:pPr algn="r" indent="0" marL="0">
+              <a:buNone/>
+            </a:pPr>
+            <a:r>
+              <a:rPr lang="en-US" sz="900" dirty="0">
+                <a:solidFill>
+                  <a:srgbClr val="5F7181"/>
+                </a:solidFill>
+                <a:latin typeface="Aptos" pitchFamily="34" charset="0"/>
+                <a:ea typeface="Aptos" pitchFamily="34" charset="-122"/>
+                <a:cs typeface="Aptos" pitchFamily="34" charset="-120"/>
+              </a:rPr>
+              <a:t>22</a:t>
+            </a:r>
+            <a:endParaRPr lang="en-US" sz="900" dirty="0"/>
+          </a:p>
+        </p:txBody>
+      </p:sp>
+      <p:sp>
+        <p:nvSpPr>
+          <p:cNvPr id="8" name="Shape 6"/>
           <p:cNvSpPr/>
           <p:nvPr/>
         </p:nvSpPr>
@@ -10587,7 +11249,7 @@
       </p:sp>
       <p:sp>
         <p:nvSpPr>
-          <p:cNvPr id="8" name="Text 6"/>
+          <p:cNvPr id="9" name="Text 7"/>
           <p:cNvSpPr/>
           <p:nvPr/>
         </p:nvSpPr>
@@ -10626,14 +11288,14 @@
       </p:sp>
       <p:sp>
         <p:nvSpPr>
-          <p:cNvPr id="9" name="Text 7"/>
+          <p:cNvPr id="10" name="Text 8"/>
           <p:cNvSpPr/>
           <p:nvPr/>
         </p:nvSpPr>
         <p:spPr>
           <a:xfrm>
             <a:off x="640080" y="621792"/>
-            <a:ext cx="10881360" cy="566928"/>
+            <a:ext cx="10881360" cy="713232"/>
           </a:xfrm>
           <a:prstGeom prst="rect">
             <a:avLst/>
@@ -10651,7 +11313,7 @@
               <a:buNone/>
             </a:pPr>
             <a:r>
-              <a:rPr lang="en-US" sz="2700" b="1" dirty="0">
+              <a:rPr lang="en-US" sz="3400" b="1" dirty="0">
                 <a:solidFill>
                   <a:srgbClr val="003A63"/>
                 </a:solidFill>
@@ -10661,20 +11323,20 @@
               </a:rPr>
               <a:t>References and Resources</a:t>
             </a:r>
-            <a:endParaRPr lang="en-US" sz="2700" dirty="0"/>
-          </a:p>
-        </p:txBody>
-      </p:sp>
-      <p:sp>
-        <p:nvSpPr>
-          <p:cNvPr id="10" name="Text 8"/>
-          <p:cNvSpPr/>
-          <p:nvPr/>
-        </p:nvSpPr>
-        <p:spPr>
-          <a:xfrm>
-            <a:off x="868680" y="1417320"/>
-            <a:ext cx="6675120" cy="4434840"/>
+            <a:endParaRPr lang="en-US" sz="3400" dirty="0"/>
+          </a:p>
+        </p:txBody>
+      </p:sp>
+      <p:sp>
+        <p:nvSpPr>
+          <p:cNvPr id="11" name="Text 9"/>
+          <p:cNvSpPr/>
+          <p:nvPr/>
+        </p:nvSpPr>
+        <p:spPr>
+          <a:xfrm>
+            <a:off x="868680" y="1508760"/>
+            <a:ext cx="6537960" cy="4160520"/>
           </a:xfrm>
           <a:prstGeom prst="rect">
             <a:avLst/>
@@ -10689,7 +11351,7 @@
           <a:lstStyle/>
           <a:p>
             <a:r>
-              <a:rPr lang="en-US" sz="1700" dirty="0">
+              <a:rPr lang="en-US" sz="2100" dirty="0">
                 <a:solidFill>
                   <a:srgbClr val="17364A"/>
                 </a:solidFill>
@@ -10699,11 +11361,11 @@
               </a:rPr>
               <a:t>CDC National Syndromic Surveillance Program: https://www.cdc.gov/nssp/</a:t>
             </a:r>
-            <a:endParaRPr lang="en-US" sz="1700" dirty="0"/>
-          </a:p>
-          <a:p>
-            <a:r>
-              <a:rPr lang="en-US" sz="1700" dirty="0">
+            <a:endParaRPr lang="en-US" sz="2100" dirty="0"/>
+          </a:p>
+          <a:p>
+            <a:r>
+              <a:rPr lang="en-US" sz="2100" dirty="0">
                 <a:solidFill>
                   <a:srgbClr val="17364A"/>
                 </a:solidFill>
@@ -10713,11 +11375,11 @@
               </a:rPr>
               <a:t>CDC Evaluation Framework: https://www.cdc.gov/evaluation/</a:t>
             </a:r>
-            <a:endParaRPr lang="en-US" sz="1700" dirty="0"/>
-          </a:p>
-          <a:p>
-            <a:r>
-              <a:rPr lang="en-US" sz="1700" dirty="0">
+            <a:endParaRPr lang="en-US" sz="2100" dirty="0"/>
+          </a:p>
+          <a:p>
+            <a:r>
+              <a:rPr lang="en-US" sz="2100" dirty="0">
                 <a:solidFill>
                   <a:srgbClr val="17364A"/>
                 </a:solidFill>
@@ -10725,29 +11387,15 @@
                 <a:ea typeface="Aptos" pitchFamily="34" charset="-122"/>
                 <a:cs typeface="Aptos" pitchFamily="34" charset="-120"/>
               </a:rPr>
-              <a:t>NIST Artificial Intelligence Risk Management Framework: https://www.nist.gov/itl/ai-risk-management-framework</a:t>
-            </a:r>
-            <a:endParaRPr lang="en-US" sz="1700" dirty="0"/>
-          </a:p>
-          <a:p>
-            <a:r>
-              <a:rPr lang="en-US" sz="1700" dirty="0">
-                <a:solidFill>
-                  <a:srgbClr val="17364A"/>
-                </a:solidFill>
-                <a:latin typeface="Aptos" pitchFamily="34" charset="0"/>
-                <a:ea typeface="Aptos" pitchFamily="34" charset="-122"/>
-                <a:cs typeface="Aptos" pitchFamily="34" charset="-120"/>
-              </a:rPr>
-              <a:t>CDC Public Health Data Strategy: https://www.cdc.gov/public-health-data-strategy/php/about/index.html</a:t>
-            </a:r>
-            <a:endParaRPr lang="en-US" sz="1700" dirty="0"/>
-          </a:p>
-        </p:txBody>
-      </p:sp>
-      <p:sp>
-        <p:nvSpPr>
-          <p:cNvPr id="11" name="Shape 9"/>
+              <a:t>NIST Artificial Intelligence Risk Management Framework:.</a:t>
+            </a:r>
+            <a:endParaRPr lang="en-US" sz="2100" dirty="0"/>
+          </a:p>
+        </p:txBody>
+      </p:sp>
+      <p:sp>
+        <p:nvSpPr>
+          <p:cNvPr id="12" name="Shape 10"/>
           <p:cNvSpPr/>
           <p:nvPr/>
         </p:nvSpPr>
@@ -10774,14 +11422,14 @@
       </p:sp>
       <p:sp>
         <p:nvSpPr>
-          <p:cNvPr id="12" name="Text 10"/>
+          <p:cNvPr id="13" name="Text 11"/>
           <p:cNvSpPr/>
           <p:nvPr/>
         </p:nvSpPr>
         <p:spPr>
           <a:xfrm>
             <a:off x="8074152" y="1563624"/>
-            <a:ext cx="2825496" cy="201168"/>
+            <a:ext cx="2825496" cy="256032"/>
           </a:xfrm>
           <a:prstGeom prst="rect">
             <a:avLst/>
@@ -10797,7 +11445,7 @@
               <a:buNone/>
             </a:pPr>
             <a:r>
-              <a:rPr lang="en-US" sz="950" b="1" dirty="0">
+              <a:rPr lang="en-US" sz="1300" b="1" dirty="0">
                 <a:solidFill>
                   <a:srgbClr val="0068B7"/>
                 </a:solidFill>
@@ -10807,20 +11455,20 @@
               </a:rPr>
               <a:t>Key idea</a:t>
             </a:r>
-            <a:endParaRPr lang="en-US" sz="950" dirty="0"/>
-          </a:p>
-        </p:txBody>
-      </p:sp>
-      <p:sp>
-        <p:nvSpPr>
-          <p:cNvPr id="13" name="Text 11"/>
-          <p:cNvSpPr/>
-          <p:nvPr/>
-        </p:nvSpPr>
-        <p:spPr>
-          <a:xfrm>
-            <a:off x="8074152" y="1856232"/>
-            <a:ext cx="2825496" cy="1261872"/>
+            <a:endParaRPr lang="en-US" sz="1300" dirty="0"/>
+          </a:p>
+        </p:txBody>
+      </p:sp>
+      <p:sp>
+        <p:nvSpPr>
+          <p:cNvPr id="14" name="Text 12"/>
+          <p:cNvSpPr/>
+          <p:nvPr/>
+        </p:nvSpPr>
+        <p:spPr>
+          <a:xfrm>
+            <a:off x="8074152" y="1920240"/>
+            <a:ext cx="2825496" cy="1188720"/>
           </a:xfrm>
           <a:prstGeom prst="rect">
             <a:avLst/>
@@ -10838,7 +11486,7 @@
               <a:buNone/>
             </a:pPr>
             <a:r>
-              <a:rPr lang="en-US" sz="1250" dirty="0">
+              <a:rPr lang="en-US" sz="1550" dirty="0">
                 <a:solidFill>
                   <a:srgbClr val="17364A"/>
                 </a:solidFill>
@@ -10848,13 +11496,13 @@
               </a:rPr>
               <a:t>CDC National Syndromic Surveillance Program: https://www.cdc.gov/nssp/</a:t>
             </a:r>
-            <a:endParaRPr lang="en-US" sz="1250" dirty="0"/>
-          </a:p>
-        </p:txBody>
-      </p:sp>
-      <p:sp>
-        <p:nvSpPr>
-          <p:cNvPr id="14" name="Shape 12"/>
+            <a:endParaRPr lang="en-US" sz="1550" dirty="0"/>
+          </a:p>
+        </p:txBody>
+      </p:sp>
+      <p:sp>
+        <p:nvSpPr>
+          <p:cNvPr id="15" name="Shape 13"/>
           <p:cNvSpPr/>
           <p:nvPr/>
         </p:nvSpPr>
@@ -10881,14 +11529,14 @@
       </p:sp>
       <p:sp>
         <p:nvSpPr>
-          <p:cNvPr id="15" name="Text 13"/>
+          <p:cNvPr id="16" name="Text 14"/>
           <p:cNvSpPr/>
           <p:nvPr/>
         </p:nvSpPr>
         <p:spPr>
           <a:xfrm>
             <a:off x="8074152" y="3666744"/>
-            <a:ext cx="2825496" cy="201168"/>
+            <a:ext cx="2825496" cy="256032"/>
           </a:xfrm>
           <a:prstGeom prst="rect">
             <a:avLst/>
@@ -10904,7 +11552,7 @@
               <a:buNone/>
             </a:pPr>
             <a:r>
-              <a:rPr lang="en-US" sz="950" b="1" dirty="0">
+              <a:rPr lang="en-US" sz="1300" b="1" dirty="0">
                 <a:solidFill>
                   <a:srgbClr val="0068B7"/>
                 </a:solidFill>
@@ -10914,20 +11562,20 @@
               </a:rPr>
               <a:t>Use this for</a:t>
             </a:r>
-            <a:endParaRPr lang="en-US" sz="950" dirty="0"/>
-          </a:p>
-        </p:txBody>
-      </p:sp>
-      <p:sp>
-        <p:nvSpPr>
-          <p:cNvPr id="16" name="Text 14"/>
-          <p:cNvSpPr/>
-          <p:nvPr/>
-        </p:nvSpPr>
-        <p:spPr>
-          <a:xfrm>
-            <a:off x="8074152" y="3959352"/>
-            <a:ext cx="2825496" cy="1170432"/>
+            <a:endParaRPr lang="en-US" sz="1300" dirty="0"/>
+          </a:p>
+        </p:txBody>
+      </p:sp>
+      <p:sp>
+        <p:nvSpPr>
+          <p:cNvPr id="17" name="Text 15"/>
+          <p:cNvSpPr/>
+          <p:nvPr/>
+        </p:nvSpPr>
+        <p:spPr>
+          <a:xfrm>
+            <a:off x="8074152" y="4023360"/>
+            <a:ext cx="2825496" cy="1097280"/>
           </a:xfrm>
           <a:prstGeom prst="rect">
             <a:avLst/>
@@ -10945,7 +11593,7 @@
               <a:buNone/>
             </a:pPr>
             <a:r>
-              <a:rPr lang="en-US" sz="1250" dirty="0">
+              <a:rPr lang="en-US" sz="1550" dirty="0">
                 <a:solidFill>
                   <a:srgbClr val="17364A"/>
                 </a:solidFill>
@@ -10955,7 +11603,7 @@
               </a:rPr>
               <a:t>Connect the concept to public health decisions, safeguards, documentation, or implementation work.</a:t>
             </a:r>
-            <a:endParaRPr lang="en-US" sz="1250" dirty="0"/>
+            <a:endParaRPr lang="en-US" sz="1550" dirty="0"/>
           </a:p>
         </p:txBody>
       </p:sp>
@@ -11152,7 +11800,7 @@
                 <a:ea typeface="Aptos" pitchFamily="34" charset="-122"/>
                 <a:cs typeface="Aptos" pitchFamily="34" charset="-120"/>
               </a:rPr>
-              <a:t>© Paula Soper</a:t>
+              <a:t>Â© Paula Soper</a:t>
             </a:r>
             <a:endParaRPr lang="en-US" sz="800" dirty="0"/>
           </a:p>
@@ -11166,8 +11814,47 @@
         </p:nvSpPr>
         <p:spPr>
           <a:xfrm>
+            <a:off x="11137392" y="6510528"/>
+            <a:ext cx="411480" cy="201168"/>
+          </a:xfrm>
+          <a:prstGeom prst="rect">
+            <a:avLst/>
+          </a:prstGeom>
+          <a:noFill/>
+          <a:ln/>
+        </p:spPr>
+        <p:txBody>
+          <a:bodyPr wrap="square" lIns="0" tIns="0" rIns="0" bIns="0" rtlCol="0" anchor="ctr"/>
+          <a:lstStyle/>
+          <a:p>
+            <a:pPr algn="r" indent="0" marL="0">
+              <a:buNone/>
+            </a:pPr>
+            <a:r>
+              <a:rPr lang="en-US" sz="900" dirty="0">
+                <a:solidFill>
+                  <a:srgbClr val="5F7181"/>
+                </a:solidFill>
+                <a:latin typeface="Aptos" pitchFamily="34" charset="0"/>
+                <a:ea typeface="Aptos" pitchFamily="34" charset="-122"/>
+                <a:cs typeface="Aptos" pitchFamily="34" charset="-120"/>
+              </a:rPr>
+              <a:t>3</a:t>
+            </a:r>
+            <a:endParaRPr lang="en-US" sz="900" dirty="0"/>
+          </a:p>
+        </p:txBody>
+      </p:sp>
+      <p:sp>
+        <p:nvSpPr>
+          <p:cNvPr id="8" name="Text 6"/>
+          <p:cNvSpPr/>
+          <p:nvPr/>
+        </p:nvSpPr>
+        <p:spPr>
+          <a:xfrm>
             <a:off x="640080" y="658368"/>
-            <a:ext cx="10881360" cy="566928"/>
+            <a:ext cx="10881360" cy="713232"/>
           </a:xfrm>
           <a:prstGeom prst="rect">
             <a:avLst/>
@@ -11185,7 +11872,7 @@
               <a:buNone/>
             </a:pPr>
             <a:r>
-              <a:rPr lang="en-US" sz="2700" b="1" dirty="0">
+              <a:rPr lang="en-US" sz="3400" b="1" dirty="0">
                 <a:solidFill>
                   <a:srgbClr val="003A63"/>
                 </a:solidFill>
@@ -11195,20 +11882,20 @@
               </a:rPr>
               <a:t>How this module connects to the playbook</a:t>
             </a:r>
-            <a:endParaRPr lang="en-US" sz="2700" dirty="0"/>
-          </a:p>
-        </p:txBody>
-      </p:sp>
-      <p:sp>
-        <p:nvSpPr>
-          <p:cNvPr id="8" name="Text 6"/>
-          <p:cNvSpPr/>
-          <p:nvPr/>
-        </p:nvSpPr>
-        <p:spPr>
-          <a:xfrm>
-            <a:off x="868680" y="1417320"/>
-            <a:ext cx="6903720" cy="4480560"/>
+            <a:endParaRPr lang="en-US" sz="3400" dirty="0"/>
+          </a:p>
+        </p:txBody>
+      </p:sp>
+      <p:sp>
+        <p:nvSpPr>
+          <p:cNvPr id="9" name="Text 7"/>
+          <p:cNvSpPr/>
+          <p:nvPr/>
+        </p:nvSpPr>
+        <p:spPr>
+          <a:xfrm>
+            <a:off x="868680" y="1508760"/>
+            <a:ext cx="6812280" cy="3977640"/>
           </a:xfrm>
           <a:prstGeom prst="rect">
             <a:avLst/>
@@ -11223,7 +11910,7 @@
           <a:lstStyle/>
           <a:p>
             <a:r>
-              <a:rPr lang="en-US" sz="1540" dirty="0">
+              <a:rPr lang="en-US" sz="1900" dirty="0">
                 <a:solidFill>
                   <a:srgbClr val="17364A"/>
                 </a:solidFill>
@@ -11231,13 +11918,13 @@
                 <a:ea typeface="Aptos" pitchFamily="34" charset="-122"/>
                 <a:cs typeface="Aptos" pitchFamily="34" charset="-120"/>
               </a:rPr>
-              <a:t>Play 13: Monitor and Evaluate AI Systems - This lesson informs Play 13 by helping learners connect the lesson topic to monitor and.</a:t>
-            </a:r>
-            <a:endParaRPr lang="en-US" sz="1540" dirty="0"/>
-          </a:p>
-          <a:p>
-            <a:r>
-              <a:rPr lang="en-US" sz="1540" dirty="0">
+              <a:t>Play 13: Monitor and Evaluate AI Systems - This lesson informs Play 13 by helping learners connect the.</a:t>
+            </a:r>
+            <a:endParaRPr lang="en-US" sz="1900" dirty="0"/>
+          </a:p>
+          <a:p>
+            <a:r>
+              <a:rPr lang="en-US" sz="1900" dirty="0">
                 <a:solidFill>
                   <a:srgbClr val="17364A"/>
                 </a:solidFill>
@@ -11245,13 +11932,13 @@
                 <a:ea typeface="Aptos" pitchFamily="34" charset="-122"/>
                 <a:cs typeface="Aptos" pitchFamily="34" charset="-120"/>
               </a:rPr>
-              <a:t>Play 12: Execute Governance and Oversight - This lesson informs Play 12 by helping learners connect the lesson topic to execute.</a:t>
-            </a:r>
-            <a:endParaRPr lang="en-US" sz="1540" dirty="0"/>
-          </a:p>
-          <a:p>
-            <a:r>
-              <a:rPr lang="en-US" sz="1540" dirty="0">
+              <a:t>Play 12: Execute Governance and Oversight - This lesson informs Play 12 by helping learners connect the.</a:t>
+            </a:r>
+            <a:endParaRPr lang="en-US" sz="1900" dirty="0"/>
+          </a:p>
+          <a:p>
+            <a:r>
+              <a:rPr lang="en-US" sz="1900" dirty="0">
                 <a:solidFill>
                   <a:srgbClr val="17364A"/>
                 </a:solidFill>
@@ -11259,13 +11946,13 @@
                 <a:ea typeface="Aptos" pitchFamily="34" charset="-122"/>
                 <a:cs typeface="Aptos" pitchFamily="34" charset="-120"/>
               </a:rPr>
-              <a:t>Play 1: Vision &amp; Guardrails - This lesson informs Play 1 by helping learners connect the lesson topic to vision &amp; guardrails work in.</a:t>
-            </a:r>
-            <a:endParaRPr lang="en-US" sz="1540" dirty="0"/>
-          </a:p>
-          <a:p>
-            <a:r>
-              <a:rPr lang="en-US" sz="1540" dirty="0">
+              <a:t>Play 1: Vision &amp; Guardrails - This lesson informs Play 1 by helping learners connect the lesson topic to.</a:t>
+            </a:r>
+            <a:endParaRPr lang="en-US" sz="1900" dirty="0"/>
+          </a:p>
+          <a:p>
+            <a:r>
+              <a:rPr lang="en-US" sz="1900" dirty="0">
                 <a:solidFill>
                   <a:srgbClr val="17364A"/>
                 </a:solidFill>
@@ -11273,15 +11960,15 @@
                 <a:ea typeface="Aptos" pitchFamily="34" charset="-122"/>
                 <a:cs typeface="Aptos" pitchFamily="34" charset="-120"/>
               </a:rPr>
-              <a:t>Play 11: Build and Deploy AI Solutions - This lesson informs Play 11 by helping learners connect the lesson topic to build and deploy.</a:t>
-            </a:r>
-            <a:endParaRPr lang="en-US" sz="1540" dirty="0"/>
-          </a:p>
-        </p:txBody>
-      </p:sp>
-      <p:sp>
-        <p:nvSpPr>
-          <p:cNvPr id="9" name="Shape 7"/>
+              <a:t>Play 11: Build and Deploy AI Solutions - This lesson informs Play 11 by helping learners connect the lesson.</a:t>
+            </a:r>
+            <a:endParaRPr lang="en-US" sz="1900" dirty="0"/>
+          </a:p>
+        </p:txBody>
+      </p:sp>
+      <p:sp>
+        <p:nvSpPr>
+          <p:cNvPr id="10" name="Shape 8"/>
           <p:cNvSpPr/>
           <p:nvPr/>
         </p:nvSpPr>
@@ -11308,14 +11995,14 @@
       </p:sp>
       <p:sp>
         <p:nvSpPr>
-          <p:cNvPr id="10" name="Text 8"/>
+          <p:cNvPr id="11" name="Text 9"/>
           <p:cNvSpPr/>
           <p:nvPr/>
         </p:nvSpPr>
         <p:spPr>
           <a:xfrm>
             <a:off x="8211312" y="1563624"/>
-            <a:ext cx="2734056" cy="201168"/>
+            <a:ext cx="2734056" cy="256032"/>
           </a:xfrm>
           <a:prstGeom prst="rect">
             <a:avLst/>
@@ -11331,7 +12018,7 @@
               <a:buNone/>
             </a:pPr>
             <a:r>
-              <a:rPr lang="en-US" sz="950" b="1" dirty="0">
+              <a:rPr lang="en-US" sz="1300" b="1" dirty="0">
                 <a:solidFill>
                   <a:srgbClr val="0068B7"/>
                 </a:solidFill>
@@ -11341,20 +12028,20 @@
               </a:rPr>
               <a:t>Apply the lesson</a:t>
             </a:r>
-            <a:endParaRPr lang="en-US" sz="950" dirty="0"/>
-          </a:p>
-        </p:txBody>
-      </p:sp>
-      <p:sp>
-        <p:nvSpPr>
-          <p:cNvPr id="11" name="Text 9"/>
-          <p:cNvSpPr/>
-          <p:nvPr/>
-        </p:nvSpPr>
-        <p:spPr>
-          <a:xfrm>
-            <a:off x="8211312" y="1856232"/>
-            <a:ext cx="2734056" cy="1536192"/>
+            <a:endParaRPr lang="en-US" sz="1300" dirty="0"/>
+          </a:p>
+        </p:txBody>
+      </p:sp>
+      <p:sp>
+        <p:nvSpPr>
+          <p:cNvPr id="12" name="Text 10"/>
+          <p:cNvSpPr/>
+          <p:nvPr/>
+        </p:nvSpPr>
+        <p:spPr>
+          <a:xfrm>
+            <a:off x="8211312" y="1920240"/>
+            <a:ext cx="2734056" cy="1463040"/>
           </a:xfrm>
           <a:prstGeom prst="rect">
             <a:avLst/>
@@ -11372,7 +12059,7 @@
               <a:buNone/>
             </a:pPr>
             <a:r>
-              <a:rPr lang="en-US" sz="1250" dirty="0">
+              <a:rPr lang="en-US" sz="1550" dirty="0">
                 <a:solidFill>
                   <a:srgbClr val="17364A"/>
                 </a:solidFill>
@@ -11382,32 +12069,32 @@
               </a:rPr>
               <a:t>Use the related plays to identify decisions, participants, timing, approvals, and documentation needed for responsible implementation.</a:t>
             </a:r>
-            <a:endParaRPr lang="en-US" sz="1250" dirty="0"/>
-          </a:p>
-        </p:txBody>
-      </p:sp>
-      <p:sp>
-        <p:nvSpPr>
-          <p:cNvPr id="12" name="Shape 10"/>
-          <p:cNvSpPr/>
-          <p:nvPr/>
-        </p:nvSpPr>
-        <p:spPr>
-          <a:xfrm>
-            <a:off x="8046720" y="3794760"/>
-            <a:ext cx="3063240" cy="1508760"/>
+            <a:endParaRPr lang="en-US" sz="1550" dirty="0"/>
+          </a:p>
+        </p:txBody>
+      </p:sp>
+      <p:sp>
+        <p:nvSpPr>
+          <p:cNvPr id="13" name="Shape 11"/>
+          <p:cNvSpPr/>
+          <p:nvPr/>
+        </p:nvSpPr>
+        <p:spPr>
+          <a:xfrm>
+            <a:off x="7818120" y="3977640"/>
+            <a:ext cx="972312" cy="749808"/>
           </a:xfrm>
           <a:prstGeom prst="roundRect">
             <a:avLst>
-              <a:gd name="adj" fmla="val 7273"/>
+              <a:gd name="adj" fmla="val 14634"/>
             </a:avLst>
           </a:prstGeom>
           <a:solidFill>
-            <a:srgbClr val="FFF4D9"/>
+            <a:srgbClr val="0068B7"/>
           </a:solidFill>
           <a:ln w="12700">
             <a:solidFill>
-              <a:srgbClr val="B9D7E6"/>
+              <a:srgbClr val="0068B7"/>
             </a:solidFill>
             <a:prstDash val="solid"/>
           </a:ln>
@@ -11415,81 +12102,256 @@
       </p:sp>
       <p:sp>
         <p:nvSpPr>
-          <p:cNvPr id="13" name="Text 11"/>
-          <p:cNvSpPr/>
-          <p:nvPr/>
-        </p:nvSpPr>
-        <p:spPr>
-          <a:xfrm>
-            <a:off x="8211312" y="3941064"/>
-            <a:ext cx="2734056" cy="201168"/>
-          </a:xfrm>
-          <a:prstGeom prst="rect">
-            <a:avLst/>
-          </a:prstGeom>
-          <a:noFill/>
-          <a:ln/>
-        </p:spPr>
-        <p:txBody>
-          <a:bodyPr wrap="square" lIns="0" tIns="0" rIns="0" bIns="0" rtlCol="0" anchor="ctr"/>
-          <a:lstStyle/>
-          <a:p>
-            <a:pPr indent="0" marL="0">
-              <a:buNone/>
-            </a:pPr>
-            <a:r>
-              <a:rPr lang="en-US" sz="950" b="1" dirty="0">
-                <a:solidFill>
-                  <a:srgbClr val="0068B7"/>
-                </a:solidFill>
-                <a:latin typeface="Aptos" pitchFamily="34" charset="0"/>
-                <a:ea typeface="Aptos" pitchFamily="34" charset="-122"/>
-                <a:cs typeface="Aptos" pitchFamily="34" charset="-120"/>
-              </a:rPr>
-              <a:t>Keep in mind</a:t>
-            </a:r>
-            <a:endParaRPr lang="en-US" sz="950" dirty="0"/>
-          </a:p>
-        </p:txBody>
-      </p:sp>
-      <p:sp>
-        <p:nvSpPr>
           <p:cNvPr id="14" name="Text 12"/>
           <p:cNvSpPr/>
           <p:nvPr/>
         </p:nvSpPr>
         <p:spPr>
           <a:xfrm>
-            <a:off x="8211312" y="4233672"/>
-            <a:ext cx="2734056" cy="941832"/>
-          </a:xfrm>
-          <a:prstGeom prst="rect">
-            <a:avLst/>
-          </a:prstGeom>
-          <a:noFill/>
-          <a:ln/>
-        </p:spPr>
-        <p:txBody>
-          <a:bodyPr wrap="square" lIns="0" tIns="0" rIns="0" bIns="0" rtlCol="0" anchor="t">
+            <a:off x="7891272" y="4169664"/>
+            <a:ext cx="826008" cy="310896"/>
+          </a:xfrm>
+          <a:prstGeom prst="rect">
+            <a:avLst/>
+          </a:prstGeom>
+          <a:noFill/>
+          <a:ln/>
+        </p:spPr>
+        <p:txBody>
+          <a:bodyPr wrap="square" lIns="0" tIns="0" rIns="0" bIns="0" rtlCol="0" anchor="ctr">
             <a:normAutofit/>
           </a:bodyPr>
           <a:lstStyle/>
           <a:p>
-            <a:pPr indent="0" marL="0">
-              <a:buNone/>
-            </a:pPr>
-            <a:r>
-              <a:rPr lang="en-US" sz="1250" dirty="0">
-                <a:solidFill>
-                  <a:srgbClr val="17364A"/>
-                </a:solidFill>
-                <a:latin typeface="Aptos" pitchFamily="34" charset="0"/>
-                <a:ea typeface="Aptos" pitchFamily="34" charset="-122"/>
-                <a:cs typeface="Aptos" pitchFamily="34" charset="-120"/>
-              </a:rPr>
-              <a:t>The playbook connection helps turn training into agency work, not just individual knowledge.</a:t>
-            </a:r>
-            <a:endParaRPr lang="en-US" sz="1250" dirty="0"/>
+            <a:pPr algn="ctr" indent="0" marL="0">
+              <a:buNone/>
+            </a:pPr>
+            <a:r>
+              <a:rPr lang="en-US" sz="1500" b="1" dirty="0">
+                <a:solidFill>
+                  <a:srgbClr val="FFFFFF"/>
+                </a:solidFill>
+                <a:latin typeface="Aptos" pitchFamily="34" charset="0"/>
+                <a:ea typeface="Aptos" pitchFamily="34" charset="-122"/>
+                <a:cs typeface="Aptos" pitchFamily="34" charset="-120"/>
+              </a:rPr>
+              <a:t>Lesson</a:t>
+            </a:r>
+            <a:endParaRPr lang="en-US" sz="1500" dirty="0"/>
+          </a:p>
+        </p:txBody>
+      </p:sp>
+      <p:sp>
+        <p:nvSpPr>
+          <p:cNvPr id="15" name="Text 13"/>
+          <p:cNvSpPr/>
+          <p:nvPr/>
+        </p:nvSpPr>
+        <p:spPr>
+          <a:xfrm>
+            <a:off x="8817864" y="4187952"/>
+            <a:ext cx="201168" cy="256032"/>
+          </a:xfrm>
+          <a:prstGeom prst="rect">
+            <a:avLst/>
+          </a:prstGeom>
+          <a:noFill/>
+          <a:ln/>
+        </p:spPr>
+        <p:txBody>
+          <a:bodyPr wrap="square" lIns="0" tIns="0" rIns="0" bIns="0" rtlCol="0" anchor="ctr"/>
+          <a:lstStyle/>
+          <a:p>
+            <a:pPr algn="ctr" indent="0" marL="0">
+              <a:buNone/>
+            </a:pPr>
+            <a:r>
+              <a:rPr lang="en-US" sz="1800" b="1" dirty="0">
+                <a:solidFill>
+                  <a:srgbClr val="0068B7"/>
+                </a:solidFill>
+                <a:latin typeface="Aptos" pitchFamily="34" charset="0"/>
+                <a:ea typeface="Aptos" pitchFamily="34" charset="-122"/>
+                <a:cs typeface="Aptos" pitchFamily="34" charset="-120"/>
+              </a:rPr>
+              <a:t>â†’</a:t>
+            </a:r>
+            <a:endParaRPr lang="en-US" sz="1800" dirty="0"/>
+          </a:p>
+        </p:txBody>
+      </p:sp>
+      <p:sp>
+        <p:nvSpPr>
+          <p:cNvPr id="16" name="Shape 14"/>
+          <p:cNvSpPr/>
+          <p:nvPr/>
+        </p:nvSpPr>
+        <p:spPr>
+          <a:xfrm>
+            <a:off x="9046464" y="3977640"/>
+            <a:ext cx="972312" cy="749808"/>
+          </a:xfrm>
+          <a:prstGeom prst="roundRect">
+            <a:avLst>
+              <a:gd name="adj" fmla="val 14634"/>
+            </a:avLst>
+          </a:prstGeom>
+          <a:solidFill>
+            <a:srgbClr val="2F8A28"/>
+          </a:solidFill>
+          <a:ln w="12700">
+            <a:solidFill>
+              <a:srgbClr val="2F8A28"/>
+            </a:solidFill>
+            <a:prstDash val="solid"/>
+          </a:ln>
+        </p:spPr>
+      </p:sp>
+      <p:sp>
+        <p:nvSpPr>
+          <p:cNvPr id="17" name="Text 15"/>
+          <p:cNvSpPr/>
+          <p:nvPr/>
+        </p:nvSpPr>
+        <p:spPr>
+          <a:xfrm>
+            <a:off x="9119616" y="4169664"/>
+            <a:ext cx="826008" cy="310896"/>
+          </a:xfrm>
+          <a:prstGeom prst="rect">
+            <a:avLst/>
+          </a:prstGeom>
+          <a:noFill/>
+          <a:ln/>
+        </p:spPr>
+        <p:txBody>
+          <a:bodyPr wrap="square" lIns="0" tIns="0" rIns="0" bIns="0" rtlCol="0" anchor="ctr">
+            <a:normAutofit/>
+          </a:bodyPr>
+          <a:lstStyle/>
+          <a:p>
+            <a:pPr algn="ctr" indent="0" marL="0">
+              <a:buNone/>
+            </a:pPr>
+            <a:r>
+              <a:rPr lang="en-US" sz="1500" b="1" dirty="0">
+                <a:solidFill>
+                  <a:srgbClr val="FFFFFF"/>
+                </a:solidFill>
+                <a:latin typeface="Aptos" pitchFamily="34" charset="0"/>
+                <a:ea typeface="Aptos" pitchFamily="34" charset="-122"/>
+                <a:cs typeface="Aptos" pitchFamily="34" charset="-120"/>
+              </a:rPr>
+              <a:t>Plays</a:t>
+            </a:r>
+            <a:endParaRPr lang="en-US" sz="1500" dirty="0"/>
+          </a:p>
+        </p:txBody>
+      </p:sp>
+      <p:sp>
+        <p:nvSpPr>
+          <p:cNvPr id="18" name="Text 16"/>
+          <p:cNvSpPr/>
+          <p:nvPr/>
+        </p:nvSpPr>
+        <p:spPr>
+          <a:xfrm>
+            <a:off x="10046208" y="4187952"/>
+            <a:ext cx="201168" cy="256032"/>
+          </a:xfrm>
+          <a:prstGeom prst="rect">
+            <a:avLst/>
+          </a:prstGeom>
+          <a:noFill/>
+          <a:ln/>
+        </p:spPr>
+        <p:txBody>
+          <a:bodyPr wrap="square" lIns="0" tIns="0" rIns="0" bIns="0" rtlCol="0" anchor="ctr"/>
+          <a:lstStyle/>
+          <a:p>
+            <a:pPr algn="ctr" indent="0" marL="0">
+              <a:buNone/>
+            </a:pPr>
+            <a:r>
+              <a:rPr lang="en-US" sz="1800" b="1" dirty="0">
+                <a:solidFill>
+                  <a:srgbClr val="0068B7"/>
+                </a:solidFill>
+                <a:latin typeface="Aptos" pitchFamily="34" charset="0"/>
+                <a:ea typeface="Aptos" pitchFamily="34" charset="-122"/>
+                <a:cs typeface="Aptos" pitchFamily="34" charset="-120"/>
+              </a:rPr>
+              <a:t>â†’</a:t>
+            </a:r>
+            <a:endParaRPr lang="en-US" sz="1800" dirty="0"/>
+          </a:p>
+        </p:txBody>
+      </p:sp>
+      <p:sp>
+        <p:nvSpPr>
+          <p:cNvPr id="19" name="Shape 17"/>
+          <p:cNvSpPr/>
+          <p:nvPr/>
+        </p:nvSpPr>
+        <p:spPr>
+          <a:xfrm>
+            <a:off x="10274808" y="3977640"/>
+            <a:ext cx="972312" cy="749808"/>
+          </a:xfrm>
+          <a:prstGeom prst="roundRect">
+            <a:avLst>
+              <a:gd name="adj" fmla="val 14634"/>
+            </a:avLst>
+          </a:prstGeom>
+          <a:solidFill>
+            <a:srgbClr val="6A4CA3"/>
+          </a:solidFill>
+          <a:ln w="12700">
+            <a:solidFill>
+              <a:srgbClr val="6A4CA3"/>
+            </a:solidFill>
+            <a:prstDash val="solid"/>
+          </a:ln>
+        </p:spPr>
+      </p:sp>
+      <p:sp>
+        <p:nvSpPr>
+          <p:cNvPr id="20" name="Text 18"/>
+          <p:cNvSpPr/>
+          <p:nvPr/>
+        </p:nvSpPr>
+        <p:spPr>
+          <a:xfrm>
+            <a:off x="10347960" y="4169664"/>
+            <a:ext cx="826008" cy="310896"/>
+          </a:xfrm>
+          <a:prstGeom prst="rect">
+            <a:avLst/>
+          </a:prstGeom>
+          <a:noFill/>
+          <a:ln/>
+        </p:spPr>
+        <p:txBody>
+          <a:bodyPr wrap="square" lIns="0" tIns="0" rIns="0" bIns="0" rtlCol="0" anchor="ctr">
+            <a:normAutofit/>
+          </a:bodyPr>
+          <a:lstStyle/>
+          <a:p>
+            <a:pPr algn="ctr" indent="0" marL="0">
+              <a:buNone/>
+            </a:pPr>
+            <a:r>
+              <a:rPr lang="en-US" sz="1500" b="1" dirty="0">
+                <a:solidFill>
+                  <a:srgbClr val="FFFFFF"/>
+                </a:solidFill>
+                <a:latin typeface="Aptos" pitchFamily="34" charset="0"/>
+                <a:ea typeface="Aptos" pitchFamily="34" charset="-122"/>
+                <a:cs typeface="Aptos" pitchFamily="34" charset="-120"/>
+              </a:rPr>
+              <a:t>Action</a:t>
+            </a:r>
+            <a:endParaRPr lang="en-US" sz="1500" dirty="0"/>
           </a:p>
         </p:txBody>
       </p:sp>
@@ -11686,7 +12548,7 @@
                 <a:ea typeface="Aptos" pitchFamily="34" charset="-122"/>
                 <a:cs typeface="Aptos" pitchFamily="34" charset="-120"/>
               </a:rPr>
-              <a:t>© Paula Soper</a:t>
+              <a:t>Â© Paula Soper</a:t>
             </a:r>
             <a:endParaRPr lang="en-US" sz="800" dirty="0"/>
           </a:p>
@@ -11700,8 +12562,47 @@
         </p:nvSpPr>
         <p:spPr>
           <a:xfrm>
+            <a:off x="11137392" y="6510528"/>
+            <a:ext cx="411480" cy="201168"/>
+          </a:xfrm>
+          <a:prstGeom prst="rect">
+            <a:avLst/>
+          </a:prstGeom>
+          <a:noFill/>
+          <a:ln/>
+        </p:spPr>
+        <p:txBody>
+          <a:bodyPr wrap="square" lIns="0" tIns="0" rIns="0" bIns="0" rtlCol="0" anchor="ctr"/>
+          <a:lstStyle/>
+          <a:p>
+            <a:pPr algn="r" indent="0" marL="0">
+              <a:buNone/>
+            </a:pPr>
+            <a:r>
+              <a:rPr lang="en-US" sz="900" dirty="0">
+                <a:solidFill>
+                  <a:srgbClr val="5F7181"/>
+                </a:solidFill>
+                <a:latin typeface="Aptos" pitchFamily="34" charset="0"/>
+                <a:ea typeface="Aptos" pitchFamily="34" charset="-122"/>
+                <a:cs typeface="Aptos" pitchFamily="34" charset="-120"/>
+              </a:rPr>
+              <a:t>4</a:t>
+            </a:r>
+            <a:endParaRPr lang="en-US" sz="900" dirty="0"/>
+          </a:p>
+        </p:txBody>
+      </p:sp>
+      <p:sp>
+        <p:nvSpPr>
+          <p:cNvPr id="8" name="Text 6"/>
+          <p:cNvSpPr/>
+          <p:nvPr/>
+        </p:nvSpPr>
+        <p:spPr>
+          <a:xfrm>
             <a:off x="640080" y="658368"/>
-            <a:ext cx="10881360" cy="566928"/>
+            <a:ext cx="10881360" cy="713232"/>
           </a:xfrm>
           <a:prstGeom prst="rect">
             <a:avLst/>
@@ -11719,7 +12620,7 @@
               <a:buNone/>
             </a:pPr>
             <a:r>
-              <a:rPr lang="en-US" sz="2700" b="1" dirty="0">
+              <a:rPr lang="en-US" sz="3400" b="1" dirty="0">
                 <a:solidFill>
                   <a:srgbClr val="003A63"/>
                 </a:solidFill>
@@ -11729,20 +12630,20 @@
               </a:rPr>
               <a:t>Related toolkit resources</a:t>
             </a:r>
-            <a:endParaRPr lang="en-US" sz="2700" dirty="0"/>
-          </a:p>
-        </p:txBody>
-      </p:sp>
-      <p:sp>
-        <p:nvSpPr>
-          <p:cNvPr id="8" name="Text 6"/>
-          <p:cNvSpPr/>
-          <p:nvPr/>
-        </p:nvSpPr>
-        <p:spPr>
-          <a:xfrm>
-            <a:off x="868680" y="1417320"/>
-            <a:ext cx="6903720" cy="4480560"/>
+            <a:endParaRPr lang="en-US" sz="3400" dirty="0"/>
+          </a:p>
+        </p:txBody>
+      </p:sp>
+      <p:sp>
+        <p:nvSpPr>
+          <p:cNvPr id="9" name="Text 7"/>
+          <p:cNvSpPr/>
+          <p:nvPr/>
+        </p:nvSpPr>
+        <p:spPr>
+          <a:xfrm>
+            <a:off x="868680" y="1508760"/>
+            <a:ext cx="6812280" cy="3977640"/>
           </a:xfrm>
           <a:prstGeom prst="rect">
             <a:avLst/>
@@ -11757,7 +12658,7 @@
           <a:lstStyle/>
           <a:p>
             <a:r>
-              <a:rPr lang="en-US" sz="1460" dirty="0">
+              <a:rPr lang="en-US" sz="1850" dirty="0">
                 <a:solidFill>
                   <a:srgbClr val="17364A"/>
                 </a:solidFill>
@@ -11765,13 +12666,13 @@
                 <a:ea typeface="Aptos" pitchFamily="34" charset="-122"/>
                 <a:cs typeface="Aptos" pitchFamily="34" charset="-120"/>
               </a:rPr>
-              <a:t>Tool 44: Performance Monitoring Dashboard (Dashboard) - Use this tool to complete or strengthen the practical exercise for the module.</a:t>
-            </a:r>
-            <a:endParaRPr lang="en-US" sz="1460" dirty="0"/>
-          </a:p>
-          <a:p>
-            <a:r>
-              <a:rPr lang="en-US" sz="1460" dirty="0">
+              <a:t>Tool 44: Performance Monitoring Dashboard (Dashboard) - Use this tool to complete or strengthen the.</a:t>
+            </a:r>
+            <a:endParaRPr lang="en-US" sz="1850" dirty="0"/>
+          </a:p>
+          <a:p>
+            <a:r>
+              <a:rPr lang="en-US" sz="1850" dirty="0">
                 <a:solidFill>
                   <a:srgbClr val="17364A"/>
                 </a:solidFill>
@@ -11779,13 +12680,13 @@
                 <a:ea typeface="Aptos" pitchFamily="34" charset="-122"/>
                 <a:cs typeface="Aptos" pitchFamily="34" charset="-120"/>
               </a:rPr>
-              <a:t>Tool 45: Continuous Improvement Log (Log) - Use Continuous Improvement Log to translate this lesson into a documented public health.</a:t>
-            </a:r>
-            <a:endParaRPr lang="en-US" sz="1460" dirty="0"/>
-          </a:p>
-          <a:p>
-            <a:r>
-              <a:rPr lang="en-US" sz="1460" dirty="0">
+              <a:t>Tool 45: Continuous Improvement Log (Log) - Use Continuous Improvement Log to translate this lesson into a.</a:t>
+            </a:r>
+            <a:endParaRPr lang="en-US" sz="1850" dirty="0"/>
+          </a:p>
+          <a:p>
+            <a:r>
+              <a:rPr lang="en-US" sz="1850" dirty="0">
                 <a:solidFill>
                   <a:srgbClr val="17364A"/>
                 </a:solidFill>
@@ -11793,13 +12694,13 @@
                 <a:ea typeface="Aptos" pitchFamily="34" charset="-122"/>
                 <a:cs typeface="Aptos" pitchFamily="34" charset="-120"/>
               </a:rPr>
-              <a:t>Tool 48: AI Evaluation &amp; Outcomes Reporting (Template) - Use this tool to complete or strengthen the practical exercise for the.</a:t>
-            </a:r>
-            <a:endParaRPr lang="en-US" sz="1460" dirty="0"/>
-          </a:p>
-          <a:p>
-            <a:r>
-              <a:rPr lang="en-US" sz="1460" dirty="0">
+              <a:t>Tool 48: AI Evaluation &amp; Outcomes Reporting (Template) - Use this tool to complete or strengthen the.</a:t>
+            </a:r>
+            <a:endParaRPr lang="en-US" sz="1850" dirty="0"/>
+          </a:p>
+          <a:p>
+            <a:r>
+              <a:rPr lang="en-US" sz="1850" dirty="0">
                 <a:solidFill>
                   <a:srgbClr val="17364A"/>
                 </a:solidFill>
@@ -11807,29 +12708,15 @@
                 <a:ea typeface="Aptos" pitchFamily="34" charset="-122"/>
                 <a:cs typeface="Aptos" pitchFamily="34" charset="-120"/>
               </a:rPr>
-              <a:t>Tool 4: AI Policy Landscape Scan (Worksheet) - Use AI Policy Landscape Scan to translate this lesson into a documented public health.</a:t>
-            </a:r>
-            <a:endParaRPr lang="en-US" sz="1460" dirty="0"/>
-          </a:p>
-          <a:p>
-            <a:r>
-              <a:rPr lang="en-US" sz="1460" dirty="0">
-                <a:solidFill>
-                  <a:srgbClr val="17364A"/>
-                </a:solidFill>
-                <a:latin typeface="Aptos" pitchFamily="34" charset="0"/>
-                <a:ea typeface="Aptos" pitchFamily="34" charset="-122"/>
-                <a:cs typeface="Aptos" pitchFamily="34" charset="-120"/>
-              </a:rPr>
-              <a:t>Tool 5: AI Environmental and Resource Impact Review (Checklist) - Use AI Environmental and Resource Impact Review to translate this.</a:t>
-            </a:r>
-            <a:endParaRPr lang="en-US" sz="1460" dirty="0"/>
-          </a:p>
-        </p:txBody>
-      </p:sp>
-      <p:sp>
-        <p:nvSpPr>
-          <p:cNvPr id="9" name="Shape 7"/>
+              <a:t>Tool 4: AI Policy Landscape Scan (Worksheet) - Use AI Policy Landscape Scan to translate this lesson into a.</a:t>
+            </a:r>
+            <a:endParaRPr lang="en-US" sz="1850" dirty="0"/>
+          </a:p>
+        </p:txBody>
+      </p:sp>
+      <p:sp>
+        <p:nvSpPr>
+          <p:cNvPr id="10" name="Shape 8"/>
           <p:cNvSpPr/>
           <p:nvPr/>
         </p:nvSpPr>
@@ -11856,14 +12743,14 @@
       </p:sp>
       <p:sp>
         <p:nvSpPr>
-          <p:cNvPr id="10" name="Text 8"/>
+          <p:cNvPr id="11" name="Text 9"/>
           <p:cNvSpPr/>
           <p:nvPr/>
         </p:nvSpPr>
         <p:spPr>
           <a:xfrm>
             <a:off x="8211312" y="1563624"/>
-            <a:ext cx="2734056" cy="201168"/>
+            <a:ext cx="2734056" cy="256032"/>
           </a:xfrm>
           <a:prstGeom prst="rect">
             <a:avLst/>
@@ -11879,7 +12766,7 @@
               <a:buNone/>
             </a:pPr>
             <a:r>
-              <a:rPr lang="en-US" sz="950" b="1" dirty="0">
+              <a:rPr lang="en-US" sz="1300" b="1" dirty="0">
                 <a:solidFill>
                   <a:srgbClr val="0068B7"/>
                 </a:solidFill>
@@ -11889,20 +12776,20 @@
               </a:rPr>
               <a:t>Use the tools</a:t>
             </a:r>
-            <a:endParaRPr lang="en-US" sz="950" dirty="0"/>
-          </a:p>
-        </p:txBody>
-      </p:sp>
-      <p:sp>
-        <p:nvSpPr>
-          <p:cNvPr id="11" name="Text 9"/>
-          <p:cNvSpPr/>
-          <p:nvPr/>
-        </p:nvSpPr>
-        <p:spPr>
-          <a:xfrm>
-            <a:off x="8211312" y="1856232"/>
-            <a:ext cx="2734056" cy="1536192"/>
+            <a:endParaRPr lang="en-US" sz="1300" dirty="0"/>
+          </a:p>
+        </p:txBody>
+      </p:sp>
+      <p:sp>
+        <p:nvSpPr>
+          <p:cNvPr id="12" name="Text 10"/>
+          <p:cNvSpPr/>
+          <p:nvPr/>
+        </p:nvSpPr>
+        <p:spPr>
+          <a:xfrm>
+            <a:off x="8211312" y="1920240"/>
+            <a:ext cx="2734056" cy="1463040"/>
           </a:xfrm>
           <a:prstGeom prst="rect">
             <a:avLst/>
@@ -11920,7 +12807,7 @@
               <a:buNone/>
             </a:pPr>
             <a:r>
-              <a:rPr lang="en-US" sz="1250" dirty="0">
+              <a:rPr lang="en-US" sz="1550" dirty="0">
                 <a:solidFill>
                   <a:srgbClr val="17364A"/>
                 </a:solidFill>
@@ -11930,32 +12817,32 @@
               </a:rPr>
               <a:t>Use linked tools when your department needs a structured worksheet, template, checklist, review process, or documentation artifact.</a:t>
             </a:r>
-            <a:endParaRPr lang="en-US" sz="1250" dirty="0"/>
-          </a:p>
-        </p:txBody>
-      </p:sp>
-      <p:sp>
-        <p:nvSpPr>
-          <p:cNvPr id="12" name="Shape 10"/>
-          <p:cNvSpPr/>
-          <p:nvPr/>
-        </p:nvSpPr>
-        <p:spPr>
-          <a:xfrm>
-            <a:off x="8046720" y="3794760"/>
-            <a:ext cx="3063240" cy="1508760"/>
+            <a:endParaRPr lang="en-US" sz="1550" dirty="0"/>
+          </a:p>
+        </p:txBody>
+      </p:sp>
+      <p:sp>
+        <p:nvSpPr>
+          <p:cNvPr id="13" name="Shape 11"/>
+          <p:cNvSpPr/>
+          <p:nvPr/>
+        </p:nvSpPr>
+        <p:spPr>
+          <a:xfrm>
+            <a:off x="7818120" y="3977640"/>
+            <a:ext cx="972312" cy="749808"/>
           </a:xfrm>
           <a:prstGeom prst="roundRect">
             <a:avLst>
-              <a:gd name="adj" fmla="val 7273"/>
+              <a:gd name="adj" fmla="val 14634"/>
             </a:avLst>
           </a:prstGeom>
           <a:solidFill>
-            <a:srgbClr val="EEF8ED"/>
+            <a:srgbClr val="0068B7"/>
           </a:solidFill>
           <a:ln w="12700">
             <a:solidFill>
-              <a:srgbClr val="B9D7E6"/>
+              <a:srgbClr val="0068B7"/>
             </a:solidFill>
             <a:prstDash val="solid"/>
           </a:ln>
@@ -11963,81 +12850,256 @@
       </p:sp>
       <p:sp>
         <p:nvSpPr>
-          <p:cNvPr id="13" name="Text 11"/>
-          <p:cNvSpPr/>
-          <p:nvPr/>
-        </p:nvSpPr>
-        <p:spPr>
-          <a:xfrm>
-            <a:off x="8211312" y="3941064"/>
-            <a:ext cx="2734056" cy="201168"/>
-          </a:xfrm>
-          <a:prstGeom prst="rect">
-            <a:avLst/>
-          </a:prstGeom>
-          <a:noFill/>
-          <a:ln/>
-        </p:spPr>
-        <p:txBody>
-          <a:bodyPr wrap="square" lIns="0" tIns="0" rIns="0" bIns="0" rtlCol="0" anchor="ctr"/>
-          <a:lstStyle/>
-          <a:p>
-            <a:pPr indent="0" marL="0">
-              <a:buNone/>
-            </a:pPr>
-            <a:r>
-              <a:rPr lang="en-US" sz="950" b="1" dirty="0">
-                <a:solidFill>
-                  <a:srgbClr val="0068B7"/>
-                </a:solidFill>
-                <a:latin typeface="Aptos" pitchFamily="34" charset="0"/>
-                <a:ea typeface="Aptos" pitchFamily="34" charset="-122"/>
-                <a:cs typeface="Aptos" pitchFamily="34" charset="-120"/>
-              </a:rPr>
-              <a:t>Avoid duplication</a:t>
-            </a:r>
-            <a:endParaRPr lang="en-US" sz="950" dirty="0"/>
-          </a:p>
-        </p:txBody>
-      </p:sp>
-      <p:sp>
-        <p:nvSpPr>
           <p:cNvPr id="14" name="Text 12"/>
           <p:cNvSpPr/>
           <p:nvPr/>
         </p:nvSpPr>
         <p:spPr>
           <a:xfrm>
-            <a:off x="8211312" y="4233672"/>
-            <a:ext cx="2734056" cy="941832"/>
-          </a:xfrm>
-          <a:prstGeom prst="rect">
-            <a:avLst/>
-          </a:prstGeom>
-          <a:noFill/>
-          <a:ln/>
-        </p:spPr>
-        <p:txBody>
-          <a:bodyPr wrap="square" lIns="0" tIns="0" rIns="0" bIns="0" rtlCol="0" anchor="t">
+            <a:off x="7891272" y="4169664"/>
+            <a:ext cx="826008" cy="310896"/>
+          </a:xfrm>
+          <a:prstGeom prst="rect">
+            <a:avLst/>
+          </a:prstGeom>
+          <a:noFill/>
+          <a:ln/>
+        </p:spPr>
+        <p:txBody>
+          <a:bodyPr wrap="square" lIns="0" tIns="0" rIns="0" bIns="0" rtlCol="0" anchor="ctr">
             <a:normAutofit/>
           </a:bodyPr>
           <a:lstStyle/>
           <a:p>
-            <a:pPr indent="0" marL="0">
-              <a:buNone/>
-            </a:pPr>
-            <a:r>
-              <a:rPr lang="en-US" sz="1250" dirty="0">
-                <a:solidFill>
-                  <a:srgbClr val="17364A"/>
-                </a:solidFill>
-                <a:latin typeface="Aptos" pitchFamily="34" charset="0"/>
-                <a:ea typeface="Aptos" pitchFamily="34" charset="-122"/>
-                <a:cs typeface="Aptos" pitchFamily="34" charset="-120"/>
-              </a:rPr>
-              <a:t>If your department already has a strong equivalent tool, adapt or use the existing process instead of recreating it.</a:t>
-            </a:r>
-            <a:endParaRPr lang="en-US" sz="1250" dirty="0"/>
+            <a:pPr algn="ctr" indent="0" marL="0">
+              <a:buNone/>
+            </a:pPr>
+            <a:r>
+              <a:rPr lang="en-US" sz="1500" b="1" dirty="0">
+                <a:solidFill>
+                  <a:srgbClr val="FFFFFF"/>
+                </a:solidFill>
+                <a:latin typeface="Aptos" pitchFamily="34" charset="0"/>
+                <a:ea typeface="Aptos" pitchFamily="34" charset="-122"/>
+                <a:cs typeface="Aptos" pitchFamily="34" charset="-120"/>
+              </a:rPr>
+              <a:t>Concept</a:t>
+            </a:r>
+            <a:endParaRPr lang="en-US" sz="1500" dirty="0"/>
+          </a:p>
+        </p:txBody>
+      </p:sp>
+      <p:sp>
+        <p:nvSpPr>
+          <p:cNvPr id="15" name="Text 13"/>
+          <p:cNvSpPr/>
+          <p:nvPr/>
+        </p:nvSpPr>
+        <p:spPr>
+          <a:xfrm>
+            <a:off x="8817864" y="4187952"/>
+            <a:ext cx="201168" cy="256032"/>
+          </a:xfrm>
+          <a:prstGeom prst="rect">
+            <a:avLst/>
+          </a:prstGeom>
+          <a:noFill/>
+          <a:ln/>
+        </p:spPr>
+        <p:txBody>
+          <a:bodyPr wrap="square" lIns="0" tIns="0" rIns="0" bIns="0" rtlCol="0" anchor="ctr"/>
+          <a:lstStyle/>
+          <a:p>
+            <a:pPr algn="ctr" indent="0" marL="0">
+              <a:buNone/>
+            </a:pPr>
+            <a:r>
+              <a:rPr lang="en-US" sz="1800" b="1" dirty="0">
+                <a:solidFill>
+                  <a:srgbClr val="0068B7"/>
+                </a:solidFill>
+                <a:latin typeface="Aptos" pitchFamily="34" charset="0"/>
+                <a:ea typeface="Aptos" pitchFamily="34" charset="-122"/>
+                <a:cs typeface="Aptos" pitchFamily="34" charset="-120"/>
+              </a:rPr>
+              <a:t>â†’</a:t>
+            </a:r>
+            <a:endParaRPr lang="en-US" sz="1800" dirty="0"/>
+          </a:p>
+        </p:txBody>
+      </p:sp>
+      <p:sp>
+        <p:nvSpPr>
+          <p:cNvPr id="16" name="Shape 14"/>
+          <p:cNvSpPr/>
+          <p:nvPr/>
+        </p:nvSpPr>
+        <p:spPr>
+          <a:xfrm>
+            <a:off x="9046464" y="3977640"/>
+            <a:ext cx="972312" cy="749808"/>
+          </a:xfrm>
+          <a:prstGeom prst="roundRect">
+            <a:avLst>
+              <a:gd name="adj" fmla="val 14634"/>
+            </a:avLst>
+          </a:prstGeom>
+          <a:solidFill>
+            <a:srgbClr val="2F8A28"/>
+          </a:solidFill>
+          <a:ln w="12700">
+            <a:solidFill>
+              <a:srgbClr val="2F8A28"/>
+            </a:solidFill>
+            <a:prstDash val="solid"/>
+          </a:ln>
+        </p:spPr>
+      </p:sp>
+      <p:sp>
+        <p:nvSpPr>
+          <p:cNvPr id="17" name="Text 15"/>
+          <p:cNvSpPr/>
+          <p:nvPr/>
+        </p:nvSpPr>
+        <p:spPr>
+          <a:xfrm>
+            <a:off x="9119616" y="4169664"/>
+            <a:ext cx="826008" cy="310896"/>
+          </a:xfrm>
+          <a:prstGeom prst="rect">
+            <a:avLst/>
+          </a:prstGeom>
+          <a:noFill/>
+          <a:ln/>
+        </p:spPr>
+        <p:txBody>
+          <a:bodyPr wrap="square" lIns="0" tIns="0" rIns="0" bIns="0" rtlCol="0" anchor="ctr">
+            <a:normAutofit/>
+          </a:bodyPr>
+          <a:lstStyle/>
+          <a:p>
+            <a:pPr algn="ctr" indent="0" marL="0">
+              <a:buNone/>
+            </a:pPr>
+            <a:r>
+              <a:rPr lang="en-US" sz="1500" b="1" dirty="0">
+                <a:solidFill>
+                  <a:srgbClr val="FFFFFF"/>
+                </a:solidFill>
+                <a:latin typeface="Aptos" pitchFamily="34" charset="0"/>
+                <a:ea typeface="Aptos" pitchFamily="34" charset="-122"/>
+                <a:cs typeface="Aptos" pitchFamily="34" charset="-120"/>
+              </a:rPr>
+              <a:t>Tool</a:t>
+            </a:r>
+            <a:endParaRPr lang="en-US" sz="1500" dirty="0"/>
+          </a:p>
+        </p:txBody>
+      </p:sp>
+      <p:sp>
+        <p:nvSpPr>
+          <p:cNvPr id="18" name="Text 16"/>
+          <p:cNvSpPr/>
+          <p:nvPr/>
+        </p:nvSpPr>
+        <p:spPr>
+          <a:xfrm>
+            <a:off x="10046208" y="4187952"/>
+            <a:ext cx="201168" cy="256032"/>
+          </a:xfrm>
+          <a:prstGeom prst="rect">
+            <a:avLst/>
+          </a:prstGeom>
+          <a:noFill/>
+          <a:ln/>
+        </p:spPr>
+        <p:txBody>
+          <a:bodyPr wrap="square" lIns="0" tIns="0" rIns="0" bIns="0" rtlCol="0" anchor="ctr"/>
+          <a:lstStyle/>
+          <a:p>
+            <a:pPr algn="ctr" indent="0" marL="0">
+              <a:buNone/>
+            </a:pPr>
+            <a:r>
+              <a:rPr lang="en-US" sz="1800" b="1" dirty="0">
+                <a:solidFill>
+                  <a:srgbClr val="0068B7"/>
+                </a:solidFill>
+                <a:latin typeface="Aptos" pitchFamily="34" charset="0"/>
+                <a:ea typeface="Aptos" pitchFamily="34" charset="-122"/>
+                <a:cs typeface="Aptos" pitchFamily="34" charset="-120"/>
+              </a:rPr>
+              <a:t>â†’</a:t>
+            </a:r>
+            <a:endParaRPr lang="en-US" sz="1800" dirty="0"/>
+          </a:p>
+        </p:txBody>
+      </p:sp>
+      <p:sp>
+        <p:nvSpPr>
+          <p:cNvPr id="19" name="Shape 17"/>
+          <p:cNvSpPr/>
+          <p:nvPr/>
+        </p:nvSpPr>
+        <p:spPr>
+          <a:xfrm>
+            <a:off x="10274808" y="3977640"/>
+            <a:ext cx="972312" cy="749808"/>
+          </a:xfrm>
+          <a:prstGeom prst="roundRect">
+            <a:avLst>
+              <a:gd name="adj" fmla="val 14634"/>
+            </a:avLst>
+          </a:prstGeom>
+          <a:solidFill>
+            <a:srgbClr val="D69A2D"/>
+          </a:solidFill>
+          <a:ln w="12700">
+            <a:solidFill>
+              <a:srgbClr val="D69A2D"/>
+            </a:solidFill>
+            <a:prstDash val="solid"/>
+          </a:ln>
+        </p:spPr>
+      </p:sp>
+      <p:sp>
+        <p:nvSpPr>
+          <p:cNvPr id="20" name="Text 18"/>
+          <p:cNvSpPr/>
+          <p:nvPr/>
+        </p:nvSpPr>
+        <p:spPr>
+          <a:xfrm>
+            <a:off x="10347960" y="4169664"/>
+            <a:ext cx="826008" cy="310896"/>
+          </a:xfrm>
+          <a:prstGeom prst="rect">
+            <a:avLst/>
+          </a:prstGeom>
+          <a:noFill/>
+          <a:ln/>
+        </p:spPr>
+        <p:txBody>
+          <a:bodyPr wrap="square" lIns="0" tIns="0" rIns="0" bIns="0" rtlCol="0" anchor="ctr">
+            <a:normAutofit/>
+          </a:bodyPr>
+          <a:lstStyle/>
+          <a:p>
+            <a:pPr algn="ctr" indent="0" marL="0">
+              <a:buNone/>
+            </a:pPr>
+            <a:r>
+              <a:rPr lang="en-US" sz="1500" b="1" dirty="0">
+                <a:solidFill>
+                  <a:srgbClr val="FFFFFF"/>
+                </a:solidFill>
+                <a:latin typeface="Aptos" pitchFamily="34" charset="0"/>
+                <a:ea typeface="Aptos" pitchFamily="34" charset="-122"/>
+                <a:cs typeface="Aptos" pitchFamily="34" charset="-120"/>
+              </a:rPr>
+              <a:t>Artifact</a:t>
+            </a:r>
+            <a:endParaRPr lang="en-US" sz="1500" dirty="0"/>
           </a:p>
         </p:txBody>
       </p:sp>
@@ -12234,7 +13296,7 @@
                 <a:ea typeface="Aptos" pitchFamily="34" charset="-122"/>
                 <a:cs typeface="Aptos" pitchFamily="34" charset="-120"/>
               </a:rPr>
-              <a:t>© Paula Soper</a:t>
+              <a:t>Â© Paula Soper</a:t>
             </a:r>
             <a:endParaRPr lang="en-US" sz="800" dirty="0"/>
           </a:p>
@@ -12242,7 +13304,46 @@
       </p:sp>
       <p:sp>
         <p:nvSpPr>
-          <p:cNvPr id="7" name="Shape 5"/>
+          <p:cNvPr id="7" name="Text 5"/>
+          <p:cNvSpPr/>
+          <p:nvPr/>
+        </p:nvSpPr>
+        <p:spPr>
+          <a:xfrm>
+            <a:off x="11137392" y="6510528"/>
+            <a:ext cx="411480" cy="201168"/>
+          </a:xfrm>
+          <a:prstGeom prst="rect">
+            <a:avLst/>
+          </a:prstGeom>
+          <a:noFill/>
+          <a:ln/>
+        </p:spPr>
+        <p:txBody>
+          <a:bodyPr wrap="square" lIns="0" tIns="0" rIns="0" bIns="0" rtlCol="0" anchor="ctr"/>
+          <a:lstStyle/>
+          <a:p>
+            <a:pPr algn="r" indent="0" marL="0">
+              <a:buNone/>
+            </a:pPr>
+            <a:r>
+              <a:rPr lang="en-US" sz="900" dirty="0">
+                <a:solidFill>
+                  <a:srgbClr val="5F7181"/>
+                </a:solidFill>
+                <a:latin typeface="Aptos" pitchFamily="34" charset="0"/>
+                <a:ea typeface="Aptos" pitchFamily="34" charset="-122"/>
+                <a:cs typeface="Aptos" pitchFamily="34" charset="-120"/>
+              </a:rPr>
+              <a:t>5</a:t>
+            </a:r>
+            <a:endParaRPr lang="en-US" sz="900" dirty="0"/>
+          </a:p>
+        </p:txBody>
+      </p:sp>
+      <p:sp>
+        <p:nvSpPr>
+          <p:cNvPr id="8" name="Shape 6"/>
           <p:cNvSpPr/>
           <p:nvPr/>
         </p:nvSpPr>
@@ -12267,7 +13368,7 @@
       </p:sp>
       <p:sp>
         <p:nvSpPr>
-          <p:cNvPr id="8" name="Text 6"/>
+          <p:cNvPr id="9" name="Text 7"/>
           <p:cNvSpPr/>
           <p:nvPr/>
         </p:nvSpPr>
@@ -12306,14 +13407,14 @@
       </p:sp>
       <p:sp>
         <p:nvSpPr>
-          <p:cNvPr id="9" name="Text 7"/>
+          <p:cNvPr id="10" name="Text 8"/>
           <p:cNvSpPr/>
           <p:nvPr/>
         </p:nvSpPr>
         <p:spPr>
           <a:xfrm>
             <a:off x="640080" y="621792"/>
-            <a:ext cx="10881360" cy="566928"/>
+            <a:ext cx="10881360" cy="713232"/>
           </a:xfrm>
           <a:prstGeom prst="rect">
             <a:avLst/>
@@ -12331,7 +13432,7 @@
               <a:buNone/>
             </a:pPr>
             <a:r>
-              <a:rPr lang="en-US" sz="2700" b="1" dirty="0">
+              <a:rPr lang="en-US" sz="3400" b="1" dirty="0">
                 <a:solidFill>
                   <a:srgbClr val="003A63"/>
                 </a:solidFill>
@@ -12341,20 +13442,20 @@
               </a:rPr>
               <a:t>Learning Objectives</a:t>
             </a:r>
-            <a:endParaRPr lang="en-US" sz="2700" dirty="0"/>
-          </a:p>
-        </p:txBody>
-      </p:sp>
-      <p:sp>
-        <p:nvSpPr>
-          <p:cNvPr id="10" name="Text 8"/>
-          <p:cNvSpPr/>
-          <p:nvPr/>
-        </p:nvSpPr>
-        <p:spPr>
-          <a:xfrm>
-            <a:off x="868680" y="1417320"/>
-            <a:ext cx="6675120" cy="4434840"/>
+            <a:endParaRPr lang="en-US" sz="3400" dirty="0"/>
+          </a:p>
+        </p:txBody>
+      </p:sp>
+      <p:sp>
+        <p:nvSpPr>
+          <p:cNvPr id="11" name="Text 9"/>
+          <p:cNvSpPr/>
+          <p:nvPr/>
+        </p:nvSpPr>
+        <p:spPr>
+          <a:xfrm>
+            <a:off x="868680" y="1508760"/>
+            <a:ext cx="6537960" cy="4160520"/>
           </a:xfrm>
           <a:prstGeom prst="rect">
             <a:avLst/>
@@ -12369,7 +13470,7 @@
           <a:lstStyle/>
           <a:p>
             <a:r>
-              <a:rPr lang="en-US" sz="1700" dirty="0">
+              <a:rPr lang="en-US" sz="2100" dirty="0">
                 <a:solidFill>
                   <a:srgbClr val="17364A"/>
                 </a:solidFill>
@@ -12379,11 +13480,11 @@
               </a:rPr>
               <a:t>Define time-series analysis and anomaly detection in public health terms.</a:t>
             </a:r>
-            <a:endParaRPr lang="en-US" sz="1700" dirty="0"/>
-          </a:p>
-          <a:p>
-            <a:r>
-              <a:rPr lang="en-US" sz="1700" dirty="0">
+            <a:endParaRPr lang="en-US" sz="2100" dirty="0"/>
+          </a:p>
+          <a:p>
+            <a:r>
+              <a:rPr lang="en-US" sz="2100" dirty="0">
                 <a:solidFill>
                   <a:srgbClr val="17364A"/>
                 </a:solidFill>
@@ -12393,11 +13494,11 @@
               </a:rPr>
               <a:t>Explain baselines, seasonality, trends, reporting delays, and thresholds.</a:t>
             </a:r>
-            <a:endParaRPr lang="en-US" sz="1700" dirty="0"/>
-          </a:p>
-          <a:p>
-            <a:r>
-              <a:rPr lang="en-US" sz="1700" dirty="0">
+            <a:endParaRPr lang="en-US" sz="2100" dirty="0"/>
+          </a:p>
+          <a:p>
+            <a:r>
+              <a:rPr lang="en-US" sz="2100" dirty="0">
                 <a:solidFill>
                   <a:srgbClr val="17364A"/>
                 </a:solidFill>
@@ -12407,27 +13508,13 @@
               </a:rPr>
               <a:t>Distinguish statistical signals from confirmed outbreaks or public health events.</a:t>
             </a:r>
-            <a:endParaRPr lang="en-US" sz="1700" dirty="0"/>
-          </a:p>
-          <a:p>
-            <a:r>
-              <a:rPr lang="en-US" sz="1700" dirty="0">
-                <a:solidFill>
-                  <a:srgbClr val="17364A"/>
-                </a:solidFill>
-                <a:latin typeface="Aptos" pitchFamily="34" charset="0"/>
-                <a:ea typeface="Aptos" pitchFamily="34" charset="-122"/>
-                <a:cs typeface="Aptos" pitchFamily="34" charset="-120"/>
-              </a:rPr>
-              <a:t>Identify risks from alert fatigue, data artifacts, delayed reporting, and model drift.</a:t>
-            </a:r>
-            <a:endParaRPr lang="en-US" sz="1700" dirty="0"/>
-          </a:p>
-        </p:txBody>
-      </p:sp>
-      <p:sp>
-        <p:nvSpPr>
-          <p:cNvPr id="11" name="Shape 9"/>
+            <a:endParaRPr lang="en-US" sz="2100" dirty="0"/>
+          </a:p>
+        </p:txBody>
+      </p:sp>
+      <p:sp>
+        <p:nvSpPr>
+          <p:cNvPr id="12" name="Shape 10"/>
           <p:cNvSpPr/>
           <p:nvPr/>
         </p:nvSpPr>
@@ -12454,14 +13541,14 @@
       </p:sp>
       <p:sp>
         <p:nvSpPr>
-          <p:cNvPr id="12" name="Text 10"/>
+          <p:cNvPr id="13" name="Text 11"/>
           <p:cNvSpPr/>
           <p:nvPr/>
         </p:nvSpPr>
         <p:spPr>
           <a:xfrm>
             <a:off x="8074152" y="1563624"/>
-            <a:ext cx="2825496" cy="201168"/>
+            <a:ext cx="2825496" cy="256032"/>
           </a:xfrm>
           <a:prstGeom prst="rect">
             <a:avLst/>
@@ -12477,7 +13564,7 @@
               <a:buNone/>
             </a:pPr>
             <a:r>
-              <a:rPr lang="en-US" sz="950" b="1" dirty="0">
+              <a:rPr lang="en-US" sz="1300" b="1" dirty="0">
                 <a:solidFill>
                   <a:srgbClr val="0068B7"/>
                 </a:solidFill>
@@ -12487,20 +13574,20 @@
               </a:rPr>
               <a:t>Key idea</a:t>
             </a:r>
-            <a:endParaRPr lang="en-US" sz="950" dirty="0"/>
-          </a:p>
-        </p:txBody>
-      </p:sp>
-      <p:sp>
-        <p:nvSpPr>
-          <p:cNvPr id="13" name="Text 11"/>
-          <p:cNvSpPr/>
-          <p:nvPr/>
-        </p:nvSpPr>
-        <p:spPr>
-          <a:xfrm>
-            <a:off x="8074152" y="1856232"/>
-            <a:ext cx="2825496" cy="1261872"/>
+            <a:endParaRPr lang="en-US" sz="1300" dirty="0"/>
+          </a:p>
+        </p:txBody>
+      </p:sp>
+      <p:sp>
+        <p:nvSpPr>
+          <p:cNvPr id="14" name="Text 12"/>
+          <p:cNvSpPr/>
+          <p:nvPr/>
+        </p:nvSpPr>
+        <p:spPr>
+          <a:xfrm>
+            <a:off x="8074152" y="1920240"/>
+            <a:ext cx="2825496" cy="1188720"/>
           </a:xfrm>
           <a:prstGeom prst="rect">
             <a:avLst/>
@@ -12518,7 +13605,7 @@
               <a:buNone/>
             </a:pPr>
             <a:r>
-              <a:rPr lang="en-US" sz="1250" dirty="0">
+              <a:rPr lang="en-US" sz="1550" dirty="0">
                 <a:solidFill>
                   <a:srgbClr val="17364A"/>
                 </a:solidFill>
@@ -12528,13 +13615,13 @@
               </a:rPr>
               <a:t>Define time-series analysis and anomaly detection in public health terms.</a:t>
             </a:r>
-            <a:endParaRPr lang="en-US" sz="1250" dirty="0"/>
-          </a:p>
-        </p:txBody>
-      </p:sp>
-      <p:sp>
-        <p:nvSpPr>
-          <p:cNvPr id="14" name="Shape 12"/>
+            <a:endParaRPr lang="en-US" sz="1550" dirty="0"/>
+          </a:p>
+        </p:txBody>
+      </p:sp>
+      <p:sp>
+        <p:nvSpPr>
+          <p:cNvPr id="15" name="Shape 13"/>
           <p:cNvSpPr/>
           <p:nvPr/>
         </p:nvSpPr>
@@ -12561,14 +13648,14 @@
       </p:sp>
       <p:sp>
         <p:nvSpPr>
-          <p:cNvPr id="15" name="Text 13"/>
+          <p:cNvPr id="16" name="Text 14"/>
           <p:cNvSpPr/>
           <p:nvPr/>
         </p:nvSpPr>
         <p:spPr>
           <a:xfrm>
             <a:off x="8074152" y="3666744"/>
-            <a:ext cx="2825496" cy="201168"/>
+            <a:ext cx="2825496" cy="256032"/>
           </a:xfrm>
           <a:prstGeom prst="rect">
             <a:avLst/>
@@ -12584,7 +13671,7 @@
               <a:buNone/>
             </a:pPr>
             <a:r>
-              <a:rPr lang="en-US" sz="950" b="1" dirty="0">
+              <a:rPr lang="en-US" sz="1300" b="1" dirty="0">
                 <a:solidFill>
                   <a:srgbClr val="0068B7"/>
                 </a:solidFill>
@@ -12594,20 +13681,20 @@
               </a:rPr>
               <a:t>Use this for</a:t>
             </a:r>
-            <a:endParaRPr lang="en-US" sz="950" dirty="0"/>
-          </a:p>
-        </p:txBody>
-      </p:sp>
-      <p:sp>
-        <p:nvSpPr>
-          <p:cNvPr id="16" name="Text 14"/>
-          <p:cNvSpPr/>
-          <p:nvPr/>
-        </p:nvSpPr>
-        <p:spPr>
-          <a:xfrm>
-            <a:off x="8074152" y="3959352"/>
-            <a:ext cx="2825496" cy="1170432"/>
+            <a:endParaRPr lang="en-US" sz="1300" dirty="0"/>
+          </a:p>
+        </p:txBody>
+      </p:sp>
+      <p:sp>
+        <p:nvSpPr>
+          <p:cNvPr id="17" name="Text 15"/>
+          <p:cNvSpPr/>
+          <p:nvPr/>
+        </p:nvSpPr>
+        <p:spPr>
+          <a:xfrm>
+            <a:off x="8074152" y="4023360"/>
+            <a:ext cx="2825496" cy="1097280"/>
           </a:xfrm>
           <a:prstGeom prst="rect">
             <a:avLst/>
@@ -12625,7 +13712,7 @@
               <a:buNone/>
             </a:pPr>
             <a:r>
-              <a:rPr lang="en-US" sz="1250" dirty="0">
+              <a:rPr lang="en-US" sz="1550" dirty="0">
                 <a:solidFill>
                   <a:srgbClr val="17364A"/>
                 </a:solidFill>
@@ -12635,7 +13722,7 @@
               </a:rPr>
               <a:t>Connect the concept to public health decisions, safeguards, documentation, or implementation work.</a:t>
             </a:r>
-            <a:endParaRPr lang="en-US" sz="1250" dirty="0"/>
+            <a:endParaRPr lang="en-US" sz="1550" dirty="0"/>
           </a:p>
         </p:txBody>
       </p:sp>
@@ -12832,7 +13919,7 @@
                 <a:ea typeface="Aptos" pitchFamily="34" charset="-122"/>
                 <a:cs typeface="Aptos" pitchFamily="34" charset="-120"/>
               </a:rPr>
-              <a:t>© Paula Soper</a:t>
+              <a:t>Â© Paula Soper</a:t>
             </a:r>
             <a:endParaRPr lang="en-US" sz="800" dirty="0"/>
           </a:p>
@@ -12846,8 +13933,47 @@
         </p:nvSpPr>
         <p:spPr>
           <a:xfrm>
+            <a:off x="11137392" y="6510528"/>
+            <a:ext cx="411480" cy="201168"/>
+          </a:xfrm>
+          <a:prstGeom prst="rect">
+            <a:avLst/>
+          </a:prstGeom>
+          <a:noFill/>
+          <a:ln/>
+        </p:spPr>
+        <p:txBody>
+          <a:bodyPr wrap="square" lIns="0" tIns="0" rIns="0" bIns="0" rtlCol="0" anchor="ctr"/>
+          <a:lstStyle/>
+          <a:p>
+            <a:pPr algn="r" indent="0" marL="0">
+              <a:buNone/>
+            </a:pPr>
+            <a:r>
+              <a:rPr lang="en-US" sz="900" dirty="0">
+                <a:solidFill>
+                  <a:srgbClr val="5F7181"/>
+                </a:solidFill>
+                <a:latin typeface="Aptos" pitchFamily="34" charset="0"/>
+                <a:ea typeface="Aptos" pitchFamily="34" charset="-122"/>
+                <a:cs typeface="Aptos" pitchFamily="34" charset="-120"/>
+              </a:rPr>
+              <a:t>6</a:t>
+            </a:r>
+            <a:endParaRPr lang="en-US" sz="900" dirty="0"/>
+          </a:p>
+        </p:txBody>
+      </p:sp>
+      <p:sp>
+        <p:nvSpPr>
+          <p:cNvPr id="8" name="Text 6"/>
+          <p:cNvSpPr/>
+          <p:nvPr/>
+        </p:nvSpPr>
+        <p:spPr>
+          <a:xfrm>
             <a:off x="640080" y="658368"/>
-            <a:ext cx="10881360" cy="566928"/>
+            <a:ext cx="10881360" cy="713232"/>
           </a:xfrm>
           <a:prstGeom prst="rect">
             <a:avLst/>
@@ -12865,7 +13991,7 @@
               <a:buNone/>
             </a:pPr>
             <a:r>
-              <a:rPr lang="en-US" sz="2700" b="1" dirty="0">
+              <a:rPr lang="en-US" sz="3400" b="1" dirty="0">
                 <a:solidFill>
                   <a:srgbClr val="003A63"/>
                 </a:solidFill>
@@ -12875,20 +14001,20 @@
               </a:rPr>
               <a:t>Learning Objectives Continued</a:t>
             </a:r>
-            <a:endParaRPr lang="en-US" sz="2700" dirty="0"/>
-          </a:p>
-        </p:txBody>
-      </p:sp>
-      <p:sp>
-        <p:nvSpPr>
-          <p:cNvPr id="8" name="Text 6"/>
-          <p:cNvSpPr/>
-          <p:nvPr/>
-        </p:nvSpPr>
-        <p:spPr>
-          <a:xfrm>
-            <a:off x="868680" y="1417320"/>
-            <a:ext cx="6675120" cy="4434840"/>
+            <a:endParaRPr lang="en-US" sz="3400" dirty="0"/>
+          </a:p>
+        </p:txBody>
+      </p:sp>
+      <p:sp>
+        <p:nvSpPr>
+          <p:cNvPr id="9" name="Text 7"/>
+          <p:cNvSpPr/>
+          <p:nvPr/>
+        </p:nvSpPr>
+        <p:spPr>
+          <a:xfrm>
+            <a:off x="868680" y="1508760"/>
+            <a:ext cx="6537960" cy="4160520"/>
           </a:xfrm>
           <a:prstGeom prst="rect">
             <a:avLst/>
@@ -12903,7 +14029,7 @@
           <a:lstStyle/>
           <a:p>
             <a:r>
-              <a:rPr lang="en-US" sz="1700" dirty="0">
+              <a:rPr lang="en-US" sz="2100" dirty="0">
                 <a:solidFill>
                   <a:srgbClr val="17364A"/>
                 </a:solidFill>
@@ -12913,13 +14039,13 @@
               </a:rPr>
               <a:t>Produce an anomaly detection review plan for one public health data stream.</a:t>
             </a:r>
-            <a:endParaRPr lang="en-US" sz="1700" dirty="0"/>
-          </a:p>
-        </p:txBody>
-      </p:sp>
-      <p:sp>
-        <p:nvSpPr>
-          <p:cNvPr id="9" name="Shape 7"/>
+            <a:endParaRPr lang="en-US" sz="2100" dirty="0"/>
+          </a:p>
+        </p:txBody>
+      </p:sp>
+      <p:sp>
+        <p:nvSpPr>
+          <p:cNvPr id="10" name="Shape 8"/>
           <p:cNvSpPr/>
           <p:nvPr/>
         </p:nvSpPr>
@@ -12946,14 +14072,14 @@
       </p:sp>
       <p:sp>
         <p:nvSpPr>
-          <p:cNvPr id="10" name="Text 8"/>
+          <p:cNvPr id="11" name="Text 9"/>
           <p:cNvSpPr/>
           <p:nvPr/>
         </p:nvSpPr>
         <p:spPr>
           <a:xfrm>
             <a:off x="8074152" y="1563624"/>
-            <a:ext cx="2825496" cy="201168"/>
+            <a:ext cx="2825496" cy="256032"/>
           </a:xfrm>
           <a:prstGeom prst="rect">
             <a:avLst/>
@@ -12969,7 +14095,7 @@
               <a:buNone/>
             </a:pPr>
             <a:r>
-              <a:rPr lang="en-US" sz="950" b="1" dirty="0">
+              <a:rPr lang="en-US" sz="1300" b="1" dirty="0">
                 <a:solidFill>
                   <a:srgbClr val="0068B7"/>
                 </a:solidFill>
@@ -12979,20 +14105,20 @@
               </a:rPr>
               <a:t>Key idea</a:t>
             </a:r>
-            <a:endParaRPr lang="en-US" sz="950" dirty="0"/>
-          </a:p>
-        </p:txBody>
-      </p:sp>
-      <p:sp>
-        <p:nvSpPr>
-          <p:cNvPr id="11" name="Text 9"/>
-          <p:cNvSpPr/>
-          <p:nvPr/>
-        </p:nvSpPr>
-        <p:spPr>
-          <a:xfrm>
-            <a:off x="8074152" y="1856232"/>
-            <a:ext cx="2825496" cy="1261872"/>
+            <a:endParaRPr lang="en-US" sz="1300" dirty="0"/>
+          </a:p>
+        </p:txBody>
+      </p:sp>
+      <p:sp>
+        <p:nvSpPr>
+          <p:cNvPr id="12" name="Text 10"/>
+          <p:cNvSpPr/>
+          <p:nvPr/>
+        </p:nvSpPr>
+        <p:spPr>
+          <a:xfrm>
+            <a:off x="8074152" y="1920240"/>
+            <a:ext cx="2825496" cy="1188720"/>
           </a:xfrm>
           <a:prstGeom prst="rect">
             <a:avLst/>
@@ -13010,7 +14136,7 @@
               <a:buNone/>
             </a:pPr>
             <a:r>
-              <a:rPr lang="en-US" sz="1250" dirty="0">
+              <a:rPr lang="en-US" sz="1550" dirty="0">
                 <a:solidFill>
                   <a:srgbClr val="17364A"/>
                 </a:solidFill>
@@ -13020,13 +14146,13 @@
               </a:rPr>
               <a:t>Produce an anomaly detection review plan for one public health data stream.</a:t>
             </a:r>
-            <a:endParaRPr lang="en-US" sz="1250" dirty="0"/>
-          </a:p>
-        </p:txBody>
-      </p:sp>
-      <p:sp>
-        <p:nvSpPr>
-          <p:cNvPr id="12" name="Shape 10"/>
+            <a:endParaRPr lang="en-US" sz="1550" dirty="0"/>
+          </a:p>
+        </p:txBody>
+      </p:sp>
+      <p:sp>
+        <p:nvSpPr>
+          <p:cNvPr id="13" name="Shape 11"/>
           <p:cNvSpPr/>
           <p:nvPr/>
         </p:nvSpPr>
@@ -13053,14 +14179,14 @@
       </p:sp>
       <p:sp>
         <p:nvSpPr>
-          <p:cNvPr id="13" name="Text 11"/>
+          <p:cNvPr id="14" name="Text 12"/>
           <p:cNvSpPr/>
           <p:nvPr/>
         </p:nvSpPr>
         <p:spPr>
           <a:xfrm>
             <a:off x="8074152" y="3666744"/>
-            <a:ext cx="2825496" cy="201168"/>
+            <a:ext cx="2825496" cy="256032"/>
           </a:xfrm>
           <a:prstGeom prst="rect">
             <a:avLst/>
@@ -13076,7 +14202,7 @@
               <a:buNone/>
             </a:pPr>
             <a:r>
-              <a:rPr lang="en-US" sz="950" b="1" dirty="0">
+              <a:rPr lang="en-US" sz="1300" b="1" dirty="0">
                 <a:solidFill>
                   <a:srgbClr val="0068B7"/>
                 </a:solidFill>
@@ -13086,20 +14212,20 @@
               </a:rPr>
               <a:t>Use this for</a:t>
             </a:r>
-            <a:endParaRPr lang="en-US" sz="950" dirty="0"/>
-          </a:p>
-        </p:txBody>
-      </p:sp>
-      <p:sp>
-        <p:nvSpPr>
-          <p:cNvPr id="14" name="Text 12"/>
-          <p:cNvSpPr/>
-          <p:nvPr/>
-        </p:nvSpPr>
-        <p:spPr>
-          <a:xfrm>
-            <a:off x="8074152" y="3959352"/>
-            <a:ext cx="2825496" cy="1170432"/>
+            <a:endParaRPr lang="en-US" sz="1300" dirty="0"/>
+          </a:p>
+        </p:txBody>
+      </p:sp>
+      <p:sp>
+        <p:nvSpPr>
+          <p:cNvPr id="15" name="Text 13"/>
+          <p:cNvSpPr/>
+          <p:nvPr/>
+        </p:nvSpPr>
+        <p:spPr>
+          <a:xfrm>
+            <a:off x="8074152" y="4023360"/>
+            <a:ext cx="2825496" cy="1097280"/>
           </a:xfrm>
           <a:prstGeom prst="rect">
             <a:avLst/>
@@ -13117,7 +14243,7 @@
               <a:buNone/>
             </a:pPr>
             <a:r>
-              <a:rPr lang="en-US" sz="1250" dirty="0">
+              <a:rPr lang="en-US" sz="1550" dirty="0">
                 <a:solidFill>
                   <a:srgbClr val="17364A"/>
                 </a:solidFill>
@@ -13127,7 +14253,7 @@
               </a:rPr>
               <a:t>Connect the concept to public health decisions, safeguards, documentation, or implementation work.</a:t>
             </a:r>
-            <a:endParaRPr lang="en-US" sz="1250" dirty="0"/>
+            <a:endParaRPr lang="en-US" sz="1550" dirty="0"/>
           </a:p>
         </p:txBody>
       </p:sp>
@@ -13324,7 +14450,7 @@
                 <a:ea typeface="Aptos" pitchFamily="34" charset="-122"/>
                 <a:cs typeface="Aptos" pitchFamily="34" charset="-120"/>
               </a:rPr>
-              <a:t>© Paula Soper</a:t>
+              <a:t>Â© Paula Soper</a:t>
             </a:r>
             <a:endParaRPr lang="en-US" sz="800" dirty="0"/>
           </a:p>
@@ -13332,7 +14458,46 @@
       </p:sp>
       <p:sp>
         <p:nvSpPr>
-          <p:cNvPr id="7" name="Shape 5"/>
+          <p:cNvPr id="7" name="Text 5"/>
+          <p:cNvSpPr/>
+          <p:nvPr/>
+        </p:nvSpPr>
+        <p:spPr>
+          <a:xfrm>
+            <a:off x="11137392" y="6510528"/>
+            <a:ext cx="411480" cy="201168"/>
+          </a:xfrm>
+          <a:prstGeom prst="rect">
+            <a:avLst/>
+          </a:prstGeom>
+          <a:noFill/>
+          <a:ln/>
+        </p:spPr>
+        <p:txBody>
+          <a:bodyPr wrap="square" lIns="0" tIns="0" rIns="0" bIns="0" rtlCol="0" anchor="ctr"/>
+          <a:lstStyle/>
+          <a:p>
+            <a:pPr algn="r" indent="0" marL="0">
+              <a:buNone/>
+            </a:pPr>
+            <a:r>
+              <a:rPr lang="en-US" sz="900" dirty="0">
+                <a:solidFill>
+                  <a:srgbClr val="5F7181"/>
+                </a:solidFill>
+                <a:latin typeface="Aptos" pitchFamily="34" charset="0"/>
+                <a:ea typeface="Aptos" pitchFamily="34" charset="-122"/>
+                <a:cs typeface="Aptos" pitchFamily="34" charset="-120"/>
+              </a:rPr>
+              <a:t>7</a:t>
+            </a:r>
+            <a:endParaRPr lang="en-US" sz="900" dirty="0"/>
+          </a:p>
+        </p:txBody>
+      </p:sp>
+      <p:sp>
+        <p:nvSpPr>
+          <p:cNvPr id="8" name="Shape 6"/>
           <p:cNvSpPr/>
           <p:nvPr/>
         </p:nvSpPr>
@@ -13357,7 +14522,7 @@
       </p:sp>
       <p:sp>
         <p:nvSpPr>
-          <p:cNvPr id="8" name="Text 6"/>
+          <p:cNvPr id="9" name="Text 7"/>
           <p:cNvSpPr/>
           <p:nvPr/>
         </p:nvSpPr>
@@ -13396,14 +14561,14 @@
       </p:sp>
       <p:sp>
         <p:nvSpPr>
-          <p:cNvPr id="9" name="Text 7"/>
+          <p:cNvPr id="10" name="Text 8"/>
           <p:cNvSpPr/>
           <p:nvPr/>
         </p:nvSpPr>
         <p:spPr>
           <a:xfrm>
             <a:off x="640080" y="621792"/>
-            <a:ext cx="10881360" cy="566928"/>
+            <a:ext cx="10881360" cy="713232"/>
           </a:xfrm>
           <a:prstGeom prst="rect">
             <a:avLst/>
@@ -13421,7 +14586,7 @@
               <a:buNone/>
             </a:pPr>
             <a:r>
-              <a:rPr lang="en-US" sz="2700" b="1" dirty="0">
+              <a:rPr lang="en-US" sz="3400" b="1" dirty="0">
                 <a:solidFill>
                   <a:srgbClr val="003A63"/>
                 </a:solidFill>
@@ -13431,20 +14596,20 @@
               </a:rPr>
               <a:t>Module Overview</a:t>
             </a:r>
-            <a:endParaRPr lang="en-US" sz="2700" dirty="0"/>
-          </a:p>
-        </p:txBody>
-      </p:sp>
-      <p:sp>
-        <p:nvSpPr>
-          <p:cNvPr id="10" name="Text 8"/>
-          <p:cNvSpPr/>
-          <p:nvPr/>
-        </p:nvSpPr>
-        <p:spPr>
-          <a:xfrm>
-            <a:off x="868680" y="1417320"/>
-            <a:ext cx="6675120" cy="4434840"/>
+            <a:endParaRPr lang="en-US" sz="3400" dirty="0"/>
+          </a:p>
+        </p:txBody>
+      </p:sp>
+      <p:sp>
+        <p:nvSpPr>
+          <p:cNvPr id="11" name="Text 9"/>
+          <p:cNvSpPr/>
+          <p:nvPr/>
+        </p:nvSpPr>
+        <p:spPr>
+          <a:xfrm>
+            <a:off x="868680" y="1508760"/>
+            <a:ext cx="6537960" cy="4160520"/>
           </a:xfrm>
           <a:prstGeom prst="rect">
             <a:avLst/>
@@ -13459,7 +14624,7 @@
           <a:lstStyle/>
           <a:p>
             <a:r>
-              <a:rPr lang="en-US" sz="1700" dirty="0">
+              <a:rPr lang="en-US" sz="2100" dirty="0">
                 <a:solidFill>
                   <a:srgbClr val="17364A"/>
                 </a:solidFill>
@@ -13469,11 +14634,11 @@
               </a:rPr>
               <a:t>Time-series analysis examines data collected over time.</a:t>
             </a:r>
-            <a:endParaRPr lang="en-US" sz="1700" dirty="0"/>
-          </a:p>
-          <a:p>
-            <a:r>
-              <a:rPr lang="en-US" sz="1700" dirty="0">
+            <a:endParaRPr lang="en-US" sz="2100" dirty="0"/>
+          </a:p>
+          <a:p>
+            <a:r>
+              <a:rPr lang="en-US" sz="2100" dirty="0">
                 <a:solidFill>
                   <a:srgbClr val="17364A"/>
                 </a:solidFill>
@@ -13481,13 +14646,13 @@
                 <a:ea typeface="Aptos" pitchFamily="34" charset="-122"/>
                 <a:cs typeface="Aptos" pitchFamily="34" charset="-120"/>
               </a:rPr>
-              <a:t>In public health, time patterns are central to surveillance, outbreak detection, syndromic monitoring, wastewater analysis,.</a:t>
-            </a:r>
-            <a:endParaRPr lang="en-US" sz="1700" dirty="0"/>
-          </a:p>
-          <a:p>
-            <a:r>
-              <a:rPr lang="en-US" sz="1700" dirty="0">
+              <a:t>In public health, time patterns are central to surveillance, outbreak detection, syndromic monitoring,.</a:t>
+            </a:r>
+            <a:endParaRPr lang="en-US" sz="2100" dirty="0"/>
+          </a:p>
+          <a:p>
+            <a:r>
+              <a:rPr lang="en-US" sz="2100" dirty="0">
                 <a:solidFill>
                   <a:srgbClr val="17364A"/>
                 </a:solidFill>
@@ -13495,29 +14660,15 @@
                 <a:ea typeface="Aptos" pitchFamily="34" charset="-122"/>
                 <a:cs typeface="Aptos" pitchFamily="34" charset="-120"/>
               </a:rPr>
-              <a:t>AI-supported anomaly detection can help identify unusual increases, decreases, or pattern changes that may require.</a:t>
-            </a:r>
-            <a:endParaRPr lang="en-US" sz="1700" dirty="0"/>
-          </a:p>
-          <a:p>
-            <a:r>
-              <a:rPr lang="en-US" sz="1700" dirty="0">
-                <a:solidFill>
-                  <a:srgbClr val="17364A"/>
-                </a:solidFill>
-                <a:latin typeface="Aptos" pitchFamily="34" charset="0"/>
-                <a:ea typeface="Aptos" pitchFamily="34" charset="-122"/>
-                <a:cs typeface="Aptos" pitchFamily="34" charset="-120"/>
-              </a:rPr>
-              <a:t>This module explains how time-series and anomaly detection methods can support public health without replacing.</a:t>
-            </a:r>
-            <a:endParaRPr lang="en-US" sz="1700" dirty="0"/>
-          </a:p>
-        </p:txBody>
-      </p:sp>
-      <p:sp>
-        <p:nvSpPr>
-          <p:cNvPr id="11" name="Shape 9"/>
+              <a:t>AI-supported anomaly detection can help identify unusual increases, decreases, or pattern changes that.</a:t>
+            </a:r>
+            <a:endParaRPr lang="en-US" sz="2100" dirty="0"/>
+          </a:p>
+        </p:txBody>
+      </p:sp>
+      <p:sp>
+        <p:nvSpPr>
+          <p:cNvPr id="12" name="Shape 10"/>
           <p:cNvSpPr/>
           <p:nvPr/>
         </p:nvSpPr>
@@ -13544,14 +14695,14 @@
       </p:sp>
       <p:sp>
         <p:nvSpPr>
-          <p:cNvPr id="12" name="Text 10"/>
+          <p:cNvPr id="13" name="Text 11"/>
           <p:cNvSpPr/>
           <p:nvPr/>
         </p:nvSpPr>
         <p:spPr>
           <a:xfrm>
             <a:off x="8074152" y="1563624"/>
-            <a:ext cx="2825496" cy="201168"/>
+            <a:ext cx="2825496" cy="256032"/>
           </a:xfrm>
           <a:prstGeom prst="rect">
             <a:avLst/>
@@ -13567,7 +14718,7 @@
               <a:buNone/>
             </a:pPr>
             <a:r>
-              <a:rPr lang="en-US" sz="950" b="1" dirty="0">
+              <a:rPr lang="en-US" sz="1300" b="1" dirty="0">
                 <a:solidFill>
                   <a:srgbClr val="0068B7"/>
                 </a:solidFill>
@@ -13577,20 +14728,20 @@
               </a:rPr>
               <a:t>Key idea</a:t>
             </a:r>
-            <a:endParaRPr lang="en-US" sz="950" dirty="0"/>
-          </a:p>
-        </p:txBody>
-      </p:sp>
-      <p:sp>
-        <p:nvSpPr>
-          <p:cNvPr id="13" name="Text 11"/>
-          <p:cNvSpPr/>
-          <p:nvPr/>
-        </p:nvSpPr>
-        <p:spPr>
-          <a:xfrm>
-            <a:off x="8074152" y="1856232"/>
-            <a:ext cx="2825496" cy="1261872"/>
+            <a:endParaRPr lang="en-US" sz="1300" dirty="0"/>
+          </a:p>
+        </p:txBody>
+      </p:sp>
+      <p:sp>
+        <p:nvSpPr>
+          <p:cNvPr id="14" name="Text 12"/>
+          <p:cNvSpPr/>
+          <p:nvPr/>
+        </p:nvSpPr>
+        <p:spPr>
+          <a:xfrm>
+            <a:off x="8074152" y="1920240"/>
+            <a:ext cx="2825496" cy="1188720"/>
           </a:xfrm>
           <a:prstGeom prst="rect">
             <a:avLst/>
@@ -13608,7 +14759,7 @@
               <a:buNone/>
             </a:pPr>
             <a:r>
-              <a:rPr lang="en-US" sz="1250" dirty="0">
+              <a:rPr lang="en-US" sz="1550" dirty="0">
                 <a:solidFill>
                   <a:srgbClr val="17364A"/>
                 </a:solidFill>
@@ -13618,13 +14769,13 @@
               </a:rPr>
               <a:t>Time-series analysis examines data collected over time.</a:t>
             </a:r>
-            <a:endParaRPr lang="en-US" sz="1250" dirty="0"/>
-          </a:p>
-        </p:txBody>
-      </p:sp>
-      <p:sp>
-        <p:nvSpPr>
-          <p:cNvPr id="14" name="Shape 12"/>
+            <a:endParaRPr lang="en-US" sz="1550" dirty="0"/>
+          </a:p>
+        </p:txBody>
+      </p:sp>
+      <p:sp>
+        <p:nvSpPr>
+          <p:cNvPr id="15" name="Shape 13"/>
           <p:cNvSpPr/>
           <p:nvPr/>
         </p:nvSpPr>
@@ -13651,14 +14802,14 @@
       </p:sp>
       <p:sp>
         <p:nvSpPr>
-          <p:cNvPr id="15" name="Text 13"/>
+          <p:cNvPr id="16" name="Text 14"/>
           <p:cNvSpPr/>
           <p:nvPr/>
         </p:nvSpPr>
         <p:spPr>
           <a:xfrm>
             <a:off x="8074152" y="3666744"/>
-            <a:ext cx="2825496" cy="201168"/>
+            <a:ext cx="2825496" cy="256032"/>
           </a:xfrm>
           <a:prstGeom prst="rect">
             <a:avLst/>
@@ -13674,7 +14825,7 @@
               <a:buNone/>
             </a:pPr>
             <a:r>
-              <a:rPr lang="en-US" sz="950" b="1" dirty="0">
+              <a:rPr lang="en-US" sz="1300" b="1" dirty="0">
                 <a:solidFill>
                   <a:srgbClr val="0068B7"/>
                 </a:solidFill>
@@ -13684,20 +14835,20 @@
               </a:rPr>
               <a:t>Use this for</a:t>
             </a:r>
-            <a:endParaRPr lang="en-US" sz="950" dirty="0"/>
-          </a:p>
-        </p:txBody>
-      </p:sp>
-      <p:sp>
-        <p:nvSpPr>
-          <p:cNvPr id="16" name="Text 14"/>
-          <p:cNvSpPr/>
-          <p:nvPr/>
-        </p:nvSpPr>
-        <p:spPr>
-          <a:xfrm>
-            <a:off x="8074152" y="3959352"/>
-            <a:ext cx="2825496" cy="1170432"/>
+            <a:endParaRPr lang="en-US" sz="1300" dirty="0"/>
+          </a:p>
+        </p:txBody>
+      </p:sp>
+      <p:sp>
+        <p:nvSpPr>
+          <p:cNvPr id="17" name="Text 15"/>
+          <p:cNvSpPr/>
+          <p:nvPr/>
+        </p:nvSpPr>
+        <p:spPr>
+          <a:xfrm>
+            <a:off x="8074152" y="4023360"/>
+            <a:ext cx="2825496" cy="1097280"/>
           </a:xfrm>
           <a:prstGeom prst="rect">
             <a:avLst/>
@@ -13715,7 +14866,7 @@
               <a:buNone/>
             </a:pPr>
             <a:r>
-              <a:rPr lang="en-US" sz="1250" dirty="0">
+              <a:rPr lang="en-US" sz="1550" dirty="0">
                 <a:solidFill>
                   <a:srgbClr val="17364A"/>
                 </a:solidFill>
@@ -13725,7 +14876,7 @@
               </a:rPr>
               <a:t>Connect the concept to public health decisions, safeguards, documentation, or implementation work.</a:t>
             </a:r>
-            <a:endParaRPr lang="en-US" sz="1250" dirty="0"/>
+            <a:endParaRPr lang="en-US" sz="1550" dirty="0"/>
           </a:p>
         </p:txBody>
       </p:sp>
@@ -13922,7 +15073,7 @@
                 <a:ea typeface="Aptos" pitchFamily="34" charset="-122"/>
                 <a:cs typeface="Aptos" pitchFamily="34" charset="-120"/>
               </a:rPr>
-              <a:t>© Paula Soper</a:t>
+              <a:t>Â© Paula Soper</a:t>
             </a:r>
             <a:endParaRPr lang="en-US" sz="800" dirty="0"/>
           </a:p>
@@ -13930,7 +15081,46 @@
       </p:sp>
       <p:sp>
         <p:nvSpPr>
-          <p:cNvPr id="7" name="Shape 5"/>
+          <p:cNvPr id="7" name="Text 5"/>
+          <p:cNvSpPr/>
+          <p:nvPr/>
+        </p:nvSpPr>
+        <p:spPr>
+          <a:xfrm>
+            <a:off x="11137392" y="6510528"/>
+            <a:ext cx="411480" cy="201168"/>
+          </a:xfrm>
+          <a:prstGeom prst="rect">
+            <a:avLst/>
+          </a:prstGeom>
+          <a:noFill/>
+          <a:ln/>
+        </p:spPr>
+        <p:txBody>
+          <a:bodyPr wrap="square" lIns="0" tIns="0" rIns="0" bIns="0" rtlCol="0" anchor="ctr"/>
+          <a:lstStyle/>
+          <a:p>
+            <a:pPr algn="r" indent="0" marL="0">
+              <a:buNone/>
+            </a:pPr>
+            <a:r>
+              <a:rPr lang="en-US" sz="900" dirty="0">
+                <a:solidFill>
+                  <a:srgbClr val="5F7181"/>
+                </a:solidFill>
+                <a:latin typeface="Aptos" pitchFamily="34" charset="0"/>
+                <a:ea typeface="Aptos" pitchFamily="34" charset="-122"/>
+                <a:cs typeface="Aptos" pitchFamily="34" charset="-120"/>
+              </a:rPr>
+              <a:t>8</a:t>
+            </a:r>
+            <a:endParaRPr lang="en-US" sz="900" dirty="0"/>
+          </a:p>
+        </p:txBody>
+      </p:sp>
+      <p:sp>
+        <p:nvSpPr>
+          <p:cNvPr id="8" name="Shape 6"/>
           <p:cNvSpPr/>
           <p:nvPr/>
         </p:nvSpPr>
@@ -13955,7 +15145,7 @@
       </p:sp>
       <p:sp>
         <p:nvSpPr>
-          <p:cNvPr id="8" name="Text 6"/>
+          <p:cNvPr id="9" name="Text 7"/>
           <p:cNvSpPr/>
           <p:nvPr/>
         </p:nvSpPr>
@@ -13994,14 +15184,14 @@
       </p:sp>
       <p:sp>
         <p:nvSpPr>
-          <p:cNvPr id="9" name="Text 7"/>
+          <p:cNvPr id="10" name="Text 8"/>
           <p:cNvSpPr/>
           <p:nvPr/>
         </p:nvSpPr>
         <p:spPr>
           <a:xfrm>
             <a:off x="640080" y="621792"/>
-            <a:ext cx="10881360" cy="566928"/>
+            <a:ext cx="10881360" cy="713232"/>
           </a:xfrm>
           <a:prstGeom prst="rect">
             <a:avLst/>
@@ -14019,7 +15209,7 @@
               <a:buNone/>
             </a:pPr>
             <a:r>
-              <a:rPr lang="en-US" sz="2700" b="1" dirty="0">
+              <a:rPr lang="en-US" sz="3400" b="1" dirty="0">
                 <a:solidFill>
                   <a:srgbClr val="003A63"/>
                 </a:solidFill>
@@ -14029,20 +15219,20 @@
               </a:rPr>
               <a:t>Why This Topic Matters for Public Health AI</a:t>
             </a:r>
-            <a:endParaRPr lang="en-US" sz="2700" dirty="0"/>
-          </a:p>
-        </p:txBody>
-      </p:sp>
-      <p:sp>
-        <p:nvSpPr>
-          <p:cNvPr id="10" name="Text 8"/>
-          <p:cNvSpPr/>
-          <p:nvPr/>
-        </p:nvSpPr>
-        <p:spPr>
-          <a:xfrm>
-            <a:off x="868680" y="1417320"/>
-            <a:ext cx="6675120" cy="4434840"/>
+            <a:endParaRPr lang="en-US" sz="3400" dirty="0"/>
+          </a:p>
+        </p:txBody>
+      </p:sp>
+      <p:sp>
+        <p:nvSpPr>
+          <p:cNvPr id="11" name="Text 9"/>
+          <p:cNvSpPr/>
+          <p:nvPr/>
+        </p:nvSpPr>
+        <p:spPr>
+          <a:xfrm>
+            <a:off x="868680" y="1508760"/>
+            <a:ext cx="6537960" cy="4160520"/>
           </a:xfrm>
           <a:prstGeom prst="rect">
             <a:avLst/>
@@ -14057,7 +15247,7 @@
           <a:lstStyle/>
           <a:p>
             <a:r>
-              <a:rPr lang="en-US" sz="1700" dirty="0">
+              <a:rPr lang="en-US" sz="2100" dirty="0">
                 <a:solidFill>
                   <a:srgbClr val="17364A"/>
                 </a:solidFill>
@@ -14067,11 +15257,11 @@
               </a:rPr>
               <a:t>Time-series methods matter because public health surveillance is often about change.</a:t>
             </a:r>
-            <a:endParaRPr lang="en-US" sz="1700" dirty="0"/>
-          </a:p>
-          <a:p>
-            <a:r>
-              <a:rPr lang="en-US" sz="1700" dirty="0">
+            <a:endParaRPr lang="en-US" sz="2100" dirty="0"/>
+          </a:p>
+          <a:p>
+            <a:r>
+              <a:rPr lang="en-US" sz="2100" dirty="0">
                 <a:solidFill>
                   <a:srgbClr val="17364A"/>
                 </a:solidFill>
@@ -14079,13 +15269,13 @@
                 <a:ea typeface="Aptos" pitchFamily="34" charset="-122"/>
                 <a:cs typeface="Aptos" pitchFamily="34" charset="-120"/>
               </a:rPr>
-              <a:t>A single count may be difficult to interpret without knowing whether it is higher than expected for that time, place,.</a:t>
-            </a:r>
-            <a:endParaRPr lang="en-US" sz="1700" dirty="0"/>
-          </a:p>
-          <a:p>
-            <a:r>
-              <a:rPr lang="en-US" sz="1700" dirty="0">
+              <a:t>A single count may be difficult to interpret without knowing whether it is higher than expected for.</a:t>
+            </a:r>
+            <a:endParaRPr lang="en-US" sz="2100" dirty="0"/>
+          </a:p>
+          <a:p>
+            <a:r>
+              <a:rPr lang="en-US" sz="2100" dirty="0">
                 <a:solidFill>
                   <a:srgbClr val="17364A"/>
                 </a:solidFill>
@@ -14093,29 +15283,15 @@
                 <a:ea typeface="Aptos" pitchFamily="34" charset="-122"/>
                 <a:cs typeface="Aptos" pitchFamily="34" charset="-120"/>
               </a:rPr>
-              <a:t>AI-supported anomaly detection can help staff review large volumes of data and prioritize signals that deserve attention.</a:t>
-            </a:r>
-            <a:endParaRPr lang="en-US" sz="1700" dirty="0"/>
-          </a:p>
-          <a:p>
-            <a:r>
-              <a:rPr lang="en-US" sz="1700" dirty="0">
-                <a:solidFill>
-                  <a:srgbClr val="17364A"/>
-                </a:solidFill>
-                <a:latin typeface="Aptos" pitchFamily="34" charset="0"/>
-                <a:ea typeface="Aptos" pitchFamily="34" charset="-122"/>
-                <a:cs typeface="Aptos" pitchFamily="34" charset="-120"/>
-              </a:rPr>
-              <a:t>However, public health time-series data are shaped by reporting systems as much as disease patterns.</a:t>
-            </a:r>
-            <a:endParaRPr lang="en-US" sz="1700" dirty="0"/>
-          </a:p>
-        </p:txBody>
-      </p:sp>
-      <p:sp>
-        <p:nvSpPr>
-          <p:cNvPr id="11" name="Shape 9"/>
+              <a:t>AI-supported anomaly detection can help staff review large volumes of data and prioritize signals that.</a:t>
+            </a:r>
+            <a:endParaRPr lang="en-US" sz="2100" dirty="0"/>
+          </a:p>
+        </p:txBody>
+      </p:sp>
+      <p:sp>
+        <p:nvSpPr>
+          <p:cNvPr id="12" name="Shape 10"/>
           <p:cNvSpPr/>
           <p:nvPr/>
         </p:nvSpPr>
@@ -14142,14 +15318,14 @@
       </p:sp>
       <p:sp>
         <p:nvSpPr>
-          <p:cNvPr id="12" name="Text 10"/>
+          <p:cNvPr id="13" name="Text 11"/>
           <p:cNvSpPr/>
           <p:nvPr/>
         </p:nvSpPr>
         <p:spPr>
           <a:xfrm>
             <a:off x="8074152" y="1563624"/>
-            <a:ext cx="2825496" cy="201168"/>
+            <a:ext cx="2825496" cy="256032"/>
           </a:xfrm>
           <a:prstGeom prst="rect">
             <a:avLst/>
@@ -14165,7 +15341,7 @@
               <a:buNone/>
             </a:pPr>
             <a:r>
-              <a:rPr lang="en-US" sz="950" b="1" dirty="0">
+              <a:rPr lang="en-US" sz="1300" b="1" dirty="0">
                 <a:solidFill>
                   <a:srgbClr val="0068B7"/>
                 </a:solidFill>
@@ -14175,20 +15351,20 @@
               </a:rPr>
               <a:t>Key idea</a:t>
             </a:r>
-            <a:endParaRPr lang="en-US" sz="950" dirty="0"/>
-          </a:p>
-        </p:txBody>
-      </p:sp>
-      <p:sp>
-        <p:nvSpPr>
-          <p:cNvPr id="13" name="Text 11"/>
-          <p:cNvSpPr/>
-          <p:nvPr/>
-        </p:nvSpPr>
-        <p:spPr>
-          <a:xfrm>
-            <a:off x="8074152" y="1856232"/>
-            <a:ext cx="2825496" cy="1261872"/>
+            <a:endParaRPr lang="en-US" sz="1300" dirty="0"/>
+          </a:p>
+        </p:txBody>
+      </p:sp>
+      <p:sp>
+        <p:nvSpPr>
+          <p:cNvPr id="14" name="Text 12"/>
+          <p:cNvSpPr/>
+          <p:nvPr/>
+        </p:nvSpPr>
+        <p:spPr>
+          <a:xfrm>
+            <a:off x="8074152" y="1920240"/>
+            <a:ext cx="2825496" cy="1188720"/>
           </a:xfrm>
           <a:prstGeom prst="rect">
             <a:avLst/>
@@ -14206,7 +15382,7 @@
               <a:buNone/>
             </a:pPr>
             <a:r>
-              <a:rPr lang="en-US" sz="1250" dirty="0">
+              <a:rPr lang="en-US" sz="1550" dirty="0">
                 <a:solidFill>
                   <a:srgbClr val="17364A"/>
                 </a:solidFill>
@@ -14216,13 +15392,13 @@
               </a:rPr>
               <a:t>Time-series methods matter because public health surveillance is often about change.</a:t>
             </a:r>
-            <a:endParaRPr lang="en-US" sz="1250" dirty="0"/>
-          </a:p>
-        </p:txBody>
-      </p:sp>
-      <p:sp>
-        <p:nvSpPr>
-          <p:cNvPr id="14" name="Shape 12"/>
+            <a:endParaRPr lang="en-US" sz="1550" dirty="0"/>
+          </a:p>
+        </p:txBody>
+      </p:sp>
+      <p:sp>
+        <p:nvSpPr>
+          <p:cNvPr id="15" name="Shape 13"/>
           <p:cNvSpPr/>
           <p:nvPr/>
         </p:nvSpPr>
@@ -14249,14 +15425,14 @@
       </p:sp>
       <p:sp>
         <p:nvSpPr>
-          <p:cNvPr id="15" name="Text 13"/>
+          <p:cNvPr id="16" name="Text 14"/>
           <p:cNvSpPr/>
           <p:nvPr/>
         </p:nvSpPr>
         <p:spPr>
           <a:xfrm>
             <a:off x="8074152" y="3666744"/>
-            <a:ext cx="2825496" cy="201168"/>
+            <a:ext cx="2825496" cy="256032"/>
           </a:xfrm>
           <a:prstGeom prst="rect">
             <a:avLst/>
@@ -14272,7 +15448,7 @@
               <a:buNone/>
             </a:pPr>
             <a:r>
-              <a:rPr lang="en-US" sz="950" b="1" dirty="0">
+              <a:rPr lang="en-US" sz="1300" b="1" dirty="0">
                 <a:solidFill>
                   <a:srgbClr val="0068B7"/>
                 </a:solidFill>
@@ -14282,20 +15458,20 @@
               </a:rPr>
               <a:t>Use this for</a:t>
             </a:r>
-            <a:endParaRPr lang="en-US" sz="950" dirty="0"/>
-          </a:p>
-        </p:txBody>
-      </p:sp>
-      <p:sp>
-        <p:nvSpPr>
-          <p:cNvPr id="16" name="Text 14"/>
-          <p:cNvSpPr/>
-          <p:nvPr/>
-        </p:nvSpPr>
-        <p:spPr>
-          <a:xfrm>
-            <a:off x="8074152" y="3959352"/>
-            <a:ext cx="2825496" cy="1170432"/>
+            <a:endParaRPr lang="en-US" sz="1300" dirty="0"/>
+          </a:p>
+        </p:txBody>
+      </p:sp>
+      <p:sp>
+        <p:nvSpPr>
+          <p:cNvPr id="17" name="Text 15"/>
+          <p:cNvSpPr/>
+          <p:nvPr/>
+        </p:nvSpPr>
+        <p:spPr>
+          <a:xfrm>
+            <a:off x="8074152" y="4023360"/>
+            <a:ext cx="2825496" cy="1097280"/>
           </a:xfrm>
           <a:prstGeom prst="rect">
             <a:avLst/>
@@ -14313,7 +15489,7 @@
               <a:buNone/>
             </a:pPr>
             <a:r>
-              <a:rPr lang="en-US" sz="1250" dirty="0">
+              <a:rPr lang="en-US" sz="1550" dirty="0">
                 <a:solidFill>
                   <a:srgbClr val="17364A"/>
                 </a:solidFill>
@@ -14323,7 +15499,7 @@
               </a:rPr>
               <a:t>Connect the concept to public health decisions, safeguards, documentation, or implementation work.</a:t>
             </a:r>
-            <a:endParaRPr lang="en-US" sz="1250" dirty="0"/>
+            <a:endParaRPr lang="en-US" sz="1550" dirty="0"/>
           </a:p>
         </p:txBody>
       </p:sp>
@@ -14520,7 +15696,7 @@
                 <a:ea typeface="Aptos" pitchFamily="34" charset="-122"/>
                 <a:cs typeface="Aptos" pitchFamily="34" charset="-120"/>
               </a:rPr>
-              <a:t>© Paula Soper</a:t>
+              <a:t>Â© Paula Soper</a:t>
             </a:r>
             <a:endParaRPr lang="en-US" sz="800" dirty="0"/>
           </a:p>
@@ -14528,7 +15704,46 @@
       </p:sp>
       <p:sp>
         <p:nvSpPr>
-          <p:cNvPr id="7" name="Shape 5"/>
+          <p:cNvPr id="7" name="Text 5"/>
+          <p:cNvSpPr/>
+          <p:nvPr/>
+        </p:nvSpPr>
+        <p:spPr>
+          <a:xfrm>
+            <a:off x="11137392" y="6510528"/>
+            <a:ext cx="411480" cy="201168"/>
+          </a:xfrm>
+          <a:prstGeom prst="rect">
+            <a:avLst/>
+          </a:prstGeom>
+          <a:noFill/>
+          <a:ln/>
+        </p:spPr>
+        <p:txBody>
+          <a:bodyPr wrap="square" lIns="0" tIns="0" rIns="0" bIns="0" rtlCol="0" anchor="ctr"/>
+          <a:lstStyle/>
+          <a:p>
+            <a:pPr algn="r" indent="0" marL="0">
+              <a:buNone/>
+            </a:pPr>
+            <a:r>
+              <a:rPr lang="en-US" sz="900" dirty="0">
+                <a:solidFill>
+                  <a:srgbClr val="5F7181"/>
+                </a:solidFill>
+                <a:latin typeface="Aptos" pitchFamily="34" charset="0"/>
+                <a:ea typeface="Aptos" pitchFamily="34" charset="-122"/>
+                <a:cs typeface="Aptos" pitchFamily="34" charset="-120"/>
+              </a:rPr>
+              <a:t>9</a:t>
+            </a:r>
+            <a:endParaRPr lang="en-US" sz="900" dirty="0"/>
+          </a:p>
+        </p:txBody>
+      </p:sp>
+      <p:sp>
+        <p:nvSpPr>
+          <p:cNvPr id="8" name="Shape 6"/>
           <p:cNvSpPr/>
           <p:nvPr/>
         </p:nvSpPr>
@@ -14553,7 +15768,7 @@
       </p:sp>
       <p:sp>
         <p:nvSpPr>
-          <p:cNvPr id="8" name="Text 6"/>
+          <p:cNvPr id="9" name="Text 7"/>
           <p:cNvSpPr/>
           <p:nvPr/>
         </p:nvSpPr>
@@ -14592,14 +15807,14 @@
       </p:sp>
       <p:sp>
         <p:nvSpPr>
-          <p:cNvPr id="9" name="Text 7"/>
+          <p:cNvPr id="10" name="Text 8"/>
           <p:cNvSpPr/>
           <p:nvPr/>
         </p:nvSpPr>
         <p:spPr>
           <a:xfrm>
             <a:off x="640080" y="621792"/>
-            <a:ext cx="10881360" cy="566928"/>
+            <a:ext cx="10881360" cy="713232"/>
           </a:xfrm>
           <a:prstGeom prst="rect">
             <a:avLst/>
@@ -14617,7 +15832,7 @@
               <a:buNone/>
             </a:pPr>
             <a:r>
-              <a:rPr lang="en-US" sz="2700" b="1" dirty="0">
+              <a:rPr lang="en-US" sz="3400" b="1" dirty="0">
                 <a:solidFill>
                   <a:srgbClr val="003A63"/>
                 </a:solidFill>
@@ -14627,20 +15842,20 @@
               </a:rPr>
               <a:t>Public Health Example</a:t>
             </a:r>
-            <a:endParaRPr lang="en-US" sz="2700" dirty="0"/>
-          </a:p>
-        </p:txBody>
-      </p:sp>
-      <p:sp>
-        <p:nvSpPr>
-          <p:cNvPr id="10" name="Text 8"/>
-          <p:cNvSpPr/>
-          <p:nvPr/>
-        </p:nvSpPr>
-        <p:spPr>
-          <a:xfrm>
-            <a:off x="868680" y="1417320"/>
-            <a:ext cx="6675120" cy="4434840"/>
+            <a:endParaRPr lang="en-US" sz="3400" dirty="0"/>
+          </a:p>
+        </p:txBody>
+      </p:sp>
+      <p:sp>
+        <p:nvSpPr>
+          <p:cNvPr id="11" name="Text 9"/>
+          <p:cNvSpPr/>
+          <p:nvPr/>
+        </p:nvSpPr>
+        <p:spPr>
+          <a:xfrm>
+            <a:off x="868680" y="1508760"/>
+            <a:ext cx="6537960" cy="4160520"/>
           </a:xfrm>
           <a:prstGeom prst="rect">
             <a:avLst/>
@@ -14655,7 +15870,7 @@
           <a:lstStyle/>
           <a:p>
             <a:r>
-              <a:rPr lang="en-US" sz="1700" dirty="0">
+              <a:rPr lang="en-US" sz="2100" dirty="0">
                 <a:solidFill>
                   <a:srgbClr val="17364A"/>
                 </a:solidFill>
@@ -14663,13 +15878,13 @@
                 <a:ea typeface="Aptos" pitchFamily="34" charset="-122"/>
                 <a:cs typeface="Aptos" pitchFamily="34" charset="-120"/>
               </a:rPr>
-              <a:t>A syndromic surveillance team may use anomaly detection to monitor emergency department visits for respiratory symptoms.</a:t>
-            </a:r>
-            <a:endParaRPr lang="en-US" sz="1700" dirty="0"/>
-          </a:p>
-          <a:p>
-            <a:r>
-              <a:rPr lang="en-US" sz="1700" dirty="0">
+              <a:t>A syndromic surveillance team may use anomaly detection to monitor emergency department visits for.</a:t>
+            </a:r>
+            <a:endParaRPr lang="en-US" sz="2100" dirty="0"/>
+          </a:p>
+          <a:p>
+            <a:r>
+              <a:rPr lang="en-US" sz="2100" dirty="0">
                 <a:solidFill>
                   <a:srgbClr val="17364A"/>
                 </a:solidFill>
@@ -14679,11 +15894,11 @@
               </a:rPr>
               <a:t>The system may flag a county when visits exceed the expected range for that day and season.</a:t>
             </a:r>
-            <a:endParaRPr lang="en-US" sz="1700" dirty="0"/>
-          </a:p>
-          <a:p>
-            <a:r>
-              <a:rPr lang="en-US" sz="1700" dirty="0">
+            <a:endParaRPr lang="en-US" sz="2100" dirty="0"/>
+          </a:p>
+          <a:p>
+            <a:r>
+              <a:rPr lang="en-US" sz="2100" dirty="0">
                 <a:solidFill>
                   <a:srgbClr val="17364A"/>
                 </a:solidFill>
@@ -14691,29 +15906,15 @@
                 <a:ea typeface="Aptos" pitchFamily="34" charset="-122"/>
                 <a:cs typeface="Aptos" pitchFamily="34" charset="-120"/>
               </a:rPr>
-              <a:t>The alert could prompt review of age groups, facilities, diagnosis text, lab data, school absenteeism, and local context.</a:t>
-            </a:r>
-            <a:endParaRPr lang="en-US" sz="1700" dirty="0"/>
-          </a:p>
-          <a:p>
-            <a:r>
-              <a:rPr lang="en-US" sz="1700" dirty="0">
-                <a:solidFill>
-                  <a:srgbClr val="17364A"/>
-                </a:solidFill>
-                <a:latin typeface="Aptos" pitchFamily="34" charset="0"/>
-                <a:ea typeface="Aptos" pitchFamily="34" charset="-122"/>
-                <a:cs typeface="Aptos" pitchFamily="34" charset="-120"/>
-              </a:rPr>
-              <a:t>The alert is valuable only if it enters a disciplined review process.</a:t>
-            </a:r>
-            <a:endParaRPr lang="en-US" sz="1700" dirty="0"/>
-          </a:p>
-        </p:txBody>
-      </p:sp>
-      <p:sp>
-        <p:nvSpPr>
-          <p:cNvPr id="11" name="Shape 9"/>
+              <a:t>The alert could prompt review of age groups, facilities, diagnosis text, lab data, school absenteeism,.</a:t>
+            </a:r>
+            <a:endParaRPr lang="en-US" sz="2100" dirty="0"/>
+          </a:p>
+        </p:txBody>
+      </p:sp>
+      <p:sp>
+        <p:nvSpPr>
+          <p:cNvPr id="12" name="Shape 10"/>
           <p:cNvSpPr/>
           <p:nvPr/>
         </p:nvSpPr>
@@ -14740,14 +15941,14 @@
       </p:sp>
       <p:sp>
         <p:nvSpPr>
-          <p:cNvPr id="12" name="Text 10"/>
+          <p:cNvPr id="13" name="Text 11"/>
           <p:cNvSpPr/>
           <p:nvPr/>
         </p:nvSpPr>
         <p:spPr>
           <a:xfrm>
             <a:off x="8074152" y="1563624"/>
-            <a:ext cx="2825496" cy="201168"/>
+            <a:ext cx="2825496" cy="256032"/>
           </a:xfrm>
           <a:prstGeom prst="rect">
             <a:avLst/>
@@ -14763,7 +15964,7 @@
               <a:buNone/>
             </a:pPr>
             <a:r>
-              <a:rPr lang="en-US" sz="950" b="1" dirty="0">
+              <a:rPr lang="en-US" sz="1300" b="1" dirty="0">
                 <a:solidFill>
                   <a:srgbClr val="0068B7"/>
                 </a:solidFill>
@@ -14773,20 +15974,20 @@
               </a:rPr>
               <a:t>Key idea</a:t>
             </a:r>
-            <a:endParaRPr lang="en-US" sz="950" dirty="0"/>
-          </a:p>
-        </p:txBody>
-      </p:sp>
-      <p:sp>
-        <p:nvSpPr>
-          <p:cNvPr id="13" name="Text 11"/>
-          <p:cNvSpPr/>
-          <p:nvPr/>
-        </p:nvSpPr>
-        <p:spPr>
-          <a:xfrm>
-            <a:off x="8074152" y="1856232"/>
-            <a:ext cx="2825496" cy="1261872"/>
+            <a:endParaRPr lang="en-US" sz="1300" dirty="0"/>
+          </a:p>
+        </p:txBody>
+      </p:sp>
+      <p:sp>
+        <p:nvSpPr>
+          <p:cNvPr id="14" name="Text 12"/>
+          <p:cNvSpPr/>
+          <p:nvPr/>
+        </p:nvSpPr>
+        <p:spPr>
+          <a:xfrm>
+            <a:off x="8074152" y="1920240"/>
+            <a:ext cx="2825496" cy="1188720"/>
           </a:xfrm>
           <a:prstGeom prst="rect">
             <a:avLst/>
@@ -14804,7 +16005,7 @@
               <a:buNone/>
             </a:pPr>
             <a:r>
-              <a:rPr lang="en-US" sz="1250" dirty="0">
+              <a:rPr lang="en-US" sz="1550" dirty="0">
                 <a:solidFill>
                   <a:srgbClr val="17364A"/>
                 </a:solidFill>
@@ -14812,15 +16013,15 @@
                 <a:ea typeface="Aptos" pitchFamily="34" charset="-122"/>
                 <a:cs typeface="Aptos" pitchFamily="34" charset="-120"/>
               </a:rPr>
-              <a:t>A syndromic surveillance team may use anomaly detection to monitor emergency department visits for respiratory symptoms.</a:t>
-            </a:r>
-            <a:endParaRPr lang="en-US" sz="1250" dirty="0"/>
-          </a:p>
-        </p:txBody>
-      </p:sp>
-      <p:sp>
-        <p:nvSpPr>
-          <p:cNvPr id="14" name="Shape 12"/>
+              <a:t>A syndromic surveillance team may use anomaly detection to monitor emergency department visits for.</a:t>
+            </a:r>
+            <a:endParaRPr lang="en-US" sz="1550" dirty="0"/>
+          </a:p>
+        </p:txBody>
+      </p:sp>
+      <p:sp>
+        <p:nvSpPr>
+          <p:cNvPr id="15" name="Shape 13"/>
           <p:cNvSpPr/>
           <p:nvPr/>
         </p:nvSpPr>
@@ -14847,14 +16048,14 @@
       </p:sp>
       <p:sp>
         <p:nvSpPr>
-          <p:cNvPr id="15" name="Text 13"/>
+          <p:cNvPr id="16" name="Text 14"/>
           <p:cNvSpPr/>
           <p:nvPr/>
         </p:nvSpPr>
         <p:spPr>
           <a:xfrm>
             <a:off x="8074152" y="3666744"/>
-            <a:ext cx="2825496" cy="201168"/>
+            <a:ext cx="2825496" cy="256032"/>
           </a:xfrm>
           <a:prstGeom prst="rect">
             <a:avLst/>
@@ -14870,7 +16071,7 @@
               <a:buNone/>
             </a:pPr>
             <a:r>
-              <a:rPr lang="en-US" sz="950" b="1" dirty="0">
+              <a:rPr lang="en-US" sz="1300" b="1" dirty="0">
                 <a:solidFill>
                   <a:srgbClr val="0068B7"/>
                 </a:solidFill>
@@ -14880,20 +16081,20 @@
               </a:rPr>
               <a:t>Use this for</a:t>
             </a:r>
-            <a:endParaRPr lang="en-US" sz="950" dirty="0"/>
-          </a:p>
-        </p:txBody>
-      </p:sp>
-      <p:sp>
-        <p:nvSpPr>
-          <p:cNvPr id="16" name="Text 14"/>
-          <p:cNvSpPr/>
-          <p:nvPr/>
-        </p:nvSpPr>
-        <p:spPr>
-          <a:xfrm>
-            <a:off x="8074152" y="3959352"/>
-            <a:ext cx="2825496" cy="1170432"/>
+            <a:endParaRPr lang="en-US" sz="1300" dirty="0"/>
+          </a:p>
+        </p:txBody>
+      </p:sp>
+      <p:sp>
+        <p:nvSpPr>
+          <p:cNvPr id="17" name="Text 15"/>
+          <p:cNvSpPr/>
+          <p:nvPr/>
+        </p:nvSpPr>
+        <p:spPr>
+          <a:xfrm>
+            <a:off x="8074152" y="4023360"/>
+            <a:ext cx="2825496" cy="1097280"/>
           </a:xfrm>
           <a:prstGeom prst="rect">
             <a:avLst/>
@@ -14911,7 +16112,7 @@
               <a:buNone/>
             </a:pPr>
             <a:r>
-              <a:rPr lang="en-US" sz="1250" dirty="0">
+              <a:rPr lang="en-US" sz="1550" dirty="0">
                 <a:solidFill>
                   <a:srgbClr val="17364A"/>
                 </a:solidFill>
@@ -14921,7 +16122,7 @@
               </a:rPr>
               <a:t>Connect the concept to public health decisions, safeguards, documentation, or implementation work.</a:t>
             </a:r>
-            <a:endParaRPr lang="en-US" sz="1250" dirty="0"/>
+            <a:endParaRPr lang="en-US" sz="1550" dirty="0"/>
           </a:p>
         </p:txBody>
       </p:sp>
